--- a/docs/Kisan_Mitra_Submission.pptx
+++ b/docs/Kisan_Mitra_Submission.pptx
@@ -1,51 +1,51 @@
 
 <file path=ppt/presentation.xml><?xml version="1.0" encoding="utf-8"?>
-<p:presentation xmlns:a="http://schemas.openxmlformats.org/drawingml/2006/main" xmlns:r="http://schemas.openxmlformats.org/officeDocument/2006/relationships" xmlns:p="http://schemas.openxmlformats.org/presentationml/2006/main" strictFirstAndLastChars="0" embedTrueTypeFonts="1" saveSubsetFonts="1" autoCompressPictures="0">
+<p:presentation xmlns:a="http://schemas.openxmlformats.org/drawingml/2006/main" xmlns:r="http://schemas.openxmlformats.org/officeDocument/2006/relationships" xmlns:mc="http://schemas.openxmlformats.org/markup-compatibility/2006" xmlns:mv="urn:schemas-microsoft-com:mac:vml" xmlns:p="http://schemas.openxmlformats.org/presentationml/2006/main" xmlns:c="http://schemas.openxmlformats.org/drawingml/2006/chart" xmlns:dgm="http://schemas.openxmlformats.org/drawingml/2006/diagram" xmlns:o="urn:schemas-microsoft-com:office:office" xmlns:v="urn:schemas-microsoft-com:vml" xmlns:pvml="urn:schemas-microsoft-com:office:powerpoint" xmlns:com="http://schemas.openxmlformats.org/drawingml/2006/compatibility" xmlns:p14="http://schemas.microsoft.com/office/powerpoint/2010/main" xmlns:p15="http://schemas.microsoft.com/office/powerpoint/2012/main" xmlns:ahyp="http://schemas.microsoft.com/office/drawing/2018/hyperlinkcolor" autoCompressPictures="0" embedTrueTypeFonts="1" strictFirstAndLastChars="0" saveSubsetFonts="1">
   <p:sldMasterIdLst>
-    <p:sldMasterId id="2147483659" r:id="rId1"/>
+    <p:sldMasterId id="2147483659" r:id="rId4"/>
   </p:sldMasterIdLst>
   <p:notesMasterIdLst>
-    <p:notesMasterId r:id="rId18"/>
+    <p:notesMasterId r:id="rId5"/>
   </p:notesMasterIdLst>
   <p:sldIdLst>
-    <p:sldId id="256" r:id="rId2"/>
-    <p:sldId id="257" r:id="rId3"/>
-    <p:sldId id="258" r:id="rId4"/>
-    <p:sldId id="259" r:id="rId5"/>
-    <p:sldId id="260" r:id="rId6"/>
-    <p:sldId id="261" r:id="rId7"/>
-    <p:sldId id="262" r:id="rId8"/>
-    <p:sldId id="263" r:id="rId9"/>
-    <p:sldId id="264" r:id="rId10"/>
-    <p:sldId id="265" r:id="rId11"/>
-    <p:sldId id="266" r:id="rId12"/>
-    <p:sldId id="267" r:id="rId13"/>
-    <p:sldId id="268" r:id="rId14"/>
-    <p:sldId id="269" r:id="rId15"/>
-    <p:sldId id="270" r:id="rId16"/>
-    <p:sldId id="271" r:id="rId17"/>
+    <p:sldId id="256" r:id="rId6"/>
+    <p:sldId id="257" r:id="rId7"/>
+    <p:sldId id="258" r:id="rId8"/>
+    <p:sldId id="259" r:id="rId9"/>
+    <p:sldId id="260" r:id="rId10"/>
+    <p:sldId id="261" r:id="rId11"/>
+    <p:sldId id="262" r:id="rId12"/>
+    <p:sldId id="263" r:id="rId13"/>
+    <p:sldId id="264" r:id="rId14"/>
+    <p:sldId id="265" r:id="rId15"/>
+    <p:sldId id="266" r:id="rId16"/>
+    <p:sldId id="267" r:id="rId17"/>
+    <p:sldId id="268" r:id="rId18"/>
+    <p:sldId id="269" r:id="rId19"/>
+    <p:sldId id="270" r:id="rId20"/>
+    <p:sldId id="271" r:id="rId21"/>
   </p:sldIdLst>
-  <p:sldSz cx="9144000" cy="5143500" type="screen16x9"/>
+  <p:sldSz cy="5143500" cx="9144000"/>
   <p:notesSz cx="6858000" cy="9144000"/>
   <p:embeddedFontLst>
     <p:embeddedFont>
-      <p:font typeface="Google Sans Flex" panose="020B0604020202020204" charset="0"/>
-      <p:regular r:id="rId19"/>
-      <p:bold r:id="rId20"/>
+      <p:font typeface="Google Sans Flex Medium"/>
+      <p:regular r:id="rId22"/>
+      <p:bold r:id="rId23"/>
     </p:embeddedFont>
     <p:embeddedFont>
-      <p:font typeface="Google Sans Flex Medium" panose="020B0604020202020204" charset="0"/>
-      <p:regular r:id="rId21"/>
-      <p:bold r:id="rId22"/>
+      <p:font typeface="Google Sans Flex"/>
+      <p:regular r:id="rId24"/>
+      <p:bold r:id="rId25"/>
     </p:embeddedFont>
     <p:embeddedFont>
-      <p:font typeface="Google Sans Flex SemiBold" panose="020B0604020202020204" charset="0"/>
-      <p:regular r:id="rId23"/>
-      <p:bold r:id="rId24"/>
+      <p:font typeface="Google Sans Flex SemiBold"/>
+      <p:regular r:id="rId26"/>
+      <p:bold r:id="rId27"/>
     </p:embeddedFont>
   </p:embeddedFontLst>
   <p:defaultTextStyle>
-    <a:defPPr marR="0" lvl="0" algn="l" rtl="0">
+    <a:defPPr lvl="0" marR="0" rtl="0" algn="l">
       <a:lnSpc>
         <a:spcPct val="100000"/>
       </a:lnSpc>
@@ -56,7 +56,7 @@
         <a:spcPts val="0"/>
       </a:spcAft>
     </a:defPPr>
-    <a:lvl1pPr marR="0" lvl="0" algn="l" rtl="0">
+    <a:lvl1pPr lvl="0" marR="0" rtl="0" algn="l">
       <a:lnSpc>
         <a:spcPct val="100000"/>
       </a:lnSpc>
@@ -70,7 +70,7 @@
         <a:srgbClr val="000000"/>
       </a:buClr>
       <a:buFont typeface="Arial"/>
-      <a:defRPr sz="1400" b="0" i="0" u="none" strike="noStrike" cap="none" spc="0">
+      <a:defRPr b="0" i="0" spc="0" sz="1400" u="none" cap="none" strike="noStrike">
         <a:solidFill>
           <a:srgbClr val="000000"/>
         </a:solidFill>
@@ -80,7 +80,7 @@
         <a:sym typeface="Arial"/>
       </a:defRPr>
     </a:lvl1pPr>
-    <a:lvl2pPr marR="0" lvl="1" algn="l" rtl="0">
+    <a:lvl2pPr lvl="1" marR="0" rtl="0" algn="l">
       <a:lnSpc>
         <a:spcPct val="100000"/>
       </a:lnSpc>
@@ -94,7 +94,7 @@
         <a:srgbClr val="000000"/>
       </a:buClr>
       <a:buFont typeface="Arial"/>
-      <a:defRPr sz="1400" b="0" i="0" u="none" strike="noStrike" cap="none" spc="0">
+      <a:defRPr b="0" i="0" spc="0" sz="1400" u="none" cap="none" strike="noStrike">
         <a:solidFill>
           <a:srgbClr val="000000"/>
         </a:solidFill>
@@ -104,7 +104,7 @@
         <a:sym typeface="Arial"/>
       </a:defRPr>
     </a:lvl2pPr>
-    <a:lvl3pPr marR="0" lvl="2" algn="l" rtl="0">
+    <a:lvl3pPr lvl="2" marR="0" rtl="0" algn="l">
       <a:lnSpc>
         <a:spcPct val="100000"/>
       </a:lnSpc>
@@ -118,7 +118,7 @@
         <a:srgbClr val="000000"/>
       </a:buClr>
       <a:buFont typeface="Arial"/>
-      <a:defRPr sz="1400" b="0" i="0" u="none" strike="noStrike" cap="none" spc="0">
+      <a:defRPr b="0" i="0" spc="0" sz="1400" u="none" cap="none" strike="noStrike">
         <a:solidFill>
           <a:srgbClr val="000000"/>
         </a:solidFill>
@@ -128,7 +128,7 @@
         <a:sym typeface="Arial"/>
       </a:defRPr>
     </a:lvl3pPr>
-    <a:lvl4pPr marR="0" lvl="3" algn="l" rtl="0">
+    <a:lvl4pPr lvl="3" marR="0" rtl="0" algn="l">
       <a:lnSpc>
         <a:spcPct val="100000"/>
       </a:lnSpc>
@@ -142,7 +142,7 @@
         <a:srgbClr val="000000"/>
       </a:buClr>
       <a:buFont typeface="Arial"/>
-      <a:defRPr sz="1400" b="0" i="0" u="none" strike="noStrike" cap="none" spc="0">
+      <a:defRPr b="0" i="0" spc="0" sz="1400" u="none" cap="none" strike="noStrike">
         <a:solidFill>
           <a:srgbClr val="000000"/>
         </a:solidFill>
@@ -152,7 +152,7 @@
         <a:sym typeface="Arial"/>
       </a:defRPr>
     </a:lvl4pPr>
-    <a:lvl5pPr marR="0" lvl="4" algn="l" rtl="0">
+    <a:lvl5pPr lvl="4" marR="0" rtl="0" algn="l">
       <a:lnSpc>
         <a:spcPct val="100000"/>
       </a:lnSpc>
@@ -166,7 +166,7 @@
         <a:srgbClr val="000000"/>
       </a:buClr>
       <a:buFont typeface="Arial"/>
-      <a:defRPr sz="1400" b="0" i="0" u="none" strike="noStrike" cap="none" spc="0">
+      <a:defRPr b="0" i="0" spc="0" sz="1400" u="none" cap="none" strike="noStrike">
         <a:solidFill>
           <a:srgbClr val="000000"/>
         </a:solidFill>
@@ -176,7 +176,7 @@
         <a:sym typeface="Arial"/>
       </a:defRPr>
     </a:lvl5pPr>
-    <a:lvl6pPr marR="0" lvl="5" algn="l" rtl="0">
+    <a:lvl6pPr lvl="5" marR="0" rtl="0" algn="l">
       <a:lnSpc>
         <a:spcPct val="100000"/>
       </a:lnSpc>
@@ -190,7 +190,7 @@
         <a:srgbClr val="000000"/>
       </a:buClr>
       <a:buFont typeface="Arial"/>
-      <a:defRPr sz="1400" b="0" i="0" u="none" strike="noStrike" cap="none" spc="0">
+      <a:defRPr b="0" i="0" spc="0" sz="1400" u="none" cap="none" strike="noStrike">
         <a:solidFill>
           <a:srgbClr val="000000"/>
         </a:solidFill>
@@ -200,7 +200,7 @@
         <a:sym typeface="Arial"/>
       </a:defRPr>
     </a:lvl6pPr>
-    <a:lvl7pPr marR="0" lvl="6" algn="l" rtl="0">
+    <a:lvl7pPr lvl="6" marR="0" rtl="0" algn="l">
       <a:lnSpc>
         <a:spcPct val="100000"/>
       </a:lnSpc>
@@ -214,7 +214,7 @@
         <a:srgbClr val="000000"/>
       </a:buClr>
       <a:buFont typeface="Arial"/>
-      <a:defRPr sz="1400" b="0" i="0" u="none" strike="noStrike" cap="none" spc="0">
+      <a:defRPr b="0" i="0" spc="0" sz="1400" u="none" cap="none" strike="noStrike">
         <a:solidFill>
           <a:srgbClr val="000000"/>
         </a:solidFill>
@@ -224,7 +224,7 @@
         <a:sym typeface="Arial"/>
       </a:defRPr>
     </a:lvl7pPr>
-    <a:lvl8pPr marR="0" lvl="7" algn="l" rtl="0">
+    <a:lvl8pPr lvl="7" marR="0" rtl="0" algn="l">
       <a:lnSpc>
         <a:spcPct val="100000"/>
       </a:lnSpc>
@@ -238,7 +238,7 @@
         <a:srgbClr val="000000"/>
       </a:buClr>
       <a:buFont typeface="Arial"/>
-      <a:defRPr sz="1400" b="0" i="0" u="none" strike="noStrike" cap="none" spc="0">
+      <a:defRPr b="0" i="0" spc="0" sz="1400" u="none" cap="none" strike="noStrike">
         <a:solidFill>
           <a:srgbClr val="000000"/>
         </a:solidFill>
@@ -248,7 +248,7 @@
         <a:sym typeface="Arial"/>
       </a:defRPr>
     </a:lvl8pPr>
-    <a:lvl9pPr marR="0" lvl="8" algn="l" rtl="0">
+    <a:lvl9pPr lvl="8" marR="0" rtl="0" algn="l">
       <a:lnSpc>
         <a:spcPct val="100000"/>
       </a:lnSpc>
@@ -262,7 +262,7 @@
         <a:srgbClr val="000000"/>
       </a:buClr>
       <a:buFont typeface="Arial"/>
-      <a:defRPr sz="1400" b="0" i="0" u="none" strike="noStrike" cap="none" spc="0">
+      <a:defRPr b="0" i="0" spc="0" sz="1400" u="none" cap="none" strike="noStrike">
         <a:solidFill>
           <a:srgbClr val="000000"/>
         </a:solidFill>
@@ -275,7 +275,7 @@
   </p:defaultTextStyle>
   <p:extLst>
     <p:ext uri="{EFAFB233-063F-42B5-8137-9DF3F51BA10A}">
-      <p15:sldGuideLst xmlns:p15="http://schemas.microsoft.com/office/powerpoint/2012/main">
+      <p15:sldGuideLst>
         <p15:guide id="1" orient="horz" pos="1620">
           <p15:clr>
             <a:srgbClr val="747775"/>
@@ -292,46 +292,12 @@
 </p:presentation>
 </file>
 
-<file path=ppt/changesInfos/changesInfo1.xml><?xml version="1.0" encoding="utf-8"?>
-<pc:chgInfo xmlns:a="http://schemas.openxmlformats.org/drawingml/2006/main" xmlns:r="http://schemas.openxmlformats.org/officeDocument/2006/relationships" xmlns:ac="http://schemas.microsoft.com/office/drawing/2013/main/command" xmlns:pc="http://schemas.microsoft.com/office/powerpoint/2013/main/command">
-  <pc:docChgLst>
-    <pc:chgData name="Kavita Chegaraddi" userId="8bc71a5b-04ae-474b-b96d-34e8604ec88e" providerId="ADAL" clId="{FDA6B157-9BED-4559-94E2-8BAA97729F14}"/>
-    <pc:docChg chg="modSld">
-      <pc:chgData name="Kavita Chegaraddi" userId="8bc71a5b-04ae-474b-b96d-34e8604ec88e" providerId="ADAL" clId="{FDA6B157-9BED-4559-94E2-8BAA97729F14}" dt="2026-10-18T11:31:59.583" v="1" actId="20577"/>
-      <pc:docMkLst>
-        <pc:docMk/>
-      </pc:docMkLst>
-      <pc:sldChg chg="modSp mod">
-        <pc:chgData name="Kavita Chegaraddi" userId="8bc71a5b-04ae-474b-b96d-34e8604ec88e" providerId="ADAL" clId="{FDA6B157-9BED-4559-94E2-8BAA97729F14}" dt="2026-10-18T11:31:59.583" v="1" actId="20577"/>
-        <pc:sldMkLst>
-          <pc:docMk/>
-          <pc:sldMk cId="0" sldId="256"/>
-        </pc:sldMkLst>
-        <pc:spChg chg="mod">
-          <ac:chgData name="Kavita Chegaraddi" userId="8bc71a5b-04ae-474b-b96d-34e8604ec88e" providerId="ADAL" clId="{FDA6B157-9BED-4559-94E2-8BAA97729F14}" dt="2026-10-18T11:31:59.583" v="1" actId="20577"/>
-          <ac:spMkLst>
-            <pc:docMk/>
-            <pc:sldMk cId="0" sldId="256"/>
-            <ac:spMk id="54" creationId="{00000000-0000-0000-0000-000000000000}"/>
-          </ac:spMkLst>
-        </pc:spChg>
-      </pc:sldChg>
-    </pc:docChg>
-  </pc:docChgLst>
-</pc:chgInfo>
-</file>
-
 <file path=ppt/notesMasters/notesMaster1.xml><?xml version="1.0" encoding="utf-8"?>
-<p:notesMaster xmlns:a="http://schemas.openxmlformats.org/drawingml/2006/main" xmlns:r="http://schemas.openxmlformats.org/officeDocument/2006/relationships" xmlns:p="http://schemas.openxmlformats.org/presentationml/2006/main">
+<p:notesMaster xmlns:a="http://schemas.openxmlformats.org/drawingml/2006/main" xmlns:r="http://schemas.openxmlformats.org/officeDocument/2006/relationships" xmlns:mc="http://schemas.openxmlformats.org/markup-compatibility/2006" xmlns:mv="urn:schemas-microsoft-com:mac:vml" xmlns:p="http://schemas.openxmlformats.org/presentationml/2006/main" xmlns:c="http://schemas.openxmlformats.org/drawingml/2006/chart" xmlns:dgm="http://schemas.openxmlformats.org/drawingml/2006/diagram" xmlns:o="urn:schemas-microsoft-com:office:office" xmlns:v="urn:schemas-microsoft-com:vml" xmlns:pvml="urn:schemas-microsoft-com:office:powerpoint" xmlns:com="http://schemas.openxmlformats.org/drawingml/2006/compatibility" xmlns:p14="http://schemas.microsoft.com/office/powerpoint/2010/main" xmlns:p15="http://schemas.microsoft.com/office/powerpoint/2012/main" xmlns:ahyp="http://schemas.microsoft.com/office/drawing/2018/hyperlinkcolor">
   <p:cSld>
-    <p:bg>
-      <p:bgRef idx="1001">
-        <a:schemeClr val="bg1"/>
-      </p:bgRef>
-    </p:bg>
     <p:spTree>
       <p:nvGrpSpPr>
-        <p:cNvPr id="1" name="Shape 2"/>
+        <p:cNvPr id="2" name="Shape 2"/>
         <p:cNvGrpSpPr/>
         <p:nvPr/>
       </p:nvGrpSpPr>
@@ -346,11 +312,9 @@
       <p:sp>
         <p:nvSpPr>
           <p:cNvPr id="3" name="Google Shape;3;n"/>
-          <p:cNvSpPr>
-            <a:spLocks noGrp="1" noRot="1" noChangeAspect="1"/>
-          </p:cNvSpPr>
+          <p:cNvSpPr/>
           <p:nvPr>
-            <p:ph type="sldImg" idx="2"/>
+            <p:ph idx="2" type="sldImg"/>
           </p:nvPr>
         </p:nvSpPr>
         <p:spPr>
@@ -359,13 +323,9 @@
             <a:ext cx="6096075" cy="3429000"/>
           </a:xfrm>
           <a:custGeom>
-            <a:avLst/>
-            <a:gdLst/>
-            <a:ahLst/>
-            <a:cxnLst/>
-            <a:rect l="l" t="t" r="r" b="b"/>
+            <a:rect b="b" l="l" r="r" t="t"/>
             <a:pathLst>
-              <a:path w="120000" h="120000" extrusionOk="0">
+              <a:path extrusionOk="0" h="120000" w="120000">
                 <a:moveTo>
                   <a:pt x="0" y="0"/>
                 </a:moveTo>
@@ -383,25 +343,23 @@
             </a:pathLst>
           </a:custGeom>
           <a:noFill/>
-          <a:ln w="9525" cap="flat" cmpd="sng">
+          <a:ln cap="flat" cmpd="sng" w="9525">
             <a:solidFill>
               <a:srgbClr val="000000"/>
             </a:solidFill>
             <a:prstDash val="solid"/>
             <a:round/>
-            <a:headEnd type="none" w="sm" len="sm"/>
-            <a:tailEnd type="none" w="sm" len="sm"/>
+            <a:headEnd len="sm" w="sm" type="none"/>
+            <a:tailEnd len="sm" w="sm" type="none"/>
           </a:ln>
         </p:spPr>
       </p:sp>
       <p:sp>
         <p:nvSpPr>
           <p:cNvPr id="4" name="Google Shape;4;n"/>
-          <p:cNvSpPr txBox="1">
-            <a:spLocks noGrp="1"/>
-          </p:cNvSpPr>
+          <p:cNvSpPr txBox="1"/>
           <p:nvPr>
-            <p:ph type="body" idx="1"/>
+            <p:ph idx="1" type="body"/>
           </p:nvPr>
         </p:nvSpPr>
         <p:spPr>
@@ -418,11 +376,11 @@
           </a:ln>
         </p:spPr>
         <p:txBody>
-          <a:bodyPr spcFirstLastPara="1" wrap="square" lIns="91425" tIns="91425" rIns="91425" bIns="91425" anchor="t" anchorCtr="0">
+          <a:bodyPr anchorCtr="0" anchor="t" bIns="91425" lIns="91425" spcFirstLastPara="1" rIns="91425" wrap="square" tIns="91425">
             <a:noAutofit/>
           </a:bodyPr>
           <a:lstStyle>
-            <a:lvl1pPr marL="457200" lvl="0" indent="-298450">
+            <a:lvl1pPr indent="-298450" lvl="0" marL="457200">
               <a:spcBef>
                 <a:spcPts val="0"/>
               </a:spcBef>
@@ -433,7 +391,7 @@
               <a:buChar char="●"/>
               <a:defRPr sz="1100"/>
             </a:lvl1pPr>
-            <a:lvl2pPr marL="914400" lvl="1" indent="-298450">
+            <a:lvl2pPr indent="-298450" lvl="1" marL="914400">
               <a:spcBef>
                 <a:spcPts val="0"/>
               </a:spcBef>
@@ -444,7 +402,7 @@
               <a:buChar char="○"/>
               <a:defRPr sz="1100"/>
             </a:lvl2pPr>
-            <a:lvl3pPr marL="1371600" lvl="2" indent="-298450">
+            <a:lvl3pPr indent="-298450" lvl="2" marL="1371600">
               <a:spcBef>
                 <a:spcPts val="0"/>
               </a:spcBef>
@@ -455,7 +413,7 @@
               <a:buChar char="■"/>
               <a:defRPr sz="1100"/>
             </a:lvl3pPr>
-            <a:lvl4pPr marL="1828800" lvl="3" indent="-298450">
+            <a:lvl4pPr indent="-298450" lvl="3" marL="1828800">
               <a:spcBef>
                 <a:spcPts val="0"/>
               </a:spcBef>
@@ -466,7 +424,7 @@
               <a:buChar char="●"/>
               <a:defRPr sz="1100"/>
             </a:lvl4pPr>
-            <a:lvl5pPr marL="2286000" lvl="4" indent="-298450">
+            <a:lvl5pPr indent="-298450" lvl="4" marL="2286000">
               <a:spcBef>
                 <a:spcPts val="0"/>
               </a:spcBef>
@@ -477,7 +435,7 @@
               <a:buChar char="○"/>
               <a:defRPr sz="1100"/>
             </a:lvl5pPr>
-            <a:lvl6pPr marL="2743200" lvl="5" indent="-298450">
+            <a:lvl6pPr indent="-298450" lvl="5" marL="2743200">
               <a:spcBef>
                 <a:spcPts val="0"/>
               </a:spcBef>
@@ -488,7 +446,7 @@
               <a:buChar char="■"/>
               <a:defRPr sz="1100"/>
             </a:lvl6pPr>
-            <a:lvl7pPr marL="3200400" lvl="6" indent="-298450">
+            <a:lvl7pPr indent="-298450" lvl="6" marL="3200400">
               <a:spcBef>
                 <a:spcPts val="0"/>
               </a:spcBef>
@@ -499,7 +457,7 @@
               <a:buChar char="●"/>
               <a:defRPr sz="1100"/>
             </a:lvl7pPr>
-            <a:lvl8pPr marL="3657600" lvl="7" indent="-298450">
+            <a:lvl8pPr indent="-298450" lvl="7" marL="3657600">
               <a:spcBef>
                 <a:spcPts val="0"/>
               </a:spcBef>
@@ -510,7 +468,7 @@
               <a:buChar char="○"/>
               <a:defRPr sz="1100"/>
             </a:lvl8pPr>
-            <a:lvl9pPr marL="4114800" lvl="8" indent="-298450">
+            <a:lvl9pPr indent="-298450" lvl="8" marL="4114800">
               <a:spcBef>
                 <a:spcPts val="0"/>
               </a:spcBef>
@@ -522,16 +480,14 @@
               <a:defRPr sz="1100"/>
             </a:lvl9pPr>
           </a:lstStyle>
-          <a:p>
-            <a:endParaRPr/>
-          </a:p>
+          <a:p/>
         </p:txBody>
       </p:sp>
     </p:spTree>
   </p:cSld>
-  <p:clrMap bg1="lt1" tx1="dk1" bg2="dk2" tx2="lt2" accent1="accent1" accent2="accent2" accent3="accent3" accent4="accent4" accent5="accent5" accent6="accent6" hlink="hlink" folHlink="folHlink"/>
+  <p:clrMap accent1="accent1" accent2="accent2" accent3="accent3" accent4="accent4" accent5="accent5" accent6="accent6" bg1="lt1" bg2="dk2" tx1="dk1" tx2="lt2" folHlink="folHlink" hlink="hlink"/>
   <p:notesStyle>
-    <a:defPPr marR="0" lvl="0" algn="l" rtl="0">
+    <a:defPPr lvl="0" marR="0" rtl="0" algn="l">
       <a:lnSpc>
         <a:spcPct val="100000"/>
       </a:lnSpc>
@@ -542,7 +498,7 @@
         <a:spcPts val="0"/>
       </a:spcAft>
     </a:defPPr>
-    <a:lvl1pPr marR="0" lvl="0" algn="l" rtl="0">
+    <a:lvl1pPr lvl="0" marR="0" rtl="0" algn="l">
       <a:lnSpc>
         <a:spcPct val="100000"/>
       </a:lnSpc>
@@ -556,7 +512,7 @@
         <a:srgbClr val="000000"/>
       </a:buClr>
       <a:buFont typeface="Arial"/>
-      <a:defRPr sz="1400" b="0" i="0" u="none" strike="noStrike" cap="none" spc="0">
+      <a:defRPr b="0" i="0" spc="0" sz="1400" u="none" cap="none" strike="noStrike">
         <a:solidFill>
           <a:srgbClr val="000000"/>
         </a:solidFill>
@@ -566,7 +522,7 @@
         <a:sym typeface="Arial"/>
       </a:defRPr>
     </a:lvl1pPr>
-    <a:lvl2pPr marR="0" lvl="1" algn="l" rtl="0">
+    <a:lvl2pPr lvl="1" marR="0" rtl="0" algn="l">
       <a:lnSpc>
         <a:spcPct val="100000"/>
       </a:lnSpc>
@@ -580,7 +536,7 @@
         <a:srgbClr val="000000"/>
       </a:buClr>
       <a:buFont typeface="Arial"/>
-      <a:defRPr sz="1400" b="0" i="0" u="none" strike="noStrike" cap="none" spc="0">
+      <a:defRPr b="0" i="0" spc="0" sz="1400" u="none" cap="none" strike="noStrike">
         <a:solidFill>
           <a:srgbClr val="000000"/>
         </a:solidFill>
@@ -590,7 +546,7 @@
         <a:sym typeface="Arial"/>
       </a:defRPr>
     </a:lvl2pPr>
-    <a:lvl3pPr marR="0" lvl="2" algn="l" rtl="0">
+    <a:lvl3pPr lvl="2" marR="0" rtl="0" algn="l">
       <a:lnSpc>
         <a:spcPct val="100000"/>
       </a:lnSpc>
@@ -604,7 +560,7 @@
         <a:srgbClr val="000000"/>
       </a:buClr>
       <a:buFont typeface="Arial"/>
-      <a:defRPr sz="1400" b="0" i="0" u="none" strike="noStrike" cap="none" spc="0">
+      <a:defRPr b="0" i="0" spc="0" sz="1400" u="none" cap="none" strike="noStrike">
         <a:solidFill>
           <a:srgbClr val="000000"/>
         </a:solidFill>
@@ -614,7 +570,7 @@
         <a:sym typeface="Arial"/>
       </a:defRPr>
     </a:lvl3pPr>
-    <a:lvl4pPr marR="0" lvl="3" algn="l" rtl="0">
+    <a:lvl4pPr lvl="3" marR="0" rtl="0" algn="l">
       <a:lnSpc>
         <a:spcPct val="100000"/>
       </a:lnSpc>
@@ -628,7 +584,7 @@
         <a:srgbClr val="000000"/>
       </a:buClr>
       <a:buFont typeface="Arial"/>
-      <a:defRPr sz="1400" b="0" i="0" u="none" strike="noStrike" cap="none" spc="0">
+      <a:defRPr b="0" i="0" spc="0" sz="1400" u="none" cap="none" strike="noStrike">
         <a:solidFill>
           <a:srgbClr val="000000"/>
         </a:solidFill>
@@ -638,7 +594,7 @@
         <a:sym typeface="Arial"/>
       </a:defRPr>
     </a:lvl4pPr>
-    <a:lvl5pPr marR="0" lvl="4" algn="l" rtl="0">
+    <a:lvl5pPr lvl="4" marR="0" rtl="0" algn="l">
       <a:lnSpc>
         <a:spcPct val="100000"/>
       </a:lnSpc>
@@ -652,7 +608,7 @@
         <a:srgbClr val="000000"/>
       </a:buClr>
       <a:buFont typeface="Arial"/>
-      <a:defRPr sz="1400" b="0" i="0" u="none" strike="noStrike" cap="none" spc="0">
+      <a:defRPr b="0" i="0" spc="0" sz="1400" u="none" cap="none" strike="noStrike">
         <a:solidFill>
           <a:srgbClr val="000000"/>
         </a:solidFill>
@@ -662,7 +618,7 @@
         <a:sym typeface="Arial"/>
       </a:defRPr>
     </a:lvl5pPr>
-    <a:lvl6pPr marR="0" lvl="5" algn="l" rtl="0">
+    <a:lvl6pPr lvl="5" marR="0" rtl="0" algn="l">
       <a:lnSpc>
         <a:spcPct val="100000"/>
       </a:lnSpc>
@@ -676,7 +632,7 @@
         <a:srgbClr val="000000"/>
       </a:buClr>
       <a:buFont typeface="Arial"/>
-      <a:defRPr sz="1400" b="0" i="0" u="none" strike="noStrike" cap="none" spc="0">
+      <a:defRPr b="0" i="0" spc="0" sz="1400" u="none" cap="none" strike="noStrike">
         <a:solidFill>
           <a:srgbClr val="000000"/>
         </a:solidFill>
@@ -686,7 +642,7 @@
         <a:sym typeface="Arial"/>
       </a:defRPr>
     </a:lvl6pPr>
-    <a:lvl7pPr marR="0" lvl="6" algn="l" rtl="0">
+    <a:lvl7pPr lvl="6" marR="0" rtl="0" algn="l">
       <a:lnSpc>
         <a:spcPct val="100000"/>
       </a:lnSpc>
@@ -700,7 +656,7 @@
         <a:srgbClr val="000000"/>
       </a:buClr>
       <a:buFont typeface="Arial"/>
-      <a:defRPr sz="1400" b="0" i="0" u="none" strike="noStrike" cap="none" spc="0">
+      <a:defRPr b="0" i="0" spc="0" sz="1400" u="none" cap="none" strike="noStrike">
         <a:solidFill>
           <a:srgbClr val="000000"/>
         </a:solidFill>
@@ -710,7 +666,7 @@
         <a:sym typeface="Arial"/>
       </a:defRPr>
     </a:lvl7pPr>
-    <a:lvl8pPr marR="0" lvl="7" algn="l" rtl="0">
+    <a:lvl8pPr lvl="7" marR="0" rtl="0" algn="l">
       <a:lnSpc>
         <a:spcPct val="100000"/>
       </a:lnSpc>
@@ -724,7 +680,7 @@
         <a:srgbClr val="000000"/>
       </a:buClr>
       <a:buFont typeface="Arial"/>
-      <a:defRPr sz="1400" b="0" i="0" u="none" strike="noStrike" cap="none" spc="0">
+      <a:defRPr b="0" i="0" spc="0" sz="1400" u="none" cap="none" strike="noStrike">
         <a:solidFill>
           <a:srgbClr val="000000"/>
         </a:solidFill>
@@ -734,7 +690,7 @@
         <a:sym typeface="Arial"/>
       </a:defRPr>
     </a:lvl8pPr>
-    <a:lvl9pPr marR="0" lvl="8" algn="l" rtl="0">
+    <a:lvl9pPr lvl="8" marR="0" rtl="0" algn="l">
       <a:lnSpc>
         <a:spcPct val="100000"/>
       </a:lnSpc>
@@ -748,7 +704,7 @@
         <a:srgbClr val="000000"/>
       </a:buClr>
       <a:buFont typeface="Arial"/>
-      <a:defRPr sz="1400" b="0" i="0" u="none" strike="noStrike" cap="none" spc="0">
+      <a:defRPr b="0" i="0" spc="0" sz="1400" u="none" cap="none" strike="noStrike">
         <a:solidFill>
           <a:srgbClr val="000000"/>
         </a:solidFill>
@@ -763,11 +719,11 @@
 </file>
 
 <file path=ppt/notesSlides/notesSlide1.xml><?xml version="1.0" encoding="utf-8"?>
-<p:notes xmlns:a="http://schemas.openxmlformats.org/drawingml/2006/main" xmlns:r="http://schemas.openxmlformats.org/officeDocument/2006/relationships" xmlns:p="http://schemas.openxmlformats.org/presentationml/2006/main" showMasterSp="0" showMasterPhAnim="0">
+<p:notes xmlns:a="http://schemas.openxmlformats.org/drawingml/2006/main" xmlns:r="http://schemas.openxmlformats.org/officeDocument/2006/relationships" xmlns:mc="http://schemas.openxmlformats.org/markup-compatibility/2006" xmlns:mv="urn:schemas-microsoft-com:mac:vml" xmlns:p="http://schemas.openxmlformats.org/presentationml/2006/main" xmlns:c="http://schemas.openxmlformats.org/drawingml/2006/chart" xmlns:dgm="http://schemas.openxmlformats.org/drawingml/2006/diagram" xmlns:o="urn:schemas-microsoft-com:office:office" xmlns:v="urn:schemas-microsoft-com:vml" xmlns:pvml="urn:schemas-microsoft-com:office:powerpoint" xmlns:com="http://schemas.openxmlformats.org/drawingml/2006/compatibility" xmlns:p14="http://schemas.microsoft.com/office/powerpoint/2010/main" xmlns:p15="http://schemas.microsoft.com/office/powerpoint/2012/main" xmlns:ahyp="http://schemas.microsoft.com/office/drawing/2018/hyperlinkcolor" showMasterPhAnim="0" showMasterSp="0">
   <p:cSld>
     <p:spTree>
       <p:nvGrpSpPr>
-        <p:cNvPr id="1" name="Shape 50"/>
+        <p:cNvPr id="50" name="Shape 50"/>
         <p:cNvGrpSpPr/>
         <p:nvPr/>
       </p:nvGrpSpPr>
@@ -782,26 +738,20 @@
       <p:sp>
         <p:nvSpPr>
           <p:cNvPr id="51" name="Google Shape;51;p:notes"/>
-          <p:cNvSpPr>
-            <a:spLocks noGrp="1" noRot="1" noChangeAspect="1"/>
-          </p:cNvSpPr>
+          <p:cNvSpPr/>
           <p:nvPr>
-            <p:ph type="sldImg" idx="2"/>
+            <p:ph idx="2" type="sldImg"/>
           </p:nvPr>
         </p:nvSpPr>
         <p:spPr>
           <a:xfrm>
-            <a:off x="381000" y="685800"/>
-            <a:ext cx="6096000" cy="3429000"/>
+            <a:off x="381300" y="685800"/>
+            <a:ext cx="6096075" cy="3429000"/>
           </a:xfrm>
           <a:custGeom>
-            <a:avLst/>
-            <a:gdLst/>
-            <a:ahLst/>
-            <a:cxnLst/>
-            <a:rect l="l" t="t" r="r" b="b"/>
+            <a:rect b="b" l="l" r="r" t="t"/>
             <a:pathLst>
-              <a:path w="120000" h="120000" extrusionOk="0">
+              <a:path extrusionOk="0" h="120000" w="120000">
                 <a:moveTo>
                   <a:pt x="0" y="0"/>
                 </a:moveTo>
@@ -823,11 +773,9 @@
       <p:sp>
         <p:nvSpPr>
           <p:cNvPr id="52" name="Google Shape;52;p:notes"/>
-          <p:cNvSpPr txBox="1">
-            <a:spLocks noGrp="1"/>
-          </p:cNvSpPr>
+          <p:cNvSpPr txBox="1"/>
           <p:nvPr>
-            <p:ph type="body" idx="1"/>
+            <p:ph idx="1" type="body"/>
           </p:nvPr>
         </p:nvSpPr>
         <p:spPr>
@@ -840,20 +788,23 @@
           </a:prstGeom>
         </p:spPr>
         <p:txBody>
-          <a:bodyPr spcFirstLastPara="1" wrap="square" lIns="91425" tIns="91425" rIns="91425" bIns="91425" anchor="t" anchorCtr="0">
+          <a:bodyPr anchorCtr="0" anchor="t" bIns="91425" lIns="91425" spcFirstLastPara="1" rIns="91425" wrap="square" tIns="91425">
             <a:noAutofit/>
           </a:bodyPr>
           <a:lstStyle/>
           <a:p>
-            <a:pPr marL="0" lvl="0" indent="0" algn="l" rtl="0">
-              <a:spcBef>
-                <a:spcPts val="0"/>
-              </a:spcBef>
-              <a:spcAft>
-                <a:spcPts val="0"/>
-              </a:spcAft>
-              <a:buNone/>
-            </a:pPr>
+            <a:pPr indent="0" lvl="0" marL="0" rtl="0" algn="l">
+              <a:spcBef>
+                <a:spcPts val="0"/>
+              </a:spcBef>
+              <a:spcAft>
+                <a:spcPts val="0"/>
+              </a:spcAft>
+              <a:buNone/>
+            </a:pPr>
+            <a:r>
+              <a:t/>
+            </a:r>
             <a:endParaRPr/>
           </a:p>
         </p:txBody>
@@ -867,11 +818,11 @@
 </file>
 
 <file path=ppt/notesSlides/notesSlide10.xml><?xml version="1.0" encoding="utf-8"?>
-<p:notes xmlns:a="http://schemas.openxmlformats.org/drawingml/2006/main" xmlns:r="http://schemas.openxmlformats.org/officeDocument/2006/relationships" xmlns:p="http://schemas.openxmlformats.org/presentationml/2006/main" showMasterSp="0" showMasterPhAnim="0">
+<p:notes xmlns:a="http://schemas.openxmlformats.org/drawingml/2006/main" xmlns:r="http://schemas.openxmlformats.org/officeDocument/2006/relationships" xmlns:mc="http://schemas.openxmlformats.org/markup-compatibility/2006" xmlns:mv="urn:schemas-microsoft-com:mac:vml" xmlns:p="http://schemas.openxmlformats.org/presentationml/2006/main" xmlns:c="http://schemas.openxmlformats.org/drawingml/2006/chart" xmlns:dgm="http://schemas.openxmlformats.org/drawingml/2006/diagram" xmlns:o="urn:schemas-microsoft-com:office:office" xmlns:v="urn:schemas-microsoft-com:vml" xmlns:pvml="urn:schemas-microsoft-com:office:powerpoint" xmlns:com="http://schemas.openxmlformats.org/drawingml/2006/compatibility" xmlns:p14="http://schemas.microsoft.com/office/powerpoint/2010/main" xmlns:p15="http://schemas.microsoft.com/office/powerpoint/2012/main" xmlns:ahyp="http://schemas.microsoft.com/office/drawing/2018/hyperlinkcolor" showMasterPhAnim="0" showMasterSp="0">
   <p:cSld>
     <p:spTree>
       <p:nvGrpSpPr>
-        <p:cNvPr id="1" name="Shape 120"/>
+        <p:cNvPr id="120" name="Shape 120"/>
         <p:cNvGrpSpPr/>
         <p:nvPr/>
       </p:nvGrpSpPr>
@@ -886,11 +837,9 @@
       <p:sp>
         <p:nvSpPr>
           <p:cNvPr id="121" name="Google Shape;121;g3fb085bff3c_0_41:notes"/>
-          <p:cNvSpPr>
-            <a:spLocks noGrp="1" noRot="1" noChangeAspect="1"/>
-          </p:cNvSpPr>
+          <p:cNvSpPr/>
           <p:nvPr>
-            <p:ph type="sldImg" idx="2"/>
+            <p:ph idx="2" type="sldImg"/>
           </p:nvPr>
         </p:nvSpPr>
         <p:spPr>
@@ -899,13 +848,9 @@
             <a:ext cx="6096000" cy="3429000"/>
           </a:xfrm>
           <a:custGeom>
-            <a:avLst/>
-            <a:gdLst/>
-            <a:ahLst/>
-            <a:cxnLst/>
-            <a:rect l="l" t="t" r="r" b="b"/>
+            <a:rect b="b" l="l" r="r" t="t"/>
             <a:pathLst>
-              <a:path w="120000" h="120000" extrusionOk="0">
+              <a:path extrusionOk="0" h="120000" w="120000">
                 <a:moveTo>
                   <a:pt x="0" y="0"/>
                 </a:moveTo>
@@ -927,11 +872,9 @@
       <p:sp>
         <p:nvSpPr>
           <p:cNvPr id="122" name="Google Shape;122;g3fb085bff3c_0_41:notes"/>
-          <p:cNvSpPr txBox="1">
-            <a:spLocks noGrp="1"/>
-          </p:cNvSpPr>
+          <p:cNvSpPr txBox="1"/>
           <p:nvPr>
-            <p:ph type="body" idx="1"/>
+            <p:ph idx="1" type="body"/>
           </p:nvPr>
         </p:nvSpPr>
         <p:spPr>
@@ -944,20 +887,23 @@
           </a:prstGeom>
         </p:spPr>
         <p:txBody>
-          <a:bodyPr spcFirstLastPara="1" wrap="square" lIns="91425" tIns="91425" rIns="91425" bIns="91425" anchor="t" anchorCtr="0">
+          <a:bodyPr anchorCtr="0" anchor="t" bIns="91425" lIns="91425" spcFirstLastPara="1" rIns="91425" wrap="square" tIns="91425">
             <a:noAutofit/>
           </a:bodyPr>
           <a:lstStyle/>
           <a:p>
-            <a:pPr marL="0" lvl="0" indent="0" algn="l" rtl="0">
-              <a:spcBef>
-                <a:spcPts val="0"/>
-              </a:spcBef>
-              <a:spcAft>
-                <a:spcPts val="0"/>
-              </a:spcAft>
-              <a:buNone/>
-            </a:pPr>
+            <a:pPr indent="0" lvl="0" marL="0" rtl="0" algn="l">
+              <a:spcBef>
+                <a:spcPts val="0"/>
+              </a:spcBef>
+              <a:spcAft>
+                <a:spcPts val="0"/>
+              </a:spcAft>
+              <a:buNone/>
+            </a:pPr>
+            <a:r>
+              <a:t/>
+            </a:r>
             <a:endParaRPr/>
           </a:p>
         </p:txBody>
@@ -971,11 +917,11 @@
 </file>
 
 <file path=ppt/notesSlides/notesSlide11.xml><?xml version="1.0" encoding="utf-8"?>
-<p:notes xmlns:a="http://schemas.openxmlformats.org/drawingml/2006/main" xmlns:r="http://schemas.openxmlformats.org/officeDocument/2006/relationships" xmlns:p="http://schemas.openxmlformats.org/presentationml/2006/main" showMasterSp="0" showMasterPhAnim="0">
+<p:notes xmlns:a="http://schemas.openxmlformats.org/drawingml/2006/main" xmlns:r="http://schemas.openxmlformats.org/officeDocument/2006/relationships" xmlns:mc="http://schemas.openxmlformats.org/markup-compatibility/2006" xmlns:mv="urn:schemas-microsoft-com:mac:vml" xmlns:p="http://schemas.openxmlformats.org/presentationml/2006/main" xmlns:c="http://schemas.openxmlformats.org/drawingml/2006/chart" xmlns:dgm="http://schemas.openxmlformats.org/drawingml/2006/diagram" xmlns:o="urn:schemas-microsoft-com:office:office" xmlns:v="urn:schemas-microsoft-com:vml" xmlns:pvml="urn:schemas-microsoft-com:office:powerpoint" xmlns:com="http://schemas.openxmlformats.org/drawingml/2006/compatibility" xmlns:p14="http://schemas.microsoft.com/office/powerpoint/2010/main" xmlns:p15="http://schemas.microsoft.com/office/powerpoint/2012/main" xmlns:ahyp="http://schemas.microsoft.com/office/drawing/2018/hyperlinkcolor" showMasterPhAnim="0" showMasterSp="0">
   <p:cSld>
     <p:spTree>
       <p:nvGrpSpPr>
-        <p:cNvPr id="1" name="Shape 128"/>
+        <p:cNvPr id="128" name="Shape 128"/>
         <p:cNvGrpSpPr/>
         <p:nvPr/>
       </p:nvGrpSpPr>
@@ -990,11 +936,9 @@
       <p:sp>
         <p:nvSpPr>
           <p:cNvPr id="129" name="Google Shape;129;g3fb085bff3c_0_46:notes"/>
-          <p:cNvSpPr>
-            <a:spLocks noGrp="1" noRot="1" noChangeAspect="1"/>
-          </p:cNvSpPr>
+          <p:cNvSpPr/>
           <p:nvPr>
-            <p:ph type="sldImg" idx="2"/>
+            <p:ph idx="2" type="sldImg"/>
           </p:nvPr>
         </p:nvSpPr>
         <p:spPr>
@@ -1003,13 +947,9 @@
             <a:ext cx="6096000" cy="3429000"/>
           </a:xfrm>
           <a:custGeom>
-            <a:avLst/>
-            <a:gdLst/>
-            <a:ahLst/>
-            <a:cxnLst/>
-            <a:rect l="l" t="t" r="r" b="b"/>
+            <a:rect b="b" l="l" r="r" t="t"/>
             <a:pathLst>
-              <a:path w="120000" h="120000" extrusionOk="0">
+              <a:path extrusionOk="0" h="120000" w="120000">
                 <a:moveTo>
                   <a:pt x="0" y="0"/>
                 </a:moveTo>
@@ -1031,11 +971,9 @@
       <p:sp>
         <p:nvSpPr>
           <p:cNvPr id="130" name="Google Shape;130;g3fb085bff3c_0_46:notes"/>
-          <p:cNvSpPr txBox="1">
-            <a:spLocks noGrp="1"/>
-          </p:cNvSpPr>
+          <p:cNvSpPr txBox="1"/>
           <p:nvPr>
-            <p:ph type="body" idx="1"/>
+            <p:ph idx="1" type="body"/>
           </p:nvPr>
         </p:nvSpPr>
         <p:spPr>
@@ -1048,20 +986,23 @@
           </a:prstGeom>
         </p:spPr>
         <p:txBody>
-          <a:bodyPr spcFirstLastPara="1" wrap="square" lIns="91425" tIns="91425" rIns="91425" bIns="91425" anchor="t" anchorCtr="0">
+          <a:bodyPr anchorCtr="0" anchor="t" bIns="91425" lIns="91425" spcFirstLastPara="1" rIns="91425" wrap="square" tIns="91425">
             <a:noAutofit/>
           </a:bodyPr>
           <a:lstStyle/>
           <a:p>
-            <a:pPr marL="0" lvl="0" indent="0" algn="l" rtl="0">
-              <a:spcBef>
-                <a:spcPts val="0"/>
-              </a:spcBef>
-              <a:spcAft>
-                <a:spcPts val="0"/>
-              </a:spcAft>
-              <a:buNone/>
-            </a:pPr>
+            <a:pPr indent="0" lvl="0" marL="0" rtl="0" algn="l">
+              <a:spcBef>
+                <a:spcPts val="0"/>
+              </a:spcBef>
+              <a:spcAft>
+                <a:spcPts val="0"/>
+              </a:spcAft>
+              <a:buNone/>
+            </a:pPr>
+            <a:r>
+              <a:t/>
+            </a:r>
             <a:endParaRPr/>
           </a:p>
         </p:txBody>
@@ -1075,11 +1016,11 @@
 </file>
 
 <file path=ppt/notesSlides/notesSlide12.xml><?xml version="1.0" encoding="utf-8"?>
-<p:notes xmlns:a="http://schemas.openxmlformats.org/drawingml/2006/main" xmlns:r="http://schemas.openxmlformats.org/officeDocument/2006/relationships" xmlns:p="http://schemas.openxmlformats.org/presentationml/2006/main" showMasterSp="0" showMasterPhAnim="0">
+<p:notes xmlns:a="http://schemas.openxmlformats.org/drawingml/2006/main" xmlns:r="http://schemas.openxmlformats.org/officeDocument/2006/relationships" xmlns:mc="http://schemas.openxmlformats.org/markup-compatibility/2006" xmlns:mv="urn:schemas-microsoft-com:mac:vml" xmlns:p="http://schemas.openxmlformats.org/presentationml/2006/main" xmlns:c="http://schemas.openxmlformats.org/drawingml/2006/chart" xmlns:dgm="http://schemas.openxmlformats.org/drawingml/2006/diagram" xmlns:o="urn:schemas-microsoft-com:office:office" xmlns:v="urn:schemas-microsoft-com:vml" xmlns:pvml="urn:schemas-microsoft-com:office:powerpoint" xmlns:com="http://schemas.openxmlformats.org/drawingml/2006/compatibility" xmlns:p14="http://schemas.microsoft.com/office/powerpoint/2010/main" xmlns:p15="http://schemas.microsoft.com/office/powerpoint/2012/main" xmlns:ahyp="http://schemas.microsoft.com/office/drawing/2018/hyperlinkcolor" showMasterPhAnim="0" showMasterSp="0">
   <p:cSld>
     <p:spTree>
       <p:nvGrpSpPr>
-        <p:cNvPr id="1" name="Shape 136"/>
+        <p:cNvPr id="136" name="Shape 136"/>
         <p:cNvGrpSpPr/>
         <p:nvPr/>
       </p:nvGrpSpPr>
@@ -1094,11 +1035,9 @@
       <p:sp>
         <p:nvSpPr>
           <p:cNvPr id="137" name="Google Shape;137;g3fb085bff3c_0_51:notes"/>
-          <p:cNvSpPr>
-            <a:spLocks noGrp="1" noRot="1" noChangeAspect="1"/>
-          </p:cNvSpPr>
+          <p:cNvSpPr/>
           <p:nvPr>
-            <p:ph type="sldImg" idx="2"/>
+            <p:ph idx="2" type="sldImg"/>
           </p:nvPr>
         </p:nvSpPr>
         <p:spPr>
@@ -1107,13 +1046,9 @@
             <a:ext cx="6096000" cy="3429000"/>
           </a:xfrm>
           <a:custGeom>
-            <a:avLst/>
-            <a:gdLst/>
-            <a:ahLst/>
-            <a:cxnLst/>
-            <a:rect l="l" t="t" r="r" b="b"/>
+            <a:rect b="b" l="l" r="r" t="t"/>
             <a:pathLst>
-              <a:path w="120000" h="120000" extrusionOk="0">
+              <a:path extrusionOk="0" h="120000" w="120000">
                 <a:moveTo>
                   <a:pt x="0" y="0"/>
                 </a:moveTo>
@@ -1135,11 +1070,9 @@
       <p:sp>
         <p:nvSpPr>
           <p:cNvPr id="138" name="Google Shape;138;g3fb085bff3c_0_51:notes"/>
-          <p:cNvSpPr txBox="1">
-            <a:spLocks noGrp="1"/>
-          </p:cNvSpPr>
+          <p:cNvSpPr txBox="1"/>
           <p:nvPr>
-            <p:ph type="body" idx="1"/>
+            <p:ph idx="1" type="body"/>
           </p:nvPr>
         </p:nvSpPr>
         <p:spPr>
@@ -1152,20 +1085,23 @@
           </a:prstGeom>
         </p:spPr>
         <p:txBody>
-          <a:bodyPr spcFirstLastPara="1" wrap="square" lIns="91425" tIns="91425" rIns="91425" bIns="91425" anchor="t" anchorCtr="0">
+          <a:bodyPr anchorCtr="0" anchor="t" bIns="91425" lIns="91425" spcFirstLastPara="1" rIns="91425" wrap="square" tIns="91425">
             <a:noAutofit/>
           </a:bodyPr>
           <a:lstStyle/>
           <a:p>
-            <a:pPr marL="0" lvl="0" indent="0" algn="l" rtl="0">
-              <a:spcBef>
-                <a:spcPts val="0"/>
-              </a:spcBef>
-              <a:spcAft>
-                <a:spcPts val="0"/>
-              </a:spcAft>
-              <a:buNone/>
-            </a:pPr>
+            <a:pPr indent="0" lvl="0" marL="0" rtl="0" algn="l">
+              <a:spcBef>
+                <a:spcPts val="0"/>
+              </a:spcBef>
+              <a:spcAft>
+                <a:spcPts val="0"/>
+              </a:spcAft>
+              <a:buNone/>
+            </a:pPr>
+            <a:r>
+              <a:t/>
+            </a:r>
             <a:endParaRPr/>
           </a:p>
         </p:txBody>
@@ -1179,11 +1115,11 @@
 </file>
 
 <file path=ppt/notesSlides/notesSlide13.xml><?xml version="1.0" encoding="utf-8"?>
-<p:notes xmlns:a="http://schemas.openxmlformats.org/drawingml/2006/main" xmlns:r="http://schemas.openxmlformats.org/officeDocument/2006/relationships" xmlns:p="http://schemas.openxmlformats.org/presentationml/2006/main" showMasterSp="0" showMasterPhAnim="0">
+<p:notes xmlns:a="http://schemas.openxmlformats.org/drawingml/2006/main" xmlns:r="http://schemas.openxmlformats.org/officeDocument/2006/relationships" xmlns:mc="http://schemas.openxmlformats.org/markup-compatibility/2006" xmlns:mv="urn:schemas-microsoft-com:mac:vml" xmlns:p="http://schemas.openxmlformats.org/presentationml/2006/main" xmlns:c="http://schemas.openxmlformats.org/drawingml/2006/chart" xmlns:dgm="http://schemas.openxmlformats.org/drawingml/2006/diagram" xmlns:o="urn:schemas-microsoft-com:office:office" xmlns:v="urn:schemas-microsoft-com:vml" xmlns:pvml="urn:schemas-microsoft-com:office:powerpoint" xmlns:com="http://schemas.openxmlformats.org/drawingml/2006/compatibility" xmlns:p14="http://schemas.microsoft.com/office/powerpoint/2010/main" xmlns:p15="http://schemas.microsoft.com/office/powerpoint/2012/main" xmlns:ahyp="http://schemas.microsoft.com/office/drawing/2018/hyperlinkcolor" showMasterPhAnim="0" showMasterSp="0">
   <p:cSld>
     <p:spTree>
       <p:nvGrpSpPr>
-        <p:cNvPr id="1" name="Shape 144"/>
+        <p:cNvPr id="144" name="Shape 144"/>
         <p:cNvGrpSpPr/>
         <p:nvPr/>
       </p:nvGrpSpPr>
@@ -1198,11 +1134,9 @@
       <p:sp>
         <p:nvSpPr>
           <p:cNvPr id="145" name="Google Shape;145;g3fb085bff3c_0_56:notes"/>
-          <p:cNvSpPr>
-            <a:spLocks noGrp="1" noRot="1" noChangeAspect="1"/>
-          </p:cNvSpPr>
+          <p:cNvSpPr/>
           <p:nvPr>
-            <p:ph type="sldImg" idx="2"/>
+            <p:ph idx="2" type="sldImg"/>
           </p:nvPr>
         </p:nvSpPr>
         <p:spPr>
@@ -1211,13 +1145,9 @@
             <a:ext cx="6096000" cy="3429000"/>
           </a:xfrm>
           <a:custGeom>
-            <a:avLst/>
-            <a:gdLst/>
-            <a:ahLst/>
-            <a:cxnLst/>
-            <a:rect l="l" t="t" r="r" b="b"/>
+            <a:rect b="b" l="l" r="r" t="t"/>
             <a:pathLst>
-              <a:path w="120000" h="120000" extrusionOk="0">
+              <a:path extrusionOk="0" h="120000" w="120000">
                 <a:moveTo>
                   <a:pt x="0" y="0"/>
                 </a:moveTo>
@@ -1239,11 +1169,9 @@
       <p:sp>
         <p:nvSpPr>
           <p:cNvPr id="146" name="Google Shape;146;g3fb085bff3c_0_56:notes"/>
-          <p:cNvSpPr txBox="1">
-            <a:spLocks noGrp="1"/>
-          </p:cNvSpPr>
+          <p:cNvSpPr txBox="1"/>
           <p:nvPr>
-            <p:ph type="body" idx="1"/>
+            <p:ph idx="1" type="body"/>
           </p:nvPr>
         </p:nvSpPr>
         <p:spPr>
@@ -1256,20 +1184,23 @@
           </a:prstGeom>
         </p:spPr>
         <p:txBody>
-          <a:bodyPr spcFirstLastPara="1" wrap="square" lIns="91425" tIns="91425" rIns="91425" bIns="91425" anchor="t" anchorCtr="0">
+          <a:bodyPr anchorCtr="0" anchor="t" bIns="91425" lIns="91425" spcFirstLastPara="1" rIns="91425" wrap="square" tIns="91425">
             <a:noAutofit/>
           </a:bodyPr>
           <a:lstStyle/>
           <a:p>
-            <a:pPr marL="0" lvl="0" indent="0" algn="l" rtl="0">
-              <a:spcBef>
-                <a:spcPts val="0"/>
-              </a:spcBef>
-              <a:spcAft>
-                <a:spcPts val="0"/>
-              </a:spcAft>
-              <a:buNone/>
-            </a:pPr>
+            <a:pPr indent="0" lvl="0" marL="0" rtl="0" algn="l">
+              <a:spcBef>
+                <a:spcPts val="0"/>
+              </a:spcBef>
+              <a:spcAft>
+                <a:spcPts val="0"/>
+              </a:spcAft>
+              <a:buNone/>
+            </a:pPr>
+            <a:r>
+              <a:t/>
+            </a:r>
             <a:endParaRPr/>
           </a:p>
         </p:txBody>
@@ -1283,11 +1214,11 @@
 </file>
 
 <file path=ppt/notesSlides/notesSlide14.xml><?xml version="1.0" encoding="utf-8"?>
-<p:notes xmlns:a="http://schemas.openxmlformats.org/drawingml/2006/main" xmlns:r="http://schemas.openxmlformats.org/officeDocument/2006/relationships" xmlns:p="http://schemas.openxmlformats.org/presentationml/2006/main" showMasterSp="0" showMasterPhAnim="0">
+<p:notes xmlns:a="http://schemas.openxmlformats.org/drawingml/2006/main" xmlns:r="http://schemas.openxmlformats.org/officeDocument/2006/relationships" xmlns:mc="http://schemas.openxmlformats.org/markup-compatibility/2006" xmlns:mv="urn:schemas-microsoft-com:mac:vml" xmlns:p="http://schemas.openxmlformats.org/presentationml/2006/main" xmlns:c="http://schemas.openxmlformats.org/drawingml/2006/chart" xmlns:dgm="http://schemas.openxmlformats.org/drawingml/2006/diagram" xmlns:o="urn:schemas-microsoft-com:office:office" xmlns:v="urn:schemas-microsoft-com:vml" xmlns:pvml="urn:schemas-microsoft-com:office:powerpoint" xmlns:com="http://schemas.openxmlformats.org/drawingml/2006/compatibility" xmlns:p14="http://schemas.microsoft.com/office/powerpoint/2010/main" xmlns:p15="http://schemas.microsoft.com/office/powerpoint/2012/main" xmlns:ahyp="http://schemas.microsoft.com/office/drawing/2018/hyperlinkcolor" showMasterPhAnim="0" showMasterSp="0">
   <p:cSld>
     <p:spTree>
       <p:nvGrpSpPr>
-        <p:cNvPr id="1" name="Shape 152"/>
+        <p:cNvPr id="152" name="Shape 152"/>
         <p:cNvGrpSpPr/>
         <p:nvPr/>
       </p:nvGrpSpPr>
@@ -1302,11 +1233,9 @@
       <p:sp>
         <p:nvSpPr>
           <p:cNvPr id="153" name="Google Shape;153;g3fb085bff3c_0_61:notes"/>
-          <p:cNvSpPr>
-            <a:spLocks noGrp="1" noRot="1" noChangeAspect="1"/>
-          </p:cNvSpPr>
+          <p:cNvSpPr/>
           <p:nvPr>
-            <p:ph type="sldImg" idx="2"/>
+            <p:ph idx="2" type="sldImg"/>
           </p:nvPr>
         </p:nvSpPr>
         <p:spPr>
@@ -1315,13 +1244,9 @@
             <a:ext cx="6096000" cy="3429000"/>
           </a:xfrm>
           <a:custGeom>
-            <a:avLst/>
-            <a:gdLst/>
-            <a:ahLst/>
-            <a:cxnLst/>
-            <a:rect l="l" t="t" r="r" b="b"/>
+            <a:rect b="b" l="l" r="r" t="t"/>
             <a:pathLst>
-              <a:path w="120000" h="120000" extrusionOk="0">
+              <a:path extrusionOk="0" h="120000" w="120000">
                 <a:moveTo>
                   <a:pt x="0" y="0"/>
                 </a:moveTo>
@@ -1343,11 +1268,9 @@
       <p:sp>
         <p:nvSpPr>
           <p:cNvPr id="154" name="Google Shape;154;g3fb085bff3c_0_61:notes"/>
-          <p:cNvSpPr txBox="1">
-            <a:spLocks noGrp="1"/>
-          </p:cNvSpPr>
+          <p:cNvSpPr txBox="1"/>
           <p:nvPr>
-            <p:ph type="body" idx="1"/>
+            <p:ph idx="1" type="body"/>
           </p:nvPr>
         </p:nvSpPr>
         <p:spPr>
@@ -1360,20 +1283,23 @@
           </a:prstGeom>
         </p:spPr>
         <p:txBody>
-          <a:bodyPr spcFirstLastPara="1" wrap="square" lIns="91425" tIns="91425" rIns="91425" bIns="91425" anchor="t" anchorCtr="0">
+          <a:bodyPr anchorCtr="0" anchor="t" bIns="91425" lIns="91425" spcFirstLastPara="1" rIns="91425" wrap="square" tIns="91425">
             <a:noAutofit/>
           </a:bodyPr>
           <a:lstStyle/>
           <a:p>
-            <a:pPr marL="0" lvl="0" indent="0" algn="l" rtl="0">
-              <a:spcBef>
-                <a:spcPts val="0"/>
-              </a:spcBef>
-              <a:spcAft>
-                <a:spcPts val="0"/>
-              </a:spcAft>
-              <a:buNone/>
-            </a:pPr>
+            <a:pPr indent="0" lvl="0" marL="0" rtl="0" algn="l">
+              <a:spcBef>
+                <a:spcPts val="0"/>
+              </a:spcBef>
+              <a:spcAft>
+                <a:spcPts val="0"/>
+              </a:spcAft>
+              <a:buNone/>
+            </a:pPr>
+            <a:r>
+              <a:t/>
+            </a:r>
             <a:endParaRPr/>
           </a:p>
         </p:txBody>
@@ -1387,11 +1313,11 @@
 </file>
 
 <file path=ppt/notesSlides/notesSlide15.xml><?xml version="1.0" encoding="utf-8"?>
-<p:notes xmlns:a="http://schemas.openxmlformats.org/drawingml/2006/main" xmlns:r="http://schemas.openxmlformats.org/officeDocument/2006/relationships" xmlns:p="http://schemas.openxmlformats.org/presentationml/2006/main" showMasterSp="0" showMasterPhAnim="0">
+<p:notes xmlns:a="http://schemas.openxmlformats.org/drawingml/2006/main" xmlns:r="http://schemas.openxmlformats.org/officeDocument/2006/relationships" xmlns:mc="http://schemas.openxmlformats.org/markup-compatibility/2006" xmlns:mv="urn:schemas-microsoft-com:mac:vml" xmlns:p="http://schemas.openxmlformats.org/presentationml/2006/main" xmlns:c="http://schemas.openxmlformats.org/drawingml/2006/chart" xmlns:dgm="http://schemas.openxmlformats.org/drawingml/2006/diagram" xmlns:o="urn:schemas-microsoft-com:office:office" xmlns:v="urn:schemas-microsoft-com:vml" xmlns:pvml="urn:schemas-microsoft-com:office:powerpoint" xmlns:com="http://schemas.openxmlformats.org/drawingml/2006/compatibility" xmlns:p14="http://schemas.microsoft.com/office/powerpoint/2010/main" xmlns:p15="http://schemas.microsoft.com/office/powerpoint/2012/main" xmlns:ahyp="http://schemas.microsoft.com/office/drawing/2018/hyperlinkcolor" showMasterPhAnim="0" showMasterSp="0">
   <p:cSld>
     <p:spTree>
       <p:nvGrpSpPr>
-        <p:cNvPr id="1" name="Shape 160"/>
+        <p:cNvPr id="160" name="Shape 160"/>
         <p:cNvGrpSpPr/>
         <p:nvPr/>
       </p:nvGrpSpPr>
@@ -1406,11 +1332,9 @@
       <p:sp>
         <p:nvSpPr>
           <p:cNvPr id="161" name="Google Shape;161;g3fb085bff3c_0_107:notes"/>
-          <p:cNvSpPr>
-            <a:spLocks noGrp="1" noRot="1" noChangeAspect="1"/>
-          </p:cNvSpPr>
+          <p:cNvSpPr/>
           <p:nvPr>
-            <p:ph type="sldImg" idx="2"/>
+            <p:ph idx="2" type="sldImg"/>
           </p:nvPr>
         </p:nvSpPr>
         <p:spPr>
@@ -1419,13 +1343,9 @@
             <a:ext cx="6096000" cy="3429000"/>
           </a:xfrm>
           <a:custGeom>
-            <a:avLst/>
-            <a:gdLst/>
-            <a:ahLst/>
-            <a:cxnLst/>
-            <a:rect l="l" t="t" r="r" b="b"/>
+            <a:rect b="b" l="l" r="r" t="t"/>
             <a:pathLst>
-              <a:path w="120000" h="120000" extrusionOk="0">
+              <a:path extrusionOk="0" h="120000" w="120000">
                 <a:moveTo>
                   <a:pt x="0" y="0"/>
                 </a:moveTo>
@@ -1447,11 +1367,9 @@
       <p:sp>
         <p:nvSpPr>
           <p:cNvPr id="162" name="Google Shape;162;g3fb085bff3c_0_107:notes"/>
-          <p:cNvSpPr txBox="1">
-            <a:spLocks noGrp="1"/>
-          </p:cNvSpPr>
+          <p:cNvSpPr txBox="1"/>
           <p:nvPr>
-            <p:ph type="body" idx="1"/>
+            <p:ph idx="1" type="body"/>
           </p:nvPr>
         </p:nvSpPr>
         <p:spPr>
@@ -1464,20 +1382,23 @@
           </a:prstGeom>
         </p:spPr>
         <p:txBody>
-          <a:bodyPr spcFirstLastPara="1" wrap="square" lIns="91425" tIns="91425" rIns="91425" bIns="91425" anchor="t" anchorCtr="0">
+          <a:bodyPr anchorCtr="0" anchor="t" bIns="91425" lIns="91425" spcFirstLastPara="1" rIns="91425" wrap="square" tIns="91425">
             <a:noAutofit/>
           </a:bodyPr>
           <a:lstStyle/>
           <a:p>
-            <a:pPr marL="0" lvl="0" indent="0" algn="l" rtl="0">
-              <a:spcBef>
-                <a:spcPts val="0"/>
-              </a:spcBef>
-              <a:spcAft>
-                <a:spcPts val="0"/>
-              </a:spcAft>
-              <a:buNone/>
-            </a:pPr>
+            <a:pPr indent="0" lvl="0" marL="0" rtl="0" algn="l">
+              <a:spcBef>
+                <a:spcPts val="0"/>
+              </a:spcBef>
+              <a:spcAft>
+                <a:spcPts val="0"/>
+              </a:spcAft>
+              <a:buNone/>
+            </a:pPr>
+            <a:r>
+              <a:t/>
+            </a:r>
             <a:endParaRPr/>
           </a:p>
         </p:txBody>
@@ -1491,11 +1412,11 @@
 </file>
 
 <file path=ppt/notesSlides/notesSlide16.xml><?xml version="1.0" encoding="utf-8"?>
-<p:notes xmlns:a="http://schemas.openxmlformats.org/drawingml/2006/main" xmlns:r="http://schemas.openxmlformats.org/officeDocument/2006/relationships" xmlns:p="http://schemas.openxmlformats.org/presentationml/2006/main" showMasterSp="0" showMasterPhAnim="0">
+<p:notes xmlns:a="http://schemas.openxmlformats.org/drawingml/2006/main" xmlns:r="http://schemas.openxmlformats.org/officeDocument/2006/relationships" xmlns:mc="http://schemas.openxmlformats.org/markup-compatibility/2006" xmlns:mv="urn:schemas-microsoft-com:mac:vml" xmlns:p="http://schemas.openxmlformats.org/presentationml/2006/main" xmlns:c="http://schemas.openxmlformats.org/drawingml/2006/chart" xmlns:dgm="http://schemas.openxmlformats.org/drawingml/2006/diagram" xmlns:o="urn:schemas-microsoft-com:office:office" xmlns:v="urn:schemas-microsoft-com:vml" xmlns:pvml="urn:schemas-microsoft-com:office:powerpoint" xmlns:com="http://schemas.openxmlformats.org/drawingml/2006/compatibility" xmlns:p14="http://schemas.microsoft.com/office/powerpoint/2010/main" xmlns:p15="http://schemas.microsoft.com/office/powerpoint/2012/main" xmlns:ahyp="http://schemas.microsoft.com/office/drawing/2018/hyperlinkcolor" showMasterPhAnim="0" showMasterSp="0">
   <p:cSld>
     <p:spTree>
       <p:nvGrpSpPr>
-        <p:cNvPr id="1" name="Shape 167"/>
+        <p:cNvPr id="167" name="Shape 167"/>
         <p:cNvGrpSpPr/>
         <p:nvPr/>
       </p:nvGrpSpPr>
@@ -1510,11 +1431,9 @@
       <p:sp>
         <p:nvSpPr>
           <p:cNvPr id="168" name="Google Shape;168;g3fb085bff3c_0_66:notes"/>
-          <p:cNvSpPr>
-            <a:spLocks noGrp="1" noRot="1" noChangeAspect="1"/>
-          </p:cNvSpPr>
+          <p:cNvSpPr/>
           <p:nvPr>
-            <p:ph type="sldImg" idx="2"/>
+            <p:ph idx="2" type="sldImg"/>
           </p:nvPr>
         </p:nvSpPr>
         <p:spPr>
@@ -1523,13 +1442,9 @@
             <a:ext cx="6096000" cy="3429000"/>
           </a:xfrm>
           <a:custGeom>
-            <a:avLst/>
-            <a:gdLst/>
-            <a:ahLst/>
-            <a:cxnLst/>
-            <a:rect l="l" t="t" r="r" b="b"/>
+            <a:rect b="b" l="l" r="r" t="t"/>
             <a:pathLst>
-              <a:path w="120000" h="120000" extrusionOk="0">
+              <a:path extrusionOk="0" h="120000" w="120000">
                 <a:moveTo>
                   <a:pt x="0" y="0"/>
                 </a:moveTo>
@@ -1551,11 +1466,9 @@
       <p:sp>
         <p:nvSpPr>
           <p:cNvPr id="169" name="Google Shape;169;g3fb085bff3c_0_66:notes"/>
-          <p:cNvSpPr txBox="1">
-            <a:spLocks noGrp="1"/>
-          </p:cNvSpPr>
+          <p:cNvSpPr txBox="1"/>
           <p:nvPr>
-            <p:ph type="body" idx="1"/>
+            <p:ph idx="1" type="body"/>
           </p:nvPr>
         </p:nvSpPr>
         <p:spPr>
@@ -1568,20 +1481,23 @@
           </a:prstGeom>
         </p:spPr>
         <p:txBody>
-          <a:bodyPr spcFirstLastPara="1" wrap="square" lIns="91425" tIns="91425" rIns="91425" bIns="91425" anchor="t" anchorCtr="0">
+          <a:bodyPr anchorCtr="0" anchor="t" bIns="91425" lIns="91425" spcFirstLastPara="1" rIns="91425" wrap="square" tIns="91425">
             <a:noAutofit/>
           </a:bodyPr>
           <a:lstStyle/>
           <a:p>
-            <a:pPr marL="0" lvl="0" indent="0" algn="l" rtl="0">
-              <a:spcBef>
-                <a:spcPts val="0"/>
-              </a:spcBef>
-              <a:spcAft>
-                <a:spcPts val="0"/>
-              </a:spcAft>
-              <a:buNone/>
-            </a:pPr>
+            <a:pPr indent="0" lvl="0" marL="0" rtl="0" algn="l">
+              <a:spcBef>
+                <a:spcPts val="0"/>
+              </a:spcBef>
+              <a:spcAft>
+                <a:spcPts val="0"/>
+              </a:spcAft>
+              <a:buNone/>
+            </a:pPr>
+            <a:r>
+              <a:t/>
+            </a:r>
             <a:endParaRPr/>
           </a:p>
         </p:txBody>
@@ -1595,11 +1511,11 @@
 </file>
 
 <file path=ppt/notesSlides/notesSlide2.xml><?xml version="1.0" encoding="utf-8"?>
-<p:notes xmlns:a="http://schemas.openxmlformats.org/drawingml/2006/main" xmlns:r="http://schemas.openxmlformats.org/officeDocument/2006/relationships" xmlns:p="http://schemas.openxmlformats.org/presentationml/2006/main" showMasterSp="0" showMasterPhAnim="0">
+<p:notes xmlns:a="http://schemas.openxmlformats.org/drawingml/2006/main" xmlns:r="http://schemas.openxmlformats.org/officeDocument/2006/relationships" xmlns:mc="http://schemas.openxmlformats.org/markup-compatibility/2006" xmlns:mv="urn:schemas-microsoft-com:mac:vml" xmlns:p="http://schemas.openxmlformats.org/presentationml/2006/main" xmlns:c="http://schemas.openxmlformats.org/drawingml/2006/chart" xmlns:dgm="http://schemas.openxmlformats.org/drawingml/2006/diagram" xmlns:o="urn:schemas-microsoft-com:office:office" xmlns:v="urn:schemas-microsoft-com:vml" xmlns:pvml="urn:schemas-microsoft-com:office:powerpoint" xmlns:com="http://schemas.openxmlformats.org/drawingml/2006/compatibility" xmlns:p14="http://schemas.microsoft.com/office/powerpoint/2010/main" xmlns:p15="http://schemas.microsoft.com/office/powerpoint/2012/main" xmlns:ahyp="http://schemas.microsoft.com/office/drawing/2018/hyperlinkcolor" showMasterPhAnim="0" showMasterSp="0">
   <p:cSld>
     <p:spTree>
       <p:nvGrpSpPr>
-        <p:cNvPr id="1" name="Shape 57"/>
+        <p:cNvPr id="57" name="Shape 57"/>
         <p:cNvGrpSpPr/>
         <p:nvPr/>
       </p:nvGrpSpPr>
@@ -1614,11 +1530,9 @@
       <p:sp>
         <p:nvSpPr>
           <p:cNvPr id="58" name="Google Shape;58;g3fb085bff3c_0_134:notes"/>
-          <p:cNvSpPr>
-            <a:spLocks noGrp="1" noRot="1" noChangeAspect="1"/>
-          </p:cNvSpPr>
+          <p:cNvSpPr/>
           <p:nvPr>
-            <p:ph type="sldImg" idx="2"/>
+            <p:ph idx="2" type="sldImg"/>
           </p:nvPr>
         </p:nvSpPr>
         <p:spPr>
@@ -1627,13 +1541,9 @@
             <a:ext cx="6096000" cy="3429000"/>
           </a:xfrm>
           <a:custGeom>
-            <a:avLst/>
-            <a:gdLst/>
-            <a:ahLst/>
-            <a:cxnLst/>
-            <a:rect l="l" t="t" r="r" b="b"/>
+            <a:rect b="b" l="l" r="r" t="t"/>
             <a:pathLst>
-              <a:path w="120000" h="120000" extrusionOk="0">
+              <a:path extrusionOk="0" h="120000" w="120000">
                 <a:moveTo>
                   <a:pt x="0" y="0"/>
                 </a:moveTo>
@@ -1655,11 +1565,9 @@
       <p:sp>
         <p:nvSpPr>
           <p:cNvPr id="59" name="Google Shape;59;g3fb085bff3c_0_134:notes"/>
-          <p:cNvSpPr txBox="1">
-            <a:spLocks noGrp="1"/>
-          </p:cNvSpPr>
+          <p:cNvSpPr txBox="1"/>
           <p:nvPr>
-            <p:ph type="body" idx="1"/>
+            <p:ph idx="1" type="body"/>
           </p:nvPr>
         </p:nvSpPr>
         <p:spPr>
@@ -1672,20 +1580,23 @@
           </a:prstGeom>
         </p:spPr>
         <p:txBody>
-          <a:bodyPr spcFirstLastPara="1" wrap="square" lIns="91425" tIns="91425" rIns="91425" bIns="91425" anchor="t" anchorCtr="0">
+          <a:bodyPr anchorCtr="0" anchor="t" bIns="91425" lIns="91425" spcFirstLastPara="1" rIns="91425" wrap="square" tIns="91425">
             <a:noAutofit/>
           </a:bodyPr>
           <a:lstStyle/>
           <a:p>
-            <a:pPr marL="0" lvl="0" indent="0" algn="l" rtl="0">
-              <a:spcBef>
-                <a:spcPts val="0"/>
-              </a:spcBef>
-              <a:spcAft>
-                <a:spcPts val="0"/>
-              </a:spcAft>
-              <a:buNone/>
-            </a:pPr>
+            <a:pPr indent="0" lvl="0" marL="0" rtl="0" algn="l">
+              <a:spcBef>
+                <a:spcPts val="0"/>
+              </a:spcBef>
+              <a:spcAft>
+                <a:spcPts val="0"/>
+              </a:spcAft>
+              <a:buNone/>
+            </a:pPr>
+            <a:r>
+              <a:t/>
+            </a:r>
             <a:endParaRPr/>
           </a:p>
         </p:txBody>
@@ -1699,11 +1610,11 @@
 </file>
 
 <file path=ppt/notesSlides/notesSlide3.xml><?xml version="1.0" encoding="utf-8"?>
-<p:notes xmlns:a="http://schemas.openxmlformats.org/drawingml/2006/main" xmlns:r="http://schemas.openxmlformats.org/officeDocument/2006/relationships" xmlns:p="http://schemas.openxmlformats.org/presentationml/2006/main" showMasterSp="0" showMasterPhAnim="0">
+<p:notes xmlns:a="http://schemas.openxmlformats.org/drawingml/2006/main" xmlns:r="http://schemas.openxmlformats.org/officeDocument/2006/relationships" xmlns:mc="http://schemas.openxmlformats.org/markup-compatibility/2006" xmlns:mv="urn:schemas-microsoft-com:mac:vml" xmlns:p="http://schemas.openxmlformats.org/presentationml/2006/main" xmlns:c="http://schemas.openxmlformats.org/drawingml/2006/chart" xmlns:dgm="http://schemas.openxmlformats.org/drawingml/2006/diagram" xmlns:o="urn:schemas-microsoft-com:office:office" xmlns:v="urn:schemas-microsoft-com:vml" xmlns:pvml="urn:schemas-microsoft-com:office:powerpoint" xmlns:com="http://schemas.openxmlformats.org/drawingml/2006/compatibility" xmlns:p14="http://schemas.microsoft.com/office/powerpoint/2010/main" xmlns:p15="http://schemas.microsoft.com/office/powerpoint/2012/main" xmlns:ahyp="http://schemas.microsoft.com/office/drawing/2018/hyperlinkcolor" showMasterPhAnim="0" showMasterSp="0">
   <p:cSld>
     <p:spTree>
       <p:nvGrpSpPr>
-        <p:cNvPr id="1" name="Shape 65"/>
+        <p:cNvPr id="65" name="Shape 65"/>
         <p:cNvGrpSpPr/>
         <p:nvPr/>
       </p:nvGrpSpPr>
@@ -1718,11 +1629,9 @@
       <p:sp>
         <p:nvSpPr>
           <p:cNvPr id="66" name="Google Shape;66;g3fb085bff3c_0_4:notes"/>
-          <p:cNvSpPr>
-            <a:spLocks noGrp="1" noRot="1" noChangeAspect="1"/>
-          </p:cNvSpPr>
+          <p:cNvSpPr/>
           <p:nvPr>
-            <p:ph type="sldImg" idx="2"/>
+            <p:ph idx="2" type="sldImg"/>
           </p:nvPr>
         </p:nvSpPr>
         <p:spPr>
@@ -1731,13 +1640,9 @@
             <a:ext cx="6096000" cy="3429000"/>
           </a:xfrm>
           <a:custGeom>
-            <a:avLst/>
-            <a:gdLst/>
-            <a:ahLst/>
-            <a:cxnLst/>
-            <a:rect l="l" t="t" r="r" b="b"/>
+            <a:rect b="b" l="l" r="r" t="t"/>
             <a:pathLst>
-              <a:path w="120000" h="120000" extrusionOk="0">
+              <a:path extrusionOk="0" h="120000" w="120000">
                 <a:moveTo>
                   <a:pt x="0" y="0"/>
                 </a:moveTo>
@@ -1759,11 +1664,9 @@
       <p:sp>
         <p:nvSpPr>
           <p:cNvPr id="67" name="Google Shape;67;g3fb085bff3c_0_4:notes"/>
-          <p:cNvSpPr txBox="1">
-            <a:spLocks noGrp="1"/>
-          </p:cNvSpPr>
+          <p:cNvSpPr txBox="1"/>
           <p:nvPr>
-            <p:ph type="body" idx="1"/>
+            <p:ph idx="1" type="body"/>
           </p:nvPr>
         </p:nvSpPr>
         <p:spPr>
@@ -1776,20 +1679,23 @@
           </a:prstGeom>
         </p:spPr>
         <p:txBody>
-          <a:bodyPr spcFirstLastPara="1" wrap="square" lIns="91425" tIns="91425" rIns="91425" bIns="91425" anchor="t" anchorCtr="0">
+          <a:bodyPr anchorCtr="0" anchor="t" bIns="91425" lIns="91425" spcFirstLastPara="1" rIns="91425" wrap="square" tIns="91425">
             <a:noAutofit/>
           </a:bodyPr>
           <a:lstStyle/>
           <a:p>
-            <a:pPr marL="0" lvl="0" indent="0" algn="l" rtl="0">
-              <a:spcBef>
-                <a:spcPts val="0"/>
-              </a:spcBef>
-              <a:spcAft>
-                <a:spcPts val="0"/>
-              </a:spcAft>
-              <a:buNone/>
-            </a:pPr>
+            <a:pPr indent="0" lvl="0" marL="0" rtl="0" algn="l">
+              <a:spcBef>
+                <a:spcPts val="0"/>
+              </a:spcBef>
+              <a:spcAft>
+                <a:spcPts val="0"/>
+              </a:spcAft>
+              <a:buNone/>
+            </a:pPr>
+            <a:r>
+              <a:t/>
+            </a:r>
             <a:endParaRPr/>
           </a:p>
         </p:txBody>
@@ -1803,11 +1709,11 @@
 </file>
 
 <file path=ppt/notesSlides/notesSlide4.xml><?xml version="1.0" encoding="utf-8"?>
-<p:notes xmlns:a="http://schemas.openxmlformats.org/drawingml/2006/main" xmlns:r="http://schemas.openxmlformats.org/officeDocument/2006/relationships" xmlns:p="http://schemas.openxmlformats.org/presentationml/2006/main" showMasterSp="0" showMasterPhAnim="0">
+<p:notes xmlns:a="http://schemas.openxmlformats.org/drawingml/2006/main" xmlns:r="http://schemas.openxmlformats.org/officeDocument/2006/relationships" xmlns:mc="http://schemas.openxmlformats.org/markup-compatibility/2006" xmlns:mv="urn:schemas-microsoft-com:mac:vml" xmlns:p="http://schemas.openxmlformats.org/presentationml/2006/main" xmlns:c="http://schemas.openxmlformats.org/drawingml/2006/chart" xmlns:dgm="http://schemas.openxmlformats.org/drawingml/2006/diagram" xmlns:o="urn:schemas-microsoft-com:office:office" xmlns:v="urn:schemas-microsoft-com:vml" xmlns:pvml="urn:schemas-microsoft-com:office:powerpoint" xmlns:com="http://schemas.openxmlformats.org/drawingml/2006/compatibility" xmlns:p14="http://schemas.microsoft.com/office/powerpoint/2010/main" xmlns:p15="http://schemas.microsoft.com/office/powerpoint/2012/main" xmlns:ahyp="http://schemas.microsoft.com/office/drawing/2018/hyperlinkcolor" showMasterPhAnim="0" showMasterSp="0">
   <p:cSld>
     <p:spTree>
       <p:nvGrpSpPr>
-        <p:cNvPr id="1" name="Shape 72"/>
+        <p:cNvPr id="72" name="Shape 72"/>
         <p:cNvGrpSpPr/>
         <p:nvPr/>
       </p:nvGrpSpPr>
@@ -1822,11 +1728,9 @@
       <p:sp>
         <p:nvSpPr>
           <p:cNvPr id="73" name="Google Shape;73;g3fb085bff3c_0_11:notes"/>
-          <p:cNvSpPr>
-            <a:spLocks noGrp="1" noRot="1" noChangeAspect="1"/>
-          </p:cNvSpPr>
+          <p:cNvSpPr/>
           <p:nvPr>
-            <p:ph type="sldImg" idx="2"/>
+            <p:ph idx="2" type="sldImg"/>
           </p:nvPr>
         </p:nvSpPr>
         <p:spPr>
@@ -1835,13 +1739,9 @@
             <a:ext cx="6096000" cy="3429000"/>
           </a:xfrm>
           <a:custGeom>
-            <a:avLst/>
-            <a:gdLst/>
-            <a:ahLst/>
-            <a:cxnLst/>
-            <a:rect l="l" t="t" r="r" b="b"/>
+            <a:rect b="b" l="l" r="r" t="t"/>
             <a:pathLst>
-              <a:path w="120000" h="120000" extrusionOk="0">
+              <a:path extrusionOk="0" h="120000" w="120000">
                 <a:moveTo>
                   <a:pt x="0" y="0"/>
                 </a:moveTo>
@@ -1863,11 +1763,9 @@
       <p:sp>
         <p:nvSpPr>
           <p:cNvPr id="74" name="Google Shape;74;g3fb085bff3c_0_11:notes"/>
-          <p:cNvSpPr txBox="1">
-            <a:spLocks noGrp="1"/>
-          </p:cNvSpPr>
+          <p:cNvSpPr txBox="1"/>
           <p:nvPr>
-            <p:ph type="body" idx="1"/>
+            <p:ph idx="1" type="body"/>
           </p:nvPr>
         </p:nvSpPr>
         <p:spPr>
@@ -1880,20 +1778,23 @@
           </a:prstGeom>
         </p:spPr>
         <p:txBody>
-          <a:bodyPr spcFirstLastPara="1" wrap="square" lIns="91425" tIns="91425" rIns="91425" bIns="91425" anchor="t" anchorCtr="0">
+          <a:bodyPr anchorCtr="0" anchor="t" bIns="91425" lIns="91425" spcFirstLastPara="1" rIns="91425" wrap="square" tIns="91425">
             <a:noAutofit/>
           </a:bodyPr>
           <a:lstStyle/>
           <a:p>
-            <a:pPr marL="0" lvl="0" indent="0" algn="l" rtl="0">
-              <a:spcBef>
-                <a:spcPts val="0"/>
-              </a:spcBef>
-              <a:spcAft>
-                <a:spcPts val="0"/>
-              </a:spcAft>
-              <a:buNone/>
-            </a:pPr>
+            <a:pPr indent="0" lvl="0" marL="0" rtl="0" algn="l">
+              <a:spcBef>
+                <a:spcPts val="0"/>
+              </a:spcBef>
+              <a:spcAft>
+                <a:spcPts val="0"/>
+              </a:spcAft>
+              <a:buNone/>
+            </a:pPr>
+            <a:r>
+              <a:t/>
+            </a:r>
             <a:endParaRPr/>
           </a:p>
         </p:txBody>
@@ -1907,11 +1808,11 @@
 </file>
 
 <file path=ppt/notesSlides/notesSlide5.xml><?xml version="1.0" encoding="utf-8"?>
-<p:notes xmlns:a="http://schemas.openxmlformats.org/drawingml/2006/main" xmlns:r="http://schemas.openxmlformats.org/officeDocument/2006/relationships" xmlns:p="http://schemas.openxmlformats.org/presentationml/2006/main" showMasterSp="0" showMasterPhAnim="0">
+<p:notes xmlns:a="http://schemas.openxmlformats.org/drawingml/2006/main" xmlns:r="http://schemas.openxmlformats.org/officeDocument/2006/relationships" xmlns:mc="http://schemas.openxmlformats.org/markup-compatibility/2006" xmlns:mv="urn:schemas-microsoft-com:mac:vml" xmlns:p="http://schemas.openxmlformats.org/presentationml/2006/main" xmlns:c="http://schemas.openxmlformats.org/drawingml/2006/chart" xmlns:dgm="http://schemas.openxmlformats.org/drawingml/2006/diagram" xmlns:o="urn:schemas-microsoft-com:office:office" xmlns:v="urn:schemas-microsoft-com:vml" xmlns:pvml="urn:schemas-microsoft-com:office:powerpoint" xmlns:com="http://schemas.openxmlformats.org/drawingml/2006/compatibility" xmlns:p14="http://schemas.microsoft.com/office/powerpoint/2010/main" xmlns:p15="http://schemas.microsoft.com/office/powerpoint/2012/main" xmlns:ahyp="http://schemas.microsoft.com/office/drawing/2018/hyperlinkcolor" showMasterPhAnim="0" showMasterSp="0">
   <p:cSld>
     <p:spTree>
       <p:nvGrpSpPr>
-        <p:cNvPr id="1" name="Shape 80"/>
+        <p:cNvPr id="80" name="Shape 80"/>
         <p:cNvGrpSpPr/>
         <p:nvPr/>
       </p:nvGrpSpPr>
@@ -1926,11 +1827,9 @@
       <p:sp>
         <p:nvSpPr>
           <p:cNvPr id="81" name="Google Shape;81;g3fb085bff3c_0_16:notes"/>
-          <p:cNvSpPr>
-            <a:spLocks noGrp="1" noRot="1" noChangeAspect="1"/>
-          </p:cNvSpPr>
+          <p:cNvSpPr/>
           <p:nvPr>
-            <p:ph type="sldImg" idx="2"/>
+            <p:ph idx="2" type="sldImg"/>
           </p:nvPr>
         </p:nvSpPr>
         <p:spPr>
@@ -1939,13 +1838,9 @@
             <a:ext cx="6096000" cy="3429000"/>
           </a:xfrm>
           <a:custGeom>
-            <a:avLst/>
-            <a:gdLst/>
-            <a:ahLst/>
-            <a:cxnLst/>
-            <a:rect l="l" t="t" r="r" b="b"/>
+            <a:rect b="b" l="l" r="r" t="t"/>
             <a:pathLst>
-              <a:path w="120000" h="120000" extrusionOk="0">
+              <a:path extrusionOk="0" h="120000" w="120000">
                 <a:moveTo>
                   <a:pt x="0" y="0"/>
                 </a:moveTo>
@@ -1967,11 +1862,9 @@
       <p:sp>
         <p:nvSpPr>
           <p:cNvPr id="82" name="Google Shape;82;g3fb085bff3c_0_16:notes"/>
-          <p:cNvSpPr txBox="1">
-            <a:spLocks noGrp="1"/>
-          </p:cNvSpPr>
+          <p:cNvSpPr txBox="1"/>
           <p:nvPr>
-            <p:ph type="body" idx="1"/>
+            <p:ph idx="1" type="body"/>
           </p:nvPr>
         </p:nvSpPr>
         <p:spPr>
@@ -1984,20 +1877,23 @@
           </a:prstGeom>
         </p:spPr>
         <p:txBody>
-          <a:bodyPr spcFirstLastPara="1" wrap="square" lIns="91425" tIns="91425" rIns="91425" bIns="91425" anchor="t" anchorCtr="0">
+          <a:bodyPr anchorCtr="0" anchor="t" bIns="91425" lIns="91425" spcFirstLastPara="1" rIns="91425" wrap="square" tIns="91425">
             <a:noAutofit/>
           </a:bodyPr>
           <a:lstStyle/>
           <a:p>
-            <a:pPr marL="0" lvl="0" indent="0" algn="l" rtl="0">
-              <a:spcBef>
-                <a:spcPts val="0"/>
-              </a:spcBef>
-              <a:spcAft>
-                <a:spcPts val="0"/>
-              </a:spcAft>
-              <a:buNone/>
-            </a:pPr>
+            <a:pPr indent="0" lvl="0" marL="0" rtl="0" algn="l">
+              <a:spcBef>
+                <a:spcPts val="0"/>
+              </a:spcBef>
+              <a:spcAft>
+                <a:spcPts val="0"/>
+              </a:spcAft>
+              <a:buNone/>
+            </a:pPr>
+            <a:r>
+              <a:t/>
+            </a:r>
             <a:endParaRPr/>
           </a:p>
         </p:txBody>
@@ -2011,11 +1907,11 @@
 </file>
 
 <file path=ppt/notesSlides/notesSlide6.xml><?xml version="1.0" encoding="utf-8"?>
-<p:notes xmlns:a="http://schemas.openxmlformats.org/drawingml/2006/main" xmlns:r="http://schemas.openxmlformats.org/officeDocument/2006/relationships" xmlns:p="http://schemas.openxmlformats.org/presentationml/2006/main" showMasterSp="0" showMasterPhAnim="0">
+<p:notes xmlns:a="http://schemas.openxmlformats.org/drawingml/2006/main" xmlns:r="http://schemas.openxmlformats.org/officeDocument/2006/relationships" xmlns:mc="http://schemas.openxmlformats.org/markup-compatibility/2006" xmlns:mv="urn:schemas-microsoft-com:mac:vml" xmlns:p="http://schemas.openxmlformats.org/presentationml/2006/main" xmlns:c="http://schemas.openxmlformats.org/drawingml/2006/chart" xmlns:dgm="http://schemas.openxmlformats.org/drawingml/2006/diagram" xmlns:o="urn:schemas-microsoft-com:office:office" xmlns:v="urn:schemas-microsoft-com:vml" xmlns:pvml="urn:schemas-microsoft-com:office:powerpoint" xmlns:com="http://schemas.openxmlformats.org/drawingml/2006/compatibility" xmlns:p14="http://schemas.microsoft.com/office/powerpoint/2010/main" xmlns:p15="http://schemas.microsoft.com/office/powerpoint/2012/main" xmlns:ahyp="http://schemas.microsoft.com/office/drawing/2018/hyperlinkcolor" showMasterPhAnim="0" showMasterSp="0">
   <p:cSld>
     <p:spTree>
       <p:nvGrpSpPr>
-        <p:cNvPr id="1" name="Shape 88"/>
+        <p:cNvPr id="88" name="Shape 88"/>
         <p:cNvGrpSpPr/>
         <p:nvPr/>
       </p:nvGrpSpPr>
@@ -2030,11 +1926,9 @@
       <p:sp>
         <p:nvSpPr>
           <p:cNvPr id="89" name="Google Shape;89;g3fb085bff3c_0_21:notes"/>
-          <p:cNvSpPr>
-            <a:spLocks noGrp="1" noRot="1" noChangeAspect="1"/>
-          </p:cNvSpPr>
+          <p:cNvSpPr/>
           <p:nvPr>
-            <p:ph type="sldImg" idx="2"/>
+            <p:ph idx="2" type="sldImg"/>
           </p:nvPr>
         </p:nvSpPr>
         <p:spPr>
@@ -2043,13 +1937,9 @@
             <a:ext cx="6096000" cy="3429000"/>
           </a:xfrm>
           <a:custGeom>
-            <a:avLst/>
-            <a:gdLst/>
-            <a:ahLst/>
-            <a:cxnLst/>
-            <a:rect l="l" t="t" r="r" b="b"/>
+            <a:rect b="b" l="l" r="r" t="t"/>
             <a:pathLst>
-              <a:path w="120000" h="120000" extrusionOk="0">
+              <a:path extrusionOk="0" h="120000" w="120000">
                 <a:moveTo>
                   <a:pt x="0" y="0"/>
                 </a:moveTo>
@@ -2071,11 +1961,9 @@
       <p:sp>
         <p:nvSpPr>
           <p:cNvPr id="90" name="Google Shape;90;g3fb085bff3c_0_21:notes"/>
-          <p:cNvSpPr txBox="1">
-            <a:spLocks noGrp="1"/>
-          </p:cNvSpPr>
+          <p:cNvSpPr txBox="1"/>
           <p:nvPr>
-            <p:ph type="body" idx="1"/>
+            <p:ph idx="1" type="body"/>
           </p:nvPr>
         </p:nvSpPr>
         <p:spPr>
@@ -2088,20 +1976,23 @@
           </a:prstGeom>
         </p:spPr>
         <p:txBody>
-          <a:bodyPr spcFirstLastPara="1" wrap="square" lIns="91425" tIns="91425" rIns="91425" bIns="91425" anchor="t" anchorCtr="0">
+          <a:bodyPr anchorCtr="0" anchor="t" bIns="91425" lIns="91425" spcFirstLastPara="1" rIns="91425" wrap="square" tIns="91425">
             <a:noAutofit/>
           </a:bodyPr>
           <a:lstStyle/>
           <a:p>
-            <a:pPr marL="0" lvl="0" indent="0" algn="l" rtl="0">
-              <a:spcBef>
-                <a:spcPts val="0"/>
-              </a:spcBef>
-              <a:spcAft>
-                <a:spcPts val="0"/>
-              </a:spcAft>
-              <a:buNone/>
-            </a:pPr>
+            <a:pPr indent="0" lvl="0" marL="0" rtl="0" algn="l">
+              <a:spcBef>
+                <a:spcPts val="0"/>
+              </a:spcBef>
+              <a:spcAft>
+                <a:spcPts val="0"/>
+              </a:spcAft>
+              <a:buNone/>
+            </a:pPr>
+            <a:r>
+              <a:t/>
+            </a:r>
             <a:endParaRPr/>
           </a:p>
         </p:txBody>
@@ -2115,11 +2006,11 @@
 </file>
 
 <file path=ppt/notesSlides/notesSlide7.xml><?xml version="1.0" encoding="utf-8"?>
-<p:notes xmlns:a="http://schemas.openxmlformats.org/drawingml/2006/main" xmlns:r="http://schemas.openxmlformats.org/officeDocument/2006/relationships" xmlns:p="http://schemas.openxmlformats.org/presentationml/2006/main" showMasterSp="0" showMasterPhAnim="0">
+<p:notes xmlns:a="http://schemas.openxmlformats.org/drawingml/2006/main" xmlns:r="http://schemas.openxmlformats.org/officeDocument/2006/relationships" xmlns:mc="http://schemas.openxmlformats.org/markup-compatibility/2006" xmlns:mv="urn:schemas-microsoft-com:mac:vml" xmlns:p="http://schemas.openxmlformats.org/presentationml/2006/main" xmlns:c="http://schemas.openxmlformats.org/drawingml/2006/chart" xmlns:dgm="http://schemas.openxmlformats.org/drawingml/2006/diagram" xmlns:o="urn:schemas-microsoft-com:office:office" xmlns:v="urn:schemas-microsoft-com:vml" xmlns:pvml="urn:schemas-microsoft-com:office:powerpoint" xmlns:com="http://schemas.openxmlformats.org/drawingml/2006/compatibility" xmlns:p14="http://schemas.microsoft.com/office/powerpoint/2010/main" xmlns:p15="http://schemas.microsoft.com/office/powerpoint/2012/main" xmlns:ahyp="http://schemas.microsoft.com/office/drawing/2018/hyperlinkcolor" showMasterPhAnim="0" showMasterSp="0">
   <p:cSld>
     <p:spTree>
       <p:nvGrpSpPr>
-        <p:cNvPr id="1" name="Shape 96"/>
+        <p:cNvPr id="96" name="Shape 96"/>
         <p:cNvGrpSpPr/>
         <p:nvPr/>
       </p:nvGrpSpPr>
@@ -2134,11 +2025,9 @@
       <p:sp>
         <p:nvSpPr>
           <p:cNvPr id="97" name="Google Shape;97;g3fb085bff3c_0_26:notes"/>
-          <p:cNvSpPr>
-            <a:spLocks noGrp="1" noRot="1" noChangeAspect="1"/>
-          </p:cNvSpPr>
+          <p:cNvSpPr/>
           <p:nvPr>
-            <p:ph type="sldImg" idx="2"/>
+            <p:ph idx="2" type="sldImg"/>
           </p:nvPr>
         </p:nvSpPr>
         <p:spPr>
@@ -2147,13 +2036,9 @@
             <a:ext cx="6096000" cy="3429000"/>
           </a:xfrm>
           <a:custGeom>
-            <a:avLst/>
-            <a:gdLst/>
-            <a:ahLst/>
-            <a:cxnLst/>
-            <a:rect l="l" t="t" r="r" b="b"/>
+            <a:rect b="b" l="l" r="r" t="t"/>
             <a:pathLst>
-              <a:path w="120000" h="120000" extrusionOk="0">
+              <a:path extrusionOk="0" h="120000" w="120000">
                 <a:moveTo>
                   <a:pt x="0" y="0"/>
                 </a:moveTo>
@@ -2175,11 +2060,9 @@
       <p:sp>
         <p:nvSpPr>
           <p:cNvPr id="98" name="Google Shape;98;g3fb085bff3c_0_26:notes"/>
-          <p:cNvSpPr txBox="1">
-            <a:spLocks noGrp="1"/>
-          </p:cNvSpPr>
+          <p:cNvSpPr txBox="1"/>
           <p:nvPr>
-            <p:ph type="body" idx="1"/>
+            <p:ph idx="1" type="body"/>
           </p:nvPr>
         </p:nvSpPr>
         <p:spPr>
@@ -2192,20 +2075,23 @@
           </a:prstGeom>
         </p:spPr>
         <p:txBody>
-          <a:bodyPr spcFirstLastPara="1" wrap="square" lIns="91425" tIns="91425" rIns="91425" bIns="91425" anchor="t" anchorCtr="0">
+          <a:bodyPr anchorCtr="0" anchor="t" bIns="91425" lIns="91425" spcFirstLastPara="1" rIns="91425" wrap="square" tIns="91425">
             <a:noAutofit/>
           </a:bodyPr>
           <a:lstStyle/>
           <a:p>
-            <a:pPr marL="0" lvl="0" indent="0" algn="l" rtl="0">
-              <a:spcBef>
-                <a:spcPts val="0"/>
-              </a:spcBef>
-              <a:spcAft>
-                <a:spcPts val="0"/>
-              </a:spcAft>
-              <a:buNone/>
-            </a:pPr>
+            <a:pPr indent="0" lvl="0" marL="0" rtl="0" algn="l">
+              <a:spcBef>
+                <a:spcPts val="0"/>
+              </a:spcBef>
+              <a:spcAft>
+                <a:spcPts val="0"/>
+              </a:spcAft>
+              <a:buNone/>
+            </a:pPr>
+            <a:r>
+              <a:t/>
+            </a:r>
             <a:endParaRPr/>
           </a:p>
         </p:txBody>
@@ -2219,11 +2105,11 @@
 </file>
 
 <file path=ppt/notesSlides/notesSlide8.xml><?xml version="1.0" encoding="utf-8"?>
-<p:notes xmlns:a="http://schemas.openxmlformats.org/drawingml/2006/main" xmlns:r="http://schemas.openxmlformats.org/officeDocument/2006/relationships" xmlns:p="http://schemas.openxmlformats.org/presentationml/2006/main" showMasterSp="0" showMasterPhAnim="0">
+<p:notes xmlns:a="http://schemas.openxmlformats.org/drawingml/2006/main" xmlns:r="http://schemas.openxmlformats.org/officeDocument/2006/relationships" xmlns:mc="http://schemas.openxmlformats.org/markup-compatibility/2006" xmlns:mv="urn:schemas-microsoft-com:mac:vml" xmlns:p="http://schemas.openxmlformats.org/presentationml/2006/main" xmlns:c="http://schemas.openxmlformats.org/drawingml/2006/chart" xmlns:dgm="http://schemas.openxmlformats.org/drawingml/2006/diagram" xmlns:o="urn:schemas-microsoft-com:office:office" xmlns:v="urn:schemas-microsoft-com:vml" xmlns:pvml="urn:schemas-microsoft-com:office:powerpoint" xmlns:com="http://schemas.openxmlformats.org/drawingml/2006/compatibility" xmlns:p14="http://schemas.microsoft.com/office/powerpoint/2010/main" xmlns:p15="http://schemas.microsoft.com/office/powerpoint/2012/main" xmlns:ahyp="http://schemas.microsoft.com/office/drawing/2018/hyperlinkcolor" showMasterPhAnim="0" showMasterSp="0">
   <p:cSld>
     <p:spTree>
       <p:nvGrpSpPr>
-        <p:cNvPr id="1" name="Shape 104"/>
+        <p:cNvPr id="104" name="Shape 104"/>
         <p:cNvGrpSpPr/>
         <p:nvPr/>
       </p:nvGrpSpPr>
@@ -2238,11 +2124,9 @@
       <p:sp>
         <p:nvSpPr>
           <p:cNvPr id="105" name="Google Shape;105;g3fb085bff3c_0_31:notes"/>
-          <p:cNvSpPr>
-            <a:spLocks noGrp="1" noRot="1" noChangeAspect="1"/>
-          </p:cNvSpPr>
+          <p:cNvSpPr/>
           <p:nvPr>
-            <p:ph type="sldImg" idx="2"/>
+            <p:ph idx="2" type="sldImg"/>
           </p:nvPr>
         </p:nvSpPr>
         <p:spPr>
@@ -2251,13 +2135,9 @@
             <a:ext cx="6096000" cy="3429000"/>
           </a:xfrm>
           <a:custGeom>
-            <a:avLst/>
-            <a:gdLst/>
-            <a:ahLst/>
-            <a:cxnLst/>
-            <a:rect l="l" t="t" r="r" b="b"/>
+            <a:rect b="b" l="l" r="r" t="t"/>
             <a:pathLst>
-              <a:path w="120000" h="120000" extrusionOk="0">
+              <a:path extrusionOk="0" h="120000" w="120000">
                 <a:moveTo>
                   <a:pt x="0" y="0"/>
                 </a:moveTo>
@@ -2279,11 +2159,9 @@
       <p:sp>
         <p:nvSpPr>
           <p:cNvPr id="106" name="Google Shape;106;g3fb085bff3c_0_31:notes"/>
-          <p:cNvSpPr txBox="1">
-            <a:spLocks noGrp="1"/>
-          </p:cNvSpPr>
+          <p:cNvSpPr txBox="1"/>
           <p:nvPr>
-            <p:ph type="body" idx="1"/>
+            <p:ph idx="1" type="body"/>
           </p:nvPr>
         </p:nvSpPr>
         <p:spPr>
@@ -2296,20 +2174,23 @@
           </a:prstGeom>
         </p:spPr>
         <p:txBody>
-          <a:bodyPr spcFirstLastPara="1" wrap="square" lIns="91425" tIns="91425" rIns="91425" bIns="91425" anchor="t" anchorCtr="0">
+          <a:bodyPr anchorCtr="0" anchor="t" bIns="91425" lIns="91425" spcFirstLastPara="1" rIns="91425" wrap="square" tIns="91425">
             <a:noAutofit/>
           </a:bodyPr>
           <a:lstStyle/>
           <a:p>
-            <a:pPr marL="0" lvl="0" indent="0" algn="l" rtl="0">
-              <a:spcBef>
-                <a:spcPts val="0"/>
-              </a:spcBef>
-              <a:spcAft>
-                <a:spcPts val="0"/>
-              </a:spcAft>
-              <a:buNone/>
-            </a:pPr>
+            <a:pPr indent="0" lvl="0" marL="0" rtl="0" algn="l">
+              <a:spcBef>
+                <a:spcPts val="0"/>
+              </a:spcBef>
+              <a:spcAft>
+                <a:spcPts val="0"/>
+              </a:spcAft>
+              <a:buNone/>
+            </a:pPr>
+            <a:r>
+              <a:t/>
+            </a:r>
             <a:endParaRPr/>
           </a:p>
         </p:txBody>
@@ -2323,11 +2204,11 @@
 </file>
 
 <file path=ppt/notesSlides/notesSlide9.xml><?xml version="1.0" encoding="utf-8"?>
-<p:notes xmlns:a="http://schemas.openxmlformats.org/drawingml/2006/main" xmlns:r="http://schemas.openxmlformats.org/officeDocument/2006/relationships" xmlns:p="http://schemas.openxmlformats.org/presentationml/2006/main" showMasterSp="0" showMasterPhAnim="0">
+<p:notes xmlns:a="http://schemas.openxmlformats.org/drawingml/2006/main" xmlns:r="http://schemas.openxmlformats.org/officeDocument/2006/relationships" xmlns:mc="http://schemas.openxmlformats.org/markup-compatibility/2006" xmlns:mv="urn:schemas-microsoft-com:mac:vml" xmlns:p="http://schemas.openxmlformats.org/presentationml/2006/main" xmlns:c="http://schemas.openxmlformats.org/drawingml/2006/chart" xmlns:dgm="http://schemas.openxmlformats.org/drawingml/2006/diagram" xmlns:o="urn:schemas-microsoft-com:office:office" xmlns:v="urn:schemas-microsoft-com:vml" xmlns:pvml="urn:schemas-microsoft-com:office:powerpoint" xmlns:com="http://schemas.openxmlformats.org/drawingml/2006/compatibility" xmlns:p14="http://schemas.microsoft.com/office/powerpoint/2010/main" xmlns:p15="http://schemas.microsoft.com/office/powerpoint/2012/main" xmlns:ahyp="http://schemas.microsoft.com/office/drawing/2018/hyperlinkcolor" showMasterPhAnim="0" showMasterSp="0">
   <p:cSld>
     <p:spTree>
       <p:nvGrpSpPr>
-        <p:cNvPr id="1" name="Shape 112"/>
+        <p:cNvPr id="112" name="Shape 112"/>
         <p:cNvGrpSpPr/>
         <p:nvPr/>
       </p:nvGrpSpPr>
@@ -2342,11 +2223,9 @@
       <p:sp>
         <p:nvSpPr>
           <p:cNvPr id="113" name="Google Shape;113;g3fb085bff3c_0_36:notes"/>
-          <p:cNvSpPr>
-            <a:spLocks noGrp="1" noRot="1" noChangeAspect="1"/>
-          </p:cNvSpPr>
+          <p:cNvSpPr/>
           <p:nvPr>
-            <p:ph type="sldImg" idx="2"/>
+            <p:ph idx="2" type="sldImg"/>
           </p:nvPr>
         </p:nvSpPr>
         <p:spPr>
@@ -2355,13 +2234,9 @@
             <a:ext cx="6096000" cy="3429000"/>
           </a:xfrm>
           <a:custGeom>
-            <a:avLst/>
-            <a:gdLst/>
-            <a:ahLst/>
-            <a:cxnLst/>
-            <a:rect l="l" t="t" r="r" b="b"/>
+            <a:rect b="b" l="l" r="r" t="t"/>
             <a:pathLst>
-              <a:path w="120000" h="120000" extrusionOk="0">
+              <a:path extrusionOk="0" h="120000" w="120000">
                 <a:moveTo>
                   <a:pt x="0" y="0"/>
                 </a:moveTo>
@@ -2383,11 +2258,9 @@
       <p:sp>
         <p:nvSpPr>
           <p:cNvPr id="114" name="Google Shape;114;g3fb085bff3c_0_36:notes"/>
-          <p:cNvSpPr txBox="1">
-            <a:spLocks noGrp="1"/>
-          </p:cNvSpPr>
+          <p:cNvSpPr txBox="1"/>
           <p:nvPr>
-            <p:ph type="body" idx="1"/>
+            <p:ph idx="1" type="body"/>
           </p:nvPr>
         </p:nvSpPr>
         <p:spPr>
@@ -2400,20 +2273,23 @@
           </a:prstGeom>
         </p:spPr>
         <p:txBody>
-          <a:bodyPr spcFirstLastPara="1" wrap="square" lIns="91425" tIns="91425" rIns="91425" bIns="91425" anchor="t" anchorCtr="0">
+          <a:bodyPr anchorCtr="0" anchor="t" bIns="91425" lIns="91425" spcFirstLastPara="1" rIns="91425" wrap="square" tIns="91425">
             <a:noAutofit/>
           </a:bodyPr>
           <a:lstStyle/>
           <a:p>
-            <a:pPr marL="0" lvl="0" indent="0" algn="l" rtl="0">
-              <a:spcBef>
-                <a:spcPts val="0"/>
-              </a:spcBef>
-              <a:spcAft>
-                <a:spcPts val="0"/>
-              </a:spcAft>
-              <a:buNone/>
-            </a:pPr>
+            <a:pPr indent="0" lvl="0" marL="0" rtl="0" algn="l">
+              <a:spcBef>
+                <a:spcPts val="0"/>
+              </a:spcBef>
+              <a:spcAft>
+                <a:spcPts val="0"/>
+              </a:spcAft>
+              <a:buNone/>
+            </a:pPr>
+            <a:r>
+              <a:t/>
+            </a:r>
             <a:endParaRPr/>
           </a:p>
         </p:txBody>
@@ -2427,11 +2303,11 @@
 </file>
 
 <file path=ppt/slideLayouts/slideLayout1.xml><?xml version="1.0" encoding="utf-8"?>
-<p:sldLayout xmlns:a="http://schemas.openxmlformats.org/drawingml/2006/main" xmlns:r="http://schemas.openxmlformats.org/officeDocument/2006/relationships" xmlns:p="http://schemas.openxmlformats.org/presentationml/2006/main" matchingName="Title slide" type="title">
+<p:sldLayout xmlns:a="http://schemas.openxmlformats.org/drawingml/2006/main" xmlns:r="http://schemas.openxmlformats.org/officeDocument/2006/relationships" xmlns:mc="http://schemas.openxmlformats.org/markup-compatibility/2006" xmlns:mv="urn:schemas-microsoft-com:mac:vml" xmlns:p="http://schemas.openxmlformats.org/presentationml/2006/main" xmlns:c="http://schemas.openxmlformats.org/drawingml/2006/chart" xmlns:dgm="http://schemas.openxmlformats.org/drawingml/2006/diagram" xmlns:o="urn:schemas-microsoft-com:office:office" xmlns:v="urn:schemas-microsoft-com:vml" xmlns:pvml="urn:schemas-microsoft-com:office:powerpoint" xmlns:com="http://schemas.openxmlformats.org/drawingml/2006/compatibility" xmlns:p14="http://schemas.microsoft.com/office/powerpoint/2010/main" xmlns:p15="http://schemas.microsoft.com/office/powerpoint/2012/main" xmlns:ahyp="http://schemas.microsoft.com/office/drawing/2018/hyperlinkcolor" matchingName="Title slide" type="title">
   <p:cSld name="TITLE">
     <p:spTree>
       <p:nvGrpSpPr>
-        <p:cNvPr id="1" name="Shape 9"/>
+        <p:cNvPr id="9" name="Shape 9"/>
         <p:cNvGrpSpPr/>
         <p:nvPr/>
       </p:nvGrpSpPr>
@@ -2446,9 +2322,7 @@
       <p:sp>
         <p:nvSpPr>
           <p:cNvPr id="10" name="Google Shape;10;p2"/>
-          <p:cNvSpPr txBox="1">
-            <a:spLocks noGrp="1"/>
-          </p:cNvSpPr>
+          <p:cNvSpPr txBox="1"/>
           <p:nvPr>
             <p:ph type="ctrTitle"/>
           </p:nvPr>
@@ -2463,7 +2337,7 @@
           </a:prstGeom>
         </p:spPr>
         <p:txBody>
-          <a:bodyPr spcFirstLastPara="1" wrap="square" lIns="91425" tIns="91425" rIns="91425" bIns="91425" anchor="b" anchorCtr="0">
+          <a:bodyPr anchorCtr="0" anchor="b" bIns="91425" lIns="91425" spcFirstLastPara="1" rIns="91425" wrap="square" tIns="91425">
             <a:normAutofit/>
           </a:bodyPr>
           <a:lstStyle>
@@ -2567,19 +2441,15 @@
               <a:defRPr sz="5200"/>
             </a:lvl9pPr>
           </a:lstStyle>
-          <a:p>
-            <a:endParaRPr/>
-          </a:p>
+          <a:p/>
         </p:txBody>
       </p:sp>
       <p:sp>
         <p:nvSpPr>
           <p:cNvPr id="11" name="Google Shape;11;p2"/>
-          <p:cNvSpPr txBox="1">
-            <a:spLocks noGrp="1"/>
-          </p:cNvSpPr>
+          <p:cNvSpPr txBox="1"/>
           <p:nvPr>
-            <p:ph type="subTitle" idx="1"/>
+            <p:ph idx="1" type="subTitle"/>
           </p:nvPr>
         </p:nvSpPr>
         <p:spPr>
@@ -2592,7 +2462,7 @@
           </a:prstGeom>
         </p:spPr>
         <p:txBody>
-          <a:bodyPr spcFirstLastPara="1" wrap="square" lIns="91425" tIns="91425" rIns="91425" bIns="91425" anchor="t" anchorCtr="0">
+          <a:bodyPr anchorCtr="0" anchor="t" bIns="91425" lIns="91425" spcFirstLastPara="1" rIns="91425" wrap="square" tIns="91425">
             <a:normAutofit/>
           </a:bodyPr>
           <a:lstStyle>
@@ -2723,19 +2593,15 @@
               <a:defRPr sz="2800"/>
             </a:lvl9pPr>
           </a:lstStyle>
-          <a:p>
-            <a:endParaRPr/>
-          </a:p>
+          <a:p/>
         </p:txBody>
       </p:sp>
       <p:sp>
         <p:nvSpPr>
           <p:cNvPr id="12" name="Google Shape;12;p2"/>
-          <p:cNvSpPr txBox="1">
-            <a:spLocks noGrp="1"/>
-          </p:cNvSpPr>
+          <p:cNvSpPr txBox="1"/>
           <p:nvPr>
-            <p:ph type="sldNum" idx="12"/>
+            <p:ph idx="12" type="sldNum"/>
           </p:nvPr>
         </p:nvSpPr>
         <p:spPr>
@@ -2748,7 +2614,7 @@
           </a:prstGeom>
         </p:spPr>
         <p:txBody>
-          <a:bodyPr spcFirstLastPara="1" wrap="square" lIns="91425" tIns="91425" rIns="91425" bIns="91425" anchor="ctr" anchorCtr="0">
+          <a:bodyPr anchorCtr="0" anchor="ctr" bIns="91425" lIns="91425" spcFirstLastPara="1" rIns="91425" wrap="square" tIns="91425">
             <a:normAutofit/>
           </a:bodyPr>
           <a:lstStyle>
@@ -2790,7 +2656,7 @@
             </a:lvl9pPr>
           </a:lstStyle>
           <a:p>
-            <a:pPr marL="0" lvl="0" indent="0" algn="r" rtl="0">
+            <a:pPr indent="0" lvl="0" marL="0" rtl="0" algn="r">
               <a:spcBef>
                 <a:spcPts val="0"/>
               </a:spcBef>
@@ -2816,11 +2682,11 @@
 </file>
 
 <file path=ppt/slideLayouts/slideLayout10.xml><?xml version="1.0" encoding="utf-8"?>
-<p:sldLayout xmlns:a="http://schemas.openxmlformats.org/drawingml/2006/main" xmlns:r="http://schemas.openxmlformats.org/officeDocument/2006/relationships" xmlns:p="http://schemas.openxmlformats.org/presentationml/2006/main" matchingName="Big number">
+<p:sldLayout xmlns:a="http://schemas.openxmlformats.org/drawingml/2006/main" xmlns:r="http://schemas.openxmlformats.org/officeDocument/2006/relationships" xmlns:mc="http://schemas.openxmlformats.org/markup-compatibility/2006" xmlns:mv="urn:schemas-microsoft-com:mac:vml" xmlns:p="http://schemas.openxmlformats.org/presentationml/2006/main" xmlns:c="http://schemas.openxmlformats.org/drawingml/2006/chart" xmlns:dgm="http://schemas.openxmlformats.org/drawingml/2006/diagram" xmlns:o="urn:schemas-microsoft-com:office:office" xmlns:v="urn:schemas-microsoft-com:vml" xmlns:pvml="urn:schemas-microsoft-com:office:powerpoint" xmlns:com="http://schemas.openxmlformats.org/drawingml/2006/compatibility" xmlns:p14="http://schemas.microsoft.com/office/powerpoint/2010/main" xmlns:p15="http://schemas.microsoft.com/office/powerpoint/2012/main" xmlns:ahyp="http://schemas.microsoft.com/office/drawing/2018/hyperlinkcolor" matchingName="Big number">
   <p:cSld name="BIG_NUMBER">
     <p:spTree>
       <p:nvGrpSpPr>
-        <p:cNvPr id="1" name="Shape 44"/>
+        <p:cNvPr id="44" name="Shape 44"/>
         <p:cNvGrpSpPr/>
         <p:nvPr/>
       </p:nvGrpSpPr>
@@ -2835,11 +2701,9 @@
       <p:sp>
         <p:nvSpPr>
           <p:cNvPr id="45" name="Google Shape;45;p11"/>
-          <p:cNvSpPr txBox="1">
-            <a:spLocks noGrp="1"/>
-          </p:cNvSpPr>
+          <p:cNvSpPr txBox="1"/>
           <p:nvPr>
-            <p:ph type="title" hasCustomPrompt="1"/>
+            <p:ph hasCustomPrompt="1" type="title"/>
           </p:nvPr>
         </p:nvSpPr>
         <p:spPr>
@@ -2852,7 +2716,7 @@
           </a:prstGeom>
         </p:spPr>
         <p:txBody>
-          <a:bodyPr spcFirstLastPara="1" wrap="square" lIns="91425" tIns="91425" rIns="91425" bIns="91425" anchor="b" anchorCtr="0">
+          <a:bodyPr anchorCtr="0" anchor="b" bIns="91425" lIns="91425" spcFirstLastPara="1" rIns="91425" wrap="square" tIns="91425">
             <a:normAutofit/>
           </a:bodyPr>
           <a:lstStyle>
@@ -2966,11 +2830,9 @@
       <p:sp>
         <p:nvSpPr>
           <p:cNvPr id="46" name="Google Shape;46;p11"/>
-          <p:cNvSpPr txBox="1">
-            <a:spLocks noGrp="1"/>
-          </p:cNvSpPr>
+          <p:cNvSpPr txBox="1"/>
           <p:nvPr>
-            <p:ph type="body" idx="1"/>
+            <p:ph idx="1" type="body"/>
           </p:nvPr>
         </p:nvSpPr>
         <p:spPr>
@@ -2983,11 +2845,11 @@
           </a:prstGeom>
         </p:spPr>
         <p:txBody>
-          <a:bodyPr spcFirstLastPara="1" wrap="square" lIns="91425" tIns="91425" rIns="91425" bIns="91425" anchor="t" anchorCtr="0">
+          <a:bodyPr anchorCtr="0" anchor="t" bIns="91425" lIns="91425" spcFirstLastPara="1" rIns="91425" wrap="square" tIns="91425">
             <a:normAutofit/>
           </a:bodyPr>
           <a:lstStyle>
-            <a:lvl1pPr marL="457200" lvl="0" indent="-342900" algn="ctr">
+            <a:lvl1pPr indent="-342900" lvl="0" marL="457200" algn="ctr">
               <a:spcBef>
                 <a:spcPts val="0"/>
               </a:spcBef>
@@ -2998,7 +2860,7 @@
               <a:buChar char="●"/>
               <a:defRPr/>
             </a:lvl1pPr>
-            <a:lvl2pPr marL="914400" lvl="1" indent="-317500" algn="ctr">
+            <a:lvl2pPr indent="-317500" lvl="1" marL="914400" algn="ctr">
               <a:spcBef>
                 <a:spcPts val="0"/>
               </a:spcBef>
@@ -3009,7 +2871,7 @@
               <a:buChar char="○"/>
               <a:defRPr/>
             </a:lvl2pPr>
-            <a:lvl3pPr marL="1371600" lvl="2" indent="-317500" algn="ctr">
+            <a:lvl3pPr indent="-317500" lvl="2" marL="1371600" algn="ctr">
               <a:spcBef>
                 <a:spcPts val="0"/>
               </a:spcBef>
@@ -3020,7 +2882,7 @@
               <a:buChar char="■"/>
               <a:defRPr/>
             </a:lvl3pPr>
-            <a:lvl4pPr marL="1828800" lvl="3" indent="-317500" algn="ctr">
+            <a:lvl4pPr indent="-317500" lvl="3" marL="1828800" algn="ctr">
               <a:spcBef>
                 <a:spcPts val="0"/>
               </a:spcBef>
@@ -3031,7 +2893,7 @@
               <a:buChar char="●"/>
               <a:defRPr/>
             </a:lvl4pPr>
-            <a:lvl5pPr marL="2286000" lvl="4" indent="-317500" algn="ctr">
+            <a:lvl5pPr indent="-317500" lvl="4" marL="2286000" algn="ctr">
               <a:spcBef>
                 <a:spcPts val="0"/>
               </a:spcBef>
@@ -3042,7 +2904,7 @@
               <a:buChar char="○"/>
               <a:defRPr/>
             </a:lvl5pPr>
-            <a:lvl6pPr marL="2743200" lvl="5" indent="-317500" algn="ctr">
+            <a:lvl6pPr indent="-317500" lvl="5" marL="2743200" algn="ctr">
               <a:spcBef>
                 <a:spcPts val="0"/>
               </a:spcBef>
@@ -3053,7 +2915,7 @@
               <a:buChar char="■"/>
               <a:defRPr/>
             </a:lvl6pPr>
-            <a:lvl7pPr marL="3200400" lvl="6" indent="-317500" algn="ctr">
+            <a:lvl7pPr indent="-317500" lvl="6" marL="3200400" algn="ctr">
               <a:spcBef>
                 <a:spcPts val="0"/>
               </a:spcBef>
@@ -3064,7 +2926,7 @@
               <a:buChar char="●"/>
               <a:defRPr/>
             </a:lvl7pPr>
-            <a:lvl8pPr marL="3657600" lvl="7" indent="-317500" algn="ctr">
+            <a:lvl8pPr indent="-317500" lvl="7" marL="3657600" algn="ctr">
               <a:spcBef>
                 <a:spcPts val="0"/>
               </a:spcBef>
@@ -3075,7 +2937,7 @@
               <a:buChar char="○"/>
               <a:defRPr/>
             </a:lvl8pPr>
-            <a:lvl9pPr marL="4114800" lvl="8" indent="-317500" algn="ctr">
+            <a:lvl9pPr indent="-317500" lvl="8" marL="4114800" algn="ctr">
               <a:spcBef>
                 <a:spcPts val="0"/>
               </a:spcBef>
@@ -3087,19 +2949,15 @@
               <a:defRPr/>
             </a:lvl9pPr>
           </a:lstStyle>
-          <a:p>
-            <a:endParaRPr/>
-          </a:p>
+          <a:p/>
         </p:txBody>
       </p:sp>
       <p:sp>
         <p:nvSpPr>
           <p:cNvPr id="47" name="Google Shape;47;p11"/>
-          <p:cNvSpPr txBox="1">
-            <a:spLocks noGrp="1"/>
-          </p:cNvSpPr>
+          <p:cNvSpPr txBox="1"/>
           <p:nvPr>
-            <p:ph type="sldNum" idx="12"/>
+            <p:ph idx="12" type="sldNum"/>
           </p:nvPr>
         </p:nvSpPr>
         <p:spPr>
@@ -3112,7 +2970,7 @@
           </a:prstGeom>
         </p:spPr>
         <p:txBody>
-          <a:bodyPr spcFirstLastPara="1" wrap="square" lIns="91425" tIns="91425" rIns="91425" bIns="91425" anchor="ctr" anchorCtr="0">
+          <a:bodyPr anchorCtr="0" anchor="ctr" bIns="91425" lIns="91425" spcFirstLastPara="1" rIns="91425" wrap="square" tIns="91425">
             <a:normAutofit/>
           </a:bodyPr>
           <a:lstStyle>
@@ -3154,7 +3012,7 @@
             </a:lvl9pPr>
           </a:lstStyle>
           <a:p>
-            <a:pPr marL="0" lvl="0" indent="0" algn="r" rtl="0">
+            <a:pPr indent="0" lvl="0" marL="0" rtl="0" algn="r">
               <a:spcBef>
                 <a:spcPts val="0"/>
               </a:spcBef>
@@ -3180,11 +3038,11 @@
 </file>
 
 <file path=ppt/slideLayouts/slideLayout11.xml><?xml version="1.0" encoding="utf-8"?>
-<p:sldLayout xmlns:a="http://schemas.openxmlformats.org/drawingml/2006/main" xmlns:r="http://schemas.openxmlformats.org/officeDocument/2006/relationships" xmlns:p="http://schemas.openxmlformats.org/presentationml/2006/main" matchingName="Blank" type="blank">
+<p:sldLayout xmlns:a="http://schemas.openxmlformats.org/drawingml/2006/main" xmlns:r="http://schemas.openxmlformats.org/officeDocument/2006/relationships" xmlns:mc="http://schemas.openxmlformats.org/markup-compatibility/2006" xmlns:mv="urn:schemas-microsoft-com:mac:vml" xmlns:p="http://schemas.openxmlformats.org/presentationml/2006/main" xmlns:c="http://schemas.openxmlformats.org/drawingml/2006/chart" xmlns:dgm="http://schemas.openxmlformats.org/drawingml/2006/diagram" xmlns:o="urn:schemas-microsoft-com:office:office" xmlns:v="urn:schemas-microsoft-com:vml" xmlns:pvml="urn:schemas-microsoft-com:office:powerpoint" xmlns:com="http://schemas.openxmlformats.org/drawingml/2006/compatibility" xmlns:p14="http://schemas.microsoft.com/office/powerpoint/2010/main" xmlns:p15="http://schemas.microsoft.com/office/powerpoint/2012/main" xmlns:ahyp="http://schemas.microsoft.com/office/drawing/2018/hyperlinkcolor" matchingName="Blank" type="blank">
   <p:cSld name="BLANK">
     <p:spTree>
       <p:nvGrpSpPr>
-        <p:cNvPr id="1" name="Shape 48"/>
+        <p:cNvPr id="48" name="Shape 48"/>
         <p:cNvGrpSpPr/>
         <p:nvPr/>
       </p:nvGrpSpPr>
@@ -3199,11 +3057,9 @@
       <p:sp>
         <p:nvSpPr>
           <p:cNvPr id="49" name="Google Shape;49;p12"/>
-          <p:cNvSpPr txBox="1">
-            <a:spLocks noGrp="1"/>
-          </p:cNvSpPr>
+          <p:cNvSpPr txBox="1"/>
           <p:nvPr>
-            <p:ph type="sldNum" idx="12"/>
+            <p:ph idx="12" type="sldNum"/>
           </p:nvPr>
         </p:nvSpPr>
         <p:spPr>
@@ -3216,7 +3072,7 @@
           </a:prstGeom>
         </p:spPr>
         <p:txBody>
-          <a:bodyPr spcFirstLastPara="1" wrap="square" lIns="91425" tIns="91425" rIns="91425" bIns="91425" anchor="ctr" anchorCtr="0">
+          <a:bodyPr anchorCtr="0" anchor="ctr" bIns="91425" lIns="91425" spcFirstLastPara="1" rIns="91425" wrap="square" tIns="91425">
             <a:normAutofit/>
           </a:bodyPr>
           <a:lstStyle>
@@ -3258,7 +3114,7 @@
             </a:lvl9pPr>
           </a:lstStyle>
           <a:p>
-            <a:pPr marL="0" lvl="0" indent="0" algn="r" rtl="0">
+            <a:pPr indent="0" lvl="0" marL="0" rtl="0" algn="r">
               <a:spcBef>
                 <a:spcPts val="0"/>
               </a:spcBef>
@@ -3284,11 +3140,11 @@
 </file>
 
 <file path=ppt/slideLayouts/slideLayout2.xml><?xml version="1.0" encoding="utf-8"?>
-<p:sldLayout xmlns:a="http://schemas.openxmlformats.org/drawingml/2006/main" xmlns:r="http://schemas.openxmlformats.org/officeDocument/2006/relationships" xmlns:p="http://schemas.openxmlformats.org/presentationml/2006/main" matchingName="Section header" type="secHead">
+<p:sldLayout xmlns:a="http://schemas.openxmlformats.org/drawingml/2006/main" xmlns:r="http://schemas.openxmlformats.org/officeDocument/2006/relationships" xmlns:mc="http://schemas.openxmlformats.org/markup-compatibility/2006" xmlns:mv="urn:schemas-microsoft-com:mac:vml" xmlns:p="http://schemas.openxmlformats.org/presentationml/2006/main" xmlns:c="http://schemas.openxmlformats.org/drawingml/2006/chart" xmlns:dgm="http://schemas.openxmlformats.org/drawingml/2006/diagram" xmlns:o="urn:schemas-microsoft-com:office:office" xmlns:v="urn:schemas-microsoft-com:vml" xmlns:pvml="urn:schemas-microsoft-com:office:powerpoint" xmlns:com="http://schemas.openxmlformats.org/drawingml/2006/compatibility" xmlns:p14="http://schemas.microsoft.com/office/powerpoint/2010/main" xmlns:p15="http://schemas.microsoft.com/office/powerpoint/2012/main" xmlns:ahyp="http://schemas.microsoft.com/office/drawing/2018/hyperlinkcolor" matchingName="Section header" type="secHead">
   <p:cSld name="SECTION_HEADER">
     <p:spTree>
       <p:nvGrpSpPr>
-        <p:cNvPr id="1" name="Shape 13"/>
+        <p:cNvPr id="13" name="Shape 13"/>
         <p:cNvGrpSpPr/>
         <p:nvPr/>
       </p:nvGrpSpPr>
@@ -3303,9 +3159,7 @@
       <p:sp>
         <p:nvSpPr>
           <p:cNvPr id="14" name="Google Shape;14;p3"/>
-          <p:cNvSpPr txBox="1">
-            <a:spLocks noGrp="1"/>
-          </p:cNvSpPr>
+          <p:cNvSpPr txBox="1"/>
           <p:nvPr>
             <p:ph type="title"/>
           </p:nvPr>
@@ -3320,7 +3174,7 @@
           </a:prstGeom>
         </p:spPr>
         <p:txBody>
-          <a:bodyPr spcFirstLastPara="1" wrap="square" lIns="91425" tIns="91425" rIns="91425" bIns="91425" anchor="ctr" anchorCtr="0">
+          <a:bodyPr anchorCtr="0" anchor="ctr" bIns="91425" lIns="91425" spcFirstLastPara="1" rIns="91425" wrap="square" tIns="91425">
             <a:normAutofit/>
           </a:bodyPr>
           <a:lstStyle>
@@ -3424,19 +3278,15 @@
               <a:defRPr sz="3600"/>
             </a:lvl9pPr>
           </a:lstStyle>
-          <a:p>
-            <a:endParaRPr/>
-          </a:p>
+          <a:p/>
         </p:txBody>
       </p:sp>
       <p:sp>
         <p:nvSpPr>
           <p:cNvPr id="15" name="Google Shape;15;p3"/>
-          <p:cNvSpPr txBox="1">
-            <a:spLocks noGrp="1"/>
-          </p:cNvSpPr>
+          <p:cNvSpPr txBox="1"/>
           <p:nvPr>
-            <p:ph type="sldNum" idx="12"/>
+            <p:ph idx="12" type="sldNum"/>
           </p:nvPr>
         </p:nvSpPr>
         <p:spPr>
@@ -3449,7 +3299,7 @@
           </a:prstGeom>
         </p:spPr>
         <p:txBody>
-          <a:bodyPr spcFirstLastPara="1" wrap="square" lIns="91425" tIns="91425" rIns="91425" bIns="91425" anchor="ctr" anchorCtr="0">
+          <a:bodyPr anchorCtr="0" anchor="ctr" bIns="91425" lIns="91425" spcFirstLastPara="1" rIns="91425" wrap="square" tIns="91425">
             <a:normAutofit/>
           </a:bodyPr>
           <a:lstStyle>
@@ -3491,7 +3341,7 @@
             </a:lvl9pPr>
           </a:lstStyle>
           <a:p>
-            <a:pPr marL="0" lvl="0" indent="0" algn="r" rtl="0">
+            <a:pPr indent="0" lvl="0" marL="0" rtl="0" algn="r">
               <a:spcBef>
                 <a:spcPts val="0"/>
               </a:spcBef>
@@ -3517,11 +3367,11 @@
 </file>
 
 <file path=ppt/slideLayouts/slideLayout3.xml><?xml version="1.0" encoding="utf-8"?>
-<p:sldLayout xmlns:a="http://schemas.openxmlformats.org/drawingml/2006/main" xmlns:r="http://schemas.openxmlformats.org/officeDocument/2006/relationships" xmlns:p="http://schemas.openxmlformats.org/presentationml/2006/main" matchingName="Title and body" type="tx">
+<p:sldLayout xmlns:a="http://schemas.openxmlformats.org/drawingml/2006/main" xmlns:r="http://schemas.openxmlformats.org/officeDocument/2006/relationships" xmlns:mc="http://schemas.openxmlformats.org/markup-compatibility/2006" xmlns:mv="urn:schemas-microsoft-com:mac:vml" xmlns:p="http://schemas.openxmlformats.org/presentationml/2006/main" xmlns:c="http://schemas.openxmlformats.org/drawingml/2006/chart" xmlns:dgm="http://schemas.openxmlformats.org/drawingml/2006/diagram" xmlns:o="urn:schemas-microsoft-com:office:office" xmlns:v="urn:schemas-microsoft-com:vml" xmlns:pvml="urn:schemas-microsoft-com:office:powerpoint" xmlns:com="http://schemas.openxmlformats.org/drawingml/2006/compatibility" xmlns:p14="http://schemas.microsoft.com/office/powerpoint/2010/main" xmlns:p15="http://schemas.microsoft.com/office/powerpoint/2012/main" xmlns:ahyp="http://schemas.microsoft.com/office/drawing/2018/hyperlinkcolor" matchingName="Title and body" type="tx">
   <p:cSld name="TITLE_AND_BODY">
     <p:spTree>
       <p:nvGrpSpPr>
-        <p:cNvPr id="1" name="Shape 16"/>
+        <p:cNvPr id="16" name="Shape 16"/>
         <p:cNvGrpSpPr/>
         <p:nvPr/>
       </p:nvGrpSpPr>
@@ -3536,9 +3386,7 @@
       <p:sp>
         <p:nvSpPr>
           <p:cNvPr id="17" name="Google Shape;17;p4"/>
-          <p:cNvSpPr txBox="1">
-            <a:spLocks noGrp="1"/>
-          </p:cNvSpPr>
+          <p:cNvSpPr txBox="1"/>
           <p:nvPr>
             <p:ph type="title"/>
           </p:nvPr>
@@ -3553,7 +3401,7 @@
           </a:prstGeom>
         </p:spPr>
         <p:txBody>
-          <a:bodyPr spcFirstLastPara="1" wrap="square" lIns="91425" tIns="91425" rIns="91425" bIns="91425" anchor="t" anchorCtr="0">
+          <a:bodyPr anchorCtr="0" anchor="t" bIns="91425" lIns="91425" spcFirstLastPara="1" rIns="91425" wrap="square" tIns="91425">
             <a:normAutofit/>
           </a:bodyPr>
           <a:lstStyle>
@@ -3657,19 +3505,15 @@
               <a:defRPr/>
             </a:lvl9pPr>
           </a:lstStyle>
-          <a:p>
-            <a:endParaRPr/>
-          </a:p>
+          <a:p/>
         </p:txBody>
       </p:sp>
       <p:sp>
         <p:nvSpPr>
           <p:cNvPr id="18" name="Google Shape;18;p4"/>
-          <p:cNvSpPr txBox="1">
-            <a:spLocks noGrp="1"/>
-          </p:cNvSpPr>
+          <p:cNvSpPr txBox="1"/>
           <p:nvPr>
-            <p:ph type="body" idx="1"/>
+            <p:ph idx="1" type="body"/>
           </p:nvPr>
         </p:nvSpPr>
         <p:spPr>
@@ -3682,11 +3526,11 @@
           </a:prstGeom>
         </p:spPr>
         <p:txBody>
-          <a:bodyPr spcFirstLastPara="1" wrap="square" lIns="91425" tIns="91425" rIns="91425" bIns="91425" anchor="t" anchorCtr="0">
+          <a:bodyPr anchorCtr="0" anchor="t" bIns="91425" lIns="91425" spcFirstLastPara="1" rIns="91425" wrap="square" tIns="91425">
             <a:normAutofit/>
           </a:bodyPr>
           <a:lstStyle>
-            <a:lvl1pPr marL="457200" lvl="0" indent="-342900">
+            <a:lvl1pPr indent="-342900" lvl="0" marL="457200">
               <a:spcBef>
                 <a:spcPts val="0"/>
               </a:spcBef>
@@ -3697,7 +3541,7 @@
               <a:buChar char="●"/>
               <a:defRPr/>
             </a:lvl1pPr>
-            <a:lvl2pPr marL="914400" lvl="1" indent="-317500">
+            <a:lvl2pPr indent="-317500" lvl="1" marL="914400">
               <a:spcBef>
                 <a:spcPts val="0"/>
               </a:spcBef>
@@ -3708,7 +3552,7 @@
               <a:buChar char="○"/>
               <a:defRPr/>
             </a:lvl2pPr>
-            <a:lvl3pPr marL="1371600" lvl="2" indent="-317500">
+            <a:lvl3pPr indent="-317500" lvl="2" marL="1371600">
               <a:spcBef>
                 <a:spcPts val="0"/>
               </a:spcBef>
@@ -3719,7 +3563,7 @@
               <a:buChar char="■"/>
               <a:defRPr/>
             </a:lvl3pPr>
-            <a:lvl4pPr marL="1828800" lvl="3" indent="-317500">
+            <a:lvl4pPr indent="-317500" lvl="3" marL="1828800">
               <a:spcBef>
                 <a:spcPts val="0"/>
               </a:spcBef>
@@ -3730,7 +3574,7 @@
               <a:buChar char="●"/>
               <a:defRPr/>
             </a:lvl4pPr>
-            <a:lvl5pPr marL="2286000" lvl="4" indent="-317500">
+            <a:lvl5pPr indent="-317500" lvl="4" marL="2286000">
               <a:spcBef>
                 <a:spcPts val="0"/>
               </a:spcBef>
@@ -3741,7 +3585,7 @@
               <a:buChar char="○"/>
               <a:defRPr/>
             </a:lvl5pPr>
-            <a:lvl6pPr marL="2743200" lvl="5" indent="-317500">
+            <a:lvl6pPr indent="-317500" lvl="5" marL="2743200">
               <a:spcBef>
                 <a:spcPts val="0"/>
               </a:spcBef>
@@ -3752,7 +3596,7 @@
               <a:buChar char="■"/>
               <a:defRPr/>
             </a:lvl6pPr>
-            <a:lvl7pPr marL="3200400" lvl="6" indent="-317500">
+            <a:lvl7pPr indent="-317500" lvl="6" marL="3200400">
               <a:spcBef>
                 <a:spcPts val="0"/>
               </a:spcBef>
@@ -3763,7 +3607,7 @@
               <a:buChar char="●"/>
               <a:defRPr/>
             </a:lvl7pPr>
-            <a:lvl8pPr marL="3657600" lvl="7" indent="-317500">
+            <a:lvl8pPr indent="-317500" lvl="7" marL="3657600">
               <a:spcBef>
                 <a:spcPts val="0"/>
               </a:spcBef>
@@ -3774,7 +3618,7 @@
               <a:buChar char="○"/>
               <a:defRPr/>
             </a:lvl8pPr>
-            <a:lvl9pPr marL="4114800" lvl="8" indent="-317500">
+            <a:lvl9pPr indent="-317500" lvl="8" marL="4114800">
               <a:spcBef>
                 <a:spcPts val="0"/>
               </a:spcBef>
@@ -3786,19 +3630,15 @@
               <a:defRPr/>
             </a:lvl9pPr>
           </a:lstStyle>
-          <a:p>
-            <a:endParaRPr/>
-          </a:p>
+          <a:p/>
         </p:txBody>
       </p:sp>
       <p:sp>
         <p:nvSpPr>
           <p:cNvPr id="19" name="Google Shape;19;p4"/>
-          <p:cNvSpPr txBox="1">
-            <a:spLocks noGrp="1"/>
-          </p:cNvSpPr>
+          <p:cNvSpPr txBox="1"/>
           <p:nvPr>
-            <p:ph type="sldNum" idx="12"/>
+            <p:ph idx="12" type="sldNum"/>
           </p:nvPr>
         </p:nvSpPr>
         <p:spPr>
@@ -3811,7 +3651,7 @@
           </a:prstGeom>
         </p:spPr>
         <p:txBody>
-          <a:bodyPr spcFirstLastPara="1" wrap="square" lIns="91425" tIns="91425" rIns="91425" bIns="91425" anchor="ctr" anchorCtr="0">
+          <a:bodyPr anchorCtr="0" anchor="ctr" bIns="91425" lIns="91425" spcFirstLastPara="1" rIns="91425" wrap="square" tIns="91425">
             <a:normAutofit/>
           </a:bodyPr>
           <a:lstStyle>
@@ -3853,7 +3693,7 @@
             </a:lvl9pPr>
           </a:lstStyle>
           <a:p>
-            <a:pPr marL="0" lvl="0" indent="0" algn="r" rtl="0">
+            <a:pPr indent="0" lvl="0" marL="0" rtl="0" algn="r">
               <a:spcBef>
                 <a:spcPts val="0"/>
               </a:spcBef>
@@ -3879,11 +3719,11 @@
 </file>
 
 <file path=ppt/slideLayouts/slideLayout4.xml><?xml version="1.0" encoding="utf-8"?>
-<p:sldLayout xmlns:a="http://schemas.openxmlformats.org/drawingml/2006/main" xmlns:r="http://schemas.openxmlformats.org/officeDocument/2006/relationships" xmlns:p="http://schemas.openxmlformats.org/presentationml/2006/main" matchingName="Title and two columns" type="twoColTx">
+<p:sldLayout xmlns:a="http://schemas.openxmlformats.org/drawingml/2006/main" xmlns:r="http://schemas.openxmlformats.org/officeDocument/2006/relationships" xmlns:mc="http://schemas.openxmlformats.org/markup-compatibility/2006" xmlns:mv="urn:schemas-microsoft-com:mac:vml" xmlns:p="http://schemas.openxmlformats.org/presentationml/2006/main" xmlns:c="http://schemas.openxmlformats.org/drawingml/2006/chart" xmlns:dgm="http://schemas.openxmlformats.org/drawingml/2006/diagram" xmlns:o="urn:schemas-microsoft-com:office:office" xmlns:v="urn:schemas-microsoft-com:vml" xmlns:pvml="urn:schemas-microsoft-com:office:powerpoint" xmlns:com="http://schemas.openxmlformats.org/drawingml/2006/compatibility" xmlns:p14="http://schemas.microsoft.com/office/powerpoint/2010/main" xmlns:p15="http://schemas.microsoft.com/office/powerpoint/2012/main" xmlns:ahyp="http://schemas.microsoft.com/office/drawing/2018/hyperlinkcolor" matchingName="Title and two columns" type="twoColTx">
   <p:cSld name="TITLE_AND_TWO_COLUMNS">
     <p:spTree>
       <p:nvGrpSpPr>
-        <p:cNvPr id="1" name="Shape 20"/>
+        <p:cNvPr id="20" name="Shape 20"/>
         <p:cNvGrpSpPr/>
         <p:nvPr/>
       </p:nvGrpSpPr>
@@ -3898,9 +3738,7 @@
       <p:sp>
         <p:nvSpPr>
           <p:cNvPr id="21" name="Google Shape;21;p5"/>
-          <p:cNvSpPr txBox="1">
-            <a:spLocks noGrp="1"/>
-          </p:cNvSpPr>
+          <p:cNvSpPr txBox="1"/>
           <p:nvPr>
             <p:ph type="title"/>
           </p:nvPr>
@@ -3915,7 +3753,7 @@
           </a:prstGeom>
         </p:spPr>
         <p:txBody>
-          <a:bodyPr spcFirstLastPara="1" wrap="square" lIns="91425" tIns="91425" rIns="91425" bIns="91425" anchor="t" anchorCtr="0">
+          <a:bodyPr anchorCtr="0" anchor="t" bIns="91425" lIns="91425" spcFirstLastPara="1" rIns="91425" wrap="square" tIns="91425">
             <a:normAutofit/>
           </a:bodyPr>
           <a:lstStyle>
@@ -4019,19 +3857,15 @@
               <a:defRPr/>
             </a:lvl9pPr>
           </a:lstStyle>
-          <a:p>
-            <a:endParaRPr/>
-          </a:p>
+          <a:p/>
         </p:txBody>
       </p:sp>
       <p:sp>
         <p:nvSpPr>
           <p:cNvPr id="22" name="Google Shape;22;p5"/>
-          <p:cNvSpPr txBox="1">
-            <a:spLocks noGrp="1"/>
-          </p:cNvSpPr>
+          <p:cNvSpPr txBox="1"/>
           <p:nvPr>
-            <p:ph type="body" idx="1"/>
+            <p:ph idx="1" type="body"/>
           </p:nvPr>
         </p:nvSpPr>
         <p:spPr>
@@ -4044,11 +3878,11 @@
           </a:prstGeom>
         </p:spPr>
         <p:txBody>
-          <a:bodyPr spcFirstLastPara="1" wrap="square" lIns="91425" tIns="91425" rIns="91425" bIns="91425" anchor="t" anchorCtr="0">
+          <a:bodyPr anchorCtr="0" anchor="t" bIns="91425" lIns="91425" spcFirstLastPara="1" rIns="91425" wrap="square" tIns="91425">
             <a:normAutofit/>
           </a:bodyPr>
           <a:lstStyle>
-            <a:lvl1pPr marL="457200" lvl="0" indent="-317500">
+            <a:lvl1pPr indent="-317500" lvl="0" marL="457200">
               <a:spcBef>
                 <a:spcPts val="0"/>
               </a:spcBef>
@@ -4059,7 +3893,7 @@
               <a:buChar char="●"/>
               <a:defRPr sz="1400"/>
             </a:lvl1pPr>
-            <a:lvl2pPr marL="914400" lvl="1" indent="-304800">
+            <a:lvl2pPr indent="-304800" lvl="1" marL="914400">
               <a:spcBef>
                 <a:spcPts val="0"/>
               </a:spcBef>
@@ -4070,7 +3904,7 @@
               <a:buChar char="○"/>
               <a:defRPr sz="1200"/>
             </a:lvl2pPr>
-            <a:lvl3pPr marL="1371600" lvl="2" indent="-304800">
+            <a:lvl3pPr indent="-304800" lvl="2" marL="1371600">
               <a:spcBef>
                 <a:spcPts val="0"/>
               </a:spcBef>
@@ -4081,7 +3915,7 @@
               <a:buChar char="■"/>
               <a:defRPr sz="1200"/>
             </a:lvl3pPr>
-            <a:lvl4pPr marL="1828800" lvl="3" indent="-304800">
+            <a:lvl4pPr indent="-304800" lvl="3" marL="1828800">
               <a:spcBef>
                 <a:spcPts val="0"/>
               </a:spcBef>
@@ -4092,7 +3926,7 @@
               <a:buChar char="●"/>
               <a:defRPr sz="1200"/>
             </a:lvl4pPr>
-            <a:lvl5pPr marL="2286000" lvl="4" indent="-304800">
+            <a:lvl5pPr indent="-304800" lvl="4" marL="2286000">
               <a:spcBef>
                 <a:spcPts val="0"/>
               </a:spcBef>
@@ -4103,7 +3937,7 @@
               <a:buChar char="○"/>
               <a:defRPr sz="1200"/>
             </a:lvl5pPr>
-            <a:lvl6pPr marL="2743200" lvl="5" indent="-304800">
+            <a:lvl6pPr indent="-304800" lvl="5" marL="2743200">
               <a:spcBef>
                 <a:spcPts val="0"/>
               </a:spcBef>
@@ -4114,7 +3948,7 @@
               <a:buChar char="■"/>
               <a:defRPr sz="1200"/>
             </a:lvl6pPr>
-            <a:lvl7pPr marL="3200400" lvl="6" indent="-304800">
+            <a:lvl7pPr indent="-304800" lvl="6" marL="3200400">
               <a:spcBef>
                 <a:spcPts val="0"/>
               </a:spcBef>
@@ -4125,7 +3959,7 @@
               <a:buChar char="●"/>
               <a:defRPr sz="1200"/>
             </a:lvl7pPr>
-            <a:lvl8pPr marL="3657600" lvl="7" indent="-304800">
+            <a:lvl8pPr indent="-304800" lvl="7" marL="3657600">
               <a:spcBef>
                 <a:spcPts val="0"/>
               </a:spcBef>
@@ -4136,7 +3970,7 @@
               <a:buChar char="○"/>
               <a:defRPr sz="1200"/>
             </a:lvl8pPr>
-            <a:lvl9pPr marL="4114800" lvl="8" indent="-304800">
+            <a:lvl9pPr indent="-304800" lvl="8" marL="4114800">
               <a:spcBef>
                 <a:spcPts val="0"/>
               </a:spcBef>
@@ -4148,19 +3982,15 @@
               <a:defRPr sz="1200"/>
             </a:lvl9pPr>
           </a:lstStyle>
-          <a:p>
-            <a:endParaRPr/>
-          </a:p>
+          <a:p/>
         </p:txBody>
       </p:sp>
       <p:sp>
         <p:nvSpPr>
           <p:cNvPr id="23" name="Google Shape;23;p5"/>
-          <p:cNvSpPr txBox="1">
-            <a:spLocks noGrp="1"/>
-          </p:cNvSpPr>
+          <p:cNvSpPr txBox="1"/>
           <p:nvPr>
-            <p:ph type="body" idx="2"/>
+            <p:ph idx="2" type="body"/>
           </p:nvPr>
         </p:nvSpPr>
         <p:spPr>
@@ -4173,11 +4003,11 @@
           </a:prstGeom>
         </p:spPr>
         <p:txBody>
-          <a:bodyPr spcFirstLastPara="1" wrap="square" lIns="91425" tIns="91425" rIns="91425" bIns="91425" anchor="t" anchorCtr="0">
+          <a:bodyPr anchorCtr="0" anchor="t" bIns="91425" lIns="91425" spcFirstLastPara="1" rIns="91425" wrap="square" tIns="91425">
             <a:normAutofit/>
           </a:bodyPr>
           <a:lstStyle>
-            <a:lvl1pPr marL="457200" lvl="0" indent="-317500">
+            <a:lvl1pPr indent="-317500" lvl="0" marL="457200">
               <a:spcBef>
                 <a:spcPts val="0"/>
               </a:spcBef>
@@ -4188,7 +4018,7 @@
               <a:buChar char="●"/>
               <a:defRPr sz="1400"/>
             </a:lvl1pPr>
-            <a:lvl2pPr marL="914400" lvl="1" indent="-304800">
+            <a:lvl2pPr indent="-304800" lvl="1" marL="914400">
               <a:spcBef>
                 <a:spcPts val="0"/>
               </a:spcBef>
@@ -4199,7 +4029,7 @@
               <a:buChar char="○"/>
               <a:defRPr sz="1200"/>
             </a:lvl2pPr>
-            <a:lvl3pPr marL="1371600" lvl="2" indent="-304800">
+            <a:lvl3pPr indent="-304800" lvl="2" marL="1371600">
               <a:spcBef>
                 <a:spcPts val="0"/>
               </a:spcBef>
@@ -4210,7 +4040,7 @@
               <a:buChar char="■"/>
               <a:defRPr sz="1200"/>
             </a:lvl3pPr>
-            <a:lvl4pPr marL="1828800" lvl="3" indent="-304800">
+            <a:lvl4pPr indent="-304800" lvl="3" marL="1828800">
               <a:spcBef>
                 <a:spcPts val="0"/>
               </a:spcBef>
@@ -4221,7 +4051,7 @@
               <a:buChar char="●"/>
               <a:defRPr sz="1200"/>
             </a:lvl4pPr>
-            <a:lvl5pPr marL="2286000" lvl="4" indent="-304800">
+            <a:lvl5pPr indent="-304800" lvl="4" marL="2286000">
               <a:spcBef>
                 <a:spcPts val="0"/>
               </a:spcBef>
@@ -4232,7 +4062,7 @@
               <a:buChar char="○"/>
               <a:defRPr sz="1200"/>
             </a:lvl5pPr>
-            <a:lvl6pPr marL="2743200" lvl="5" indent="-304800">
+            <a:lvl6pPr indent="-304800" lvl="5" marL="2743200">
               <a:spcBef>
                 <a:spcPts val="0"/>
               </a:spcBef>
@@ -4243,7 +4073,7 @@
               <a:buChar char="■"/>
               <a:defRPr sz="1200"/>
             </a:lvl6pPr>
-            <a:lvl7pPr marL="3200400" lvl="6" indent="-304800">
+            <a:lvl7pPr indent="-304800" lvl="6" marL="3200400">
               <a:spcBef>
                 <a:spcPts val="0"/>
               </a:spcBef>
@@ -4254,7 +4084,7 @@
               <a:buChar char="●"/>
               <a:defRPr sz="1200"/>
             </a:lvl7pPr>
-            <a:lvl8pPr marL="3657600" lvl="7" indent="-304800">
+            <a:lvl8pPr indent="-304800" lvl="7" marL="3657600">
               <a:spcBef>
                 <a:spcPts val="0"/>
               </a:spcBef>
@@ -4265,7 +4095,7 @@
               <a:buChar char="○"/>
               <a:defRPr sz="1200"/>
             </a:lvl8pPr>
-            <a:lvl9pPr marL="4114800" lvl="8" indent="-304800">
+            <a:lvl9pPr indent="-304800" lvl="8" marL="4114800">
               <a:spcBef>
                 <a:spcPts val="0"/>
               </a:spcBef>
@@ -4277,19 +4107,15 @@
               <a:defRPr sz="1200"/>
             </a:lvl9pPr>
           </a:lstStyle>
-          <a:p>
-            <a:endParaRPr/>
-          </a:p>
+          <a:p/>
         </p:txBody>
       </p:sp>
       <p:sp>
         <p:nvSpPr>
           <p:cNvPr id="24" name="Google Shape;24;p5"/>
-          <p:cNvSpPr txBox="1">
-            <a:spLocks noGrp="1"/>
-          </p:cNvSpPr>
+          <p:cNvSpPr txBox="1"/>
           <p:nvPr>
-            <p:ph type="sldNum" idx="12"/>
+            <p:ph idx="12" type="sldNum"/>
           </p:nvPr>
         </p:nvSpPr>
         <p:spPr>
@@ -4302,7 +4128,7 @@
           </a:prstGeom>
         </p:spPr>
         <p:txBody>
-          <a:bodyPr spcFirstLastPara="1" wrap="square" lIns="91425" tIns="91425" rIns="91425" bIns="91425" anchor="ctr" anchorCtr="0">
+          <a:bodyPr anchorCtr="0" anchor="ctr" bIns="91425" lIns="91425" spcFirstLastPara="1" rIns="91425" wrap="square" tIns="91425">
             <a:normAutofit/>
           </a:bodyPr>
           <a:lstStyle>
@@ -4344,7 +4170,7 @@
             </a:lvl9pPr>
           </a:lstStyle>
           <a:p>
-            <a:pPr marL="0" lvl="0" indent="0" algn="r" rtl="0">
+            <a:pPr indent="0" lvl="0" marL="0" rtl="0" algn="r">
               <a:spcBef>
                 <a:spcPts val="0"/>
               </a:spcBef>
@@ -4370,11 +4196,11 @@
 </file>
 
 <file path=ppt/slideLayouts/slideLayout5.xml><?xml version="1.0" encoding="utf-8"?>
-<p:sldLayout xmlns:a="http://schemas.openxmlformats.org/drawingml/2006/main" xmlns:r="http://schemas.openxmlformats.org/officeDocument/2006/relationships" xmlns:p="http://schemas.openxmlformats.org/presentationml/2006/main" matchingName="Title only" type="titleOnly">
+<p:sldLayout xmlns:a="http://schemas.openxmlformats.org/drawingml/2006/main" xmlns:r="http://schemas.openxmlformats.org/officeDocument/2006/relationships" xmlns:mc="http://schemas.openxmlformats.org/markup-compatibility/2006" xmlns:mv="urn:schemas-microsoft-com:mac:vml" xmlns:p="http://schemas.openxmlformats.org/presentationml/2006/main" xmlns:c="http://schemas.openxmlformats.org/drawingml/2006/chart" xmlns:dgm="http://schemas.openxmlformats.org/drawingml/2006/diagram" xmlns:o="urn:schemas-microsoft-com:office:office" xmlns:v="urn:schemas-microsoft-com:vml" xmlns:pvml="urn:schemas-microsoft-com:office:powerpoint" xmlns:com="http://schemas.openxmlformats.org/drawingml/2006/compatibility" xmlns:p14="http://schemas.microsoft.com/office/powerpoint/2010/main" xmlns:p15="http://schemas.microsoft.com/office/powerpoint/2012/main" xmlns:ahyp="http://schemas.microsoft.com/office/drawing/2018/hyperlinkcolor" matchingName="Title only" type="titleOnly">
   <p:cSld name="TITLE_ONLY">
     <p:spTree>
       <p:nvGrpSpPr>
-        <p:cNvPr id="1" name="Shape 25"/>
+        <p:cNvPr id="25" name="Shape 25"/>
         <p:cNvGrpSpPr/>
         <p:nvPr/>
       </p:nvGrpSpPr>
@@ -4389,9 +4215,7 @@
       <p:sp>
         <p:nvSpPr>
           <p:cNvPr id="26" name="Google Shape;26;p6"/>
-          <p:cNvSpPr txBox="1">
-            <a:spLocks noGrp="1"/>
-          </p:cNvSpPr>
+          <p:cNvSpPr txBox="1"/>
           <p:nvPr>
             <p:ph type="title"/>
           </p:nvPr>
@@ -4406,7 +4230,7 @@
           </a:prstGeom>
         </p:spPr>
         <p:txBody>
-          <a:bodyPr spcFirstLastPara="1" wrap="square" lIns="91425" tIns="91425" rIns="91425" bIns="91425" anchor="t" anchorCtr="0">
+          <a:bodyPr anchorCtr="0" anchor="t" bIns="91425" lIns="91425" spcFirstLastPara="1" rIns="91425" wrap="square" tIns="91425">
             <a:normAutofit/>
           </a:bodyPr>
           <a:lstStyle>
@@ -4510,19 +4334,15 @@
               <a:defRPr/>
             </a:lvl9pPr>
           </a:lstStyle>
-          <a:p>
-            <a:endParaRPr/>
-          </a:p>
+          <a:p/>
         </p:txBody>
       </p:sp>
       <p:sp>
         <p:nvSpPr>
           <p:cNvPr id="27" name="Google Shape;27;p6"/>
-          <p:cNvSpPr txBox="1">
-            <a:spLocks noGrp="1"/>
-          </p:cNvSpPr>
+          <p:cNvSpPr txBox="1"/>
           <p:nvPr>
-            <p:ph type="sldNum" idx="12"/>
+            <p:ph idx="12" type="sldNum"/>
           </p:nvPr>
         </p:nvSpPr>
         <p:spPr>
@@ -4535,7 +4355,7 @@
           </a:prstGeom>
         </p:spPr>
         <p:txBody>
-          <a:bodyPr spcFirstLastPara="1" wrap="square" lIns="91425" tIns="91425" rIns="91425" bIns="91425" anchor="ctr" anchorCtr="0">
+          <a:bodyPr anchorCtr="0" anchor="ctr" bIns="91425" lIns="91425" spcFirstLastPara="1" rIns="91425" wrap="square" tIns="91425">
             <a:normAutofit/>
           </a:bodyPr>
           <a:lstStyle>
@@ -4577,7 +4397,7 @@
             </a:lvl9pPr>
           </a:lstStyle>
           <a:p>
-            <a:pPr marL="0" lvl="0" indent="0" algn="r" rtl="0">
+            <a:pPr indent="0" lvl="0" marL="0" rtl="0" algn="r">
               <a:spcBef>
                 <a:spcPts val="0"/>
               </a:spcBef>
@@ -4603,11 +4423,11 @@
 </file>
 
 <file path=ppt/slideLayouts/slideLayout6.xml><?xml version="1.0" encoding="utf-8"?>
-<p:sldLayout xmlns:a="http://schemas.openxmlformats.org/drawingml/2006/main" xmlns:r="http://schemas.openxmlformats.org/officeDocument/2006/relationships" xmlns:p="http://schemas.openxmlformats.org/presentationml/2006/main" matchingName="One column text">
+<p:sldLayout xmlns:a="http://schemas.openxmlformats.org/drawingml/2006/main" xmlns:r="http://schemas.openxmlformats.org/officeDocument/2006/relationships" xmlns:mc="http://schemas.openxmlformats.org/markup-compatibility/2006" xmlns:mv="urn:schemas-microsoft-com:mac:vml" xmlns:p="http://schemas.openxmlformats.org/presentationml/2006/main" xmlns:c="http://schemas.openxmlformats.org/drawingml/2006/chart" xmlns:dgm="http://schemas.openxmlformats.org/drawingml/2006/diagram" xmlns:o="urn:schemas-microsoft-com:office:office" xmlns:v="urn:schemas-microsoft-com:vml" xmlns:pvml="urn:schemas-microsoft-com:office:powerpoint" xmlns:com="http://schemas.openxmlformats.org/drawingml/2006/compatibility" xmlns:p14="http://schemas.microsoft.com/office/powerpoint/2010/main" xmlns:p15="http://schemas.microsoft.com/office/powerpoint/2012/main" xmlns:ahyp="http://schemas.microsoft.com/office/drawing/2018/hyperlinkcolor" matchingName="One column text">
   <p:cSld name="ONE_COLUMN_TEXT">
     <p:spTree>
       <p:nvGrpSpPr>
-        <p:cNvPr id="1" name="Shape 28"/>
+        <p:cNvPr id="28" name="Shape 28"/>
         <p:cNvGrpSpPr/>
         <p:nvPr/>
       </p:nvGrpSpPr>
@@ -4622,9 +4442,7 @@
       <p:sp>
         <p:nvSpPr>
           <p:cNvPr id="29" name="Google Shape;29;p7"/>
-          <p:cNvSpPr txBox="1">
-            <a:spLocks noGrp="1"/>
-          </p:cNvSpPr>
+          <p:cNvSpPr txBox="1"/>
           <p:nvPr>
             <p:ph type="title"/>
           </p:nvPr>
@@ -4639,7 +4457,7 @@
           </a:prstGeom>
         </p:spPr>
         <p:txBody>
-          <a:bodyPr spcFirstLastPara="1" wrap="square" lIns="91425" tIns="91425" rIns="91425" bIns="91425" anchor="b" anchorCtr="0">
+          <a:bodyPr anchorCtr="0" anchor="b" bIns="91425" lIns="91425" spcFirstLastPara="1" rIns="91425" wrap="square" tIns="91425">
             <a:normAutofit/>
           </a:bodyPr>
           <a:lstStyle>
@@ -4743,19 +4561,15 @@
               <a:defRPr sz="2400"/>
             </a:lvl9pPr>
           </a:lstStyle>
-          <a:p>
-            <a:endParaRPr/>
-          </a:p>
+          <a:p/>
         </p:txBody>
       </p:sp>
       <p:sp>
         <p:nvSpPr>
           <p:cNvPr id="30" name="Google Shape;30;p7"/>
-          <p:cNvSpPr txBox="1">
-            <a:spLocks noGrp="1"/>
-          </p:cNvSpPr>
+          <p:cNvSpPr txBox="1"/>
           <p:nvPr>
-            <p:ph type="body" idx="1"/>
+            <p:ph idx="1" type="body"/>
           </p:nvPr>
         </p:nvSpPr>
         <p:spPr>
@@ -4768,11 +4582,11 @@
           </a:prstGeom>
         </p:spPr>
         <p:txBody>
-          <a:bodyPr spcFirstLastPara="1" wrap="square" lIns="91425" tIns="91425" rIns="91425" bIns="91425" anchor="t" anchorCtr="0">
+          <a:bodyPr anchorCtr="0" anchor="t" bIns="91425" lIns="91425" spcFirstLastPara="1" rIns="91425" wrap="square" tIns="91425">
             <a:normAutofit/>
           </a:bodyPr>
           <a:lstStyle>
-            <a:lvl1pPr marL="457200" lvl="0" indent="-304800">
+            <a:lvl1pPr indent="-304800" lvl="0" marL="457200">
               <a:spcBef>
                 <a:spcPts val="0"/>
               </a:spcBef>
@@ -4783,7 +4597,7 @@
               <a:buChar char="●"/>
               <a:defRPr sz="1200"/>
             </a:lvl1pPr>
-            <a:lvl2pPr marL="914400" lvl="1" indent="-304800">
+            <a:lvl2pPr indent="-304800" lvl="1" marL="914400">
               <a:spcBef>
                 <a:spcPts val="0"/>
               </a:spcBef>
@@ -4794,7 +4608,7 @@
               <a:buChar char="○"/>
               <a:defRPr sz="1200"/>
             </a:lvl2pPr>
-            <a:lvl3pPr marL="1371600" lvl="2" indent="-304800">
+            <a:lvl3pPr indent="-304800" lvl="2" marL="1371600">
               <a:spcBef>
                 <a:spcPts val="0"/>
               </a:spcBef>
@@ -4805,7 +4619,7 @@
               <a:buChar char="■"/>
               <a:defRPr sz="1200"/>
             </a:lvl3pPr>
-            <a:lvl4pPr marL="1828800" lvl="3" indent="-304800">
+            <a:lvl4pPr indent="-304800" lvl="3" marL="1828800">
               <a:spcBef>
                 <a:spcPts val="0"/>
               </a:spcBef>
@@ -4816,7 +4630,7 @@
               <a:buChar char="●"/>
               <a:defRPr sz="1200"/>
             </a:lvl4pPr>
-            <a:lvl5pPr marL="2286000" lvl="4" indent="-304800">
+            <a:lvl5pPr indent="-304800" lvl="4" marL="2286000">
               <a:spcBef>
                 <a:spcPts val="0"/>
               </a:spcBef>
@@ -4827,7 +4641,7 @@
               <a:buChar char="○"/>
               <a:defRPr sz="1200"/>
             </a:lvl5pPr>
-            <a:lvl6pPr marL="2743200" lvl="5" indent="-304800">
+            <a:lvl6pPr indent="-304800" lvl="5" marL="2743200">
               <a:spcBef>
                 <a:spcPts val="0"/>
               </a:spcBef>
@@ -4838,7 +4652,7 @@
               <a:buChar char="■"/>
               <a:defRPr sz="1200"/>
             </a:lvl6pPr>
-            <a:lvl7pPr marL="3200400" lvl="6" indent="-304800">
+            <a:lvl7pPr indent="-304800" lvl="6" marL="3200400">
               <a:spcBef>
                 <a:spcPts val="0"/>
               </a:spcBef>
@@ -4849,7 +4663,7 @@
               <a:buChar char="●"/>
               <a:defRPr sz="1200"/>
             </a:lvl7pPr>
-            <a:lvl8pPr marL="3657600" lvl="7" indent="-304800">
+            <a:lvl8pPr indent="-304800" lvl="7" marL="3657600">
               <a:spcBef>
                 <a:spcPts val="0"/>
               </a:spcBef>
@@ -4860,7 +4674,7 @@
               <a:buChar char="○"/>
               <a:defRPr sz="1200"/>
             </a:lvl8pPr>
-            <a:lvl9pPr marL="4114800" lvl="8" indent="-304800">
+            <a:lvl9pPr indent="-304800" lvl="8" marL="4114800">
               <a:spcBef>
                 <a:spcPts val="0"/>
               </a:spcBef>
@@ -4872,19 +4686,15 @@
               <a:defRPr sz="1200"/>
             </a:lvl9pPr>
           </a:lstStyle>
-          <a:p>
-            <a:endParaRPr/>
-          </a:p>
+          <a:p/>
         </p:txBody>
       </p:sp>
       <p:sp>
         <p:nvSpPr>
           <p:cNvPr id="31" name="Google Shape;31;p7"/>
-          <p:cNvSpPr txBox="1">
-            <a:spLocks noGrp="1"/>
-          </p:cNvSpPr>
+          <p:cNvSpPr txBox="1"/>
           <p:nvPr>
-            <p:ph type="sldNum" idx="12"/>
+            <p:ph idx="12" type="sldNum"/>
           </p:nvPr>
         </p:nvSpPr>
         <p:spPr>
@@ -4897,7 +4707,7 @@
           </a:prstGeom>
         </p:spPr>
         <p:txBody>
-          <a:bodyPr spcFirstLastPara="1" wrap="square" lIns="91425" tIns="91425" rIns="91425" bIns="91425" anchor="ctr" anchorCtr="0">
+          <a:bodyPr anchorCtr="0" anchor="ctr" bIns="91425" lIns="91425" spcFirstLastPara="1" rIns="91425" wrap="square" tIns="91425">
             <a:normAutofit/>
           </a:bodyPr>
           <a:lstStyle>
@@ -4939,7 +4749,7 @@
             </a:lvl9pPr>
           </a:lstStyle>
           <a:p>
-            <a:pPr marL="0" lvl="0" indent="0" algn="r" rtl="0">
+            <a:pPr indent="0" lvl="0" marL="0" rtl="0" algn="r">
               <a:spcBef>
                 <a:spcPts val="0"/>
               </a:spcBef>
@@ -4965,11 +4775,11 @@
 </file>
 
 <file path=ppt/slideLayouts/slideLayout7.xml><?xml version="1.0" encoding="utf-8"?>
-<p:sldLayout xmlns:a="http://schemas.openxmlformats.org/drawingml/2006/main" xmlns:r="http://schemas.openxmlformats.org/officeDocument/2006/relationships" xmlns:p="http://schemas.openxmlformats.org/presentationml/2006/main" matchingName="Main point">
+<p:sldLayout xmlns:a="http://schemas.openxmlformats.org/drawingml/2006/main" xmlns:r="http://schemas.openxmlformats.org/officeDocument/2006/relationships" xmlns:mc="http://schemas.openxmlformats.org/markup-compatibility/2006" xmlns:mv="urn:schemas-microsoft-com:mac:vml" xmlns:p="http://schemas.openxmlformats.org/presentationml/2006/main" xmlns:c="http://schemas.openxmlformats.org/drawingml/2006/chart" xmlns:dgm="http://schemas.openxmlformats.org/drawingml/2006/diagram" xmlns:o="urn:schemas-microsoft-com:office:office" xmlns:v="urn:schemas-microsoft-com:vml" xmlns:pvml="urn:schemas-microsoft-com:office:powerpoint" xmlns:com="http://schemas.openxmlformats.org/drawingml/2006/compatibility" xmlns:p14="http://schemas.microsoft.com/office/powerpoint/2010/main" xmlns:p15="http://schemas.microsoft.com/office/powerpoint/2012/main" xmlns:ahyp="http://schemas.microsoft.com/office/drawing/2018/hyperlinkcolor" matchingName="Main point">
   <p:cSld name="MAIN_POINT">
     <p:spTree>
       <p:nvGrpSpPr>
-        <p:cNvPr id="1" name="Shape 32"/>
+        <p:cNvPr id="32" name="Shape 32"/>
         <p:cNvGrpSpPr/>
         <p:nvPr/>
       </p:nvGrpSpPr>
@@ -4984,9 +4794,7 @@
       <p:sp>
         <p:nvSpPr>
           <p:cNvPr id="33" name="Google Shape;33;p8"/>
-          <p:cNvSpPr txBox="1">
-            <a:spLocks noGrp="1"/>
-          </p:cNvSpPr>
+          <p:cNvSpPr txBox="1"/>
           <p:nvPr>
             <p:ph type="title"/>
           </p:nvPr>
@@ -5001,7 +4809,7 @@
           </a:prstGeom>
         </p:spPr>
         <p:txBody>
-          <a:bodyPr spcFirstLastPara="1" wrap="square" lIns="91425" tIns="91425" rIns="91425" bIns="91425" anchor="ctr" anchorCtr="0">
+          <a:bodyPr anchorCtr="0" anchor="ctr" bIns="91425" lIns="91425" spcFirstLastPara="1" rIns="91425" wrap="square" tIns="91425">
             <a:normAutofit/>
           </a:bodyPr>
           <a:lstStyle>
@@ -5105,19 +4913,15 @@
               <a:defRPr sz="4800"/>
             </a:lvl9pPr>
           </a:lstStyle>
-          <a:p>
-            <a:endParaRPr/>
-          </a:p>
+          <a:p/>
         </p:txBody>
       </p:sp>
       <p:sp>
         <p:nvSpPr>
           <p:cNvPr id="34" name="Google Shape;34;p8"/>
-          <p:cNvSpPr txBox="1">
-            <a:spLocks noGrp="1"/>
-          </p:cNvSpPr>
+          <p:cNvSpPr txBox="1"/>
           <p:nvPr>
-            <p:ph type="sldNum" idx="12"/>
+            <p:ph idx="12" type="sldNum"/>
           </p:nvPr>
         </p:nvSpPr>
         <p:spPr>
@@ -5130,7 +4934,7 @@
           </a:prstGeom>
         </p:spPr>
         <p:txBody>
-          <a:bodyPr spcFirstLastPara="1" wrap="square" lIns="91425" tIns="91425" rIns="91425" bIns="91425" anchor="ctr" anchorCtr="0">
+          <a:bodyPr anchorCtr="0" anchor="ctr" bIns="91425" lIns="91425" spcFirstLastPara="1" rIns="91425" wrap="square" tIns="91425">
             <a:normAutofit/>
           </a:bodyPr>
           <a:lstStyle>
@@ -5172,7 +4976,7 @@
             </a:lvl9pPr>
           </a:lstStyle>
           <a:p>
-            <a:pPr marL="0" lvl="0" indent="0" algn="r" rtl="0">
+            <a:pPr indent="0" lvl="0" marL="0" rtl="0" algn="r">
               <a:spcBef>
                 <a:spcPts val="0"/>
               </a:spcBef>
@@ -5198,11 +5002,11 @@
 </file>
 
 <file path=ppt/slideLayouts/slideLayout8.xml><?xml version="1.0" encoding="utf-8"?>
-<p:sldLayout xmlns:a="http://schemas.openxmlformats.org/drawingml/2006/main" xmlns:r="http://schemas.openxmlformats.org/officeDocument/2006/relationships" xmlns:p="http://schemas.openxmlformats.org/presentationml/2006/main" matchingName="Section title and description">
+<p:sldLayout xmlns:a="http://schemas.openxmlformats.org/drawingml/2006/main" xmlns:r="http://schemas.openxmlformats.org/officeDocument/2006/relationships" xmlns:mc="http://schemas.openxmlformats.org/markup-compatibility/2006" xmlns:mv="urn:schemas-microsoft-com:mac:vml" xmlns:p="http://schemas.openxmlformats.org/presentationml/2006/main" xmlns:c="http://schemas.openxmlformats.org/drawingml/2006/chart" xmlns:dgm="http://schemas.openxmlformats.org/drawingml/2006/diagram" xmlns:o="urn:schemas-microsoft-com:office:office" xmlns:v="urn:schemas-microsoft-com:vml" xmlns:pvml="urn:schemas-microsoft-com:office:powerpoint" xmlns:com="http://schemas.openxmlformats.org/drawingml/2006/compatibility" xmlns:p14="http://schemas.microsoft.com/office/powerpoint/2010/main" xmlns:p15="http://schemas.microsoft.com/office/powerpoint/2012/main" xmlns:ahyp="http://schemas.microsoft.com/office/drawing/2018/hyperlinkcolor" matchingName="Section title and description">
   <p:cSld name="SECTION_TITLE_AND_DESCRIPTION">
     <p:spTree>
       <p:nvGrpSpPr>
-        <p:cNvPr id="1" name="Shape 35"/>
+        <p:cNvPr id="35" name="Shape 35"/>
         <p:cNvGrpSpPr/>
         <p:nvPr/>
       </p:nvGrpSpPr>
@@ -5236,20 +5040,23 @@
           </a:ln>
         </p:spPr>
         <p:txBody>
-          <a:bodyPr spcFirstLastPara="1" wrap="square" lIns="91425" tIns="91425" rIns="91425" bIns="91425" anchor="ctr" anchorCtr="0">
+          <a:bodyPr anchorCtr="0" anchor="ctr" bIns="91425" lIns="91425" spcFirstLastPara="1" rIns="91425" wrap="square" tIns="91425">
             <a:noAutofit/>
           </a:bodyPr>
           <a:lstStyle/>
           <a:p>
-            <a:pPr marL="0" lvl="0" indent="0" algn="l" rtl="0">
-              <a:spcBef>
-                <a:spcPts val="0"/>
-              </a:spcBef>
-              <a:spcAft>
-                <a:spcPts val="0"/>
-              </a:spcAft>
-              <a:buNone/>
-            </a:pPr>
+            <a:pPr indent="0" lvl="0" marL="0" rtl="0" algn="l">
+              <a:spcBef>
+                <a:spcPts val="0"/>
+              </a:spcBef>
+              <a:spcAft>
+                <a:spcPts val="0"/>
+              </a:spcAft>
+              <a:buNone/>
+            </a:pPr>
+            <a:r>
+              <a:t/>
+            </a:r>
             <a:endParaRPr/>
           </a:p>
         </p:txBody>
@@ -5257,9 +5064,7 @@
       <p:sp>
         <p:nvSpPr>
           <p:cNvPr id="37" name="Google Shape;37;p9"/>
-          <p:cNvSpPr txBox="1">
-            <a:spLocks noGrp="1"/>
-          </p:cNvSpPr>
+          <p:cNvSpPr txBox="1"/>
           <p:nvPr>
             <p:ph type="title"/>
           </p:nvPr>
@@ -5274,7 +5079,7 @@
           </a:prstGeom>
         </p:spPr>
         <p:txBody>
-          <a:bodyPr spcFirstLastPara="1" wrap="square" lIns="91425" tIns="91425" rIns="91425" bIns="91425" anchor="b" anchorCtr="0">
+          <a:bodyPr anchorCtr="0" anchor="b" bIns="91425" lIns="91425" spcFirstLastPara="1" rIns="91425" wrap="square" tIns="91425">
             <a:normAutofit/>
           </a:bodyPr>
           <a:lstStyle>
@@ -5378,19 +5183,15 @@
               <a:defRPr sz="4200"/>
             </a:lvl9pPr>
           </a:lstStyle>
-          <a:p>
-            <a:endParaRPr/>
-          </a:p>
+          <a:p/>
         </p:txBody>
       </p:sp>
       <p:sp>
         <p:nvSpPr>
           <p:cNvPr id="38" name="Google Shape;38;p9"/>
-          <p:cNvSpPr txBox="1">
-            <a:spLocks noGrp="1"/>
-          </p:cNvSpPr>
+          <p:cNvSpPr txBox="1"/>
           <p:nvPr>
-            <p:ph type="subTitle" idx="1"/>
+            <p:ph idx="1" type="subTitle"/>
           </p:nvPr>
         </p:nvSpPr>
         <p:spPr>
@@ -5403,7 +5204,7 @@
           </a:prstGeom>
         </p:spPr>
         <p:txBody>
-          <a:bodyPr spcFirstLastPara="1" wrap="square" lIns="91425" tIns="91425" rIns="91425" bIns="91425" anchor="t" anchorCtr="0">
+          <a:bodyPr anchorCtr="0" anchor="t" bIns="91425" lIns="91425" spcFirstLastPara="1" rIns="91425" wrap="square" tIns="91425">
             <a:normAutofit/>
           </a:bodyPr>
           <a:lstStyle>
@@ -5534,19 +5335,15 @@
               <a:defRPr sz="2100"/>
             </a:lvl9pPr>
           </a:lstStyle>
-          <a:p>
-            <a:endParaRPr/>
-          </a:p>
+          <a:p/>
         </p:txBody>
       </p:sp>
       <p:sp>
         <p:nvSpPr>
           <p:cNvPr id="39" name="Google Shape;39;p9"/>
-          <p:cNvSpPr txBox="1">
-            <a:spLocks noGrp="1"/>
-          </p:cNvSpPr>
+          <p:cNvSpPr txBox="1"/>
           <p:nvPr>
-            <p:ph type="body" idx="2"/>
+            <p:ph idx="2" type="body"/>
           </p:nvPr>
         </p:nvSpPr>
         <p:spPr>
@@ -5559,11 +5356,11 @@
           </a:prstGeom>
         </p:spPr>
         <p:txBody>
-          <a:bodyPr spcFirstLastPara="1" wrap="square" lIns="91425" tIns="91425" rIns="91425" bIns="91425" anchor="ctr" anchorCtr="0">
+          <a:bodyPr anchorCtr="0" anchor="ctr" bIns="91425" lIns="91425" spcFirstLastPara="1" rIns="91425" wrap="square" tIns="91425">
             <a:normAutofit/>
           </a:bodyPr>
           <a:lstStyle>
-            <a:lvl1pPr marL="457200" lvl="0" indent="-342900">
+            <a:lvl1pPr indent="-342900" lvl="0" marL="457200">
               <a:spcBef>
                 <a:spcPts val="0"/>
               </a:spcBef>
@@ -5574,7 +5371,7 @@
               <a:buChar char="●"/>
               <a:defRPr/>
             </a:lvl1pPr>
-            <a:lvl2pPr marL="914400" lvl="1" indent="-317500">
+            <a:lvl2pPr indent="-317500" lvl="1" marL="914400">
               <a:spcBef>
                 <a:spcPts val="0"/>
               </a:spcBef>
@@ -5585,7 +5382,7 @@
               <a:buChar char="○"/>
               <a:defRPr/>
             </a:lvl2pPr>
-            <a:lvl3pPr marL="1371600" lvl="2" indent="-317500">
+            <a:lvl3pPr indent="-317500" lvl="2" marL="1371600">
               <a:spcBef>
                 <a:spcPts val="0"/>
               </a:spcBef>
@@ -5596,7 +5393,7 @@
               <a:buChar char="■"/>
               <a:defRPr/>
             </a:lvl3pPr>
-            <a:lvl4pPr marL="1828800" lvl="3" indent="-317500">
+            <a:lvl4pPr indent="-317500" lvl="3" marL="1828800">
               <a:spcBef>
                 <a:spcPts val="0"/>
               </a:spcBef>
@@ -5607,7 +5404,7 @@
               <a:buChar char="●"/>
               <a:defRPr/>
             </a:lvl4pPr>
-            <a:lvl5pPr marL="2286000" lvl="4" indent="-317500">
+            <a:lvl5pPr indent="-317500" lvl="4" marL="2286000">
               <a:spcBef>
                 <a:spcPts val="0"/>
               </a:spcBef>
@@ -5618,7 +5415,7 @@
               <a:buChar char="○"/>
               <a:defRPr/>
             </a:lvl5pPr>
-            <a:lvl6pPr marL="2743200" lvl="5" indent="-317500">
+            <a:lvl6pPr indent="-317500" lvl="5" marL="2743200">
               <a:spcBef>
                 <a:spcPts val="0"/>
               </a:spcBef>
@@ -5629,7 +5426,7 @@
               <a:buChar char="■"/>
               <a:defRPr/>
             </a:lvl6pPr>
-            <a:lvl7pPr marL="3200400" lvl="6" indent="-317500">
+            <a:lvl7pPr indent="-317500" lvl="6" marL="3200400">
               <a:spcBef>
                 <a:spcPts val="0"/>
               </a:spcBef>
@@ -5640,7 +5437,7 @@
               <a:buChar char="●"/>
               <a:defRPr/>
             </a:lvl7pPr>
-            <a:lvl8pPr marL="3657600" lvl="7" indent="-317500">
+            <a:lvl8pPr indent="-317500" lvl="7" marL="3657600">
               <a:spcBef>
                 <a:spcPts val="0"/>
               </a:spcBef>
@@ -5651,7 +5448,7 @@
               <a:buChar char="○"/>
               <a:defRPr/>
             </a:lvl8pPr>
-            <a:lvl9pPr marL="4114800" lvl="8" indent="-317500">
+            <a:lvl9pPr indent="-317500" lvl="8" marL="4114800">
               <a:spcBef>
                 <a:spcPts val="0"/>
               </a:spcBef>
@@ -5663,19 +5460,15 @@
               <a:defRPr/>
             </a:lvl9pPr>
           </a:lstStyle>
-          <a:p>
-            <a:endParaRPr/>
-          </a:p>
+          <a:p/>
         </p:txBody>
       </p:sp>
       <p:sp>
         <p:nvSpPr>
           <p:cNvPr id="40" name="Google Shape;40;p9"/>
-          <p:cNvSpPr txBox="1">
-            <a:spLocks noGrp="1"/>
-          </p:cNvSpPr>
+          <p:cNvSpPr txBox="1"/>
           <p:nvPr>
-            <p:ph type="sldNum" idx="12"/>
+            <p:ph idx="12" type="sldNum"/>
           </p:nvPr>
         </p:nvSpPr>
         <p:spPr>
@@ -5688,7 +5481,7 @@
           </a:prstGeom>
         </p:spPr>
         <p:txBody>
-          <a:bodyPr spcFirstLastPara="1" wrap="square" lIns="91425" tIns="91425" rIns="91425" bIns="91425" anchor="ctr" anchorCtr="0">
+          <a:bodyPr anchorCtr="0" anchor="ctr" bIns="91425" lIns="91425" spcFirstLastPara="1" rIns="91425" wrap="square" tIns="91425">
             <a:normAutofit/>
           </a:bodyPr>
           <a:lstStyle>
@@ -5730,7 +5523,7 @@
             </a:lvl9pPr>
           </a:lstStyle>
           <a:p>
-            <a:pPr marL="0" lvl="0" indent="0" algn="r" rtl="0">
+            <a:pPr indent="0" lvl="0" marL="0" rtl="0" algn="r">
               <a:spcBef>
                 <a:spcPts val="0"/>
               </a:spcBef>
@@ -5756,11 +5549,11 @@
 </file>
 
 <file path=ppt/slideLayouts/slideLayout9.xml><?xml version="1.0" encoding="utf-8"?>
-<p:sldLayout xmlns:a="http://schemas.openxmlformats.org/drawingml/2006/main" xmlns:r="http://schemas.openxmlformats.org/officeDocument/2006/relationships" xmlns:p="http://schemas.openxmlformats.org/presentationml/2006/main" matchingName="Caption">
+<p:sldLayout xmlns:a="http://schemas.openxmlformats.org/drawingml/2006/main" xmlns:r="http://schemas.openxmlformats.org/officeDocument/2006/relationships" xmlns:mc="http://schemas.openxmlformats.org/markup-compatibility/2006" xmlns:mv="urn:schemas-microsoft-com:mac:vml" xmlns:p="http://schemas.openxmlformats.org/presentationml/2006/main" xmlns:c="http://schemas.openxmlformats.org/drawingml/2006/chart" xmlns:dgm="http://schemas.openxmlformats.org/drawingml/2006/diagram" xmlns:o="urn:schemas-microsoft-com:office:office" xmlns:v="urn:schemas-microsoft-com:vml" xmlns:pvml="urn:schemas-microsoft-com:office:powerpoint" xmlns:com="http://schemas.openxmlformats.org/drawingml/2006/compatibility" xmlns:p14="http://schemas.microsoft.com/office/powerpoint/2010/main" xmlns:p15="http://schemas.microsoft.com/office/powerpoint/2012/main" xmlns:ahyp="http://schemas.microsoft.com/office/drawing/2018/hyperlinkcolor" matchingName="Caption">
   <p:cSld name="CAPTION_ONLY">
     <p:spTree>
       <p:nvGrpSpPr>
-        <p:cNvPr id="1" name="Shape 41"/>
+        <p:cNvPr id="41" name="Shape 41"/>
         <p:cNvGrpSpPr/>
         <p:nvPr/>
       </p:nvGrpSpPr>
@@ -5775,11 +5568,9 @@
       <p:sp>
         <p:nvSpPr>
           <p:cNvPr id="42" name="Google Shape;42;p10"/>
-          <p:cNvSpPr txBox="1">
-            <a:spLocks noGrp="1"/>
-          </p:cNvSpPr>
+          <p:cNvSpPr txBox="1"/>
           <p:nvPr>
-            <p:ph type="body" idx="1"/>
+            <p:ph idx="1" type="body"/>
           </p:nvPr>
         </p:nvSpPr>
         <p:spPr>
@@ -5792,11 +5583,11 @@
           </a:prstGeom>
         </p:spPr>
         <p:txBody>
-          <a:bodyPr spcFirstLastPara="1" wrap="square" lIns="91425" tIns="91425" rIns="91425" bIns="91425" anchor="ctr" anchorCtr="0">
+          <a:bodyPr anchorCtr="0" anchor="ctr" bIns="91425" lIns="91425" spcFirstLastPara="1" rIns="91425" wrap="square" tIns="91425">
             <a:normAutofit/>
           </a:bodyPr>
           <a:lstStyle>
-            <a:lvl1pPr marL="457200" lvl="0" indent="-228600">
+            <a:lvl1pPr indent="-228600" lvl="0" marL="457200">
               <a:lnSpc>
                 <a:spcPct val="100000"/>
               </a:lnSpc>
@@ -5811,19 +5602,15 @@
               <a:defRPr/>
             </a:lvl1pPr>
           </a:lstStyle>
-          <a:p>
-            <a:endParaRPr/>
-          </a:p>
+          <a:p/>
         </p:txBody>
       </p:sp>
       <p:sp>
         <p:nvSpPr>
           <p:cNvPr id="43" name="Google Shape;43;p10"/>
-          <p:cNvSpPr txBox="1">
-            <a:spLocks noGrp="1"/>
-          </p:cNvSpPr>
+          <p:cNvSpPr txBox="1"/>
           <p:nvPr>
-            <p:ph type="sldNum" idx="12"/>
+            <p:ph idx="12" type="sldNum"/>
           </p:nvPr>
         </p:nvSpPr>
         <p:spPr>
@@ -5836,7 +5623,7 @@
           </a:prstGeom>
         </p:spPr>
         <p:txBody>
-          <a:bodyPr spcFirstLastPara="1" wrap="square" lIns="91425" tIns="91425" rIns="91425" bIns="91425" anchor="ctr" anchorCtr="0">
+          <a:bodyPr anchorCtr="0" anchor="ctr" bIns="91425" lIns="91425" spcFirstLastPara="1" rIns="91425" wrap="square" tIns="91425">
             <a:normAutofit/>
           </a:bodyPr>
           <a:lstStyle>
@@ -5878,7 +5665,7 @@
             </a:lvl9pPr>
           </a:lstStyle>
           <a:p>
-            <a:pPr marL="0" lvl="0" indent="0" algn="r" rtl="0">
+            <a:pPr indent="0" lvl="0" marL="0" rtl="0" algn="r">
               <a:spcBef>
                 <a:spcPts val="0"/>
               </a:spcBef>
@@ -5904,19 +5691,18 @@
 </file>
 
 <file path=ppt/slideMasters/slideMaster1.xml><?xml version="1.0" encoding="utf-8"?>
-<p:sldMaster xmlns:a="http://schemas.openxmlformats.org/drawingml/2006/main" xmlns:r="http://schemas.openxmlformats.org/officeDocument/2006/relationships" xmlns:p="http://schemas.openxmlformats.org/presentationml/2006/main">
+<p:sldMaster xmlns:a="http://schemas.openxmlformats.org/drawingml/2006/main" xmlns:r="http://schemas.openxmlformats.org/officeDocument/2006/relationships" xmlns:mc="http://schemas.openxmlformats.org/markup-compatibility/2006" xmlns:mv="urn:schemas-microsoft-com:mac:vml" xmlns:p="http://schemas.openxmlformats.org/presentationml/2006/main" xmlns:c="http://schemas.openxmlformats.org/drawingml/2006/chart" xmlns:dgm="http://schemas.openxmlformats.org/drawingml/2006/diagram" xmlns:o="urn:schemas-microsoft-com:office:office" xmlns:v="urn:schemas-microsoft-com:vml" xmlns:pvml="urn:schemas-microsoft-com:office:powerpoint" xmlns:com="http://schemas.openxmlformats.org/drawingml/2006/compatibility" xmlns:p14="http://schemas.microsoft.com/office/powerpoint/2010/main" xmlns:p15="http://schemas.microsoft.com/office/powerpoint/2012/main" xmlns:ahyp="http://schemas.microsoft.com/office/drawing/2018/hyperlinkcolor">
   <p:cSld name="simple-light-2">
     <p:bg>
       <p:bgPr>
         <a:solidFill>
           <a:schemeClr val="lt1"/>
         </a:solidFill>
-        <a:effectLst/>
       </p:bgPr>
     </p:bg>
     <p:spTree>
       <p:nvGrpSpPr>
-        <p:cNvPr id="1" name="Shape 5"/>
+        <p:cNvPr id="5" name="Shape 5"/>
         <p:cNvGrpSpPr/>
         <p:nvPr/>
       </p:nvGrpSpPr>
@@ -5931,9 +5717,7 @@
       <p:sp>
         <p:nvSpPr>
           <p:cNvPr id="6" name="Google Shape;6;p1"/>
-          <p:cNvSpPr txBox="1">
-            <a:spLocks noGrp="1"/>
-          </p:cNvSpPr>
+          <p:cNvSpPr txBox="1"/>
           <p:nvPr>
             <p:ph type="title"/>
           </p:nvPr>
@@ -5952,7 +5736,7 @@
           </a:ln>
         </p:spPr>
         <p:txBody>
-          <a:bodyPr spcFirstLastPara="1" wrap="square" lIns="91425" tIns="91425" rIns="91425" bIns="91425" anchor="t" anchorCtr="0">
+          <a:bodyPr anchorCtr="0" anchor="t" bIns="91425" lIns="91425" spcFirstLastPara="1" rIns="91425" wrap="square" tIns="91425">
             <a:normAutofit/>
           </a:bodyPr>
           <a:lstStyle>
@@ -6119,19 +5903,15 @@
               </a:defRPr>
             </a:lvl9pPr>
           </a:lstStyle>
-          <a:p>
-            <a:endParaRPr/>
-          </a:p>
+          <a:p/>
         </p:txBody>
       </p:sp>
       <p:sp>
         <p:nvSpPr>
           <p:cNvPr id="7" name="Google Shape;7;p1"/>
-          <p:cNvSpPr txBox="1">
-            <a:spLocks noGrp="1"/>
-          </p:cNvSpPr>
+          <p:cNvSpPr txBox="1"/>
           <p:nvPr>
-            <p:ph type="body" idx="1"/>
+            <p:ph idx="1" type="body"/>
           </p:nvPr>
         </p:nvSpPr>
         <p:spPr>
@@ -6148,11 +5928,11 @@
           </a:ln>
         </p:spPr>
         <p:txBody>
-          <a:bodyPr spcFirstLastPara="1" wrap="square" lIns="91425" tIns="91425" rIns="91425" bIns="91425" anchor="t" anchorCtr="0">
+          <a:bodyPr anchorCtr="0" anchor="t" bIns="91425" lIns="91425" spcFirstLastPara="1" rIns="91425" wrap="square" tIns="91425">
             <a:normAutofit/>
           </a:bodyPr>
           <a:lstStyle>
-            <a:lvl1pPr marL="457200" lvl="0" indent="-342900">
+            <a:lvl1pPr indent="-342900" lvl="0" marL="457200">
               <a:lnSpc>
                 <a:spcPct val="115000"/>
               </a:lnSpc>
@@ -6173,7 +5953,7 @@
                 </a:solidFill>
               </a:defRPr>
             </a:lvl1pPr>
-            <a:lvl2pPr marL="914400" lvl="1" indent="-317500">
+            <a:lvl2pPr indent="-317500" lvl="1" marL="914400">
               <a:lnSpc>
                 <a:spcPct val="115000"/>
               </a:lnSpc>
@@ -6194,7 +5974,7 @@
                 </a:solidFill>
               </a:defRPr>
             </a:lvl2pPr>
-            <a:lvl3pPr marL="1371600" lvl="2" indent="-317500">
+            <a:lvl3pPr indent="-317500" lvl="2" marL="1371600">
               <a:lnSpc>
                 <a:spcPct val="115000"/>
               </a:lnSpc>
@@ -6215,7 +5995,7 @@
                 </a:solidFill>
               </a:defRPr>
             </a:lvl3pPr>
-            <a:lvl4pPr marL="1828800" lvl="3" indent="-317500">
+            <a:lvl4pPr indent="-317500" lvl="3" marL="1828800">
               <a:lnSpc>
                 <a:spcPct val="115000"/>
               </a:lnSpc>
@@ -6236,7 +6016,7 @@
                 </a:solidFill>
               </a:defRPr>
             </a:lvl4pPr>
-            <a:lvl5pPr marL="2286000" lvl="4" indent="-317500">
+            <a:lvl5pPr indent="-317500" lvl="4" marL="2286000">
               <a:lnSpc>
                 <a:spcPct val="115000"/>
               </a:lnSpc>
@@ -6257,7 +6037,7 @@
                 </a:solidFill>
               </a:defRPr>
             </a:lvl5pPr>
-            <a:lvl6pPr marL="2743200" lvl="5" indent="-317500">
+            <a:lvl6pPr indent="-317500" lvl="5" marL="2743200">
               <a:lnSpc>
                 <a:spcPct val="115000"/>
               </a:lnSpc>
@@ -6278,7 +6058,7 @@
                 </a:solidFill>
               </a:defRPr>
             </a:lvl6pPr>
-            <a:lvl7pPr marL="3200400" lvl="6" indent="-317500">
+            <a:lvl7pPr indent="-317500" lvl="6" marL="3200400">
               <a:lnSpc>
                 <a:spcPct val="115000"/>
               </a:lnSpc>
@@ -6299,7 +6079,7 @@
                 </a:solidFill>
               </a:defRPr>
             </a:lvl7pPr>
-            <a:lvl8pPr marL="3657600" lvl="7" indent="-317500">
+            <a:lvl8pPr indent="-317500" lvl="7" marL="3657600">
               <a:lnSpc>
                 <a:spcPct val="115000"/>
               </a:lnSpc>
@@ -6320,7 +6100,7 @@
                 </a:solidFill>
               </a:defRPr>
             </a:lvl8pPr>
-            <a:lvl9pPr marL="4114800" lvl="8" indent="-317500">
+            <a:lvl9pPr indent="-317500" lvl="8" marL="4114800">
               <a:lnSpc>
                 <a:spcPct val="115000"/>
               </a:lnSpc>
@@ -6342,19 +6122,15 @@
               </a:defRPr>
             </a:lvl9pPr>
           </a:lstStyle>
-          <a:p>
-            <a:endParaRPr/>
-          </a:p>
+          <a:p/>
         </p:txBody>
       </p:sp>
       <p:sp>
         <p:nvSpPr>
           <p:cNvPr id="8" name="Google Shape;8;p1"/>
-          <p:cNvSpPr txBox="1">
-            <a:spLocks noGrp="1"/>
-          </p:cNvSpPr>
+          <p:cNvSpPr txBox="1"/>
           <p:nvPr>
-            <p:ph type="sldNum" idx="12"/>
+            <p:ph idx="12" type="sldNum"/>
           </p:nvPr>
         </p:nvSpPr>
         <p:spPr>
@@ -6371,7 +6147,7 @@
           </a:ln>
         </p:spPr>
         <p:txBody>
-          <a:bodyPr spcFirstLastPara="1" wrap="square" lIns="91425" tIns="91425" rIns="91425" bIns="91425" anchor="ctr" anchorCtr="0">
+          <a:bodyPr anchorCtr="0" anchor="ctr" bIns="91425" lIns="91425" spcFirstLastPara="1" rIns="91425" wrap="square" tIns="91425">
             <a:normAutofit/>
           </a:bodyPr>
           <a:lstStyle>
@@ -6449,7 +6225,7 @@
             </a:lvl9pPr>
           </a:lstStyle>
           <a:p>
-            <a:pPr marL="0" lvl="0" indent="0" algn="r" rtl="0">
+            <a:pPr indent="0" lvl="0" marL="0" rtl="0" algn="r">
               <a:spcBef>
                 <a:spcPts val="0"/>
               </a:spcBef>
@@ -6468,7 +6244,7 @@
       </p:sp>
     </p:spTree>
   </p:cSld>
-  <p:clrMap bg1="lt1" tx1="dk1" bg2="dk2" tx2="lt2" accent1="accent1" accent2="accent2" accent3="accent3" accent4="accent4" accent5="accent5" accent6="accent6" hlink="hlink" folHlink="folHlink"/>
+  <p:clrMap accent1="accent1" accent2="accent2" accent3="accent3" accent4="accent4" accent5="accent5" accent6="accent6" bg1="lt1" bg2="dk2" tx1="dk1" tx2="lt2" folHlink="folHlink" hlink="hlink"/>
   <p:sldLayoutIdLst>
     <p:sldLayoutId id="2147483648" r:id="rId1"/>
     <p:sldLayoutId id="2147483649" r:id="rId2"/>
@@ -6482,10 +6258,10 @@
     <p:sldLayoutId id="2147483657" r:id="rId10"/>
     <p:sldLayoutId id="2147483658" r:id="rId11"/>
   </p:sldLayoutIdLst>
-  <p:hf sldNum="0" hdr="0" ftr="0" dt="0"/>
+  <p:hf dt="0" ftr="0" hdr="0" sldNum="0"/>
   <p:txStyles>
     <p:titleStyle>
-      <a:defPPr marR="0" lvl="0" algn="l" rtl="0">
+      <a:defPPr lvl="0" marR="0" rtl="0" algn="l">
         <a:lnSpc>
           <a:spcPct val="100000"/>
         </a:lnSpc>
@@ -6496,7 +6272,7 @@
           <a:spcPts val="0"/>
         </a:spcAft>
       </a:defPPr>
-      <a:lvl1pPr marR="0" lvl="0" algn="l" rtl="0">
+      <a:lvl1pPr lvl="0" marR="0" rtl="0" algn="l">
         <a:lnSpc>
           <a:spcPct val="100000"/>
         </a:lnSpc>
@@ -6510,7 +6286,7 @@
           <a:srgbClr val="000000"/>
         </a:buClr>
         <a:buFont typeface="Arial"/>
-        <a:defRPr sz="1400" b="0" i="0" u="none" strike="noStrike" cap="none" spc="0">
+        <a:defRPr b="0" i="0" spc="0" sz="1400" u="none" cap="none" strike="noStrike">
           <a:solidFill>
             <a:srgbClr val="000000"/>
           </a:solidFill>
@@ -6520,7 +6296,7 @@
           <a:sym typeface="Arial"/>
         </a:defRPr>
       </a:lvl1pPr>
-      <a:lvl2pPr marR="0" lvl="1" algn="l" rtl="0">
+      <a:lvl2pPr lvl="1" marR="0" rtl="0" algn="l">
         <a:lnSpc>
           <a:spcPct val="100000"/>
         </a:lnSpc>
@@ -6534,7 +6310,7 @@
           <a:srgbClr val="000000"/>
         </a:buClr>
         <a:buFont typeface="Arial"/>
-        <a:defRPr sz="1400" b="0" i="0" u="none" strike="noStrike" cap="none" spc="0">
+        <a:defRPr b="0" i="0" spc="0" sz="1400" u="none" cap="none" strike="noStrike">
           <a:solidFill>
             <a:srgbClr val="000000"/>
           </a:solidFill>
@@ -6544,7 +6320,7 @@
           <a:sym typeface="Arial"/>
         </a:defRPr>
       </a:lvl2pPr>
-      <a:lvl3pPr marR="0" lvl="2" algn="l" rtl="0">
+      <a:lvl3pPr lvl="2" marR="0" rtl="0" algn="l">
         <a:lnSpc>
           <a:spcPct val="100000"/>
         </a:lnSpc>
@@ -6558,7 +6334,7 @@
           <a:srgbClr val="000000"/>
         </a:buClr>
         <a:buFont typeface="Arial"/>
-        <a:defRPr sz="1400" b="0" i="0" u="none" strike="noStrike" cap="none" spc="0">
+        <a:defRPr b="0" i="0" spc="0" sz="1400" u="none" cap="none" strike="noStrike">
           <a:solidFill>
             <a:srgbClr val="000000"/>
           </a:solidFill>
@@ -6568,7 +6344,7 @@
           <a:sym typeface="Arial"/>
         </a:defRPr>
       </a:lvl3pPr>
-      <a:lvl4pPr marR="0" lvl="3" algn="l" rtl="0">
+      <a:lvl4pPr lvl="3" marR="0" rtl="0" algn="l">
         <a:lnSpc>
           <a:spcPct val="100000"/>
         </a:lnSpc>
@@ -6582,7 +6358,7 @@
           <a:srgbClr val="000000"/>
         </a:buClr>
         <a:buFont typeface="Arial"/>
-        <a:defRPr sz="1400" b="0" i="0" u="none" strike="noStrike" cap="none" spc="0">
+        <a:defRPr b="0" i="0" spc="0" sz="1400" u="none" cap="none" strike="noStrike">
           <a:solidFill>
             <a:srgbClr val="000000"/>
           </a:solidFill>
@@ -6592,7 +6368,7 @@
           <a:sym typeface="Arial"/>
         </a:defRPr>
       </a:lvl4pPr>
-      <a:lvl5pPr marR="0" lvl="4" algn="l" rtl="0">
+      <a:lvl5pPr lvl="4" marR="0" rtl="0" algn="l">
         <a:lnSpc>
           <a:spcPct val="100000"/>
         </a:lnSpc>
@@ -6606,7 +6382,7 @@
           <a:srgbClr val="000000"/>
         </a:buClr>
         <a:buFont typeface="Arial"/>
-        <a:defRPr sz="1400" b="0" i="0" u="none" strike="noStrike" cap="none" spc="0">
+        <a:defRPr b="0" i="0" spc="0" sz="1400" u="none" cap="none" strike="noStrike">
           <a:solidFill>
             <a:srgbClr val="000000"/>
           </a:solidFill>
@@ -6616,7 +6392,7 @@
           <a:sym typeface="Arial"/>
         </a:defRPr>
       </a:lvl5pPr>
-      <a:lvl6pPr marR="0" lvl="5" algn="l" rtl="0">
+      <a:lvl6pPr lvl="5" marR="0" rtl="0" algn="l">
         <a:lnSpc>
           <a:spcPct val="100000"/>
         </a:lnSpc>
@@ -6630,7 +6406,7 @@
           <a:srgbClr val="000000"/>
         </a:buClr>
         <a:buFont typeface="Arial"/>
-        <a:defRPr sz="1400" b="0" i="0" u="none" strike="noStrike" cap="none" spc="0">
+        <a:defRPr b="0" i="0" spc="0" sz="1400" u="none" cap="none" strike="noStrike">
           <a:solidFill>
             <a:srgbClr val="000000"/>
           </a:solidFill>
@@ -6640,7 +6416,7 @@
           <a:sym typeface="Arial"/>
         </a:defRPr>
       </a:lvl6pPr>
-      <a:lvl7pPr marR="0" lvl="6" algn="l" rtl="0">
+      <a:lvl7pPr lvl="6" marR="0" rtl="0" algn="l">
         <a:lnSpc>
           <a:spcPct val="100000"/>
         </a:lnSpc>
@@ -6654,7 +6430,7 @@
           <a:srgbClr val="000000"/>
         </a:buClr>
         <a:buFont typeface="Arial"/>
-        <a:defRPr sz="1400" b="0" i="0" u="none" strike="noStrike" cap="none" spc="0">
+        <a:defRPr b="0" i="0" spc="0" sz="1400" u="none" cap="none" strike="noStrike">
           <a:solidFill>
             <a:srgbClr val="000000"/>
           </a:solidFill>
@@ -6664,7 +6440,7 @@
           <a:sym typeface="Arial"/>
         </a:defRPr>
       </a:lvl7pPr>
-      <a:lvl8pPr marR="0" lvl="7" algn="l" rtl="0">
+      <a:lvl8pPr lvl="7" marR="0" rtl="0" algn="l">
         <a:lnSpc>
           <a:spcPct val="100000"/>
         </a:lnSpc>
@@ -6678,7 +6454,7 @@
           <a:srgbClr val="000000"/>
         </a:buClr>
         <a:buFont typeface="Arial"/>
-        <a:defRPr sz="1400" b="0" i="0" u="none" strike="noStrike" cap="none" spc="0">
+        <a:defRPr b="0" i="0" spc="0" sz="1400" u="none" cap="none" strike="noStrike">
           <a:solidFill>
             <a:srgbClr val="000000"/>
           </a:solidFill>
@@ -6688,7 +6464,7 @@
           <a:sym typeface="Arial"/>
         </a:defRPr>
       </a:lvl8pPr>
-      <a:lvl9pPr marR="0" lvl="8" algn="l" rtl="0">
+      <a:lvl9pPr lvl="8" marR="0" rtl="0" algn="l">
         <a:lnSpc>
           <a:spcPct val="100000"/>
         </a:lnSpc>
@@ -6702,7 +6478,7 @@
           <a:srgbClr val="000000"/>
         </a:buClr>
         <a:buFont typeface="Arial"/>
-        <a:defRPr sz="1400" b="0" i="0" u="none" strike="noStrike" cap="none" spc="0">
+        <a:defRPr b="0" i="0" spc="0" sz="1400" u="none" cap="none" strike="noStrike">
           <a:solidFill>
             <a:srgbClr val="000000"/>
           </a:solidFill>
@@ -6714,7 +6490,7 @@
       </a:lvl9pPr>
     </p:titleStyle>
     <p:bodyStyle>
-      <a:defPPr marR="0" lvl="0" algn="l" rtl="0">
+      <a:defPPr lvl="0" marR="0" rtl="0" algn="l">
         <a:lnSpc>
           <a:spcPct val="100000"/>
         </a:lnSpc>
@@ -6725,7 +6501,7 @@
           <a:spcPts val="0"/>
         </a:spcAft>
       </a:defPPr>
-      <a:lvl1pPr marR="0" lvl="0" algn="l" rtl="0">
+      <a:lvl1pPr lvl="0" marR="0" rtl="0" algn="l">
         <a:lnSpc>
           <a:spcPct val="100000"/>
         </a:lnSpc>
@@ -6739,7 +6515,7 @@
           <a:srgbClr val="000000"/>
         </a:buClr>
         <a:buFont typeface="Arial"/>
-        <a:defRPr sz="1400" b="0" i="0" u="none" strike="noStrike" cap="none" spc="0">
+        <a:defRPr b="0" i="0" spc="0" sz="1400" u="none" cap="none" strike="noStrike">
           <a:solidFill>
             <a:srgbClr val="000000"/>
           </a:solidFill>
@@ -6749,7 +6525,7 @@
           <a:sym typeface="Arial"/>
         </a:defRPr>
       </a:lvl1pPr>
-      <a:lvl2pPr marR="0" lvl="1" algn="l" rtl="0">
+      <a:lvl2pPr lvl="1" marR="0" rtl="0" algn="l">
         <a:lnSpc>
           <a:spcPct val="100000"/>
         </a:lnSpc>
@@ -6763,7 +6539,7 @@
           <a:srgbClr val="000000"/>
         </a:buClr>
         <a:buFont typeface="Arial"/>
-        <a:defRPr sz="1400" b="0" i="0" u="none" strike="noStrike" cap="none" spc="0">
+        <a:defRPr b="0" i="0" spc="0" sz="1400" u="none" cap="none" strike="noStrike">
           <a:solidFill>
             <a:srgbClr val="000000"/>
           </a:solidFill>
@@ -6773,7 +6549,7 @@
           <a:sym typeface="Arial"/>
         </a:defRPr>
       </a:lvl2pPr>
-      <a:lvl3pPr marR="0" lvl="2" algn="l" rtl="0">
+      <a:lvl3pPr lvl="2" marR="0" rtl="0" algn="l">
         <a:lnSpc>
           <a:spcPct val="100000"/>
         </a:lnSpc>
@@ -6787,7 +6563,7 @@
           <a:srgbClr val="000000"/>
         </a:buClr>
         <a:buFont typeface="Arial"/>
-        <a:defRPr sz="1400" b="0" i="0" u="none" strike="noStrike" cap="none" spc="0">
+        <a:defRPr b="0" i="0" spc="0" sz="1400" u="none" cap="none" strike="noStrike">
           <a:solidFill>
             <a:srgbClr val="000000"/>
           </a:solidFill>
@@ -6797,7 +6573,7 @@
           <a:sym typeface="Arial"/>
         </a:defRPr>
       </a:lvl3pPr>
-      <a:lvl4pPr marR="0" lvl="3" algn="l" rtl="0">
+      <a:lvl4pPr lvl="3" marR="0" rtl="0" algn="l">
         <a:lnSpc>
           <a:spcPct val="100000"/>
         </a:lnSpc>
@@ -6811,7 +6587,7 @@
           <a:srgbClr val="000000"/>
         </a:buClr>
         <a:buFont typeface="Arial"/>
-        <a:defRPr sz="1400" b="0" i="0" u="none" strike="noStrike" cap="none" spc="0">
+        <a:defRPr b="0" i="0" spc="0" sz="1400" u="none" cap="none" strike="noStrike">
           <a:solidFill>
             <a:srgbClr val="000000"/>
           </a:solidFill>
@@ -6821,7 +6597,7 @@
           <a:sym typeface="Arial"/>
         </a:defRPr>
       </a:lvl4pPr>
-      <a:lvl5pPr marR="0" lvl="4" algn="l" rtl="0">
+      <a:lvl5pPr lvl="4" marR="0" rtl="0" algn="l">
         <a:lnSpc>
           <a:spcPct val="100000"/>
         </a:lnSpc>
@@ -6835,7 +6611,7 @@
           <a:srgbClr val="000000"/>
         </a:buClr>
         <a:buFont typeface="Arial"/>
-        <a:defRPr sz="1400" b="0" i="0" u="none" strike="noStrike" cap="none" spc="0">
+        <a:defRPr b="0" i="0" spc="0" sz="1400" u="none" cap="none" strike="noStrike">
           <a:solidFill>
             <a:srgbClr val="000000"/>
           </a:solidFill>
@@ -6845,7 +6621,7 @@
           <a:sym typeface="Arial"/>
         </a:defRPr>
       </a:lvl5pPr>
-      <a:lvl6pPr marR="0" lvl="5" algn="l" rtl="0">
+      <a:lvl6pPr lvl="5" marR="0" rtl="0" algn="l">
         <a:lnSpc>
           <a:spcPct val="100000"/>
         </a:lnSpc>
@@ -6859,7 +6635,7 @@
           <a:srgbClr val="000000"/>
         </a:buClr>
         <a:buFont typeface="Arial"/>
-        <a:defRPr sz="1400" b="0" i="0" u="none" strike="noStrike" cap="none" spc="0">
+        <a:defRPr b="0" i="0" spc="0" sz="1400" u="none" cap="none" strike="noStrike">
           <a:solidFill>
             <a:srgbClr val="000000"/>
           </a:solidFill>
@@ -6869,7 +6645,7 @@
           <a:sym typeface="Arial"/>
         </a:defRPr>
       </a:lvl6pPr>
-      <a:lvl7pPr marR="0" lvl="6" algn="l" rtl="0">
+      <a:lvl7pPr lvl="6" marR="0" rtl="0" algn="l">
         <a:lnSpc>
           <a:spcPct val="100000"/>
         </a:lnSpc>
@@ -6883,7 +6659,7 @@
           <a:srgbClr val="000000"/>
         </a:buClr>
         <a:buFont typeface="Arial"/>
-        <a:defRPr sz="1400" b="0" i="0" u="none" strike="noStrike" cap="none" spc="0">
+        <a:defRPr b="0" i="0" spc="0" sz="1400" u="none" cap="none" strike="noStrike">
           <a:solidFill>
             <a:srgbClr val="000000"/>
           </a:solidFill>
@@ -6893,7 +6669,7 @@
           <a:sym typeface="Arial"/>
         </a:defRPr>
       </a:lvl7pPr>
-      <a:lvl8pPr marR="0" lvl="7" algn="l" rtl="0">
+      <a:lvl8pPr lvl="7" marR="0" rtl="0" algn="l">
         <a:lnSpc>
           <a:spcPct val="100000"/>
         </a:lnSpc>
@@ -6907,7 +6683,7 @@
           <a:srgbClr val="000000"/>
         </a:buClr>
         <a:buFont typeface="Arial"/>
-        <a:defRPr sz="1400" b="0" i="0" u="none" strike="noStrike" cap="none" spc="0">
+        <a:defRPr b="0" i="0" spc="0" sz="1400" u="none" cap="none" strike="noStrike">
           <a:solidFill>
             <a:srgbClr val="000000"/>
           </a:solidFill>
@@ -6917,7 +6693,7 @@
           <a:sym typeface="Arial"/>
         </a:defRPr>
       </a:lvl8pPr>
-      <a:lvl9pPr marR="0" lvl="8" algn="l" rtl="0">
+      <a:lvl9pPr lvl="8" marR="0" rtl="0" algn="l">
         <a:lnSpc>
           <a:spcPct val="100000"/>
         </a:lnSpc>
@@ -6931,7 +6707,7 @@
           <a:srgbClr val="000000"/>
         </a:buClr>
         <a:buFont typeface="Arial"/>
-        <a:defRPr sz="1400" b="0" i="0" u="none" strike="noStrike" cap="none" spc="0">
+        <a:defRPr b="0" i="0" spc="0" sz="1400" u="none" cap="none" strike="noStrike">
           <a:solidFill>
             <a:srgbClr val="000000"/>
           </a:solidFill>
@@ -6943,7 +6719,7 @@
       </a:lvl9pPr>
     </p:bodyStyle>
     <p:otherStyle>
-      <a:defPPr marR="0" lvl="0" algn="l" rtl="0">
+      <a:defPPr lvl="0" marR="0" rtl="0" algn="l">
         <a:lnSpc>
           <a:spcPct val="100000"/>
         </a:lnSpc>
@@ -6954,7 +6730,7 @@
           <a:spcPts val="0"/>
         </a:spcAft>
       </a:defPPr>
-      <a:lvl1pPr marR="0" lvl="0" algn="l" rtl="0">
+      <a:lvl1pPr lvl="0" marR="0" rtl="0" algn="l">
         <a:lnSpc>
           <a:spcPct val="100000"/>
         </a:lnSpc>
@@ -6968,7 +6744,7 @@
           <a:srgbClr val="000000"/>
         </a:buClr>
         <a:buFont typeface="Arial"/>
-        <a:defRPr sz="1400" b="0" i="0" u="none" strike="noStrike" cap="none" spc="0">
+        <a:defRPr b="0" i="0" spc="0" sz="1400" u="none" cap="none" strike="noStrike">
           <a:solidFill>
             <a:srgbClr val="000000"/>
           </a:solidFill>
@@ -6978,7 +6754,7 @@
           <a:sym typeface="Arial"/>
         </a:defRPr>
       </a:lvl1pPr>
-      <a:lvl2pPr marR="0" lvl="1" algn="l" rtl="0">
+      <a:lvl2pPr lvl="1" marR="0" rtl="0" algn="l">
         <a:lnSpc>
           <a:spcPct val="100000"/>
         </a:lnSpc>
@@ -6992,7 +6768,7 @@
           <a:srgbClr val="000000"/>
         </a:buClr>
         <a:buFont typeface="Arial"/>
-        <a:defRPr sz="1400" b="0" i="0" u="none" strike="noStrike" cap="none" spc="0">
+        <a:defRPr b="0" i="0" spc="0" sz="1400" u="none" cap="none" strike="noStrike">
           <a:solidFill>
             <a:srgbClr val="000000"/>
           </a:solidFill>
@@ -7002,7 +6778,7 @@
           <a:sym typeface="Arial"/>
         </a:defRPr>
       </a:lvl2pPr>
-      <a:lvl3pPr marR="0" lvl="2" algn="l" rtl="0">
+      <a:lvl3pPr lvl="2" marR="0" rtl="0" algn="l">
         <a:lnSpc>
           <a:spcPct val="100000"/>
         </a:lnSpc>
@@ -7016,7 +6792,7 @@
           <a:srgbClr val="000000"/>
         </a:buClr>
         <a:buFont typeface="Arial"/>
-        <a:defRPr sz="1400" b="0" i="0" u="none" strike="noStrike" cap="none" spc="0">
+        <a:defRPr b="0" i="0" spc="0" sz="1400" u="none" cap="none" strike="noStrike">
           <a:solidFill>
             <a:srgbClr val="000000"/>
           </a:solidFill>
@@ -7026,7 +6802,7 @@
           <a:sym typeface="Arial"/>
         </a:defRPr>
       </a:lvl3pPr>
-      <a:lvl4pPr marR="0" lvl="3" algn="l" rtl="0">
+      <a:lvl4pPr lvl="3" marR="0" rtl="0" algn="l">
         <a:lnSpc>
           <a:spcPct val="100000"/>
         </a:lnSpc>
@@ -7040,7 +6816,7 @@
           <a:srgbClr val="000000"/>
         </a:buClr>
         <a:buFont typeface="Arial"/>
-        <a:defRPr sz="1400" b="0" i="0" u="none" strike="noStrike" cap="none" spc="0">
+        <a:defRPr b="0" i="0" spc="0" sz="1400" u="none" cap="none" strike="noStrike">
           <a:solidFill>
             <a:srgbClr val="000000"/>
           </a:solidFill>
@@ -7050,7 +6826,7 @@
           <a:sym typeface="Arial"/>
         </a:defRPr>
       </a:lvl4pPr>
-      <a:lvl5pPr marR="0" lvl="4" algn="l" rtl="0">
+      <a:lvl5pPr lvl="4" marR="0" rtl="0" algn="l">
         <a:lnSpc>
           <a:spcPct val="100000"/>
         </a:lnSpc>
@@ -7064,7 +6840,7 @@
           <a:srgbClr val="000000"/>
         </a:buClr>
         <a:buFont typeface="Arial"/>
-        <a:defRPr sz="1400" b="0" i="0" u="none" strike="noStrike" cap="none" spc="0">
+        <a:defRPr b="0" i="0" spc="0" sz="1400" u="none" cap="none" strike="noStrike">
           <a:solidFill>
             <a:srgbClr val="000000"/>
           </a:solidFill>
@@ -7074,7 +6850,7 @@
           <a:sym typeface="Arial"/>
         </a:defRPr>
       </a:lvl5pPr>
-      <a:lvl6pPr marR="0" lvl="5" algn="l" rtl="0">
+      <a:lvl6pPr lvl="5" marR="0" rtl="0" algn="l">
         <a:lnSpc>
           <a:spcPct val="100000"/>
         </a:lnSpc>
@@ -7088,7 +6864,7 @@
           <a:srgbClr val="000000"/>
         </a:buClr>
         <a:buFont typeface="Arial"/>
-        <a:defRPr sz="1400" b="0" i="0" u="none" strike="noStrike" cap="none" spc="0">
+        <a:defRPr b="0" i="0" spc="0" sz="1400" u="none" cap="none" strike="noStrike">
           <a:solidFill>
             <a:srgbClr val="000000"/>
           </a:solidFill>
@@ -7098,7 +6874,7 @@
           <a:sym typeface="Arial"/>
         </a:defRPr>
       </a:lvl6pPr>
-      <a:lvl7pPr marR="0" lvl="6" algn="l" rtl="0">
+      <a:lvl7pPr lvl="6" marR="0" rtl="0" algn="l">
         <a:lnSpc>
           <a:spcPct val="100000"/>
         </a:lnSpc>
@@ -7112,7 +6888,7 @@
           <a:srgbClr val="000000"/>
         </a:buClr>
         <a:buFont typeface="Arial"/>
-        <a:defRPr sz="1400" b="0" i="0" u="none" strike="noStrike" cap="none" spc="0">
+        <a:defRPr b="0" i="0" spc="0" sz="1400" u="none" cap="none" strike="noStrike">
           <a:solidFill>
             <a:srgbClr val="000000"/>
           </a:solidFill>
@@ -7122,7 +6898,7 @@
           <a:sym typeface="Arial"/>
         </a:defRPr>
       </a:lvl7pPr>
-      <a:lvl8pPr marR="0" lvl="7" algn="l" rtl="0">
+      <a:lvl8pPr lvl="7" marR="0" rtl="0" algn="l">
         <a:lnSpc>
           <a:spcPct val="100000"/>
         </a:lnSpc>
@@ -7136,7 +6912,7 @@
           <a:srgbClr val="000000"/>
         </a:buClr>
         <a:buFont typeface="Arial"/>
-        <a:defRPr sz="1400" b="0" i="0" u="none" strike="noStrike" cap="none" spc="0">
+        <a:defRPr b="0" i="0" spc="0" sz="1400" u="none" cap="none" strike="noStrike">
           <a:solidFill>
             <a:srgbClr val="000000"/>
           </a:solidFill>
@@ -7146,7 +6922,7 @@
           <a:sym typeface="Arial"/>
         </a:defRPr>
       </a:lvl8pPr>
-      <a:lvl9pPr marR="0" lvl="8" algn="l" rtl="0">
+      <a:lvl9pPr lvl="8" marR="0" rtl="0" algn="l">
         <a:lnSpc>
           <a:spcPct val="100000"/>
         </a:lnSpc>
@@ -7160,7 +6936,7 @@
           <a:srgbClr val="000000"/>
         </a:buClr>
         <a:buFont typeface="Arial"/>
-        <a:defRPr sz="1400" b="0" i="0" u="none" strike="noStrike" cap="none" spc="0">
+        <a:defRPr b="0" i="0" spc="0" sz="1400" u="none" cap="none" strike="noStrike">
           <a:solidFill>
             <a:srgbClr val="000000"/>
           </a:solidFill>
@@ -7176,11 +6952,11 @@
 </file>
 
 <file path=ppt/slides/slide1.xml><?xml version="1.0" encoding="utf-8"?>
-<p:sld xmlns:a="http://schemas.openxmlformats.org/drawingml/2006/main" xmlns:r="http://schemas.openxmlformats.org/officeDocument/2006/relationships" xmlns:p="http://schemas.openxmlformats.org/presentationml/2006/main">
+<p:sld xmlns:a="http://schemas.openxmlformats.org/drawingml/2006/main" xmlns:r="http://schemas.openxmlformats.org/officeDocument/2006/relationships" xmlns:mc="http://schemas.openxmlformats.org/markup-compatibility/2006" xmlns:mv="urn:schemas-microsoft-com:mac:vml" xmlns:p="http://schemas.openxmlformats.org/presentationml/2006/main" xmlns:c="http://schemas.openxmlformats.org/drawingml/2006/chart" xmlns:dgm="http://schemas.openxmlformats.org/drawingml/2006/diagram" xmlns:o="urn:schemas-microsoft-com:office:office" xmlns:v="urn:schemas-microsoft-com:vml" xmlns:pvml="urn:schemas-microsoft-com:office:powerpoint" xmlns:com="http://schemas.openxmlformats.org/drawingml/2006/compatibility" xmlns:p14="http://schemas.microsoft.com/office/powerpoint/2010/main" xmlns:p15="http://schemas.microsoft.com/office/powerpoint/2012/main" xmlns:ahyp="http://schemas.microsoft.com/office/drawing/2018/hyperlinkcolor">
   <p:cSld>
     <p:spTree>
       <p:nvGrpSpPr>
-        <p:cNvPr id="1" name="Shape 53"/>
+        <p:cNvPr id="53" name="Shape 53"/>
         <p:cNvGrpSpPr/>
         <p:nvPr/>
       </p:nvGrpSpPr>
@@ -7212,12 +6988,12 @@
           </a:ln>
         </p:spPr>
         <p:txBody>
-          <a:bodyPr spcFirstLastPara="1" wrap="square" lIns="91425" tIns="91425" rIns="91425" bIns="91425" anchor="t" anchorCtr="0">
+          <a:bodyPr anchorCtr="0" anchor="t" bIns="91425" lIns="91425" spcFirstLastPara="1" rIns="91425" wrap="square" tIns="91425">
             <a:noAutofit/>
           </a:bodyPr>
           <a:lstStyle/>
           <a:p>
-            <a:pPr marL="0" lvl="0" indent="0" algn="l" rtl="0">
+            <a:pPr indent="0" lvl="0" marL="0" rtl="0" algn="l">
               <a:lnSpc>
                 <a:spcPct val="115000"/>
               </a:lnSpc>
@@ -7230,7 +7006,7 @@
               <a:buNone/>
             </a:pPr>
             <a:r>
-              <a:rPr sz="2200" dirty="0">
+              <a:rPr sz="2200">
                 <a:solidFill>
                   <a:srgbClr val="212121"/>
                 </a:solidFill>
@@ -7238,7 +7014,7 @@
               </a:rPr>
               <a:t>Team Details</a:t>
             </a:r>
-            <a:endParaRPr sz="2100" dirty="0">
+            <a:endParaRPr sz="2100">
               <a:latin typeface="Google Sans Flex SemiBold"/>
               <a:ea typeface="Google Sans Flex SemiBold"/>
               <a:cs typeface="Google Sans Flex SemiBold"/>
@@ -7252,7 +7028,7 @@
               </a:lnSpc>
             </a:pPr>
             <a:r>
-              <a:rPr sz="1400" dirty="0">
+              <a:rPr sz="1400">
                 <a:solidFill>
                   <a:srgbClr val="212121"/>
                 </a:solidFill>
@@ -7268,31 +7044,13 @@
               </a:lnSpc>
             </a:pPr>
             <a:r>
-              <a:rPr sz="1400" dirty="0">
-                <a:solidFill>
-                  <a:srgbClr val="212121"/>
-                </a:solidFill>
-                <a:latin typeface="Google Sans Flex"/>
-              </a:rPr>
-              <a:t>Team leader name: Kavita</a:t>
-            </a:r>
-            <a:r>
-              <a:rPr lang="en-IN" sz="1400">
-                <a:solidFill>
-                  <a:srgbClr val="212121"/>
-                </a:solidFill>
-                <a:latin typeface="Google Sans Flex"/>
-              </a:rPr>
-              <a:t> S</a:t>
-            </a:r>
-            <a:r>
               <a:rPr sz="1400">
                 <a:solidFill>
                   <a:srgbClr val="212121"/>
                 </a:solidFill>
                 <a:latin typeface="Google Sans Flex"/>
               </a:rPr>
-              <a:t> Chegaraddi</a:t>
+              <a:t>Team leader name: Kavita Chegaraddi</a:t>
             </a:r>
           </a:p>
           <a:p>
@@ -7302,7 +7060,7 @@
               </a:lnSpc>
             </a:pPr>
             <a:r>
-              <a:rPr sz="1400" dirty="0">
+              <a:rPr sz="1400">
                 <a:solidFill>
                   <a:srgbClr val="212121"/>
                 </a:solidFill>
@@ -7351,7 +7109,7 @@
           <a:blip r:embed="rId4">
             <a:alphaModFix/>
           </a:blip>
-          <a:srcRect b="98001"/>
+          <a:srcRect b="98001" l="0" r="0" t="0"/>
           <a:stretch/>
         </p:blipFill>
         <p:spPr>
@@ -7377,11 +7135,11 @@
 </file>
 
 <file path=ppt/slides/slide10.xml><?xml version="1.0" encoding="utf-8"?>
-<p:sld xmlns:a="http://schemas.openxmlformats.org/drawingml/2006/main" xmlns:r="http://schemas.openxmlformats.org/officeDocument/2006/relationships" xmlns:p="http://schemas.openxmlformats.org/presentationml/2006/main">
+<p:sld xmlns:a="http://schemas.openxmlformats.org/drawingml/2006/main" xmlns:r="http://schemas.openxmlformats.org/officeDocument/2006/relationships" xmlns:mc="http://schemas.openxmlformats.org/markup-compatibility/2006" xmlns:mv="urn:schemas-microsoft-com:mac:vml" xmlns:p="http://schemas.openxmlformats.org/presentationml/2006/main" xmlns:c="http://schemas.openxmlformats.org/drawingml/2006/chart" xmlns:dgm="http://schemas.openxmlformats.org/drawingml/2006/diagram" xmlns:o="urn:schemas-microsoft-com:office:office" xmlns:v="urn:schemas-microsoft-com:vml" xmlns:pvml="urn:schemas-microsoft-com:office:powerpoint" xmlns:com="http://schemas.openxmlformats.org/drawingml/2006/compatibility" xmlns:p14="http://schemas.microsoft.com/office/powerpoint/2010/main" xmlns:p15="http://schemas.microsoft.com/office/powerpoint/2012/main" xmlns:ahyp="http://schemas.microsoft.com/office/drawing/2018/hyperlinkcolor">
   <p:cSld>
     <p:spTree>
       <p:nvGrpSpPr>
-        <p:cNvPr id="1" name="Shape 123"/>
+        <p:cNvPr id="123" name="Shape 123"/>
         <p:cNvGrpSpPr/>
         <p:nvPr/>
       </p:nvGrpSpPr>
@@ -7403,7 +7161,7 @@
           <a:blip r:embed="rId3">
             <a:alphaModFix/>
           </a:blip>
-          <a:srcRect b="98001"/>
+          <a:srcRect b="98001" l="0" r="0" t="0"/>
           <a:stretch/>
         </p:blipFill>
         <p:spPr>
@@ -7470,20 +7228,23 @@
           </a:ln>
         </p:spPr>
         <p:txBody>
-          <a:bodyPr spcFirstLastPara="1" wrap="square" lIns="91425" tIns="91425" rIns="91425" bIns="91425" anchor="ctr" anchorCtr="0">
+          <a:bodyPr anchorCtr="0" anchor="ctr" bIns="91425" lIns="91425" spcFirstLastPara="1" rIns="91425" wrap="square" tIns="91425">
             <a:noAutofit/>
           </a:bodyPr>
           <a:lstStyle/>
           <a:p>
-            <a:pPr marL="0" lvl="0" indent="0" algn="ctr" rtl="0">
-              <a:spcBef>
-                <a:spcPts val="0"/>
-              </a:spcBef>
-              <a:spcAft>
-                <a:spcPts val="0"/>
-              </a:spcAft>
-              <a:buNone/>
-            </a:pPr>
+            <a:pPr indent="0" lvl="0" marL="0" rtl="0" algn="ctr">
+              <a:spcBef>
+                <a:spcPts val="0"/>
+              </a:spcBef>
+              <a:spcAft>
+                <a:spcPts val="0"/>
+              </a:spcAft>
+              <a:buNone/>
+            </a:pPr>
+            <a:r>
+              <a:t/>
+            </a:r>
             <a:endParaRPr/>
           </a:p>
         </p:txBody>
@@ -7508,12 +7269,12 @@
           </a:ln>
         </p:spPr>
         <p:txBody>
-          <a:bodyPr spcFirstLastPara="1" wrap="square" lIns="91425" tIns="91425" rIns="91425" bIns="91425" anchor="t" anchorCtr="0">
+          <a:bodyPr anchorCtr="0" anchor="t" bIns="91425" lIns="91425" spcFirstLastPara="1" rIns="91425" wrap="square" tIns="91425">
             <a:noAutofit/>
           </a:bodyPr>
           <a:lstStyle/>
           <a:p>
-            <a:pPr marL="0" lvl="0" indent="0" algn="l" rtl="0">
+            <a:pPr indent="0" lvl="0" marL="0" rtl="0" algn="l">
               <a:lnSpc>
                 <a:spcPct val="115000"/>
               </a:lnSpc>
@@ -7580,7 +7341,7 @@
                 </a:solidFill>
                 <a:latin typeface="Google Sans Flex"/>
               </a:rPr>
-              <a:t>•  Gemini API (Vertex AI): pay-per-call, multimodal + text — estimated low cost at pilot scale (a few thousand diagnoses/month)</a:t>
+              <a:t>•  Current deployed cost: $0 — no billing account, no credit card, anywhere in the stack</a:t>
             </a:r>
           </a:p>
           <a:p>
@@ -7599,7 +7360,7 @@
                 </a:solidFill>
                 <a:latin typeface="Google Sans Flex"/>
               </a:rPr>
-              <a:t>•  Vertex AI Search: billed per query + storage — a single regional disease guide (9 documents) is a negligible index size</a:t>
+              <a:t>•  Firebase Hosting: free Spark plan, no usage cap reached at this scale</a:t>
             </a:r>
           </a:p>
           <a:p>
@@ -7618,7 +7379,7 @@
                 </a:solidFill>
                 <a:latin typeface="Google Sans Flex"/>
               </a:rPr>
-              <a:t>•  Cloud Run + Firebase Hosting: both have a generous free tier; this workload stays within it at pilot scale</a:t>
+              <a:t>•  Gemini API: free tier via Google AI Studio — 20 requests/day per project for gemini-3.8-flash; each diagnosis now uses 2 calls (diagnosis + orchestration), so roughly 10 full diagnoses/day before the app gracefully falls back to deterministic logic for the rest of the day</a:t>
             </a:r>
           </a:p>
           <a:p>
@@ -7637,7 +7398,7 @@
                 </a:solidFill>
                 <a:latin typeface="Google Sans Flex"/>
               </a:rPr>
-              <a:t>•  Cloud Translation + Text-to-Speech: billed per character — Kannada advisory text is short (1–2 sentences per diagnosis)</a:t>
+              <a:t>•  Open-Meteo, Web Speech API: free, no quota observed in testing</a:t>
             </a:r>
           </a:p>
           <a:p>
@@ -7656,26 +7417,7 @@
                 </a:solidFill>
                 <a:latin typeface="Google Sans Flex"/>
               </a:rPr>
-              <a:t>•  Firestore: free tier covers a pilot-scale dealer directory and diagnosis history</a:t>
-            </a:r>
-          </a:p>
-          <a:p>
-            <a:pPr>
-              <a:lnSpc>
-                <a:spcPct val="120000"/>
-              </a:lnSpc>
-              <a:spcAft>
-                <a:spcPts val="600"/>
-              </a:spcAft>
-            </a:pPr>
-            <a:r>
-              <a:rPr sz="1400">
-                <a:solidFill>
-                  <a:srgbClr val="212121"/>
-                </a:solidFill>
-                <a:latin typeface="Google Sans Flex"/>
-              </a:rPr>
-              <a:t>•  Google Cloud's $300 new-account credit comfortably covers hackathon build and pilot testing</a:t>
+              <a:t>•  Scaling beyond the free tier: upgrading to a paid Gemini tier is the only cost that would be needed to raise the daily diagnosis cap — no other paid service is required even at higher usage, since there is no backend, database, or search service to scale</a:t>
             </a:r>
           </a:p>
         </p:txBody>
@@ -7689,11 +7431,11 @@
 </file>
 
 <file path=ppt/slides/slide11.xml><?xml version="1.0" encoding="utf-8"?>
-<p:sld xmlns:a="http://schemas.openxmlformats.org/drawingml/2006/main" xmlns:r="http://schemas.openxmlformats.org/officeDocument/2006/relationships" xmlns:p="http://schemas.openxmlformats.org/presentationml/2006/main">
+<p:sld xmlns:a="http://schemas.openxmlformats.org/drawingml/2006/main" xmlns:r="http://schemas.openxmlformats.org/officeDocument/2006/relationships" xmlns:mc="http://schemas.openxmlformats.org/markup-compatibility/2006" xmlns:mv="urn:schemas-microsoft-com:mac:vml" xmlns:p="http://schemas.openxmlformats.org/presentationml/2006/main" xmlns:c="http://schemas.openxmlformats.org/drawingml/2006/chart" xmlns:dgm="http://schemas.openxmlformats.org/drawingml/2006/diagram" xmlns:o="urn:schemas-microsoft-com:office:office" xmlns:v="urn:schemas-microsoft-com:vml" xmlns:pvml="urn:schemas-microsoft-com:office:powerpoint" xmlns:com="http://schemas.openxmlformats.org/drawingml/2006/compatibility" xmlns:p14="http://schemas.microsoft.com/office/powerpoint/2010/main" xmlns:p15="http://schemas.microsoft.com/office/powerpoint/2012/main" xmlns:ahyp="http://schemas.microsoft.com/office/drawing/2018/hyperlinkcolor">
   <p:cSld>
     <p:spTree>
       <p:nvGrpSpPr>
-        <p:cNvPr id="1" name="Shape 131"/>
+        <p:cNvPr id="131" name="Shape 131"/>
         <p:cNvGrpSpPr/>
         <p:nvPr/>
       </p:nvGrpSpPr>
@@ -7715,7 +7457,7 @@
           <a:blip r:embed="rId3">
             <a:alphaModFix/>
           </a:blip>
-          <a:srcRect b="98001"/>
+          <a:srcRect b="98001" l="0" r="0" t="0"/>
           <a:stretch/>
         </p:blipFill>
         <p:spPr>
@@ -7782,20 +7524,23 @@
           </a:ln>
         </p:spPr>
         <p:txBody>
-          <a:bodyPr spcFirstLastPara="1" wrap="square" lIns="91425" tIns="91425" rIns="91425" bIns="91425" anchor="ctr" anchorCtr="0">
+          <a:bodyPr anchorCtr="0" anchor="ctr" bIns="91425" lIns="91425" spcFirstLastPara="1" rIns="91425" wrap="square" tIns="91425">
             <a:noAutofit/>
           </a:bodyPr>
           <a:lstStyle/>
           <a:p>
-            <a:pPr marL="0" lvl="0" indent="0" algn="ctr" rtl="0">
-              <a:spcBef>
-                <a:spcPts val="0"/>
-              </a:spcBef>
-              <a:spcAft>
-                <a:spcPts val="0"/>
-              </a:spcAft>
-              <a:buNone/>
-            </a:pPr>
+            <a:pPr indent="0" lvl="0" marL="0" rtl="0" algn="ctr">
+              <a:spcBef>
+                <a:spcPts val="0"/>
+              </a:spcBef>
+              <a:spcAft>
+                <a:spcPts val="0"/>
+              </a:spcAft>
+              <a:buNone/>
+            </a:pPr>
+            <a:r>
+              <a:t/>
+            </a:r>
             <a:endParaRPr/>
           </a:p>
         </p:txBody>
@@ -7820,12 +7565,12 @@
           </a:ln>
         </p:spPr>
         <p:txBody>
-          <a:bodyPr spcFirstLastPara="1" wrap="square" lIns="91425" tIns="91425" rIns="91425" bIns="91425" anchor="t" anchorCtr="0">
+          <a:bodyPr anchorCtr="0" anchor="t" bIns="91425" lIns="91425" spcFirstLastPara="1" rIns="91425" wrap="square" tIns="91425">
             <a:noAutofit/>
           </a:bodyPr>
           <a:lstStyle/>
           <a:p>
-            <a:pPr marL="0" lvl="0" indent="0" algn="l" rtl="0">
+            <a:pPr indent="0" lvl="0" marL="0" rtl="0" algn="l">
               <a:lnSpc>
                 <a:spcPct val="115000"/>
               </a:lnSpc>
@@ -7912,11 +7657,11 @@
 </file>
 
 <file path=ppt/slides/slide12.xml><?xml version="1.0" encoding="utf-8"?>
-<p:sld xmlns:a="http://schemas.openxmlformats.org/drawingml/2006/main" xmlns:r="http://schemas.openxmlformats.org/officeDocument/2006/relationships" xmlns:p="http://schemas.openxmlformats.org/presentationml/2006/main">
+<p:sld xmlns:a="http://schemas.openxmlformats.org/drawingml/2006/main" xmlns:r="http://schemas.openxmlformats.org/officeDocument/2006/relationships" xmlns:mc="http://schemas.openxmlformats.org/markup-compatibility/2006" xmlns:mv="urn:schemas-microsoft-com:mac:vml" xmlns:p="http://schemas.openxmlformats.org/presentationml/2006/main" xmlns:c="http://schemas.openxmlformats.org/drawingml/2006/chart" xmlns:dgm="http://schemas.openxmlformats.org/drawingml/2006/diagram" xmlns:o="urn:schemas-microsoft-com:office:office" xmlns:v="urn:schemas-microsoft-com:vml" xmlns:pvml="urn:schemas-microsoft-com:office:powerpoint" xmlns:com="http://schemas.openxmlformats.org/drawingml/2006/compatibility" xmlns:p14="http://schemas.microsoft.com/office/powerpoint/2010/main" xmlns:p15="http://schemas.microsoft.com/office/powerpoint/2012/main" xmlns:ahyp="http://schemas.microsoft.com/office/drawing/2018/hyperlinkcolor">
   <p:cSld>
     <p:spTree>
       <p:nvGrpSpPr>
-        <p:cNvPr id="1" name="Shape 139"/>
+        <p:cNvPr id="139" name="Shape 139"/>
         <p:cNvGrpSpPr/>
         <p:nvPr/>
       </p:nvGrpSpPr>
@@ -7938,7 +7683,7 @@
           <a:blip r:embed="rId3">
             <a:alphaModFix/>
           </a:blip>
-          <a:srcRect b="98001"/>
+          <a:srcRect b="98001" l="0" r="0" t="0"/>
           <a:stretch/>
         </p:blipFill>
         <p:spPr>
@@ -8005,20 +7750,23 @@
           </a:ln>
         </p:spPr>
         <p:txBody>
-          <a:bodyPr spcFirstLastPara="1" wrap="square" lIns="91425" tIns="91425" rIns="91425" bIns="91425" anchor="ctr" anchorCtr="0">
+          <a:bodyPr anchorCtr="0" anchor="ctr" bIns="91425" lIns="91425" spcFirstLastPara="1" rIns="91425" wrap="square" tIns="91425">
             <a:noAutofit/>
           </a:bodyPr>
           <a:lstStyle/>
           <a:p>
-            <a:pPr marL="0" lvl="0" indent="0" algn="ctr" rtl="0">
-              <a:spcBef>
-                <a:spcPts val="0"/>
-              </a:spcBef>
-              <a:spcAft>
-                <a:spcPts val="0"/>
-              </a:spcAft>
-              <a:buNone/>
-            </a:pPr>
+            <a:pPr indent="0" lvl="0" marL="0" rtl="0" algn="ctr">
+              <a:spcBef>
+                <a:spcPts val="0"/>
+              </a:spcBef>
+              <a:spcAft>
+                <a:spcPts val="0"/>
+              </a:spcAft>
+              <a:buNone/>
+            </a:pPr>
+            <a:r>
+              <a:t/>
+            </a:r>
             <a:endParaRPr/>
           </a:p>
         </p:txBody>
@@ -8043,12 +7791,12 @@
           </a:ln>
         </p:spPr>
         <p:txBody>
-          <a:bodyPr spcFirstLastPara="1" wrap="square" lIns="91425" tIns="91425" rIns="91425" bIns="91425" anchor="t" anchorCtr="0">
+          <a:bodyPr anchorCtr="0" anchor="t" bIns="91425" lIns="91425" spcFirstLastPara="1" rIns="91425" wrap="square" tIns="91425">
             <a:noAutofit/>
           </a:bodyPr>
           <a:lstStyle/>
           <a:p>
-            <a:pPr marL="0" lvl="0" indent="0" algn="l" rtl="0">
+            <a:pPr indent="0" lvl="0" marL="0" rtl="0" algn="l">
               <a:lnSpc>
                 <a:spcPct val="115000"/>
               </a:lnSpc>
@@ -8105,17 +7853,17 @@
                 <a:spcPct val="120000"/>
               </a:lnSpc>
               <a:spcAft>
-                <a:spcPts val="600"/>
+                <a:spcPts val="500"/>
               </a:spcAft>
             </a:pPr>
             <a:r>
-              <a:rPr sz="1400">
+              <a:rPr sz="1300">
                 <a:solidFill>
                   <a:srgbClr val="212121"/>
                 </a:solidFill>
                 <a:latin typeface="Google Sans Flex"/>
               </a:rPr>
-              <a:t>•  Measured live against the running FastAPI backend (5 requests per endpoint, mock mode):</a:t>
+              <a:t>•  Measured live in the browser against the deployed static site (5 calls per operation):</a:t>
             </a:r>
           </a:p>
           <a:p>
@@ -8124,17 +7872,17 @@
                 <a:spcPct val="120000"/>
               </a:lnSpc>
               <a:spcAft>
-                <a:spcPts val="600"/>
+                <a:spcPts val="500"/>
               </a:spcAft>
             </a:pPr>
             <a:r>
-              <a:rPr sz="1400">
+              <a:rPr sz="1300">
                 <a:solidFill>
                   <a:srgbClr val="212121"/>
                 </a:solidFill>
                 <a:latin typeface="Google Sans Flex"/>
               </a:rPr>
-              <a:t>•  GET /health — avg 5ms</a:t>
+              <a:t>•  RAG retrieval (TF-IDF index build, cold) — ~92ms once per session; warm lookups &lt;1ms</a:t>
             </a:r>
           </a:p>
           <a:p>
@@ -8143,17 +7891,17 @@
                 <a:spcPct val="120000"/>
               </a:lnSpc>
               <a:spcAft>
-                <a:spcPts val="600"/>
+                <a:spcPts val="500"/>
               </a:spcAft>
             </a:pPr>
             <a:r>
-              <a:rPr sz="1400">
+              <a:rPr sz="1300">
                 <a:solidFill>
                   <a:srgbClr val="212121"/>
                 </a:solidFill>
                 <a:latin typeface="Google Sans Flex"/>
               </a:rPr>
-              <a:t>•  GET /dealer-lookup — avg 9ms</a:t>
+              <a:t>•  Dealer / sell-price lookup — ~0.1–2.5ms (in-memory JSON lookups)</a:t>
             </a:r>
           </a:p>
           <a:p>
@@ -8162,17 +7910,17 @@
                 <a:spcPct val="120000"/>
               </a:lnSpc>
               <a:spcAft>
-                <a:spcPts val="600"/>
+                <a:spcPts val="500"/>
               </a:spcAft>
             </a:pPr>
             <a:r>
-              <a:rPr sz="1400">
+              <a:rPr sz="1300">
                 <a:solidFill>
                   <a:srgbClr val="212121"/>
                 </a:solidFill>
                 <a:latin typeface="Google Sans Flex"/>
               </a:rPr>
-              <a:t>•  GET /outbreak-check — avg 30ms (geo-radius query over 300 diagnosis records)</a:t>
+              <a:t>•  Outbreak check (geo-radius over 300 diagnosis records) — ~3.6ms avg</a:t>
             </a:r>
           </a:p>
           <a:p>
@@ -8181,17 +7929,17 @@
                 <a:spcPct val="120000"/>
               </a:lnSpc>
               <a:spcAft>
-                <a:spcPts val="600"/>
+                <a:spcPts val="500"/>
               </a:spcAft>
             </a:pPr>
             <a:r>
-              <a:rPr sz="1400">
+              <a:rPr sz="1300">
                 <a:solidFill>
                   <a:srgbClr val="212121"/>
                 </a:solidFill>
                 <a:latin typeface="Google Sans Flex"/>
               </a:rPr>
-              <a:t>•  GET /district-dashboard — avg 24ms (full district aggregation, anonymized to village level)</a:t>
+              <a:t>•  District dashboard snapshot load — ~17ms avg</a:t>
             </a:r>
           </a:p>
           <a:p>
@@ -8200,17 +7948,17 @@
                 <a:spcPct val="120000"/>
               </a:lnSpc>
               <a:spcAft>
-                <a:spcPts val="600"/>
+                <a:spcPts val="500"/>
               </a:spcAft>
             </a:pPr>
             <a:r>
-              <a:rPr sz="1400">
+              <a:rPr sz="1300">
                 <a:solidFill>
                   <a:srgbClr val="212121"/>
                 </a:solidFill>
                 <a:latin typeface="Google Sans Flex"/>
               </a:rPr>
-              <a:t>•  POST /diagnose (full pipeline incl. live Open-Meteo weather call) — avg 924ms</a:t>
+              <a:t>•  Weather (live Open-Meteo call) — ~660ms avg (external network call)</a:t>
             </a:r>
           </a:p>
           <a:p>
@@ -8219,17 +7967,36 @@
                 <a:spcPct val="120000"/>
               </a:lnSpc>
               <a:spcAft>
-                <a:spcPts val="600"/>
+                <a:spcPts val="500"/>
               </a:spcAft>
             </a:pPr>
             <a:r>
-              <a:rPr sz="1400">
+              <a:rPr sz="1300">
                 <a:solidFill>
                   <a:srgbClr val="212121"/>
                 </a:solidFill>
                 <a:latin typeface="Google Sans Flex"/>
               </a:rPr>
-              <a:t>•  Verified end-to-end with Playwright against the live browser UI — zero console errors across the main app and the district dashboard</a:t>
+              <a:t>•  Full diagnosis pipeline (2 Gemini calls: diagnosis + orchestration) — several seconds under normal quota; up to ~20s worst case if quota is exhausted and both calls exhaust retries before falling back</a:t>
+            </a:r>
+          </a:p>
+          <a:p>
+            <a:pPr>
+              <a:lnSpc>
+                <a:spcPct val="120000"/>
+              </a:lnSpc>
+              <a:spcAft>
+                <a:spcPts val="500"/>
+              </a:spcAft>
+            </a:pPr>
+            <a:r>
+              <a:rPr sz="1300">
+                <a:solidFill>
+                  <a:srgbClr val="212121"/>
+                </a:solidFill>
+                <a:latin typeface="Google Sans Flex"/>
+              </a:rPr>
+              <a:t>•  Verified end-to-end with Playwright against the live deployed URL, with zero local servers running — confirms zero hidden dependency on anything other than the public Gemini and Open-Meteo APIs</a:t>
             </a:r>
           </a:p>
         </p:txBody>
@@ -8243,11 +8010,11 @@
 </file>
 
 <file path=ppt/slides/slide13.xml><?xml version="1.0" encoding="utf-8"?>
-<p:sld xmlns:a="http://schemas.openxmlformats.org/drawingml/2006/main" xmlns:r="http://schemas.openxmlformats.org/officeDocument/2006/relationships" xmlns:p="http://schemas.openxmlformats.org/presentationml/2006/main">
+<p:sld xmlns:a="http://schemas.openxmlformats.org/drawingml/2006/main" xmlns:r="http://schemas.openxmlformats.org/officeDocument/2006/relationships" xmlns:mc="http://schemas.openxmlformats.org/markup-compatibility/2006" xmlns:mv="urn:schemas-microsoft-com:mac:vml" xmlns:p="http://schemas.openxmlformats.org/presentationml/2006/main" xmlns:c="http://schemas.openxmlformats.org/drawingml/2006/chart" xmlns:dgm="http://schemas.openxmlformats.org/drawingml/2006/diagram" xmlns:o="urn:schemas-microsoft-com:office:office" xmlns:v="urn:schemas-microsoft-com:vml" xmlns:pvml="urn:schemas-microsoft-com:office:powerpoint" xmlns:com="http://schemas.openxmlformats.org/drawingml/2006/compatibility" xmlns:p14="http://schemas.microsoft.com/office/powerpoint/2010/main" xmlns:p15="http://schemas.microsoft.com/office/powerpoint/2012/main" xmlns:ahyp="http://schemas.microsoft.com/office/drawing/2018/hyperlinkcolor">
   <p:cSld>
     <p:spTree>
       <p:nvGrpSpPr>
-        <p:cNvPr id="1" name="Shape 147"/>
+        <p:cNvPr id="147" name="Shape 147"/>
         <p:cNvGrpSpPr/>
         <p:nvPr/>
       </p:nvGrpSpPr>
@@ -8269,7 +8036,7 @@
           <a:blip r:embed="rId3">
             <a:alphaModFix/>
           </a:blip>
-          <a:srcRect b="98001"/>
+          <a:srcRect b="98001" l="0" r="0" t="0"/>
           <a:stretch/>
         </p:blipFill>
         <p:spPr>
@@ -8336,20 +8103,23 @@
           </a:ln>
         </p:spPr>
         <p:txBody>
-          <a:bodyPr spcFirstLastPara="1" wrap="square" lIns="91425" tIns="91425" rIns="91425" bIns="91425" anchor="ctr" anchorCtr="0">
+          <a:bodyPr anchorCtr="0" anchor="ctr" bIns="91425" lIns="91425" spcFirstLastPara="1" rIns="91425" wrap="square" tIns="91425">
             <a:noAutofit/>
           </a:bodyPr>
           <a:lstStyle/>
           <a:p>
-            <a:pPr marL="0" lvl="0" indent="0" algn="ctr" rtl="0">
-              <a:spcBef>
-                <a:spcPts val="0"/>
-              </a:spcBef>
-              <a:spcAft>
-                <a:spcPts val="0"/>
-              </a:spcAft>
-              <a:buNone/>
-            </a:pPr>
+            <a:pPr indent="0" lvl="0" marL="0" rtl="0" algn="ctr">
+              <a:spcBef>
+                <a:spcPts val="0"/>
+              </a:spcBef>
+              <a:spcAft>
+                <a:spcPts val="0"/>
+              </a:spcAft>
+              <a:buNone/>
+            </a:pPr>
+            <a:r>
+              <a:t/>
+            </a:r>
             <a:endParaRPr/>
           </a:p>
         </p:txBody>
@@ -8374,12 +8144,12 @@
           </a:ln>
         </p:spPr>
         <p:txBody>
-          <a:bodyPr spcFirstLastPara="1" wrap="square" lIns="91425" tIns="91425" rIns="91425" bIns="91425" anchor="t" anchorCtr="0">
+          <a:bodyPr anchorCtr="0" anchor="t" bIns="91425" lIns="91425" spcFirstLastPara="1" rIns="91425" wrap="square" tIns="91425">
             <a:noAutofit/>
           </a:bodyPr>
           <a:lstStyle/>
           <a:p>
-            <a:pPr marL="0" lvl="0" indent="0" algn="l" rtl="0">
+            <a:pPr indent="0" lvl="0" marL="0" rtl="0" algn="l">
               <a:lnSpc>
                 <a:spcPct val="115000"/>
               </a:lnSpc>
@@ -8498,11 +8268,11 @@
 </file>
 
 <file path=ppt/slides/slide14.xml><?xml version="1.0" encoding="utf-8"?>
-<p:sld xmlns:a="http://schemas.openxmlformats.org/drawingml/2006/main" xmlns:r="http://schemas.openxmlformats.org/officeDocument/2006/relationships" xmlns:p="http://schemas.openxmlformats.org/presentationml/2006/main">
+<p:sld xmlns:a="http://schemas.openxmlformats.org/drawingml/2006/main" xmlns:r="http://schemas.openxmlformats.org/officeDocument/2006/relationships" xmlns:mc="http://schemas.openxmlformats.org/markup-compatibility/2006" xmlns:mv="urn:schemas-microsoft-com:mac:vml" xmlns:p="http://schemas.openxmlformats.org/presentationml/2006/main" xmlns:c="http://schemas.openxmlformats.org/drawingml/2006/chart" xmlns:dgm="http://schemas.openxmlformats.org/drawingml/2006/diagram" xmlns:o="urn:schemas-microsoft-com:office:office" xmlns:v="urn:schemas-microsoft-com:vml" xmlns:pvml="urn:schemas-microsoft-com:office:powerpoint" xmlns:com="http://schemas.openxmlformats.org/drawingml/2006/compatibility" xmlns:p14="http://schemas.microsoft.com/office/powerpoint/2010/main" xmlns:p15="http://schemas.microsoft.com/office/powerpoint/2012/main" xmlns:ahyp="http://schemas.microsoft.com/office/drawing/2018/hyperlinkcolor">
   <p:cSld>
     <p:spTree>
       <p:nvGrpSpPr>
-        <p:cNvPr id="1" name="Shape 155"/>
+        <p:cNvPr id="155" name="Shape 155"/>
         <p:cNvGrpSpPr/>
         <p:nvPr/>
       </p:nvGrpSpPr>
@@ -8524,7 +8294,7 @@
           <a:blip r:embed="rId3">
             <a:alphaModFix/>
           </a:blip>
-          <a:srcRect b="98001"/>
+          <a:srcRect b="98001" l="0" r="0" t="0"/>
           <a:stretch/>
         </p:blipFill>
         <p:spPr>
@@ -8591,20 +8361,23 @@
           </a:ln>
         </p:spPr>
         <p:txBody>
-          <a:bodyPr spcFirstLastPara="1" wrap="square" lIns="91425" tIns="91425" rIns="91425" bIns="91425" anchor="ctr" anchorCtr="0">
+          <a:bodyPr anchorCtr="0" anchor="ctr" bIns="91425" lIns="91425" spcFirstLastPara="1" rIns="91425" wrap="square" tIns="91425">
             <a:noAutofit/>
           </a:bodyPr>
           <a:lstStyle/>
           <a:p>
-            <a:pPr marL="0" lvl="0" indent="0" algn="ctr" rtl="0">
-              <a:spcBef>
-                <a:spcPts val="0"/>
-              </a:spcBef>
-              <a:spcAft>
-                <a:spcPts val="0"/>
-              </a:spcAft>
-              <a:buNone/>
-            </a:pPr>
+            <a:pPr indent="0" lvl="0" marL="0" rtl="0" algn="ctr">
+              <a:spcBef>
+                <a:spcPts val="0"/>
+              </a:spcBef>
+              <a:spcAft>
+                <a:spcPts val="0"/>
+              </a:spcAft>
+              <a:buNone/>
+            </a:pPr>
+            <a:r>
+              <a:t/>
+            </a:r>
             <a:endParaRPr/>
           </a:p>
         </p:txBody>
@@ -8629,12 +8402,12 @@
           </a:ln>
         </p:spPr>
         <p:txBody>
-          <a:bodyPr spcFirstLastPara="1" wrap="square" lIns="91425" tIns="91425" rIns="91425" bIns="91425" anchor="t" anchorCtr="0">
+          <a:bodyPr anchorCtr="0" anchor="t" bIns="91425" lIns="91425" spcFirstLastPara="1" rIns="91425" wrap="square" tIns="91425">
             <a:noAutofit/>
           </a:bodyPr>
           <a:lstStyle/>
           <a:p>
-            <a:pPr marL="0" lvl="0" indent="0" algn="l" rtl="0">
+            <a:pPr indent="0" lvl="0" marL="0" rtl="0" algn="l">
               <a:lnSpc>
                 <a:spcPct val="115000"/>
               </a:lnSpc>
@@ -8675,7 +8448,7 @@
                 </a:solidFill>
                 <a:latin typeface="Google Sans Flex"/>
               </a:rPr>
-              <a:t>GitHub Public Repository: [add link before submission]</a:t>
+              <a:t>GitHub Public Repository: https://github.com/Kavitacs08/kisan-mitra</a:t>
             </a:r>
           </a:p>
           <a:p>
@@ -8707,7 +8480,7 @@
                 </a:solidFill>
                 <a:latin typeface="Google Sans Flex"/>
               </a:rPr>
-              <a:t>Final Product Link: [add link before submission]</a:t>
+              <a:t>Final Product Link: https://kisan-mitra-2026-56c5d.web.app</a:t>
             </a:r>
           </a:p>
         </p:txBody>
@@ -8721,11 +8494,11 @@
 </file>
 
 <file path=ppt/slides/slide15.xml><?xml version="1.0" encoding="utf-8"?>
-<p:sld xmlns:a="http://schemas.openxmlformats.org/drawingml/2006/main" xmlns:r="http://schemas.openxmlformats.org/officeDocument/2006/relationships" xmlns:p="http://schemas.openxmlformats.org/presentationml/2006/main">
+<p:sld xmlns:a="http://schemas.openxmlformats.org/drawingml/2006/main" xmlns:r="http://schemas.openxmlformats.org/officeDocument/2006/relationships" xmlns:mc="http://schemas.openxmlformats.org/markup-compatibility/2006" xmlns:mv="urn:schemas-microsoft-com:mac:vml" xmlns:p="http://schemas.openxmlformats.org/presentationml/2006/main" xmlns:c="http://schemas.openxmlformats.org/drawingml/2006/chart" xmlns:dgm="http://schemas.openxmlformats.org/drawingml/2006/diagram" xmlns:o="urn:schemas-microsoft-com:office:office" xmlns:v="urn:schemas-microsoft-com:vml" xmlns:pvml="urn:schemas-microsoft-com:office:powerpoint" xmlns:com="http://schemas.openxmlformats.org/drawingml/2006/compatibility" xmlns:p14="http://schemas.microsoft.com/office/powerpoint/2010/main" xmlns:p15="http://schemas.microsoft.com/office/powerpoint/2012/main" xmlns:ahyp="http://schemas.microsoft.com/office/drawing/2018/hyperlinkcolor">
   <p:cSld>
     <p:spTree>
       <p:nvGrpSpPr>
-        <p:cNvPr id="1" name="Shape 163"/>
+        <p:cNvPr id="163" name="Shape 163"/>
         <p:cNvGrpSpPr/>
         <p:nvPr/>
       </p:nvGrpSpPr>
@@ -8747,7 +8520,7 @@
           <a:blip r:embed="rId3">
             <a:alphaModFix/>
           </a:blip>
-          <a:srcRect b="98001"/>
+          <a:srcRect b="98001" l="0" r="0" t="0"/>
           <a:stretch/>
         </p:blipFill>
         <p:spPr>
@@ -8814,20 +8587,23 @@
           </a:ln>
         </p:spPr>
         <p:txBody>
-          <a:bodyPr spcFirstLastPara="1" wrap="square" lIns="91425" tIns="91425" rIns="91425" bIns="91425" anchor="ctr" anchorCtr="0">
+          <a:bodyPr anchorCtr="0" anchor="ctr" bIns="91425" lIns="91425" spcFirstLastPara="1" rIns="91425" wrap="square" tIns="91425">
             <a:noAutofit/>
           </a:bodyPr>
           <a:lstStyle/>
           <a:p>
-            <a:pPr marL="0" lvl="0" indent="0" algn="ctr" rtl="0">
-              <a:spcBef>
-                <a:spcPts val="0"/>
-              </a:spcBef>
-              <a:spcAft>
-                <a:spcPts val="0"/>
-              </a:spcAft>
-              <a:buNone/>
-            </a:pPr>
+            <a:pPr indent="0" lvl="0" marL="0" rtl="0" algn="ctr">
+              <a:spcBef>
+                <a:spcPts val="0"/>
+              </a:spcBef>
+              <a:spcAft>
+                <a:spcPts val="0"/>
+              </a:spcAft>
+              <a:buNone/>
+            </a:pPr>
+            <a:r>
+              <a:t/>
+            </a:r>
             <a:endParaRPr/>
           </a:p>
         </p:txBody>
@@ -8841,11 +8617,11 @@
 </file>
 
 <file path=ppt/slides/slide16.xml><?xml version="1.0" encoding="utf-8"?>
-<p:sld xmlns:a="http://schemas.openxmlformats.org/drawingml/2006/main" xmlns:r="http://schemas.openxmlformats.org/officeDocument/2006/relationships" xmlns:p="http://schemas.openxmlformats.org/presentationml/2006/main">
+<p:sld xmlns:a="http://schemas.openxmlformats.org/drawingml/2006/main" xmlns:r="http://schemas.openxmlformats.org/officeDocument/2006/relationships" xmlns:mc="http://schemas.openxmlformats.org/markup-compatibility/2006" xmlns:mv="urn:schemas-microsoft-com:mac:vml" xmlns:p="http://schemas.openxmlformats.org/presentationml/2006/main" xmlns:c="http://schemas.openxmlformats.org/drawingml/2006/chart" xmlns:dgm="http://schemas.openxmlformats.org/drawingml/2006/diagram" xmlns:o="urn:schemas-microsoft-com:office:office" xmlns:v="urn:schemas-microsoft-com:vml" xmlns:pvml="urn:schemas-microsoft-com:office:powerpoint" xmlns:com="http://schemas.openxmlformats.org/drawingml/2006/compatibility" xmlns:p14="http://schemas.microsoft.com/office/powerpoint/2010/main" xmlns:p15="http://schemas.microsoft.com/office/powerpoint/2012/main" xmlns:ahyp="http://schemas.microsoft.com/office/drawing/2018/hyperlinkcolor">
   <p:cSld>
     <p:spTree>
       <p:nvGrpSpPr>
-        <p:cNvPr id="1" name="Shape 170"/>
+        <p:cNvPr id="170" name="Shape 170"/>
         <p:cNvGrpSpPr/>
         <p:nvPr/>
       </p:nvGrpSpPr>
@@ -8867,7 +8643,7 @@
           <a:blip r:embed="rId3">
             <a:alphaModFix/>
           </a:blip>
-          <a:srcRect b="98001"/>
+          <a:srcRect b="98001" l="0" r="0" t="0"/>
           <a:stretch/>
         </p:blipFill>
         <p:spPr>
@@ -8921,11 +8697,11 @@
 </file>
 
 <file path=ppt/slides/slide2.xml><?xml version="1.0" encoding="utf-8"?>
-<p:sld xmlns:a="http://schemas.openxmlformats.org/drawingml/2006/main" xmlns:r="http://schemas.openxmlformats.org/officeDocument/2006/relationships" xmlns:p="http://schemas.openxmlformats.org/presentationml/2006/main">
+<p:sld xmlns:a="http://schemas.openxmlformats.org/drawingml/2006/main" xmlns:r="http://schemas.openxmlformats.org/officeDocument/2006/relationships" xmlns:mc="http://schemas.openxmlformats.org/markup-compatibility/2006" xmlns:mv="urn:schemas-microsoft-com:mac:vml" xmlns:p="http://schemas.openxmlformats.org/presentationml/2006/main" xmlns:c="http://schemas.openxmlformats.org/drawingml/2006/chart" xmlns:dgm="http://schemas.openxmlformats.org/drawingml/2006/diagram" xmlns:o="urn:schemas-microsoft-com:office:office" xmlns:v="urn:schemas-microsoft-com:vml" xmlns:pvml="urn:schemas-microsoft-com:office:powerpoint" xmlns:com="http://schemas.openxmlformats.org/drawingml/2006/compatibility" xmlns:p14="http://schemas.microsoft.com/office/powerpoint/2010/main" xmlns:p15="http://schemas.microsoft.com/office/powerpoint/2012/main" xmlns:ahyp="http://schemas.microsoft.com/office/drawing/2018/hyperlinkcolor">
   <p:cSld>
     <p:spTree>
       <p:nvGrpSpPr>
-        <p:cNvPr id="1" name="Shape 60"/>
+        <p:cNvPr id="60" name="Shape 60"/>
         <p:cNvGrpSpPr/>
         <p:nvPr/>
       </p:nvGrpSpPr>
@@ -8947,7 +8723,7 @@
           <a:blip r:embed="rId3">
             <a:alphaModFix/>
           </a:blip>
-          <a:srcRect b="98001"/>
+          <a:srcRect b="98001" l="0" r="0" t="0"/>
           <a:stretch/>
         </p:blipFill>
         <p:spPr>
@@ -8986,20 +8762,23 @@
           </a:ln>
         </p:spPr>
         <p:txBody>
-          <a:bodyPr spcFirstLastPara="1" wrap="square" lIns="91425" tIns="91425" rIns="91425" bIns="91425" anchor="ctr" anchorCtr="0">
+          <a:bodyPr anchorCtr="0" anchor="ctr" bIns="91425" lIns="91425" spcFirstLastPara="1" rIns="91425" wrap="square" tIns="91425">
             <a:noAutofit/>
           </a:bodyPr>
           <a:lstStyle/>
           <a:p>
-            <a:pPr marL="0" lvl="0" indent="0" algn="ctr" rtl="0">
-              <a:spcBef>
-                <a:spcPts val="0"/>
-              </a:spcBef>
-              <a:spcAft>
-                <a:spcPts val="0"/>
-              </a:spcAft>
-              <a:buNone/>
-            </a:pPr>
+            <a:pPr indent="0" lvl="0" marL="0" rtl="0" algn="ctr">
+              <a:spcBef>
+                <a:spcPts val="0"/>
+              </a:spcBef>
+              <a:spcAft>
+                <a:spcPts val="0"/>
+              </a:spcAft>
+              <a:buNone/>
+            </a:pPr>
+            <a:r>
+              <a:t/>
+            </a:r>
             <a:endParaRPr/>
           </a:p>
         </p:txBody>
@@ -9024,12 +8803,12 @@
           </a:ln>
         </p:spPr>
         <p:txBody>
-          <a:bodyPr spcFirstLastPara="1" wrap="square" lIns="91425" tIns="91425" rIns="91425" bIns="91425" anchor="t" anchorCtr="0">
+          <a:bodyPr anchorCtr="0" anchor="t" bIns="91425" lIns="91425" spcFirstLastPara="1" rIns="91425" wrap="square" tIns="91425">
             <a:noAutofit/>
           </a:bodyPr>
           <a:lstStyle/>
           <a:p>
-            <a:pPr marL="0" lvl="0" indent="0" algn="l" rtl="0">
+            <a:pPr indent="0" lvl="0" marL="0" rtl="0" algn="l">
               <a:spcBef>
                 <a:spcPts val="0"/>
               </a:spcBef>
@@ -9107,15 +8886,18 @@
             </a:endParaRPr>
           </a:p>
           <a:p>
-            <a:pPr marL="0" lvl="0" indent="0" algn="l" rtl="0">
-              <a:spcBef>
-                <a:spcPts val="0"/>
-              </a:spcBef>
-              <a:spcAft>
-                <a:spcPts val="0"/>
-              </a:spcAft>
-              <a:buNone/>
-            </a:pPr>
+            <a:pPr indent="0" lvl="0" marL="0" rtl="0" algn="l">
+              <a:spcBef>
+                <a:spcPts val="0"/>
+              </a:spcBef>
+              <a:spcAft>
+                <a:spcPts val="0"/>
+              </a:spcAft>
+              <a:buNone/>
+            </a:pPr>
+            <a:r>
+              <a:t/>
+            </a:r>
             <a:endParaRPr sz="1100">
               <a:solidFill>
                 <a:schemeClr val="lt1"/>
@@ -9155,7 +8937,7 @@
             <a:noFill/>
           </a:ln>
           <a:effectLst>
-            <a:outerShdw blurRad="971550" dist="19050" dir="5400000" algn="bl" rotWithShape="0">
+            <a:outerShdw blurRad="971550" rotWithShape="0" algn="bl" dir="5400000" dist="19050">
               <a:schemeClr val="lt1">
                 <a:alpha val="50000"/>
               </a:schemeClr>
@@ -9172,11 +8954,11 @@
 </file>
 
 <file path=ppt/slides/slide3.xml><?xml version="1.0" encoding="utf-8"?>
-<p:sld xmlns:a="http://schemas.openxmlformats.org/drawingml/2006/main" xmlns:r="http://schemas.openxmlformats.org/officeDocument/2006/relationships" xmlns:p="http://schemas.openxmlformats.org/presentationml/2006/main">
+<p:sld xmlns:a="http://schemas.openxmlformats.org/drawingml/2006/main" xmlns:r="http://schemas.openxmlformats.org/officeDocument/2006/relationships" xmlns:mc="http://schemas.openxmlformats.org/markup-compatibility/2006" xmlns:mv="urn:schemas-microsoft-com:mac:vml" xmlns:p="http://schemas.openxmlformats.org/presentationml/2006/main" xmlns:c="http://schemas.openxmlformats.org/drawingml/2006/chart" xmlns:dgm="http://schemas.openxmlformats.org/drawingml/2006/diagram" xmlns:o="urn:schemas-microsoft-com:office:office" xmlns:v="urn:schemas-microsoft-com:vml" xmlns:pvml="urn:schemas-microsoft-com:office:powerpoint" xmlns:com="http://schemas.openxmlformats.org/drawingml/2006/compatibility" xmlns:p14="http://schemas.microsoft.com/office/powerpoint/2010/main" xmlns:p15="http://schemas.microsoft.com/office/powerpoint/2012/main" xmlns:ahyp="http://schemas.microsoft.com/office/drawing/2018/hyperlinkcolor">
   <p:cSld>
     <p:spTree>
       <p:nvGrpSpPr>
-        <p:cNvPr id="1" name="Shape 68"/>
+        <p:cNvPr id="68" name="Shape 68"/>
         <p:cNvGrpSpPr/>
         <p:nvPr/>
       </p:nvGrpSpPr>
@@ -9238,20 +9020,23 @@
           </a:ln>
         </p:spPr>
         <p:txBody>
-          <a:bodyPr spcFirstLastPara="1" wrap="square" lIns="91425" tIns="91425" rIns="91425" bIns="91425" anchor="ctr" anchorCtr="0">
+          <a:bodyPr anchorCtr="0" anchor="ctr" bIns="91425" lIns="91425" spcFirstLastPara="1" rIns="91425" wrap="square" tIns="91425">
             <a:noAutofit/>
           </a:bodyPr>
           <a:lstStyle/>
           <a:p>
-            <a:pPr marL="0" lvl="0" indent="0" algn="ctr" rtl="0">
-              <a:spcBef>
-                <a:spcPts val="0"/>
-              </a:spcBef>
-              <a:spcAft>
-                <a:spcPts val="0"/>
-              </a:spcAft>
-              <a:buNone/>
-            </a:pPr>
+            <a:pPr indent="0" lvl="0" marL="0" rtl="0" algn="ctr">
+              <a:spcBef>
+                <a:spcPts val="0"/>
+              </a:spcBef>
+              <a:spcAft>
+                <a:spcPts val="0"/>
+              </a:spcAft>
+              <a:buNone/>
+            </a:pPr>
+            <a:r>
+              <a:t/>
+            </a:r>
             <a:endParaRPr/>
           </a:p>
         </p:txBody>
@@ -9276,12 +9061,12 @@
           </a:ln>
         </p:spPr>
         <p:txBody>
-          <a:bodyPr spcFirstLastPara="1" wrap="square" lIns="91425" tIns="91425" rIns="91425" bIns="91425" anchor="t" anchorCtr="0">
+          <a:bodyPr anchorCtr="0" anchor="t" bIns="91425" lIns="91425" spcFirstLastPara="1" rIns="91425" wrap="square" tIns="91425">
             <a:noAutofit/>
           </a:bodyPr>
           <a:lstStyle/>
           <a:p>
-            <a:pPr marL="0" lvl="0" indent="0" algn="l" rtl="0">
+            <a:pPr indent="0" lvl="0" marL="0" rtl="0" algn="l">
               <a:lnSpc>
                 <a:spcPct val="115000"/>
               </a:lnSpc>
@@ -9419,11 +9204,11 @@
 </file>
 
 <file path=ppt/slides/slide4.xml><?xml version="1.0" encoding="utf-8"?>
-<p:sld xmlns:a="http://schemas.openxmlformats.org/drawingml/2006/main" xmlns:r="http://schemas.openxmlformats.org/officeDocument/2006/relationships" xmlns:p="http://schemas.openxmlformats.org/presentationml/2006/main">
+<p:sld xmlns:a="http://schemas.openxmlformats.org/drawingml/2006/main" xmlns:r="http://schemas.openxmlformats.org/officeDocument/2006/relationships" xmlns:mc="http://schemas.openxmlformats.org/markup-compatibility/2006" xmlns:mv="urn:schemas-microsoft-com:mac:vml" xmlns:p="http://schemas.openxmlformats.org/presentationml/2006/main" xmlns:c="http://schemas.openxmlformats.org/drawingml/2006/chart" xmlns:dgm="http://schemas.openxmlformats.org/drawingml/2006/diagram" xmlns:o="urn:schemas-microsoft-com:office:office" xmlns:v="urn:schemas-microsoft-com:vml" xmlns:pvml="urn:schemas-microsoft-com:office:powerpoint" xmlns:com="http://schemas.openxmlformats.org/drawingml/2006/compatibility" xmlns:p14="http://schemas.microsoft.com/office/powerpoint/2010/main" xmlns:p15="http://schemas.microsoft.com/office/powerpoint/2012/main" xmlns:ahyp="http://schemas.microsoft.com/office/drawing/2018/hyperlinkcolor">
   <p:cSld>
     <p:spTree>
       <p:nvGrpSpPr>
-        <p:cNvPr id="1" name="Shape 75"/>
+        <p:cNvPr id="75" name="Shape 75"/>
         <p:cNvGrpSpPr/>
         <p:nvPr/>
       </p:nvGrpSpPr>
@@ -9445,7 +9230,7 @@
           <a:blip r:embed="rId3">
             <a:alphaModFix/>
           </a:blip>
-          <a:srcRect b="98001"/>
+          <a:srcRect b="98001" l="0" r="0" t="0"/>
           <a:stretch/>
         </p:blipFill>
         <p:spPr>
@@ -9512,20 +9297,23 @@
           </a:ln>
         </p:spPr>
         <p:txBody>
-          <a:bodyPr spcFirstLastPara="1" wrap="square" lIns="91425" tIns="91425" rIns="91425" bIns="91425" anchor="ctr" anchorCtr="0">
+          <a:bodyPr anchorCtr="0" anchor="ctr" bIns="91425" lIns="91425" spcFirstLastPara="1" rIns="91425" wrap="square" tIns="91425">
             <a:noAutofit/>
           </a:bodyPr>
           <a:lstStyle/>
           <a:p>
-            <a:pPr marL="0" lvl="0" indent="0" algn="ctr" rtl="0">
-              <a:spcBef>
-                <a:spcPts val="0"/>
-              </a:spcBef>
-              <a:spcAft>
-                <a:spcPts val="0"/>
-              </a:spcAft>
-              <a:buNone/>
-            </a:pPr>
+            <a:pPr indent="0" lvl="0" marL="0" rtl="0" algn="ctr">
+              <a:spcBef>
+                <a:spcPts val="0"/>
+              </a:spcBef>
+              <a:spcAft>
+                <a:spcPts val="0"/>
+              </a:spcAft>
+              <a:buNone/>
+            </a:pPr>
+            <a:r>
+              <a:t/>
+            </a:r>
             <a:endParaRPr/>
           </a:p>
         </p:txBody>
@@ -9550,12 +9338,12 @@
           </a:ln>
         </p:spPr>
         <p:txBody>
-          <a:bodyPr spcFirstLastPara="1" wrap="square" lIns="91425" tIns="91425" rIns="91425" bIns="91425" anchor="t" anchorCtr="0">
+          <a:bodyPr anchorCtr="0" anchor="t" bIns="91425" lIns="91425" spcFirstLastPara="1" rIns="91425" wrap="square" tIns="91425">
             <a:noAutofit/>
           </a:bodyPr>
           <a:lstStyle/>
           <a:p>
-            <a:pPr marL="0" lvl="0" indent="0" algn="l" rtl="0">
+            <a:pPr indent="0" lvl="0" marL="0" rtl="0" algn="l">
               <a:lnSpc>
                 <a:spcPct val="115000"/>
               </a:lnSpc>
@@ -9674,11 +9462,11 @@
 </file>
 
 <file path=ppt/slides/slide5.xml><?xml version="1.0" encoding="utf-8"?>
-<p:sld xmlns:a="http://schemas.openxmlformats.org/drawingml/2006/main" xmlns:r="http://schemas.openxmlformats.org/officeDocument/2006/relationships" xmlns:p="http://schemas.openxmlformats.org/presentationml/2006/main">
+<p:sld xmlns:a="http://schemas.openxmlformats.org/drawingml/2006/main" xmlns:r="http://schemas.openxmlformats.org/officeDocument/2006/relationships" xmlns:mc="http://schemas.openxmlformats.org/markup-compatibility/2006" xmlns:mv="urn:schemas-microsoft-com:mac:vml" xmlns:p="http://schemas.openxmlformats.org/presentationml/2006/main" xmlns:c="http://schemas.openxmlformats.org/drawingml/2006/chart" xmlns:dgm="http://schemas.openxmlformats.org/drawingml/2006/diagram" xmlns:o="urn:schemas-microsoft-com:office:office" xmlns:v="urn:schemas-microsoft-com:vml" xmlns:pvml="urn:schemas-microsoft-com:office:powerpoint" xmlns:com="http://schemas.openxmlformats.org/drawingml/2006/compatibility" xmlns:p14="http://schemas.microsoft.com/office/powerpoint/2010/main" xmlns:p15="http://schemas.microsoft.com/office/powerpoint/2012/main" xmlns:ahyp="http://schemas.microsoft.com/office/drawing/2018/hyperlinkcolor">
   <p:cSld>
     <p:spTree>
       <p:nvGrpSpPr>
-        <p:cNvPr id="1" name="Shape 83"/>
+        <p:cNvPr id="83" name="Shape 83"/>
         <p:cNvGrpSpPr/>
         <p:nvPr/>
       </p:nvGrpSpPr>
@@ -9700,7 +9488,7 @@
           <a:blip r:embed="rId3">
             <a:alphaModFix/>
           </a:blip>
-          <a:srcRect b="98001"/>
+          <a:srcRect b="98001" l="0" r="0" t="0"/>
           <a:stretch/>
         </p:blipFill>
         <p:spPr>
@@ -9767,20 +9555,23 @@
           </a:ln>
         </p:spPr>
         <p:txBody>
-          <a:bodyPr spcFirstLastPara="1" wrap="square" lIns="91425" tIns="91425" rIns="91425" bIns="91425" anchor="ctr" anchorCtr="0">
+          <a:bodyPr anchorCtr="0" anchor="ctr" bIns="91425" lIns="91425" spcFirstLastPara="1" rIns="91425" wrap="square" tIns="91425">
             <a:noAutofit/>
           </a:bodyPr>
           <a:lstStyle/>
           <a:p>
-            <a:pPr marL="0" lvl="0" indent="0" algn="ctr" rtl="0">
-              <a:spcBef>
-                <a:spcPts val="0"/>
-              </a:spcBef>
-              <a:spcAft>
-                <a:spcPts val="0"/>
-              </a:spcAft>
-              <a:buNone/>
-            </a:pPr>
+            <a:pPr indent="0" lvl="0" marL="0" rtl="0" algn="ctr">
+              <a:spcBef>
+                <a:spcPts val="0"/>
+              </a:spcBef>
+              <a:spcAft>
+                <a:spcPts val="0"/>
+              </a:spcAft>
+              <a:buNone/>
+            </a:pPr>
+            <a:r>
+              <a:t/>
+            </a:r>
             <a:endParaRPr/>
           </a:p>
         </p:txBody>
@@ -9805,12 +9596,12 @@
           </a:ln>
         </p:spPr>
         <p:txBody>
-          <a:bodyPr spcFirstLastPara="1" wrap="square" lIns="91425" tIns="91425" rIns="91425" bIns="91425" anchor="t" anchorCtr="0">
+          <a:bodyPr anchorCtr="0" anchor="t" bIns="91425" lIns="91425" spcFirstLastPara="1" rIns="91425" wrap="square" tIns="91425">
             <a:noAutofit/>
           </a:bodyPr>
           <a:lstStyle/>
           <a:p>
-            <a:pPr marL="0" lvl="0" indent="0" algn="l" rtl="0">
+            <a:pPr indent="0" lvl="0" marL="0" rtl="0" algn="l">
               <a:lnSpc>
                 <a:spcPct val="115000"/>
               </a:lnSpc>
@@ -10032,6 +9823,25 @@
               <a:t>•  District dashboard — anonymized, village-level view for an extension officer or NGO</a:t>
             </a:r>
           </a:p>
+          <a:p>
+            <a:pPr>
+              <a:lnSpc>
+                <a:spcPct val="120000"/>
+              </a:lnSpc>
+              <a:spcAft>
+                <a:spcPts val="400"/>
+              </a:spcAft>
+            </a:pPr>
+            <a:r>
+              <a:rPr sz="1300">
+                <a:solidFill>
+                  <a:srgbClr val="212121"/>
+                </a:solidFill>
+                <a:latin typeface="Google Sans Flex"/>
+              </a:rPr>
+              <a:t>•  Gemini-driven orchestration — the model itself decides which of these tools to call, via real function-calling, not a hardcoded decision tree</a:t>
+            </a:r>
+          </a:p>
         </p:txBody>
       </p:sp>
     </p:spTree>
@@ -10043,11 +9853,11 @@
 </file>
 
 <file path=ppt/slides/slide6.xml><?xml version="1.0" encoding="utf-8"?>
-<p:sld xmlns:a="http://schemas.openxmlformats.org/drawingml/2006/main" xmlns:r="http://schemas.openxmlformats.org/officeDocument/2006/relationships" xmlns:p="http://schemas.openxmlformats.org/presentationml/2006/main">
+<p:sld xmlns:a="http://schemas.openxmlformats.org/drawingml/2006/main" xmlns:r="http://schemas.openxmlformats.org/officeDocument/2006/relationships" xmlns:mc="http://schemas.openxmlformats.org/markup-compatibility/2006" xmlns:mv="urn:schemas-microsoft-com:mac:vml" xmlns:p="http://schemas.openxmlformats.org/presentationml/2006/main" xmlns:c="http://schemas.openxmlformats.org/drawingml/2006/chart" xmlns:dgm="http://schemas.openxmlformats.org/drawingml/2006/diagram" xmlns:o="urn:schemas-microsoft-com:office:office" xmlns:v="urn:schemas-microsoft-com:vml" xmlns:pvml="urn:schemas-microsoft-com:office:powerpoint" xmlns:com="http://schemas.openxmlformats.org/drawingml/2006/compatibility" xmlns:p14="http://schemas.microsoft.com/office/powerpoint/2010/main" xmlns:p15="http://schemas.microsoft.com/office/powerpoint/2012/main" xmlns:ahyp="http://schemas.microsoft.com/office/drawing/2018/hyperlinkcolor">
   <p:cSld>
     <p:spTree>
       <p:nvGrpSpPr>
-        <p:cNvPr id="1" name="Shape 91"/>
+        <p:cNvPr id="91" name="Shape 91"/>
         <p:cNvGrpSpPr/>
         <p:nvPr/>
       </p:nvGrpSpPr>
@@ -10069,7 +9879,7 @@
           <a:blip r:embed="rId3">
             <a:alphaModFix/>
           </a:blip>
-          <a:srcRect b="98001"/>
+          <a:srcRect b="98001" l="0" r="0" t="0"/>
           <a:stretch/>
         </p:blipFill>
         <p:spPr>
@@ -10136,20 +9946,23 @@
           </a:ln>
         </p:spPr>
         <p:txBody>
-          <a:bodyPr spcFirstLastPara="1" wrap="square" lIns="91425" tIns="91425" rIns="91425" bIns="91425" anchor="ctr" anchorCtr="0">
+          <a:bodyPr anchorCtr="0" anchor="ctr" bIns="91425" lIns="91425" spcFirstLastPara="1" rIns="91425" wrap="square" tIns="91425">
             <a:noAutofit/>
           </a:bodyPr>
           <a:lstStyle/>
           <a:p>
-            <a:pPr marL="0" lvl="0" indent="0" algn="ctr" rtl="0">
-              <a:spcBef>
-                <a:spcPts val="0"/>
-              </a:spcBef>
-              <a:spcAft>
-                <a:spcPts val="0"/>
-              </a:spcAft>
-              <a:buNone/>
-            </a:pPr>
+            <a:pPr indent="0" lvl="0" marL="0" rtl="0" algn="ctr">
+              <a:spcBef>
+                <a:spcPts val="0"/>
+              </a:spcBef>
+              <a:spcAft>
+                <a:spcPts val="0"/>
+              </a:spcAft>
+              <a:buNone/>
+            </a:pPr>
+            <a:r>
+              <a:t/>
+            </a:r>
             <a:endParaRPr/>
           </a:p>
         </p:txBody>
@@ -10174,12 +9987,12 @@
           </a:ln>
         </p:spPr>
         <p:txBody>
-          <a:bodyPr spcFirstLastPara="1" wrap="square" lIns="91425" tIns="91425" rIns="91425" bIns="91425" anchor="t" anchorCtr="0">
+          <a:bodyPr anchorCtr="0" anchor="t" bIns="91425" lIns="91425" spcFirstLastPara="1" rIns="91425" wrap="square" tIns="91425">
             <a:noAutofit/>
           </a:bodyPr>
           <a:lstStyle/>
           <a:p>
-            <a:pPr marL="0" lvl="0" indent="0" algn="l" rtl="0">
+            <a:pPr indent="0" lvl="0" marL="0" rtl="0" algn="l">
               <a:lnSpc>
                 <a:spcPct val="115000"/>
               </a:lnSpc>
@@ -10236,17 +10049,17 @@
                 <a:spcPct val="120000"/>
               </a:lnSpc>
               <a:spcAft>
-                <a:spcPts val="800"/>
+                <a:spcPts val="600"/>
               </a:spcAft>
             </a:pPr>
             <a:r>
-              <a:rPr sz="1300">
+              <a:rPr sz="1250">
                 <a:solidFill>
                   <a:srgbClr val="212121"/>
                 </a:solidFill>
                 <a:latin typeface="Google Sans Flex"/>
               </a:rPr>
-              <a:t>•  Farmer speaks/types symptom + uploads photo</a:t>
+              <a:t>•  Farmer speaks/types symptom + optionally uploads a photo, entirely in the browser</a:t>
             </a:r>
           </a:p>
           <a:p>
@@ -10255,17 +10068,17 @@
                 <a:spcPct val="120000"/>
               </a:lnSpc>
               <a:spcAft>
-                <a:spcPts val="800"/>
+                <a:spcPts val="600"/>
               </a:spcAft>
             </a:pPr>
             <a:r>
-              <a:rPr sz="1300">
+              <a:rPr sz="1250">
                 <a:solidFill>
                   <a:srgbClr val="212121"/>
                 </a:solidFill>
                 <a:latin typeface="Google Sans Flex"/>
               </a:rPr>
-              <a:t>•  → Gemini multimodal diagnosis grounded via Vertex AI Search (RAG) over the regional disease guide</a:t>
+              <a:t>•  → Gemini multimodal diagnosis call, grounded by RAG retrieval (TF-IDF, hand-rolled in JS) over bilingual English + Kannada disease guides shipped with the site</a:t>
             </a:r>
           </a:p>
           <a:p>
@@ -10274,11 +10087,11 @@
                 <a:spcPct val="120000"/>
               </a:lnSpc>
               <a:spcAft>
-                <a:spcPts val="800"/>
+                <a:spcPts val="600"/>
               </a:spcAft>
             </a:pPr>
             <a:r>
-              <a:rPr sz="1300">
+              <a:rPr sz="1250">
                 <a:solidFill>
                   <a:srgbClr val="212121"/>
                 </a:solidFill>
@@ -10293,17 +10106,17 @@
                 <a:spcPct val="120000"/>
               </a:lnSpc>
               <a:spcAft>
-                <a:spcPts val="800"/>
+                <a:spcPts val="600"/>
               </a:spcAft>
             </a:pPr>
             <a:r>
-              <a:rPr sz="1300">
+              <a:rPr sz="1250">
                 <a:solidFill>
                   <a:srgbClr val="212121"/>
                 </a:solidFill>
                 <a:latin typeface="Google Sans Flex"/>
               </a:rPr>
-              <a:t>•  → Branch: diseased → dealer lookup + outbreak check + insurance claim check + group-buy check  |  healthy + near harvest → sell-price lookup</a:t>
+              <a:t>•  → A second Gemini call, using real function-calling, decides WHICH of 4 tools to invoke (dealer lookup, sell-price lookup, insurance-claim check, group-buy check) based on the diagnosis, outbreak signal, and near-harvest flag — not a hardcoded if/else</a:t>
             </a:r>
           </a:p>
           <a:p>
@@ -10312,17 +10125,17 @@
                 <a:spcPct val="120000"/>
               </a:lnSpc>
               <a:spcAft>
-                <a:spcPts val="800"/>
+                <a:spcPts val="600"/>
               </a:spcAft>
             </a:pPr>
             <a:r>
-              <a:rPr sz="1300">
+              <a:rPr sz="1250">
                 <a:solidFill>
                   <a:srgbClr val="212121"/>
                 </a:solidFill>
                 <a:latin typeface="Google Sans Flex"/>
               </a:rPr>
-              <a:t>•  → Advisory translated to Kannada, converted to speech</a:t>
+              <a:t>•  → Chosen tools run against the known dealer/pricing data; results assembled</a:t>
             </a:r>
           </a:p>
           <a:p>
@@ -10331,11 +10144,30 @@
                 <a:spcPct val="120000"/>
               </a:lnSpc>
               <a:spcAft>
-                <a:spcPts val="800"/>
+                <a:spcPts val="600"/>
               </a:spcAft>
             </a:pPr>
             <a:r>
-              <a:rPr sz="1300">
+              <a:rPr sz="1250">
+                <a:solidFill>
+                  <a:srgbClr val="212121"/>
+                </a:solidFill>
+                <a:latin typeface="Google Sans Flex"/>
+              </a:rPr>
+              <a:t>•  → Advisory translated to Kannada, spoken via the browser's own Web Speech API if a kn-IN voice is available</a:t>
+            </a:r>
+          </a:p>
+          <a:p>
+            <a:pPr>
+              <a:lnSpc>
+                <a:spcPct val="120000"/>
+              </a:lnSpc>
+              <a:spcAft>
+                <a:spcPts val="600"/>
+              </a:spcAft>
+            </a:pPr>
+            <a:r>
+              <a:rPr sz="1250">
                 <a:solidFill>
                   <a:srgbClr val="212121"/>
                 </a:solidFill>
@@ -10350,17 +10182,17 @@
                 <a:spcPct val="120000"/>
               </a:lnSpc>
               <a:spcAft>
-                <a:spcPts val="800"/>
+                <a:spcPts val="600"/>
               </a:spcAft>
             </a:pPr>
             <a:r>
-              <a:rPr sz="1300">
+              <a:rPr sz="1250">
                 <a:solidFill>
                   <a:srgbClr val="212121"/>
                 </a:solidFill>
                 <a:latin typeface="Google Sans Flex"/>
               </a:rPr>
-              <a:t>•  → Separately: district dashboard aggregates all diagnosis history, anonymized to village level, for an extension officer</a:t>
+              <a:t>•  → Separately: district dashboard loads a pre-aggregated, anonymized village-level snapshot built at deploy time, never raw farmer data</a:t>
             </a:r>
           </a:p>
         </p:txBody>
@@ -10374,11 +10206,11 @@
 </file>
 
 <file path=ppt/slides/slide7.xml><?xml version="1.0" encoding="utf-8"?>
-<p:sld xmlns:a="http://schemas.openxmlformats.org/drawingml/2006/main" xmlns:r="http://schemas.openxmlformats.org/officeDocument/2006/relationships" xmlns:p="http://schemas.openxmlformats.org/presentationml/2006/main">
+<p:sld xmlns:a="http://schemas.openxmlformats.org/drawingml/2006/main" xmlns:r="http://schemas.openxmlformats.org/officeDocument/2006/relationships" xmlns:mc="http://schemas.openxmlformats.org/markup-compatibility/2006" xmlns:mv="urn:schemas-microsoft-com:mac:vml" xmlns:p="http://schemas.openxmlformats.org/presentationml/2006/main" xmlns:c="http://schemas.openxmlformats.org/drawingml/2006/chart" xmlns:dgm="http://schemas.openxmlformats.org/drawingml/2006/diagram" xmlns:o="urn:schemas-microsoft-com:office:office" xmlns:v="urn:schemas-microsoft-com:vml" xmlns:pvml="urn:schemas-microsoft-com:office:powerpoint" xmlns:com="http://schemas.openxmlformats.org/drawingml/2006/compatibility" xmlns:p14="http://schemas.microsoft.com/office/powerpoint/2010/main" xmlns:p15="http://schemas.microsoft.com/office/powerpoint/2012/main" xmlns:ahyp="http://schemas.microsoft.com/office/drawing/2018/hyperlinkcolor">
   <p:cSld>
     <p:spTree>
       <p:nvGrpSpPr>
-        <p:cNvPr id="1" name="Shape 99"/>
+        <p:cNvPr id="99" name="Shape 99"/>
         <p:cNvGrpSpPr/>
         <p:nvPr/>
       </p:nvGrpSpPr>
@@ -10400,7 +10232,7 @@
           <a:blip r:embed="rId3">
             <a:alphaModFix/>
           </a:blip>
-          <a:srcRect b="98001"/>
+          <a:srcRect b="98001" l="0" r="0" t="0"/>
           <a:stretch/>
         </p:blipFill>
         <p:spPr>
@@ -10467,20 +10299,23 @@
           </a:ln>
         </p:spPr>
         <p:txBody>
-          <a:bodyPr spcFirstLastPara="1" wrap="square" lIns="91425" tIns="91425" rIns="91425" bIns="91425" anchor="ctr" anchorCtr="0">
+          <a:bodyPr anchorCtr="0" anchor="ctr" bIns="91425" lIns="91425" spcFirstLastPara="1" rIns="91425" wrap="square" tIns="91425">
             <a:noAutofit/>
           </a:bodyPr>
           <a:lstStyle/>
           <a:p>
-            <a:pPr marL="0" lvl="0" indent="0" algn="ctr" rtl="0">
-              <a:spcBef>
-                <a:spcPts val="0"/>
-              </a:spcBef>
-              <a:spcAft>
-                <a:spcPts val="0"/>
-              </a:spcAft>
-              <a:buNone/>
-            </a:pPr>
+            <a:pPr indent="0" lvl="0" marL="0" rtl="0" algn="ctr">
+              <a:spcBef>
+                <a:spcPts val="0"/>
+              </a:spcBef>
+              <a:spcAft>
+                <a:spcPts val="0"/>
+              </a:spcAft>
+              <a:buNone/>
+            </a:pPr>
+            <a:r>
+              <a:t/>
+            </a:r>
             <a:endParaRPr/>
           </a:p>
         </p:txBody>
@@ -10505,12 +10340,12 @@
           </a:ln>
         </p:spPr>
         <p:txBody>
-          <a:bodyPr spcFirstLastPara="1" wrap="square" lIns="91425" tIns="91425" rIns="91425" bIns="91425" anchor="t" anchorCtr="0">
+          <a:bodyPr anchorCtr="0" anchor="t" bIns="91425" lIns="91425" spcFirstLastPara="1" rIns="91425" wrap="square" tIns="91425">
             <a:noAutofit/>
           </a:bodyPr>
           <a:lstStyle/>
           <a:p>
-            <a:pPr marL="0" lvl="0" indent="0" algn="l" rtl="0">
+            <a:pPr indent="0" lvl="0" marL="0" rtl="0" algn="l">
               <a:lnSpc>
                 <a:spcPct val="115000"/>
               </a:lnSpc>
@@ -10597,11 +10432,11 @@
 </file>
 
 <file path=ppt/slides/slide8.xml><?xml version="1.0" encoding="utf-8"?>
-<p:sld xmlns:a="http://schemas.openxmlformats.org/drawingml/2006/main" xmlns:r="http://schemas.openxmlformats.org/officeDocument/2006/relationships" xmlns:p="http://schemas.openxmlformats.org/presentationml/2006/main">
+<p:sld xmlns:a="http://schemas.openxmlformats.org/drawingml/2006/main" xmlns:r="http://schemas.openxmlformats.org/officeDocument/2006/relationships" xmlns:mc="http://schemas.openxmlformats.org/markup-compatibility/2006" xmlns:mv="urn:schemas-microsoft-com:mac:vml" xmlns:p="http://schemas.openxmlformats.org/presentationml/2006/main" xmlns:c="http://schemas.openxmlformats.org/drawingml/2006/chart" xmlns:dgm="http://schemas.openxmlformats.org/drawingml/2006/diagram" xmlns:o="urn:schemas-microsoft-com:office:office" xmlns:v="urn:schemas-microsoft-com:vml" xmlns:pvml="urn:schemas-microsoft-com:office:powerpoint" xmlns:com="http://schemas.openxmlformats.org/drawingml/2006/compatibility" xmlns:p14="http://schemas.microsoft.com/office/powerpoint/2010/main" xmlns:p15="http://schemas.microsoft.com/office/powerpoint/2012/main" xmlns:ahyp="http://schemas.microsoft.com/office/drawing/2018/hyperlinkcolor">
   <p:cSld>
     <p:spTree>
       <p:nvGrpSpPr>
-        <p:cNvPr id="1" name="Shape 107"/>
+        <p:cNvPr id="107" name="Shape 107"/>
         <p:cNvGrpSpPr/>
         <p:nvPr/>
       </p:nvGrpSpPr>
@@ -10623,7 +10458,7 @@
           <a:blip r:embed="rId3">
             <a:alphaModFix/>
           </a:blip>
-          <a:srcRect b="98001"/>
+          <a:srcRect b="98001" l="0" r="0" t="0"/>
           <a:stretch/>
         </p:blipFill>
         <p:spPr>
@@ -10690,20 +10525,23 @@
           </a:ln>
         </p:spPr>
         <p:txBody>
-          <a:bodyPr spcFirstLastPara="1" wrap="square" lIns="91425" tIns="91425" rIns="91425" bIns="91425" anchor="ctr" anchorCtr="0">
+          <a:bodyPr anchorCtr="0" anchor="ctr" bIns="91425" lIns="91425" spcFirstLastPara="1" rIns="91425" wrap="square" tIns="91425">
             <a:noAutofit/>
           </a:bodyPr>
           <a:lstStyle/>
           <a:p>
-            <a:pPr marL="0" lvl="0" indent="0" algn="ctr" rtl="0">
-              <a:spcBef>
-                <a:spcPts val="0"/>
-              </a:spcBef>
-              <a:spcAft>
-                <a:spcPts val="0"/>
-              </a:spcAft>
-              <a:buNone/>
-            </a:pPr>
+            <a:pPr indent="0" lvl="0" marL="0" rtl="0" algn="ctr">
+              <a:spcBef>
+                <a:spcPts val="0"/>
+              </a:spcBef>
+              <a:spcAft>
+                <a:spcPts val="0"/>
+              </a:spcAft>
+              <a:buNone/>
+            </a:pPr>
+            <a:r>
+              <a:t/>
+            </a:r>
             <a:endParaRPr/>
           </a:p>
         </p:txBody>
@@ -10728,12 +10566,12 @@
           </a:ln>
         </p:spPr>
         <p:txBody>
-          <a:bodyPr spcFirstLastPara="1" wrap="square" lIns="91425" tIns="91425" rIns="91425" bIns="91425" anchor="t" anchorCtr="0">
+          <a:bodyPr anchorCtr="0" anchor="t" bIns="91425" lIns="91425" spcFirstLastPara="1" rIns="91425" wrap="square" tIns="91425">
             <a:noAutofit/>
           </a:bodyPr>
           <a:lstStyle/>
           <a:p>
-            <a:pPr marL="0" lvl="0" indent="0" algn="l" rtl="0">
+            <a:pPr indent="0" lvl="0" marL="0" rtl="0" algn="l">
               <a:lnSpc>
                 <a:spcPct val="115000"/>
               </a:lnSpc>
@@ -10794,13 +10632,13 @@
               </a:spcAft>
             </a:pPr>
             <a:r>
-              <a:rPr sz="1400">
+              <a:rPr sz="1300">
                 <a:solidFill>
                   <a:srgbClr val="212121"/>
                 </a:solidFill>
                 <a:latin typeface="Google Sans Flex"/>
               </a:rPr>
-              <a:t>•  Farmer (photo + voice) → Firebase Hosting (frontend) → Cloud Run (FastAPI backend)</a:t>
+              <a:t>•  100% client-side static site — no backend server, no billing account, no credit card anywhere in the deployed stack — Firebase Hosting (free Spark plan) serves the app</a:t>
             </a:r>
           </a:p>
           <a:p>
@@ -10813,13 +10651,13 @@
               </a:spcAft>
             </a:pPr>
             <a:r>
-              <a:rPr sz="1400">
+              <a:rPr sz="1300">
                 <a:solidFill>
                   <a:srgbClr val="212121"/>
                 </a:solidFill>
                 <a:latin typeface="Google Sans Flex"/>
               </a:rPr>
-              <a:t>•  Gemini multimodal diagnosis, grounded via Vertex AI Search over the regional disease guide</a:t>
+              <a:t>•  Diagnosis: a real Gemini multimodal API call direct from the browser, grounded by a hand-rolled TF-IDF + cosine-similarity RAG index over 18 disease documents (9 English + 9 Kannada), so a Kannada symptom description retrieves relevant passages natively</a:t>
             </a:r>
           </a:p>
           <a:p>
@@ -10832,13 +10670,13 @@
               </a:spcAft>
             </a:pPr>
             <a:r>
-              <a:rPr sz="1400">
+              <a:rPr sz="1300">
                 <a:solidFill>
                   <a:srgbClr val="212121"/>
                 </a:solidFill>
                 <a:latin typeface="Google Sans Flex"/>
               </a:rPr>
-              <a:t>•  Cloud Translation + Cloud Text-to-Speech for the Kannada voice advisory</a:t>
+              <a:t>•  Orchestration: a second Gemini call uses real function-calling (tools/functionDeclarations) to decide which of 4 downstream tools to invoke — the model drives the decision, not a hardcoded branch — falling back to equivalent deterministic rules only if the live call fails after retries</a:t>
             </a:r>
           </a:p>
           <a:p>
@@ -10851,13 +10689,13 @@
               </a:spcAft>
             </a:pPr>
             <a:r>
-              <a:rPr sz="1400">
+              <a:rPr sz="1300">
                 <a:solidFill>
                   <a:srgbClr val="212121"/>
                 </a:solidFill>
                 <a:latin typeface="Google Sans Flex"/>
               </a:rPr>
-              <a:t>•  Firestore holds the dealer directory, mandi prices, and diagnosis history</a:t>
+              <a:t>•  Weather: a direct, keyless call to the free Open-Meteo API (confirmed CORS-enabled)</a:t>
             </a:r>
           </a:p>
           <a:p>
@@ -10870,13 +10708,13 @@
               </a:spcAft>
             </a:pPr>
             <a:r>
-              <a:rPr sz="1400">
+              <a:rPr sz="1300">
                 <a:solidFill>
                   <a:srgbClr val="212121"/>
                 </a:solidFill>
                 <a:latin typeface="Google Sans Flex"/>
               </a:rPr>
-              <a:t>•  Diagnosis history feeds three agentic reasoning steps: a geo-radius outbreak query, a per-plot history query for recurring issues, and a district-wide aggregation for the extension-officer dashboard</a:t>
+              <a:t>•  Dealer directory, mandi prices, and diagnosis history ship as static JSON/CSV with the site; the district dashboard loads a pre-aggregated snapshot built at deploy time from the private farmer dataset, so raw farmer/plot linkage never ships publicly</a:t>
             </a:r>
           </a:p>
           <a:p>
@@ -10889,13 +10727,13 @@
               </a:spcAft>
             </a:pPr>
             <a:r>
-              <a:rPr sz="1400">
+              <a:rPr sz="1300">
                 <a:solidFill>
                   <a:srgbClr val="212121"/>
                 </a:solidFill>
                 <a:latin typeface="Google Sans Flex"/>
               </a:rPr>
-              <a:t>•  An outbreak signal additionally triggers a bulk-pricing check against the dealer directory for the group-buy alert</a:t>
+              <a:t>•  Voice advisory: the browser's own Web Speech API (SpeechSynthesis), feature-detecting a kn-IN voice at runtime</a:t>
             </a:r>
           </a:p>
         </p:txBody>
@@ -10909,11 +10747,11 @@
 </file>
 
 <file path=ppt/slides/slide9.xml><?xml version="1.0" encoding="utf-8"?>
-<p:sld xmlns:a="http://schemas.openxmlformats.org/drawingml/2006/main" xmlns:r="http://schemas.openxmlformats.org/officeDocument/2006/relationships" xmlns:p="http://schemas.openxmlformats.org/presentationml/2006/main">
+<p:sld xmlns:a="http://schemas.openxmlformats.org/drawingml/2006/main" xmlns:r="http://schemas.openxmlformats.org/officeDocument/2006/relationships" xmlns:mc="http://schemas.openxmlformats.org/markup-compatibility/2006" xmlns:mv="urn:schemas-microsoft-com:mac:vml" xmlns:p="http://schemas.openxmlformats.org/presentationml/2006/main" xmlns:c="http://schemas.openxmlformats.org/drawingml/2006/chart" xmlns:dgm="http://schemas.openxmlformats.org/drawingml/2006/diagram" xmlns:o="urn:schemas-microsoft-com:office:office" xmlns:v="urn:schemas-microsoft-com:vml" xmlns:pvml="urn:schemas-microsoft-com:office:powerpoint" xmlns:com="http://schemas.openxmlformats.org/drawingml/2006/compatibility" xmlns:p14="http://schemas.microsoft.com/office/powerpoint/2010/main" xmlns:p15="http://schemas.microsoft.com/office/powerpoint/2012/main" xmlns:ahyp="http://schemas.microsoft.com/office/drawing/2018/hyperlinkcolor">
   <p:cSld>
     <p:spTree>
       <p:nvGrpSpPr>
-        <p:cNvPr id="1" name="Shape 115"/>
+        <p:cNvPr id="115" name="Shape 115"/>
         <p:cNvGrpSpPr/>
         <p:nvPr/>
       </p:nvGrpSpPr>
@@ -10935,7 +10773,7 @@
           <a:blip r:embed="rId3">
             <a:alphaModFix/>
           </a:blip>
-          <a:srcRect b="98001"/>
+          <a:srcRect b="98001" l="0" r="0" t="0"/>
           <a:stretch/>
         </p:blipFill>
         <p:spPr>
@@ -11002,20 +10840,23 @@
           </a:ln>
         </p:spPr>
         <p:txBody>
-          <a:bodyPr spcFirstLastPara="1" wrap="square" lIns="91425" tIns="91425" rIns="91425" bIns="91425" anchor="ctr" anchorCtr="0">
+          <a:bodyPr anchorCtr="0" anchor="ctr" bIns="91425" lIns="91425" spcFirstLastPara="1" rIns="91425" wrap="square" tIns="91425">
             <a:noAutofit/>
           </a:bodyPr>
           <a:lstStyle/>
           <a:p>
-            <a:pPr marL="0" lvl="0" indent="0" algn="ctr" rtl="0">
-              <a:spcBef>
-                <a:spcPts val="0"/>
-              </a:spcBef>
-              <a:spcAft>
-                <a:spcPts val="0"/>
-              </a:spcAft>
-              <a:buNone/>
-            </a:pPr>
+            <a:pPr indent="0" lvl="0" marL="0" rtl="0" algn="ctr">
+              <a:spcBef>
+                <a:spcPts val="0"/>
+              </a:spcBef>
+              <a:spcAft>
+                <a:spcPts val="0"/>
+              </a:spcAft>
+              <a:buNone/>
+            </a:pPr>
+            <a:r>
+              <a:t/>
+            </a:r>
             <a:endParaRPr/>
           </a:p>
         </p:txBody>
@@ -11040,12 +10881,12 @@
           </a:ln>
         </p:spPr>
         <p:txBody>
-          <a:bodyPr spcFirstLastPara="1" wrap="square" lIns="91425" tIns="91425" rIns="91425" bIns="91425" anchor="t" anchorCtr="0">
+          <a:bodyPr anchorCtr="0" anchor="t" bIns="91425" lIns="91425" spcFirstLastPara="1" rIns="91425" wrap="square" tIns="91425">
             <a:noAutofit/>
           </a:bodyPr>
           <a:lstStyle/>
           <a:p>
-            <a:pPr marL="0" lvl="0" indent="0" algn="l" rtl="0">
+            <a:pPr indent="0" lvl="0" marL="0" rtl="0" algn="l">
               <a:lnSpc>
                 <a:spcPct val="115000"/>
               </a:lnSpc>
@@ -11102,17 +10943,17 @@
                 <a:spcPct val="120000"/>
               </a:lnSpc>
               <a:spcAft>
-                <a:spcPts val="500"/>
+                <a:spcPts val="400"/>
               </a:spcAft>
             </a:pPr>
             <a:r>
-              <a:rPr sz="1400">
+              <a:rPr sz="1300">
                 <a:solidFill>
                   <a:srgbClr val="212121"/>
                 </a:solidFill>
                 <a:latin typeface="Google Sans Flex"/>
               </a:rPr>
-              <a:t>•  Gemini (Vertex AI) — multimodal diagnosis, function calling, synthesis</a:t>
+              <a:t>•  Gemini API (gemini-3.8-flash) — called directly from the browser for two things: multimodal diagnosis, and a second call using real function-calling to decide which tools to invoke</a:t>
             </a:r>
           </a:p>
           <a:p>
@@ -11121,17 +10962,17 @@
                 <a:spcPct val="120000"/>
               </a:lnSpc>
               <a:spcAft>
-                <a:spcPts val="500"/>
+                <a:spcPts val="400"/>
               </a:spcAft>
             </a:pPr>
             <a:r>
-              <a:rPr sz="1400">
+              <a:rPr sz="1300">
                 <a:solidFill>
                   <a:srgbClr val="212121"/>
                 </a:solidFill>
                 <a:latin typeface="Google Sans Flex"/>
               </a:rPr>
-              <a:t>•  Vertex AI Search — RAG grounding over the regional disease guide</a:t>
+              <a:t>•  Firebase Hosting — free Spark plan, zero billing, serves the entire static site</a:t>
             </a:r>
           </a:p>
           <a:p>
@@ -11140,17 +10981,17 @@
                 <a:spcPct val="120000"/>
               </a:lnSpc>
               <a:spcAft>
-                <a:spcPts val="500"/>
+                <a:spcPts val="400"/>
               </a:spcAft>
             </a:pPr>
             <a:r>
-              <a:rPr sz="1400">
+              <a:rPr sz="1300">
                 <a:solidFill>
                   <a:srgbClr val="212121"/>
                 </a:solidFill>
                 <a:latin typeface="Google Sans Flex"/>
               </a:rPr>
-              <a:t>•  Cloud Run — FastAPI backend hosting</a:t>
+              <a:t>•  Vanilla JavaScript (ES modules) — no framework, no bundler, no agentic framework (no LangChain/CrewAI/Vertex Agent Builder) — direct fetch() calls to the Gemini API</a:t>
             </a:r>
           </a:p>
           <a:p>
@@ -11159,17 +11000,17 @@
                 <a:spcPct val="120000"/>
               </a:lnSpc>
               <a:spcAft>
-                <a:spcPts val="500"/>
+                <a:spcPts val="400"/>
               </a:spcAft>
             </a:pPr>
             <a:r>
-              <a:rPr sz="1400">
+              <a:rPr sz="1300">
                 <a:solidFill>
                   <a:srgbClr val="212121"/>
                 </a:solidFill>
                 <a:latin typeface="Google Sans Flex"/>
               </a:rPr>
-              <a:t>•  Firebase Hosting — frontend hosting</a:t>
+              <a:t>•  Hand-rolled TF-IDF + cosine similarity (JS) — RAG retrieval over the disease guides, no vector database or external search service</a:t>
             </a:r>
           </a:p>
           <a:p>
@@ -11178,17 +11019,17 @@
                 <a:spcPct val="120000"/>
               </a:lnSpc>
               <a:spcAft>
-                <a:spcPts val="500"/>
+                <a:spcPts val="400"/>
               </a:spcAft>
             </a:pPr>
             <a:r>
-              <a:rPr sz="1400">
+              <a:rPr sz="1300">
                 <a:solidFill>
                   <a:srgbClr val="212121"/>
                 </a:solidFill>
                 <a:latin typeface="Google Sans Flex"/>
               </a:rPr>
-              <a:t>•  Firestore — dealer directory, mandi prices, diagnosis history</a:t>
+              <a:t>•  Open-Meteo — free, keyless weather API</a:t>
             </a:r>
           </a:p>
           <a:p>
@@ -11197,17 +11038,17 @@
                 <a:spcPct val="120000"/>
               </a:lnSpc>
               <a:spcAft>
-                <a:spcPts val="500"/>
+                <a:spcPts val="400"/>
               </a:spcAft>
             </a:pPr>
             <a:r>
-              <a:rPr sz="1400">
+              <a:rPr sz="1300">
                 <a:solidFill>
                   <a:srgbClr val="212121"/>
                 </a:solidFill>
                 <a:latin typeface="Google Sans Flex"/>
               </a:rPr>
-              <a:t>•  Cloud Translation API + Cloud Text-to-Speech — Kannada voice advisory</a:t>
+              <a:t>•  Web Speech API (browser-native) — speech recognition for Kannada voice input, SpeechSynthesis for voice output</a:t>
             </a:r>
           </a:p>
           <a:p>
@@ -11216,17 +11057,17 @@
                 <a:spcPct val="120000"/>
               </a:lnSpc>
               <a:spcAft>
-                <a:spcPts val="500"/>
+                <a:spcPts val="400"/>
               </a:spcAft>
             </a:pPr>
             <a:r>
-              <a:rPr sz="1400">
+              <a:rPr sz="1300">
                 <a:solidFill>
                   <a:srgbClr val="212121"/>
                 </a:solidFill>
                 <a:latin typeface="Google Sans Flex"/>
               </a:rPr>
-              <a:t>•  Open-Meteo — live weather context</a:t>
+              <a:t>•  Static JSON/CSV data files — dealer directory, mandi prices, diagnosis history</a:t>
             </a:r>
           </a:p>
           <a:p>
@@ -11235,17 +11076,17 @@
                 <a:spcPct val="120000"/>
               </a:lnSpc>
               <a:spcAft>
-                <a:spcPts val="500"/>
+                <a:spcPts val="400"/>
               </a:spcAft>
             </a:pPr>
             <a:r>
-              <a:rPr sz="1400">
+              <a:rPr sz="1300">
                 <a:solidFill>
                   <a:srgbClr val="212121"/>
                 </a:solidFill>
                 <a:latin typeface="Google Sans Flex"/>
               </a:rPr>
-              <a:t>•  Python (FastAPI, pydantic), scikit-learn (RAG retrieval), Playwright (verification)</a:t>
+              <a:t>•  Python (data generation, build-time dashboard aggregation), Playwright (verification)</a:t>
             </a:r>
           </a:p>
         </p:txBody>
@@ -11259,7 +11100,7 @@
 </file>
 
 <file path=ppt/theme/theme1.xml><?xml version="1.0" encoding="utf-8"?>
-<a:theme xmlns:a="http://schemas.openxmlformats.org/drawingml/2006/main" name="Simple Light">
+<a:theme xmlns:a="http://schemas.openxmlformats.org/drawingml/2006/main" xmlns:r="http://schemas.openxmlformats.org/officeDocument/2006/relationships" name="Simple Light">
   <a:themeElements>
     <a:clrScheme name="Simple Light">
       <a:dk1>
@@ -11534,13 +11375,11 @@
       </a:bgFillStyleLst>
     </a:fmtScheme>
   </a:themeElements>
-  <a:objectDefaults/>
-  <a:extraClrSchemeLst/>
 </a:theme>
 </file>
 
 <file path=ppt/theme/theme2.xml><?xml version="1.0" encoding="utf-8"?>
-<a:theme xmlns:a="http://schemas.openxmlformats.org/drawingml/2006/main">
+<a:theme xmlns:a="http://schemas.openxmlformats.org/drawingml/2006/main" xmlns:r="http://schemas.openxmlformats.org/officeDocument/2006/relationships">
   <a:themeElements>
     <a:clrScheme name="Default">
       <a:dk1>
@@ -11815,7 +11654,5 @@
       </a:bgFillStyleLst>
     </a:fmtScheme>
   </a:themeElements>
-  <a:objectDefaults/>
-  <a:extraClrSchemeLst/>
 </a:theme>
 </file>
--- a/docs/Kisan_Mitra_Submission.pptx
+++ b/docs/Kisan_Mitra_Submission.pptx
@@ -1,51 +1,51 @@
 
 <file path=ppt/presentation.xml><?xml version="1.0" encoding="utf-8"?>
-<p:presentation xmlns:a="http://schemas.openxmlformats.org/drawingml/2006/main" xmlns:r="http://schemas.openxmlformats.org/officeDocument/2006/relationships" xmlns:mc="http://schemas.openxmlformats.org/markup-compatibility/2006" xmlns:mv="urn:schemas-microsoft-com:mac:vml" xmlns:p="http://schemas.openxmlformats.org/presentationml/2006/main" xmlns:c="http://schemas.openxmlformats.org/drawingml/2006/chart" xmlns:dgm="http://schemas.openxmlformats.org/drawingml/2006/diagram" xmlns:o="urn:schemas-microsoft-com:office:office" xmlns:v="urn:schemas-microsoft-com:vml" xmlns:pvml="urn:schemas-microsoft-com:office:powerpoint" xmlns:com="http://schemas.openxmlformats.org/drawingml/2006/compatibility" xmlns:p14="http://schemas.microsoft.com/office/powerpoint/2010/main" xmlns:p15="http://schemas.microsoft.com/office/powerpoint/2012/main" xmlns:ahyp="http://schemas.microsoft.com/office/drawing/2018/hyperlinkcolor" autoCompressPictures="0" embedTrueTypeFonts="1" strictFirstAndLastChars="0" saveSubsetFonts="1">
+<p:presentation xmlns:a="http://schemas.openxmlformats.org/drawingml/2006/main" xmlns:r="http://schemas.openxmlformats.org/officeDocument/2006/relationships" xmlns:p="http://schemas.openxmlformats.org/presentationml/2006/main" strictFirstAndLastChars="0" embedTrueTypeFonts="1" saveSubsetFonts="1" autoCompressPictures="0">
   <p:sldMasterIdLst>
-    <p:sldMasterId id="2147483659" r:id="rId4"/>
+    <p:sldMasterId id="2147483659" r:id="rId1"/>
   </p:sldMasterIdLst>
   <p:notesMasterIdLst>
-    <p:notesMasterId r:id="rId5"/>
+    <p:notesMasterId r:id="rId18"/>
   </p:notesMasterIdLst>
   <p:sldIdLst>
-    <p:sldId id="256" r:id="rId6"/>
-    <p:sldId id="257" r:id="rId7"/>
-    <p:sldId id="258" r:id="rId8"/>
-    <p:sldId id="259" r:id="rId9"/>
-    <p:sldId id="260" r:id="rId10"/>
-    <p:sldId id="261" r:id="rId11"/>
-    <p:sldId id="262" r:id="rId12"/>
-    <p:sldId id="263" r:id="rId13"/>
-    <p:sldId id="264" r:id="rId14"/>
-    <p:sldId id="265" r:id="rId15"/>
-    <p:sldId id="266" r:id="rId16"/>
-    <p:sldId id="267" r:id="rId17"/>
-    <p:sldId id="268" r:id="rId18"/>
-    <p:sldId id="269" r:id="rId19"/>
-    <p:sldId id="270" r:id="rId20"/>
-    <p:sldId id="271" r:id="rId21"/>
+    <p:sldId id="256" r:id="rId2"/>
+    <p:sldId id="257" r:id="rId3"/>
+    <p:sldId id="258" r:id="rId4"/>
+    <p:sldId id="259" r:id="rId5"/>
+    <p:sldId id="260" r:id="rId6"/>
+    <p:sldId id="261" r:id="rId7"/>
+    <p:sldId id="262" r:id="rId8"/>
+    <p:sldId id="263" r:id="rId9"/>
+    <p:sldId id="264" r:id="rId10"/>
+    <p:sldId id="265" r:id="rId11"/>
+    <p:sldId id="266" r:id="rId12"/>
+    <p:sldId id="267" r:id="rId13"/>
+    <p:sldId id="268" r:id="rId14"/>
+    <p:sldId id="269" r:id="rId15"/>
+    <p:sldId id="270" r:id="rId16"/>
+    <p:sldId id="271" r:id="rId17"/>
   </p:sldIdLst>
-  <p:sldSz cy="5143500" cx="9144000"/>
+  <p:sldSz cx="9144000" cy="5143500" type="screen16x9"/>
   <p:notesSz cx="6858000" cy="9144000"/>
   <p:embeddedFontLst>
     <p:embeddedFont>
-      <p:font typeface="Google Sans Flex Medium"/>
-      <p:regular r:id="rId22"/>
-      <p:bold r:id="rId23"/>
+      <p:font typeface="Google Sans Flex" panose="020B0604020202020204" charset="0"/>
+      <p:regular r:id="rId19"/>
+      <p:bold r:id="rId20"/>
     </p:embeddedFont>
     <p:embeddedFont>
-      <p:font typeface="Google Sans Flex"/>
-      <p:regular r:id="rId24"/>
-      <p:bold r:id="rId25"/>
+      <p:font typeface="Google Sans Flex Medium" panose="020B0604020202020204" charset="0"/>
+      <p:regular r:id="rId21"/>
+      <p:bold r:id="rId22"/>
     </p:embeddedFont>
     <p:embeddedFont>
-      <p:font typeface="Google Sans Flex SemiBold"/>
-      <p:regular r:id="rId26"/>
-      <p:bold r:id="rId27"/>
+      <p:font typeface="Google Sans Flex SemiBold" panose="020B0604020202020204" charset="0"/>
+      <p:regular r:id="rId23"/>
+      <p:bold r:id="rId24"/>
     </p:embeddedFont>
   </p:embeddedFontLst>
   <p:defaultTextStyle>
-    <a:defPPr lvl="0" marR="0" rtl="0" algn="l">
+    <a:defPPr marR="0" lvl="0" algn="l" rtl="0">
       <a:lnSpc>
         <a:spcPct val="100000"/>
       </a:lnSpc>
@@ -56,7 +56,7 @@
         <a:spcPts val="0"/>
       </a:spcAft>
     </a:defPPr>
-    <a:lvl1pPr lvl="0" marR="0" rtl="0" algn="l">
+    <a:lvl1pPr marR="0" lvl="0" algn="l" rtl="0">
       <a:lnSpc>
         <a:spcPct val="100000"/>
       </a:lnSpc>
@@ -70,7 +70,7 @@
         <a:srgbClr val="000000"/>
       </a:buClr>
       <a:buFont typeface="Arial"/>
-      <a:defRPr b="0" i="0" spc="0" sz="1400" u="none" cap="none" strike="noStrike">
+      <a:defRPr sz="1400" b="0" i="0" u="none" strike="noStrike" cap="none" spc="0">
         <a:solidFill>
           <a:srgbClr val="000000"/>
         </a:solidFill>
@@ -80,7 +80,7 @@
         <a:sym typeface="Arial"/>
       </a:defRPr>
     </a:lvl1pPr>
-    <a:lvl2pPr lvl="1" marR="0" rtl="0" algn="l">
+    <a:lvl2pPr marR="0" lvl="1" algn="l" rtl="0">
       <a:lnSpc>
         <a:spcPct val="100000"/>
       </a:lnSpc>
@@ -94,7 +94,7 @@
         <a:srgbClr val="000000"/>
       </a:buClr>
       <a:buFont typeface="Arial"/>
-      <a:defRPr b="0" i="0" spc="0" sz="1400" u="none" cap="none" strike="noStrike">
+      <a:defRPr sz="1400" b="0" i="0" u="none" strike="noStrike" cap="none" spc="0">
         <a:solidFill>
           <a:srgbClr val="000000"/>
         </a:solidFill>
@@ -104,7 +104,7 @@
         <a:sym typeface="Arial"/>
       </a:defRPr>
     </a:lvl2pPr>
-    <a:lvl3pPr lvl="2" marR="0" rtl="0" algn="l">
+    <a:lvl3pPr marR="0" lvl="2" algn="l" rtl="0">
       <a:lnSpc>
         <a:spcPct val="100000"/>
       </a:lnSpc>
@@ -118,7 +118,7 @@
         <a:srgbClr val="000000"/>
       </a:buClr>
       <a:buFont typeface="Arial"/>
-      <a:defRPr b="0" i="0" spc="0" sz="1400" u="none" cap="none" strike="noStrike">
+      <a:defRPr sz="1400" b="0" i="0" u="none" strike="noStrike" cap="none" spc="0">
         <a:solidFill>
           <a:srgbClr val="000000"/>
         </a:solidFill>
@@ -128,7 +128,7 @@
         <a:sym typeface="Arial"/>
       </a:defRPr>
     </a:lvl3pPr>
-    <a:lvl4pPr lvl="3" marR="0" rtl="0" algn="l">
+    <a:lvl4pPr marR="0" lvl="3" algn="l" rtl="0">
       <a:lnSpc>
         <a:spcPct val="100000"/>
       </a:lnSpc>
@@ -142,7 +142,7 @@
         <a:srgbClr val="000000"/>
       </a:buClr>
       <a:buFont typeface="Arial"/>
-      <a:defRPr b="0" i="0" spc="0" sz="1400" u="none" cap="none" strike="noStrike">
+      <a:defRPr sz="1400" b="0" i="0" u="none" strike="noStrike" cap="none" spc="0">
         <a:solidFill>
           <a:srgbClr val="000000"/>
         </a:solidFill>
@@ -152,7 +152,7 @@
         <a:sym typeface="Arial"/>
       </a:defRPr>
     </a:lvl4pPr>
-    <a:lvl5pPr lvl="4" marR="0" rtl="0" algn="l">
+    <a:lvl5pPr marR="0" lvl="4" algn="l" rtl="0">
       <a:lnSpc>
         <a:spcPct val="100000"/>
       </a:lnSpc>
@@ -166,7 +166,7 @@
         <a:srgbClr val="000000"/>
       </a:buClr>
       <a:buFont typeface="Arial"/>
-      <a:defRPr b="0" i="0" spc="0" sz="1400" u="none" cap="none" strike="noStrike">
+      <a:defRPr sz="1400" b="0" i="0" u="none" strike="noStrike" cap="none" spc="0">
         <a:solidFill>
           <a:srgbClr val="000000"/>
         </a:solidFill>
@@ -176,7 +176,7 @@
         <a:sym typeface="Arial"/>
       </a:defRPr>
     </a:lvl5pPr>
-    <a:lvl6pPr lvl="5" marR="0" rtl="0" algn="l">
+    <a:lvl6pPr marR="0" lvl="5" algn="l" rtl="0">
       <a:lnSpc>
         <a:spcPct val="100000"/>
       </a:lnSpc>
@@ -190,7 +190,7 @@
         <a:srgbClr val="000000"/>
       </a:buClr>
       <a:buFont typeface="Arial"/>
-      <a:defRPr b="0" i="0" spc="0" sz="1400" u="none" cap="none" strike="noStrike">
+      <a:defRPr sz="1400" b="0" i="0" u="none" strike="noStrike" cap="none" spc="0">
         <a:solidFill>
           <a:srgbClr val="000000"/>
         </a:solidFill>
@@ -200,7 +200,7 @@
         <a:sym typeface="Arial"/>
       </a:defRPr>
     </a:lvl6pPr>
-    <a:lvl7pPr lvl="6" marR="0" rtl="0" algn="l">
+    <a:lvl7pPr marR="0" lvl="6" algn="l" rtl="0">
       <a:lnSpc>
         <a:spcPct val="100000"/>
       </a:lnSpc>
@@ -214,7 +214,7 @@
         <a:srgbClr val="000000"/>
       </a:buClr>
       <a:buFont typeface="Arial"/>
-      <a:defRPr b="0" i="0" spc="0" sz="1400" u="none" cap="none" strike="noStrike">
+      <a:defRPr sz="1400" b="0" i="0" u="none" strike="noStrike" cap="none" spc="0">
         <a:solidFill>
           <a:srgbClr val="000000"/>
         </a:solidFill>
@@ -224,7 +224,7 @@
         <a:sym typeface="Arial"/>
       </a:defRPr>
     </a:lvl7pPr>
-    <a:lvl8pPr lvl="7" marR="0" rtl="0" algn="l">
+    <a:lvl8pPr marR="0" lvl="7" algn="l" rtl="0">
       <a:lnSpc>
         <a:spcPct val="100000"/>
       </a:lnSpc>
@@ -238,7 +238,7 @@
         <a:srgbClr val="000000"/>
       </a:buClr>
       <a:buFont typeface="Arial"/>
-      <a:defRPr b="0" i="0" spc="0" sz="1400" u="none" cap="none" strike="noStrike">
+      <a:defRPr sz="1400" b="0" i="0" u="none" strike="noStrike" cap="none" spc="0">
         <a:solidFill>
           <a:srgbClr val="000000"/>
         </a:solidFill>
@@ -248,7 +248,7 @@
         <a:sym typeface="Arial"/>
       </a:defRPr>
     </a:lvl8pPr>
-    <a:lvl9pPr lvl="8" marR="0" rtl="0" algn="l">
+    <a:lvl9pPr marR="0" lvl="8" algn="l" rtl="0">
       <a:lnSpc>
         <a:spcPct val="100000"/>
       </a:lnSpc>
@@ -262,7 +262,7 @@
         <a:srgbClr val="000000"/>
       </a:buClr>
       <a:buFont typeface="Arial"/>
-      <a:defRPr b="0" i="0" spc="0" sz="1400" u="none" cap="none" strike="noStrike">
+      <a:defRPr sz="1400" b="0" i="0" u="none" strike="noStrike" cap="none" spc="0">
         <a:solidFill>
           <a:srgbClr val="000000"/>
         </a:solidFill>
@@ -275,7 +275,7 @@
   </p:defaultTextStyle>
   <p:extLst>
     <p:ext uri="{EFAFB233-063F-42B5-8137-9DF3F51BA10A}">
-      <p15:sldGuideLst>
+      <p15:sldGuideLst xmlns:p15="http://schemas.microsoft.com/office/powerpoint/2012/main">
         <p15:guide id="1" orient="horz" pos="1620">
           <p15:clr>
             <a:srgbClr val="747775"/>
@@ -293,11 +293,16 @@
 </file>
 
 <file path=ppt/notesMasters/notesMaster1.xml><?xml version="1.0" encoding="utf-8"?>
-<p:notesMaster xmlns:a="http://schemas.openxmlformats.org/drawingml/2006/main" xmlns:r="http://schemas.openxmlformats.org/officeDocument/2006/relationships" xmlns:mc="http://schemas.openxmlformats.org/markup-compatibility/2006" xmlns:mv="urn:schemas-microsoft-com:mac:vml" xmlns:p="http://schemas.openxmlformats.org/presentationml/2006/main" xmlns:c="http://schemas.openxmlformats.org/drawingml/2006/chart" xmlns:dgm="http://schemas.openxmlformats.org/drawingml/2006/diagram" xmlns:o="urn:schemas-microsoft-com:office:office" xmlns:v="urn:schemas-microsoft-com:vml" xmlns:pvml="urn:schemas-microsoft-com:office:powerpoint" xmlns:com="http://schemas.openxmlformats.org/drawingml/2006/compatibility" xmlns:p14="http://schemas.microsoft.com/office/powerpoint/2010/main" xmlns:p15="http://schemas.microsoft.com/office/powerpoint/2012/main" xmlns:ahyp="http://schemas.microsoft.com/office/drawing/2018/hyperlinkcolor">
+<p:notesMaster xmlns:a="http://schemas.openxmlformats.org/drawingml/2006/main" xmlns:r="http://schemas.openxmlformats.org/officeDocument/2006/relationships" xmlns:p="http://schemas.openxmlformats.org/presentationml/2006/main">
   <p:cSld>
+    <p:bg>
+      <p:bgRef idx="1001">
+        <a:schemeClr val="bg1"/>
+      </p:bgRef>
+    </p:bg>
     <p:spTree>
       <p:nvGrpSpPr>
-        <p:cNvPr id="2" name="Shape 2"/>
+        <p:cNvPr id="1" name="Shape 2"/>
         <p:cNvGrpSpPr/>
         <p:nvPr/>
       </p:nvGrpSpPr>
@@ -312,9 +317,11 @@
       <p:sp>
         <p:nvSpPr>
           <p:cNvPr id="3" name="Google Shape;3;n"/>
-          <p:cNvSpPr/>
+          <p:cNvSpPr>
+            <a:spLocks noGrp="1" noRot="1" noChangeAspect="1"/>
+          </p:cNvSpPr>
           <p:nvPr>
-            <p:ph idx="2" type="sldImg"/>
+            <p:ph type="sldImg" idx="2"/>
           </p:nvPr>
         </p:nvSpPr>
         <p:spPr>
@@ -323,9 +330,13 @@
             <a:ext cx="6096075" cy="3429000"/>
           </a:xfrm>
           <a:custGeom>
-            <a:rect b="b" l="l" r="r" t="t"/>
+            <a:avLst/>
+            <a:gdLst/>
+            <a:ahLst/>
+            <a:cxnLst/>
+            <a:rect l="l" t="t" r="r" b="b"/>
             <a:pathLst>
-              <a:path extrusionOk="0" h="120000" w="120000">
+              <a:path w="120000" h="120000" extrusionOk="0">
                 <a:moveTo>
                   <a:pt x="0" y="0"/>
                 </a:moveTo>
@@ -343,23 +354,25 @@
             </a:pathLst>
           </a:custGeom>
           <a:noFill/>
-          <a:ln cap="flat" cmpd="sng" w="9525">
+          <a:ln w="9525" cap="flat" cmpd="sng">
             <a:solidFill>
               <a:srgbClr val="000000"/>
             </a:solidFill>
             <a:prstDash val="solid"/>
             <a:round/>
-            <a:headEnd len="sm" w="sm" type="none"/>
-            <a:tailEnd len="sm" w="sm" type="none"/>
+            <a:headEnd type="none" w="sm" len="sm"/>
+            <a:tailEnd type="none" w="sm" len="sm"/>
           </a:ln>
         </p:spPr>
       </p:sp>
       <p:sp>
         <p:nvSpPr>
           <p:cNvPr id="4" name="Google Shape;4;n"/>
-          <p:cNvSpPr txBox="1"/>
+          <p:cNvSpPr txBox="1">
+            <a:spLocks noGrp="1"/>
+          </p:cNvSpPr>
           <p:nvPr>
-            <p:ph idx="1" type="body"/>
+            <p:ph type="body" idx="1"/>
           </p:nvPr>
         </p:nvSpPr>
         <p:spPr>
@@ -376,11 +389,11 @@
           </a:ln>
         </p:spPr>
         <p:txBody>
-          <a:bodyPr anchorCtr="0" anchor="t" bIns="91425" lIns="91425" spcFirstLastPara="1" rIns="91425" wrap="square" tIns="91425">
+          <a:bodyPr spcFirstLastPara="1" wrap="square" lIns="91425" tIns="91425" rIns="91425" bIns="91425" anchor="t" anchorCtr="0">
             <a:noAutofit/>
           </a:bodyPr>
           <a:lstStyle>
-            <a:lvl1pPr indent="-298450" lvl="0" marL="457200">
+            <a:lvl1pPr marL="457200" lvl="0" indent="-298450">
               <a:spcBef>
                 <a:spcPts val="0"/>
               </a:spcBef>
@@ -391,7 +404,7 @@
               <a:buChar char="●"/>
               <a:defRPr sz="1100"/>
             </a:lvl1pPr>
-            <a:lvl2pPr indent="-298450" lvl="1" marL="914400">
+            <a:lvl2pPr marL="914400" lvl="1" indent="-298450">
               <a:spcBef>
                 <a:spcPts val="0"/>
               </a:spcBef>
@@ -402,7 +415,7 @@
               <a:buChar char="○"/>
               <a:defRPr sz="1100"/>
             </a:lvl2pPr>
-            <a:lvl3pPr indent="-298450" lvl="2" marL="1371600">
+            <a:lvl3pPr marL="1371600" lvl="2" indent="-298450">
               <a:spcBef>
                 <a:spcPts val="0"/>
               </a:spcBef>
@@ -413,7 +426,7 @@
               <a:buChar char="■"/>
               <a:defRPr sz="1100"/>
             </a:lvl3pPr>
-            <a:lvl4pPr indent="-298450" lvl="3" marL="1828800">
+            <a:lvl4pPr marL="1828800" lvl="3" indent="-298450">
               <a:spcBef>
                 <a:spcPts val="0"/>
               </a:spcBef>
@@ -424,7 +437,7 @@
               <a:buChar char="●"/>
               <a:defRPr sz="1100"/>
             </a:lvl4pPr>
-            <a:lvl5pPr indent="-298450" lvl="4" marL="2286000">
+            <a:lvl5pPr marL="2286000" lvl="4" indent="-298450">
               <a:spcBef>
                 <a:spcPts val="0"/>
               </a:spcBef>
@@ -435,7 +448,7 @@
               <a:buChar char="○"/>
               <a:defRPr sz="1100"/>
             </a:lvl5pPr>
-            <a:lvl6pPr indent="-298450" lvl="5" marL="2743200">
+            <a:lvl6pPr marL="2743200" lvl="5" indent="-298450">
               <a:spcBef>
                 <a:spcPts val="0"/>
               </a:spcBef>
@@ -446,7 +459,7 @@
               <a:buChar char="■"/>
               <a:defRPr sz="1100"/>
             </a:lvl6pPr>
-            <a:lvl7pPr indent="-298450" lvl="6" marL="3200400">
+            <a:lvl7pPr marL="3200400" lvl="6" indent="-298450">
               <a:spcBef>
                 <a:spcPts val="0"/>
               </a:spcBef>
@@ -457,7 +470,7 @@
               <a:buChar char="●"/>
               <a:defRPr sz="1100"/>
             </a:lvl7pPr>
-            <a:lvl8pPr indent="-298450" lvl="7" marL="3657600">
+            <a:lvl8pPr marL="3657600" lvl="7" indent="-298450">
               <a:spcBef>
                 <a:spcPts val="0"/>
               </a:spcBef>
@@ -468,7 +481,7 @@
               <a:buChar char="○"/>
               <a:defRPr sz="1100"/>
             </a:lvl8pPr>
-            <a:lvl9pPr indent="-298450" lvl="8" marL="4114800">
+            <a:lvl9pPr marL="4114800" lvl="8" indent="-298450">
               <a:spcBef>
                 <a:spcPts val="0"/>
               </a:spcBef>
@@ -480,14 +493,16 @@
               <a:defRPr sz="1100"/>
             </a:lvl9pPr>
           </a:lstStyle>
-          <a:p/>
+          <a:p>
+            <a:endParaRPr/>
+          </a:p>
         </p:txBody>
       </p:sp>
     </p:spTree>
   </p:cSld>
-  <p:clrMap accent1="accent1" accent2="accent2" accent3="accent3" accent4="accent4" accent5="accent5" accent6="accent6" bg1="lt1" bg2="dk2" tx1="dk1" tx2="lt2" folHlink="folHlink" hlink="hlink"/>
+  <p:clrMap bg1="lt1" tx1="dk1" bg2="dk2" tx2="lt2" accent1="accent1" accent2="accent2" accent3="accent3" accent4="accent4" accent5="accent5" accent6="accent6" hlink="hlink" folHlink="folHlink"/>
   <p:notesStyle>
-    <a:defPPr lvl="0" marR="0" rtl="0" algn="l">
+    <a:defPPr marR="0" lvl="0" algn="l" rtl="0">
       <a:lnSpc>
         <a:spcPct val="100000"/>
       </a:lnSpc>
@@ -498,7 +513,7 @@
         <a:spcPts val="0"/>
       </a:spcAft>
     </a:defPPr>
-    <a:lvl1pPr lvl="0" marR="0" rtl="0" algn="l">
+    <a:lvl1pPr marR="0" lvl="0" algn="l" rtl="0">
       <a:lnSpc>
         <a:spcPct val="100000"/>
       </a:lnSpc>
@@ -512,7 +527,7 @@
         <a:srgbClr val="000000"/>
       </a:buClr>
       <a:buFont typeface="Arial"/>
-      <a:defRPr b="0" i="0" spc="0" sz="1400" u="none" cap="none" strike="noStrike">
+      <a:defRPr sz="1400" b="0" i="0" u="none" strike="noStrike" cap="none" spc="0">
         <a:solidFill>
           <a:srgbClr val="000000"/>
         </a:solidFill>
@@ -522,7 +537,7 @@
         <a:sym typeface="Arial"/>
       </a:defRPr>
     </a:lvl1pPr>
-    <a:lvl2pPr lvl="1" marR="0" rtl="0" algn="l">
+    <a:lvl2pPr marR="0" lvl="1" algn="l" rtl="0">
       <a:lnSpc>
         <a:spcPct val="100000"/>
       </a:lnSpc>
@@ -536,7 +551,7 @@
         <a:srgbClr val="000000"/>
       </a:buClr>
       <a:buFont typeface="Arial"/>
-      <a:defRPr b="0" i="0" spc="0" sz="1400" u="none" cap="none" strike="noStrike">
+      <a:defRPr sz="1400" b="0" i="0" u="none" strike="noStrike" cap="none" spc="0">
         <a:solidFill>
           <a:srgbClr val="000000"/>
         </a:solidFill>
@@ -546,7 +561,7 @@
         <a:sym typeface="Arial"/>
       </a:defRPr>
     </a:lvl2pPr>
-    <a:lvl3pPr lvl="2" marR="0" rtl="0" algn="l">
+    <a:lvl3pPr marR="0" lvl="2" algn="l" rtl="0">
       <a:lnSpc>
         <a:spcPct val="100000"/>
       </a:lnSpc>
@@ -560,7 +575,7 @@
         <a:srgbClr val="000000"/>
       </a:buClr>
       <a:buFont typeface="Arial"/>
-      <a:defRPr b="0" i="0" spc="0" sz="1400" u="none" cap="none" strike="noStrike">
+      <a:defRPr sz="1400" b="0" i="0" u="none" strike="noStrike" cap="none" spc="0">
         <a:solidFill>
           <a:srgbClr val="000000"/>
         </a:solidFill>
@@ -570,7 +585,7 @@
         <a:sym typeface="Arial"/>
       </a:defRPr>
     </a:lvl3pPr>
-    <a:lvl4pPr lvl="3" marR="0" rtl="0" algn="l">
+    <a:lvl4pPr marR="0" lvl="3" algn="l" rtl="0">
       <a:lnSpc>
         <a:spcPct val="100000"/>
       </a:lnSpc>
@@ -584,7 +599,7 @@
         <a:srgbClr val="000000"/>
       </a:buClr>
       <a:buFont typeface="Arial"/>
-      <a:defRPr b="0" i="0" spc="0" sz="1400" u="none" cap="none" strike="noStrike">
+      <a:defRPr sz="1400" b="0" i="0" u="none" strike="noStrike" cap="none" spc="0">
         <a:solidFill>
           <a:srgbClr val="000000"/>
         </a:solidFill>
@@ -594,7 +609,7 @@
         <a:sym typeface="Arial"/>
       </a:defRPr>
     </a:lvl4pPr>
-    <a:lvl5pPr lvl="4" marR="0" rtl="0" algn="l">
+    <a:lvl5pPr marR="0" lvl="4" algn="l" rtl="0">
       <a:lnSpc>
         <a:spcPct val="100000"/>
       </a:lnSpc>
@@ -608,7 +623,7 @@
         <a:srgbClr val="000000"/>
       </a:buClr>
       <a:buFont typeface="Arial"/>
-      <a:defRPr b="0" i="0" spc="0" sz="1400" u="none" cap="none" strike="noStrike">
+      <a:defRPr sz="1400" b="0" i="0" u="none" strike="noStrike" cap="none" spc="0">
         <a:solidFill>
           <a:srgbClr val="000000"/>
         </a:solidFill>
@@ -618,7 +633,7 @@
         <a:sym typeface="Arial"/>
       </a:defRPr>
     </a:lvl5pPr>
-    <a:lvl6pPr lvl="5" marR="0" rtl="0" algn="l">
+    <a:lvl6pPr marR="0" lvl="5" algn="l" rtl="0">
       <a:lnSpc>
         <a:spcPct val="100000"/>
       </a:lnSpc>
@@ -632,7 +647,7 @@
         <a:srgbClr val="000000"/>
       </a:buClr>
       <a:buFont typeface="Arial"/>
-      <a:defRPr b="0" i="0" spc="0" sz="1400" u="none" cap="none" strike="noStrike">
+      <a:defRPr sz="1400" b="0" i="0" u="none" strike="noStrike" cap="none" spc="0">
         <a:solidFill>
           <a:srgbClr val="000000"/>
         </a:solidFill>
@@ -642,7 +657,7 @@
         <a:sym typeface="Arial"/>
       </a:defRPr>
     </a:lvl6pPr>
-    <a:lvl7pPr lvl="6" marR="0" rtl="0" algn="l">
+    <a:lvl7pPr marR="0" lvl="6" algn="l" rtl="0">
       <a:lnSpc>
         <a:spcPct val="100000"/>
       </a:lnSpc>
@@ -656,7 +671,7 @@
         <a:srgbClr val="000000"/>
       </a:buClr>
       <a:buFont typeface="Arial"/>
-      <a:defRPr b="0" i="0" spc="0" sz="1400" u="none" cap="none" strike="noStrike">
+      <a:defRPr sz="1400" b="0" i="0" u="none" strike="noStrike" cap="none" spc="0">
         <a:solidFill>
           <a:srgbClr val="000000"/>
         </a:solidFill>
@@ -666,7 +681,7 @@
         <a:sym typeface="Arial"/>
       </a:defRPr>
     </a:lvl7pPr>
-    <a:lvl8pPr lvl="7" marR="0" rtl="0" algn="l">
+    <a:lvl8pPr marR="0" lvl="7" algn="l" rtl="0">
       <a:lnSpc>
         <a:spcPct val="100000"/>
       </a:lnSpc>
@@ -680,7 +695,7 @@
         <a:srgbClr val="000000"/>
       </a:buClr>
       <a:buFont typeface="Arial"/>
-      <a:defRPr b="0" i="0" spc="0" sz="1400" u="none" cap="none" strike="noStrike">
+      <a:defRPr sz="1400" b="0" i="0" u="none" strike="noStrike" cap="none" spc="0">
         <a:solidFill>
           <a:srgbClr val="000000"/>
         </a:solidFill>
@@ -690,7 +705,7 @@
         <a:sym typeface="Arial"/>
       </a:defRPr>
     </a:lvl8pPr>
-    <a:lvl9pPr lvl="8" marR="0" rtl="0" algn="l">
+    <a:lvl9pPr marR="0" lvl="8" algn="l" rtl="0">
       <a:lnSpc>
         <a:spcPct val="100000"/>
       </a:lnSpc>
@@ -704,7 +719,7 @@
         <a:srgbClr val="000000"/>
       </a:buClr>
       <a:buFont typeface="Arial"/>
-      <a:defRPr b="0" i="0" spc="0" sz="1400" u="none" cap="none" strike="noStrike">
+      <a:defRPr sz="1400" b="0" i="0" u="none" strike="noStrike" cap="none" spc="0">
         <a:solidFill>
           <a:srgbClr val="000000"/>
         </a:solidFill>
@@ -719,11 +734,11 @@
 </file>
 
 <file path=ppt/notesSlides/notesSlide1.xml><?xml version="1.0" encoding="utf-8"?>
-<p:notes xmlns:a="http://schemas.openxmlformats.org/drawingml/2006/main" xmlns:r="http://schemas.openxmlformats.org/officeDocument/2006/relationships" xmlns:mc="http://schemas.openxmlformats.org/markup-compatibility/2006" xmlns:mv="urn:schemas-microsoft-com:mac:vml" xmlns:p="http://schemas.openxmlformats.org/presentationml/2006/main" xmlns:c="http://schemas.openxmlformats.org/drawingml/2006/chart" xmlns:dgm="http://schemas.openxmlformats.org/drawingml/2006/diagram" xmlns:o="urn:schemas-microsoft-com:office:office" xmlns:v="urn:schemas-microsoft-com:vml" xmlns:pvml="urn:schemas-microsoft-com:office:powerpoint" xmlns:com="http://schemas.openxmlformats.org/drawingml/2006/compatibility" xmlns:p14="http://schemas.microsoft.com/office/powerpoint/2010/main" xmlns:p15="http://schemas.microsoft.com/office/powerpoint/2012/main" xmlns:ahyp="http://schemas.microsoft.com/office/drawing/2018/hyperlinkcolor" showMasterPhAnim="0" showMasterSp="0">
+<p:notes xmlns:a="http://schemas.openxmlformats.org/drawingml/2006/main" xmlns:r="http://schemas.openxmlformats.org/officeDocument/2006/relationships" xmlns:p="http://schemas.openxmlformats.org/presentationml/2006/main" showMasterSp="0" showMasterPhAnim="0">
   <p:cSld>
     <p:spTree>
       <p:nvGrpSpPr>
-        <p:cNvPr id="50" name="Shape 50"/>
+        <p:cNvPr id="1" name="Shape 50"/>
         <p:cNvGrpSpPr/>
         <p:nvPr/>
       </p:nvGrpSpPr>
@@ -738,9 +753,11 @@
       <p:sp>
         <p:nvSpPr>
           <p:cNvPr id="51" name="Google Shape;51;p:notes"/>
-          <p:cNvSpPr/>
+          <p:cNvSpPr>
+            <a:spLocks noGrp="1" noRot="1" noChangeAspect="1"/>
+          </p:cNvSpPr>
           <p:nvPr>
-            <p:ph idx="2" type="sldImg"/>
+            <p:ph type="sldImg" idx="2"/>
           </p:nvPr>
         </p:nvSpPr>
         <p:spPr>
@@ -749,9 +766,13 @@
             <a:ext cx="6096075" cy="3429000"/>
           </a:xfrm>
           <a:custGeom>
-            <a:rect b="b" l="l" r="r" t="t"/>
+            <a:avLst/>
+            <a:gdLst/>
+            <a:ahLst/>
+            <a:cxnLst/>
+            <a:rect l="l" t="t" r="r" b="b"/>
             <a:pathLst>
-              <a:path extrusionOk="0" h="120000" w="120000">
+              <a:path w="120000" h="120000" extrusionOk="0">
                 <a:moveTo>
                   <a:pt x="0" y="0"/>
                 </a:moveTo>
@@ -773,9 +794,11 @@
       <p:sp>
         <p:nvSpPr>
           <p:cNvPr id="52" name="Google Shape;52;p:notes"/>
-          <p:cNvSpPr txBox="1"/>
+          <p:cNvSpPr txBox="1">
+            <a:spLocks noGrp="1"/>
+          </p:cNvSpPr>
           <p:nvPr>
-            <p:ph idx="1" type="body"/>
+            <p:ph type="body" idx="1"/>
           </p:nvPr>
         </p:nvSpPr>
         <p:spPr>
@@ -788,23 +811,20 @@
           </a:prstGeom>
         </p:spPr>
         <p:txBody>
-          <a:bodyPr anchorCtr="0" anchor="t" bIns="91425" lIns="91425" spcFirstLastPara="1" rIns="91425" wrap="square" tIns="91425">
+          <a:bodyPr spcFirstLastPara="1" wrap="square" lIns="91425" tIns="91425" rIns="91425" bIns="91425" anchor="t" anchorCtr="0">
             <a:noAutofit/>
           </a:bodyPr>
           <a:lstStyle/>
           <a:p>
-            <a:pPr indent="0" lvl="0" marL="0" rtl="0" algn="l">
-              <a:spcBef>
-                <a:spcPts val="0"/>
-              </a:spcBef>
-              <a:spcAft>
-                <a:spcPts val="0"/>
-              </a:spcAft>
-              <a:buNone/>
-            </a:pPr>
-            <a:r>
-              <a:t/>
-            </a:r>
+            <a:pPr marL="0" lvl="0" indent="0" algn="l" rtl="0">
+              <a:spcBef>
+                <a:spcPts val="0"/>
+              </a:spcBef>
+              <a:spcAft>
+                <a:spcPts val="0"/>
+              </a:spcAft>
+              <a:buNone/>
+            </a:pPr>
             <a:endParaRPr/>
           </a:p>
         </p:txBody>
@@ -818,11 +838,11 @@
 </file>
 
 <file path=ppt/notesSlides/notesSlide10.xml><?xml version="1.0" encoding="utf-8"?>
-<p:notes xmlns:a="http://schemas.openxmlformats.org/drawingml/2006/main" xmlns:r="http://schemas.openxmlformats.org/officeDocument/2006/relationships" xmlns:mc="http://schemas.openxmlformats.org/markup-compatibility/2006" xmlns:mv="urn:schemas-microsoft-com:mac:vml" xmlns:p="http://schemas.openxmlformats.org/presentationml/2006/main" xmlns:c="http://schemas.openxmlformats.org/drawingml/2006/chart" xmlns:dgm="http://schemas.openxmlformats.org/drawingml/2006/diagram" xmlns:o="urn:schemas-microsoft-com:office:office" xmlns:v="urn:schemas-microsoft-com:vml" xmlns:pvml="urn:schemas-microsoft-com:office:powerpoint" xmlns:com="http://schemas.openxmlformats.org/drawingml/2006/compatibility" xmlns:p14="http://schemas.microsoft.com/office/powerpoint/2010/main" xmlns:p15="http://schemas.microsoft.com/office/powerpoint/2012/main" xmlns:ahyp="http://schemas.microsoft.com/office/drawing/2018/hyperlinkcolor" showMasterPhAnim="0" showMasterSp="0">
+<p:notes xmlns:a="http://schemas.openxmlformats.org/drawingml/2006/main" xmlns:r="http://schemas.openxmlformats.org/officeDocument/2006/relationships" xmlns:p="http://schemas.openxmlformats.org/presentationml/2006/main" showMasterSp="0" showMasterPhAnim="0">
   <p:cSld>
     <p:spTree>
       <p:nvGrpSpPr>
-        <p:cNvPr id="120" name="Shape 120"/>
+        <p:cNvPr id="1" name="Shape 120"/>
         <p:cNvGrpSpPr/>
         <p:nvPr/>
       </p:nvGrpSpPr>
@@ -837,9 +857,11 @@
       <p:sp>
         <p:nvSpPr>
           <p:cNvPr id="121" name="Google Shape;121;g3fb085bff3c_0_41:notes"/>
-          <p:cNvSpPr/>
+          <p:cNvSpPr>
+            <a:spLocks noGrp="1" noRot="1" noChangeAspect="1"/>
+          </p:cNvSpPr>
           <p:nvPr>
-            <p:ph idx="2" type="sldImg"/>
+            <p:ph type="sldImg" idx="2"/>
           </p:nvPr>
         </p:nvSpPr>
         <p:spPr>
@@ -848,9 +870,13 @@
             <a:ext cx="6096000" cy="3429000"/>
           </a:xfrm>
           <a:custGeom>
-            <a:rect b="b" l="l" r="r" t="t"/>
+            <a:avLst/>
+            <a:gdLst/>
+            <a:ahLst/>
+            <a:cxnLst/>
+            <a:rect l="l" t="t" r="r" b="b"/>
             <a:pathLst>
-              <a:path extrusionOk="0" h="120000" w="120000">
+              <a:path w="120000" h="120000" extrusionOk="0">
                 <a:moveTo>
                   <a:pt x="0" y="0"/>
                 </a:moveTo>
@@ -872,9 +898,11 @@
       <p:sp>
         <p:nvSpPr>
           <p:cNvPr id="122" name="Google Shape;122;g3fb085bff3c_0_41:notes"/>
-          <p:cNvSpPr txBox="1"/>
+          <p:cNvSpPr txBox="1">
+            <a:spLocks noGrp="1"/>
+          </p:cNvSpPr>
           <p:nvPr>
-            <p:ph idx="1" type="body"/>
+            <p:ph type="body" idx="1"/>
           </p:nvPr>
         </p:nvSpPr>
         <p:spPr>
@@ -887,23 +915,20 @@
           </a:prstGeom>
         </p:spPr>
         <p:txBody>
-          <a:bodyPr anchorCtr="0" anchor="t" bIns="91425" lIns="91425" spcFirstLastPara="1" rIns="91425" wrap="square" tIns="91425">
+          <a:bodyPr spcFirstLastPara="1" wrap="square" lIns="91425" tIns="91425" rIns="91425" bIns="91425" anchor="t" anchorCtr="0">
             <a:noAutofit/>
           </a:bodyPr>
           <a:lstStyle/>
           <a:p>
-            <a:pPr indent="0" lvl="0" marL="0" rtl="0" algn="l">
-              <a:spcBef>
-                <a:spcPts val="0"/>
-              </a:spcBef>
-              <a:spcAft>
-                <a:spcPts val="0"/>
-              </a:spcAft>
-              <a:buNone/>
-            </a:pPr>
-            <a:r>
-              <a:t/>
-            </a:r>
+            <a:pPr marL="0" lvl="0" indent="0" algn="l" rtl="0">
+              <a:spcBef>
+                <a:spcPts val="0"/>
+              </a:spcBef>
+              <a:spcAft>
+                <a:spcPts val="0"/>
+              </a:spcAft>
+              <a:buNone/>
+            </a:pPr>
             <a:endParaRPr/>
           </a:p>
         </p:txBody>
@@ -917,11 +942,11 @@
 </file>
 
 <file path=ppt/notesSlides/notesSlide11.xml><?xml version="1.0" encoding="utf-8"?>
-<p:notes xmlns:a="http://schemas.openxmlformats.org/drawingml/2006/main" xmlns:r="http://schemas.openxmlformats.org/officeDocument/2006/relationships" xmlns:mc="http://schemas.openxmlformats.org/markup-compatibility/2006" xmlns:mv="urn:schemas-microsoft-com:mac:vml" xmlns:p="http://schemas.openxmlformats.org/presentationml/2006/main" xmlns:c="http://schemas.openxmlformats.org/drawingml/2006/chart" xmlns:dgm="http://schemas.openxmlformats.org/drawingml/2006/diagram" xmlns:o="urn:schemas-microsoft-com:office:office" xmlns:v="urn:schemas-microsoft-com:vml" xmlns:pvml="urn:schemas-microsoft-com:office:powerpoint" xmlns:com="http://schemas.openxmlformats.org/drawingml/2006/compatibility" xmlns:p14="http://schemas.microsoft.com/office/powerpoint/2010/main" xmlns:p15="http://schemas.microsoft.com/office/powerpoint/2012/main" xmlns:ahyp="http://schemas.microsoft.com/office/drawing/2018/hyperlinkcolor" showMasterPhAnim="0" showMasterSp="0">
+<p:notes xmlns:a="http://schemas.openxmlformats.org/drawingml/2006/main" xmlns:r="http://schemas.openxmlformats.org/officeDocument/2006/relationships" xmlns:p="http://schemas.openxmlformats.org/presentationml/2006/main" showMasterSp="0" showMasterPhAnim="0">
   <p:cSld>
     <p:spTree>
       <p:nvGrpSpPr>
-        <p:cNvPr id="128" name="Shape 128"/>
+        <p:cNvPr id="1" name="Shape 128"/>
         <p:cNvGrpSpPr/>
         <p:nvPr/>
       </p:nvGrpSpPr>
@@ -936,9 +961,11 @@
       <p:sp>
         <p:nvSpPr>
           <p:cNvPr id="129" name="Google Shape;129;g3fb085bff3c_0_46:notes"/>
-          <p:cNvSpPr/>
+          <p:cNvSpPr>
+            <a:spLocks noGrp="1" noRot="1" noChangeAspect="1"/>
+          </p:cNvSpPr>
           <p:nvPr>
-            <p:ph idx="2" type="sldImg"/>
+            <p:ph type="sldImg" idx="2"/>
           </p:nvPr>
         </p:nvSpPr>
         <p:spPr>
@@ -947,9 +974,13 @@
             <a:ext cx="6096000" cy="3429000"/>
           </a:xfrm>
           <a:custGeom>
-            <a:rect b="b" l="l" r="r" t="t"/>
+            <a:avLst/>
+            <a:gdLst/>
+            <a:ahLst/>
+            <a:cxnLst/>
+            <a:rect l="l" t="t" r="r" b="b"/>
             <a:pathLst>
-              <a:path extrusionOk="0" h="120000" w="120000">
+              <a:path w="120000" h="120000" extrusionOk="0">
                 <a:moveTo>
                   <a:pt x="0" y="0"/>
                 </a:moveTo>
@@ -971,9 +1002,11 @@
       <p:sp>
         <p:nvSpPr>
           <p:cNvPr id="130" name="Google Shape;130;g3fb085bff3c_0_46:notes"/>
-          <p:cNvSpPr txBox="1"/>
+          <p:cNvSpPr txBox="1">
+            <a:spLocks noGrp="1"/>
+          </p:cNvSpPr>
           <p:nvPr>
-            <p:ph idx="1" type="body"/>
+            <p:ph type="body" idx="1"/>
           </p:nvPr>
         </p:nvSpPr>
         <p:spPr>
@@ -986,23 +1019,20 @@
           </a:prstGeom>
         </p:spPr>
         <p:txBody>
-          <a:bodyPr anchorCtr="0" anchor="t" bIns="91425" lIns="91425" spcFirstLastPara="1" rIns="91425" wrap="square" tIns="91425">
+          <a:bodyPr spcFirstLastPara="1" wrap="square" lIns="91425" tIns="91425" rIns="91425" bIns="91425" anchor="t" anchorCtr="0">
             <a:noAutofit/>
           </a:bodyPr>
           <a:lstStyle/>
           <a:p>
-            <a:pPr indent="0" lvl="0" marL="0" rtl="0" algn="l">
-              <a:spcBef>
-                <a:spcPts val="0"/>
-              </a:spcBef>
-              <a:spcAft>
-                <a:spcPts val="0"/>
-              </a:spcAft>
-              <a:buNone/>
-            </a:pPr>
-            <a:r>
-              <a:t/>
-            </a:r>
+            <a:pPr marL="0" lvl="0" indent="0" algn="l" rtl="0">
+              <a:spcBef>
+                <a:spcPts val="0"/>
+              </a:spcBef>
+              <a:spcAft>
+                <a:spcPts val="0"/>
+              </a:spcAft>
+              <a:buNone/>
+            </a:pPr>
             <a:endParaRPr/>
           </a:p>
         </p:txBody>
@@ -1016,11 +1046,11 @@
 </file>
 
 <file path=ppt/notesSlides/notesSlide12.xml><?xml version="1.0" encoding="utf-8"?>
-<p:notes xmlns:a="http://schemas.openxmlformats.org/drawingml/2006/main" xmlns:r="http://schemas.openxmlformats.org/officeDocument/2006/relationships" xmlns:mc="http://schemas.openxmlformats.org/markup-compatibility/2006" xmlns:mv="urn:schemas-microsoft-com:mac:vml" xmlns:p="http://schemas.openxmlformats.org/presentationml/2006/main" xmlns:c="http://schemas.openxmlformats.org/drawingml/2006/chart" xmlns:dgm="http://schemas.openxmlformats.org/drawingml/2006/diagram" xmlns:o="urn:schemas-microsoft-com:office:office" xmlns:v="urn:schemas-microsoft-com:vml" xmlns:pvml="urn:schemas-microsoft-com:office:powerpoint" xmlns:com="http://schemas.openxmlformats.org/drawingml/2006/compatibility" xmlns:p14="http://schemas.microsoft.com/office/powerpoint/2010/main" xmlns:p15="http://schemas.microsoft.com/office/powerpoint/2012/main" xmlns:ahyp="http://schemas.microsoft.com/office/drawing/2018/hyperlinkcolor" showMasterPhAnim="0" showMasterSp="0">
+<p:notes xmlns:a="http://schemas.openxmlformats.org/drawingml/2006/main" xmlns:r="http://schemas.openxmlformats.org/officeDocument/2006/relationships" xmlns:p="http://schemas.openxmlformats.org/presentationml/2006/main" showMasterSp="0" showMasterPhAnim="0">
   <p:cSld>
     <p:spTree>
       <p:nvGrpSpPr>
-        <p:cNvPr id="136" name="Shape 136"/>
+        <p:cNvPr id="1" name="Shape 136"/>
         <p:cNvGrpSpPr/>
         <p:nvPr/>
       </p:nvGrpSpPr>
@@ -1035,9 +1065,11 @@
       <p:sp>
         <p:nvSpPr>
           <p:cNvPr id="137" name="Google Shape;137;g3fb085bff3c_0_51:notes"/>
-          <p:cNvSpPr/>
+          <p:cNvSpPr>
+            <a:spLocks noGrp="1" noRot="1" noChangeAspect="1"/>
+          </p:cNvSpPr>
           <p:nvPr>
-            <p:ph idx="2" type="sldImg"/>
+            <p:ph type="sldImg" idx="2"/>
           </p:nvPr>
         </p:nvSpPr>
         <p:spPr>
@@ -1046,9 +1078,13 @@
             <a:ext cx="6096000" cy="3429000"/>
           </a:xfrm>
           <a:custGeom>
-            <a:rect b="b" l="l" r="r" t="t"/>
+            <a:avLst/>
+            <a:gdLst/>
+            <a:ahLst/>
+            <a:cxnLst/>
+            <a:rect l="l" t="t" r="r" b="b"/>
             <a:pathLst>
-              <a:path extrusionOk="0" h="120000" w="120000">
+              <a:path w="120000" h="120000" extrusionOk="0">
                 <a:moveTo>
                   <a:pt x="0" y="0"/>
                 </a:moveTo>
@@ -1070,9 +1106,11 @@
       <p:sp>
         <p:nvSpPr>
           <p:cNvPr id="138" name="Google Shape;138;g3fb085bff3c_0_51:notes"/>
-          <p:cNvSpPr txBox="1"/>
+          <p:cNvSpPr txBox="1">
+            <a:spLocks noGrp="1"/>
+          </p:cNvSpPr>
           <p:nvPr>
-            <p:ph idx="1" type="body"/>
+            <p:ph type="body" idx="1"/>
           </p:nvPr>
         </p:nvSpPr>
         <p:spPr>
@@ -1085,23 +1123,20 @@
           </a:prstGeom>
         </p:spPr>
         <p:txBody>
-          <a:bodyPr anchorCtr="0" anchor="t" bIns="91425" lIns="91425" spcFirstLastPara="1" rIns="91425" wrap="square" tIns="91425">
+          <a:bodyPr spcFirstLastPara="1" wrap="square" lIns="91425" tIns="91425" rIns="91425" bIns="91425" anchor="t" anchorCtr="0">
             <a:noAutofit/>
           </a:bodyPr>
           <a:lstStyle/>
           <a:p>
-            <a:pPr indent="0" lvl="0" marL="0" rtl="0" algn="l">
-              <a:spcBef>
-                <a:spcPts val="0"/>
-              </a:spcBef>
-              <a:spcAft>
-                <a:spcPts val="0"/>
-              </a:spcAft>
-              <a:buNone/>
-            </a:pPr>
-            <a:r>
-              <a:t/>
-            </a:r>
+            <a:pPr marL="0" lvl="0" indent="0" algn="l" rtl="0">
+              <a:spcBef>
+                <a:spcPts val="0"/>
+              </a:spcBef>
+              <a:spcAft>
+                <a:spcPts val="0"/>
+              </a:spcAft>
+              <a:buNone/>
+            </a:pPr>
             <a:endParaRPr/>
           </a:p>
         </p:txBody>
@@ -1115,11 +1150,11 @@
 </file>
 
 <file path=ppt/notesSlides/notesSlide13.xml><?xml version="1.0" encoding="utf-8"?>
-<p:notes xmlns:a="http://schemas.openxmlformats.org/drawingml/2006/main" xmlns:r="http://schemas.openxmlformats.org/officeDocument/2006/relationships" xmlns:mc="http://schemas.openxmlformats.org/markup-compatibility/2006" xmlns:mv="urn:schemas-microsoft-com:mac:vml" xmlns:p="http://schemas.openxmlformats.org/presentationml/2006/main" xmlns:c="http://schemas.openxmlformats.org/drawingml/2006/chart" xmlns:dgm="http://schemas.openxmlformats.org/drawingml/2006/diagram" xmlns:o="urn:schemas-microsoft-com:office:office" xmlns:v="urn:schemas-microsoft-com:vml" xmlns:pvml="urn:schemas-microsoft-com:office:powerpoint" xmlns:com="http://schemas.openxmlformats.org/drawingml/2006/compatibility" xmlns:p14="http://schemas.microsoft.com/office/powerpoint/2010/main" xmlns:p15="http://schemas.microsoft.com/office/powerpoint/2012/main" xmlns:ahyp="http://schemas.microsoft.com/office/drawing/2018/hyperlinkcolor" showMasterPhAnim="0" showMasterSp="0">
+<p:notes xmlns:a="http://schemas.openxmlformats.org/drawingml/2006/main" xmlns:r="http://schemas.openxmlformats.org/officeDocument/2006/relationships" xmlns:p="http://schemas.openxmlformats.org/presentationml/2006/main" showMasterSp="0" showMasterPhAnim="0">
   <p:cSld>
     <p:spTree>
       <p:nvGrpSpPr>
-        <p:cNvPr id="144" name="Shape 144"/>
+        <p:cNvPr id="1" name="Shape 144"/>
         <p:cNvGrpSpPr/>
         <p:nvPr/>
       </p:nvGrpSpPr>
@@ -1134,20 +1169,26 @@
       <p:sp>
         <p:nvSpPr>
           <p:cNvPr id="145" name="Google Shape;145;g3fb085bff3c_0_56:notes"/>
-          <p:cNvSpPr/>
+          <p:cNvSpPr>
+            <a:spLocks noGrp="1" noRot="1" noChangeAspect="1"/>
+          </p:cNvSpPr>
           <p:nvPr>
-            <p:ph idx="2" type="sldImg"/>
+            <p:ph type="sldImg" idx="2"/>
           </p:nvPr>
         </p:nvSpPr>
         <p:spPr>
           <a:xfrm>
-            <a:off x="381300" y="685800"/>
+            <a:off x="381000" y="685800"/>
             <a:ext cx="6096000" cy="3429000"/>
           </a:xfrm>
           <a:custGeom>
-            <a:rect b="b" l="l" r="r" t="t"/>
+            <a:avLst/>
+            <a:gdLst/>
+            <a:ahLst/>
+            <a:cxnLst/>
+            <a:rect l="l" t="t" r="r" b="b"/>
             <a:pathLst>
-              <a:path extrusionOk="0" h="120000" w="120000">
+              <a:path w="120000" h="120000" extrusionOk="0">
                 <a:moveTo>
                   <a:pt x="0" y="0"/>
                 </a:moveTo>
@@ -1169,9 +1210,11 @@
       <p:sp>
         <p:nvSpPr>
           <p:cNvPr id="146" name="Google Shape;146;g3fb085bff3c_0_56:notes"/>
-          <p:cNvSpPr txBox="1"/>
+          <p:cNvSpPr txBox="1">
+            <a:spLocks noGrp="1"/>
+          </p:cNvSpPr>
           <p:nvPr>
-            <p:ph idx="1" type="body"/>
+            <p:ph type="body" idx="1"/>
           </p:nvPr>
         </p:nvSpPr>
         <p:spPr>
@@ -1184,23 +1227,20 @@
           </a:prstGeom>
         </p:spPr>
         <p:txBody>
-          <a:bodyPr anchorCtr="0" anchor="t" bIns="91425" lIns="91425" spcFirstLastPara="1" rIns="91425" wrap="square" tIns="91425">
+          <a:bodyPr spcFirstLastPara="1" wrap="square" lIns="91425" tIns="91425" rIns="91425" bIns="91425" anchor="t" anchorCtr="0">
             <a:noAutofit/>
           </a:bodyPr>
           <a:lstStyle/>
           <a:p>
-            <a:pPr indent="0" lvl="0" marL="0" rtl="0" algn="l">
-              <a:spcBef>
-                <a:spcPts val="0"/>
-              </a:spcBef>
-              <a:spcAft>
-                <a:spcPts val="0"/>
-              </a:spcAft>
-              <a:buNone/>
-            </a:pPr>
-            <a:r>
-              <a:t/>
-            </a:r>
+            <a:pPr marL="0" lvl="0" indent="0" algn="l" rtl="0">
+              <a:spcBef>
+                <a:spcPts val="0"/>
+              </a:spcBef>
+              <a:spcAft>
+                <a:spcPts val="0"/>
+              </a:spcAft>
+              <a:buNone/>
+            </a:pPr>
             <a:endParaRPr/>
           </a:p>
         </p:txBody>
@@ -1214,11 +1254,11 @@
 </file>
 
 <file path=ppt/notesSlides/notesSlide14.xml><?xml version="1.0" encoding="utf-8"?>
-<p:notes xmlns:a="http://schemas.openxmlformats.org/drawingml/2006/main" xmlns:r="http://schemas.openxmlformats.org/officeDocument/2006/relationships" xmlns:mc="http://schemas.openxmlformats.org/markup-compatibility/2006" xmlns:mv="urn:schemas-microsoft-com:mac:vml" xmlns:p="http://schemas.openxmlformats.org/presentationml/2006/main" xmlns:c="http://schemas.openxmlformats.org/drawingml/2006/chart" xmlns:dgm="http://schemas.openxmlformats.org/drawingml/2006/diagram" xmlns:o="urn:schemas-microsoft-com:office:office" xmlns:v="urn:schemas-microsoft-com:vml" xmlns:pvml="urn:schemas-microsoft-com:office:powerpoint" xmlns:com="http://schemas.openxmlformats.org/drawingml/2006/compatibility" xmlns:p14="http://schemas.microsoft.com/office/powerpoint/2010/main" xmlns:p15="http://schemas.microsoft.com/office/powerpoint/2012/main" xmlns:ahyp="http://schemas.microsoft.com/office/drawing/2018/hyperlinkcolor" showMasterPhAnim="0" showMasterSp="0">
+<p:notes xmlns:a="http://schemas.openxmlformats.org/drawingml/2006/main" xmlns:r="http://schemas.openxmlformats.org/officeDocument/2006/relationships" xmlns:p="http://schemas.openxmlformats.org/presentationml/2006/main" showMasterSp="0" showMasterPhAnim="0">
   <p:cSld>
     <p:spTree>
       <p:nvGrpSpPr>
-        <p:cNvPr id="152" name="Shape 152"/>
+        <p:cNvPr id="1" name="Shape 152"/>
         <p:cNvGrpSpPr/>
         <p:nvPr/>
       </p:nvGrpSpPr>
@@ -1233,9 +1273,11 @@
       <p:sp>
         <p:nvSpPr>
           <p:cNvPr id="153" name="Google Shape;153;g3fb085bff3c_0_61:notes"/>
-          <p:cNvSpPr/>
+          <p:cNvSpPr>
+            <a:spLocks noGrp="1" noRot="1" noChangeAspect="1"/>
+          </p:cNvSpPr>
           <p:nvPr>
-            <p:ph idx="2" type="sldImg"/>
+            <p:ph type="sldImg" idx="2"/>
           </p:nvPr>
         </p:nvSpPr>
         <p:spPr>
@@ -1244,9 +1286,13 @@
             <a:ext cx="6096000" cy="3429000"/>
           </a:xfrm>
           <a:custGeom>
-            <a:rect b="b" l="l" r="r" t="t"/>
+            <a:avLst/>
+            <a:gdLst/>
+            <a:ahLst/>
+            <a:cxnLst/>
+            <a:rect l="l" t="t" r="r" b="b"/>
             <a:pathLst>
-              <a:path extrusionOk="0" h="120000" w="120000">
+              <a:path w="120000" h="120000" extrusionOk="0">
                 <a:moveTo>
                   <a:pt x="0" y="0"/>
                 </a:moveTo>
@@ -1268,9 +1314,11 @@
       <p:sp>
         <p:nvSpPr>
           <p:cNvPr id="154" name="Google Shape;154;g3fb085bff3c_0_61:notes"/>
-          <p:cNvSpPr txBox="1"/>
+          <p:cNvSpPr txBox="1">
+            <a:spLocks noGrp="1"/>
+          </p:cNvSpPr>
           <p:nvPr>
-            <p:ph idx="1" type="body"/>
+            <p:ph type="body" idx="1"/>
           </p:nvPr>
         </p:nvSpPr>
         <p:spPr>
@@ -1283,23 +1331,20 @@
           </a:prstGeom>
         </p:spPr>
         <p:txBody>
-          <a:bodyPr anchorCtr="0" anchor="t" bIns="91425" lIns="91425" spcFirstLastPara="1" rIns="91425" wrap="square" tIns="91425">
+          <a:bodyPr spcFirstLastPara="1" wrap="square" lIns="91425" tIns="91425" rIns="91425" bIns="91425" anchor="t" anchorCtr="0">
             <a:noAutofit/>
           </a:bodyPr>
           <a:lstStyle/>
           <a:p>
-            <a:pPr indent="0" lvl="0" marL="0" rtl="0" algn="l">
-              <a:spcBef>
-                <a:spcPts val="0"/>
-              </a:spcBef>
-              <a:spcAft>
-                <a:spcPts val="0"/>
-              </a:spcAft>
-              <a:buNone/>
-            </a:pPr>
-            <a:r>
-              <a:t/>
-            </a:r>
+            <a:pPr marL="0" lvl="0" indent="0" algn="l" rtl="0">
+              <a:spcBef>
+                <a:spcPts val="0"/>
+              </a:spcBef>
+              <a:spcAft>
+                <a:spcPts val="0"/>
+              </a:spcAft>
+              <a:buNone/>
+            </a:pPr>
             <a:endParaRPr/>
           </a:p>
         </p:txBody>
@@ -1313,11 +1358,11 @@
 </file>
 
 <file path=ppt/notesSlides/notesSlide15.xml><?xml version="1.0" encoding="utf-8"?>
-<p:notes xmlns:a="http://schemas.openxmlformats.org/drawingml/2006/main" xmlns:r="http://schemas.openxmlformats.org/officeDocument/2006/relationships" xmlns:mc="http://schemas.openxmlformats.org/markup-compatibility/2006" xmlns:mv="urn:schemas-microsoft-com:mac:vml" xmlns:p="http://schemas.openxmlformats.org/presentationml/2006/main" xmlns:c="http://schemas.openxmlformats.org/drawingml/2006/chart" xmlns:dgm="http://schemas.openxmlformats.org/drawingml/2006/diagram" xmlns:o="urn:schemas-microsoft-com:office:office" xmlns:v="urn:schemas-microsoft-com:vml" xmlns:pvml="urn:schemas-microsoft-com:office:powerpoint" xmlns:com="http://schemas.openxmlformats.org/drawingml/2006/compatibility" xmlns:p14="http://schemas.microsoft.com/office/powerpoint/2010/main" xmlns:p15="http://schemas.microsoft.com/office/powerpoint/2012/main" xmlns:ahyp="http://schemas.microsoft.com/office/drawing/2018/hyperlinkcolor" showMasterPhAnim="0" showMasterSp="0">
+<p:notes xmlns:a="http://schemas.openxmlformats.org/drawingml/2006/main" xmlns:r="http://schemas.openxmlformats.org/officeDocument/2006/relationships" xmlns:p="http://schemas.openxmlformats.org/presentationml/2006/main" showMasterSp="0" showMasterPhAnim="0">
   <p:cSld>
     <p:spTree>
       <p:nvGrpSpPr>
-        <p:cNvPr id="160" name="Shape 160"/>
+        <p:cNvPr id="1" name="Shape 160"/>
         <p:cNvGrpSpPr/>
         <p:nvPr/>
       </p:nvGrpSpPr>
@@ -1332,9 +1377,11 @@
       <p:sp>
         <p:nvSpPr>
           <p:cNvPr id="161" name="Google Shape;161;g3fb085bff3c_0_107:notes"/>
-          <p:cNvSpPr/>
+          <p:cNvSpPr>
+            <a:spLocks noGrp="1" noRot="1" noChangeAspect="1"/>
+          </p:cNvSpPr>
           <p:nvPr>
-            <p:ph idx="2" type="sldImg"/>
+            <p:ph type="sldImg" idx="2"/>
           </p:nvPr>
         </p:nvSpPr>
         <p:spPr>
@@ -1343,9 +1390,13 @@
             <a:ext cx="6096000" cy="3429000"/>
           </a:xfrm>
           <a:custGeom>
-            <a:rect b="b" l="l" r="r" t="t"/>
+            <a:avLst/>
+            <a:gdLst/>
+            <a:ahLst/>
+            <a:cxnLst/>
+            <a:rect l="l" t="t" r="r" b="b"/>
             <a:pathLst>
-              <a:path extrusionOk="0" h="120000" w="120000">
+              <a:path w="120000" h="120000" extrusionOk="0">
                 <a:moveTo>
                   <a:pt x="0" y="0"/>
                 </a:moveTo>
@@ -1367,9 +1418,11 @@
       <p:sp>
         <p:nvSpPr>
           <p:cNvPr id="162" name="Google Shape;162;g3fb085bff3c_0_107:notes"/>
-          <p:cNvSpPr txBox="1"/>
+          <p:cNvSpPr txBox="1">
+            <a:spLocks noGrp="1"/>
+          </p:cNvSpPr>
           <p:nvPr>
-            <p:ph idx="1" type="body"/>
+            <p:ph type="body" idx="1"/>
           </p:nvPr>
         </p:nvSpPr>
         <p:spPr>
@@ -1382,23 +1435,20 @@
           </a:prstGeom>
         </p:spPr>
         <p:txBody>
-          <a:bodyPr anchorCtr="0" anchor="t" bIns="91425" lIns="91425" spcFirstLastPara="1" rIns="91425" wrap="square" tIns="91425">
+          <a:bodyPr spcFirstLastPara="1" wrap="square" lIns="91425" tIns="91425" rIns="91425" bIns="91425" anchor="t" anchorCtr="0">
             <a:noAutofit/>
           </a:bodyPr>
           <a:lstStyle/>
           <a:p>
-            <a:pPr indent="0" lvl="0" marL="0" rtl="0" algn="l">
-              <a:spcBef>
-                <a:spcPts val="0"/>
-              </a:spcBef>
-              <a:spcAft>
-                <a:spcPts val="0"/>
-              </a:spcAft>
-              <a:buNone/>
-            </a:pPr>
-            <a:r>
-              <a:t/>
-            </a:r>
+            <a:pPr marL="0" lvl="0" indent="0" algn="l" rtl="0">
+              <a:spcBef>
+                <a:spcPts val="0"/>
+              </a:spcBef>
+              <a:spcAft>
+                <a:spcPts val="0"/>
+              </a:spcAft>
+              <a:buNone/>
+            </a:pPr>
             <a:endParaRPr/>
           </a:p>
         </p:txBody>
@@ -1412,11 +1462,11 @@
 </file>
 
 <file path=ppt/notesSlides/notesSlide16.xml><?xml version="1.0" encoding="utf-8"?>
-<p:notes xmlns:a="http://schemas.openxmlformats.org/drawingml/2006/main" xmlns:r="http://schemas.openxmlformats.org/officeDocument/2006/relationships" xmlns:mc="http://schemas.openxmlformats.org/markup-compatibility/2006" xmlns:mv="urn:schemas-microsoft-com:mac:vml" xmlns:p="http://schemas.openxmlformats.org/presentationml/2006/main" xmlns:c="http://schemas.openxmlformats.org/drawingml/2006/chart" xmlns:dgm="http://schemas.openxmlformats.org/drawingml/2006/diagram" xmlns:o="urn:schemas-microsoft-com:office:office" xmlns:v="urn:schemas-microsoft-com:vml" xmlns:pvml="urn:schemas-microsoft-com:office:powerpoint" xmlns:com="http://schemas.openxmlformats.org/drawingml/2006/compatibility" xmlns:p14="http://schemas.microsoft.com/office/powerpoint/2010/main" xmlns:p15="http://schemas.microsoft.com/office/powerpoint/2012/main" xmlns:ahyp="http://schemas.microsoft.com/office/drawing/2018/hyperlinkcolor" showMasterPhAnim="0" showMasterSp="0">
+<p:notes xmlns:a="http://schemas.openxmlformats.org/drawingml/2006/main" xmlns:r="http://schemas.openxmlformats.org/officeDocument/2006/relationships" xmlns:p="http://schemas.openxmlformats.org/presentationml/2006/main" showMasterSp="0" showMasterPhAnim="0">
   <p:cSld>
     <p:spTree>
       <p:nvGrpSpPr>
-        <p:cNvPr id="167" name="Shape 167"/>
+        <p:cNvPr id="1" name="Shape 167"/>
         <p:cNvGrpSpPr/>
         <p:nvPr/>
       </p:nvGrpSpPr>
@@ -1431,9 +1481,11 @@
       <p:sp>
         <p:nvSpPr>
           <p:cNvPr id="168" name="Google Shape;168;g3fb085bff3c_0_66:notes"/>
-          <p:cNvSpPr/>
+          <p:cNvSpPr>
+            <a:spLocks noGrp="1" noRot="1" noChangeAspect="1"/>
+          </p:cNvSpPr>
           <p:nvPr>
-            <p:ph idx="2" type="sldImg"/>
+            <p:ph type="sldImg" idx="2"/>
           </p:nvPr>
         </p:nvSpPr>
         <p:spPr>
@@ -1442,9 +1494,13 @@
             <a:ext cx="6096000" cy="3429000"/>
           </a:xfrm>
           <a:custGeom>
-            <a:rect b="b" l="l" r="r" t="t"/>
+            <a:avLst/>
+            <a:gdLst/>
+            <a:ahLst/>
+            <a:cxnLst/>
+            <a:rect l="l" t="t" r="r" b="b"/>
             <a:pathLst>
-              <a:path extrusionOk="0" h="120000" w="120000">
+              <a:path w="120000" h="120000" extrusionOk="0">
                 <a:moveTo>
                   <a:pt x="0" y="0"/>
                 </a:moveTo>
@@ -1466,9 +1522,11 @@
       <p:sp>
         <p:nvSpPr>
           <p:cNvPr id="169" name="Google Shape;169;g3fb085bff3c_0_66:notes"/>
-          <p:cNvSpPr txBox="1"/>
+          <p:cNvSpPr txBox="1">
+            <a:spLocks noGrp="1"/>
+          </p:cNvSpPr>
           <p:nvPr>
-            <p:ph idx="1" type="body"/>
+            <p:ph type="body" idx="1"/>
           </p:nvPr>
         </p:nvSpPr>
         <p:spPr>
@@ -1481,23 +1539,20 @@
           </a:prstGeom>
         </p:spPr>
         <p:txBody>
-          <a:bodyPr anchorCtr="0" anchor="t" bIns="91425" lIns="91425" spcFirstLastPara="1" rIns="91425" wrap="square" tIns="91425">
+          <a:bodyPr spcFirstLastPara="1" wrap="square" lIns="91425" tIns="91425" rIns="91425" bIns="91425" anchor="t" anchorCtr="0">
             <a:noAutofit/>
           </a:bodyPr>
           <a:lstStyle/>
           <a:p>
-            <a:pPr indent="0" lvl="0" marL="0" rtl="0" algn="l">
-              <a:spcBef>
-                <a:spcPts val="0"/>
-              </a:spcBef>
-              <a:spcAft>
-                <a:spcPts val="0"/>
-              </a:spcAft>
-              <a:buNone/>
-            </a:pPr>
-            <a:r>
-              <a:t/>
-            </a:r>
+            <a:pPr marL="0" lvl="0" indent="0" algn="l" rtl="0">
+              <a:spcBef>
+                <a:spcPts val="0"/>
+              </a:spcBef>
+              <a:spcAft>
+                <a:spcPts val="0"/>
+              </a:spcAft>
+              <a:buNone/>
+            </a:pPr>
             <a:endParaRPr/>
           </a:p>
         </p:txBody>
@@ -1511,11 +1566,11 @@
 </file>
 
 <file path=ppt/notesSlides/notesSlide2.xml><?xml version="1.0" encoding="utf-8"?>
-<p:notes xmlns:a="http://schemas.openxmlformats.org/drawingml/2006/main" xmlns:r="http://schemas.openxmlformats.org/officeDocument/2006/relationships" xmlns:mc="http://schemas.openxmlformats.org/markup-compatibility/2006" xmlns:mv="urn:schemas-microsoft-com:mac:vml" xmlns:p="http://schemas.openxmlformats.org/presentationml/2006/main" xmlns:c="http://schemas.openxmlformats.org/drawingml/2006/chart" xmlns:dgm="http://schemas.openxmlformats.org/drawingml/2006/diagram" xmlns:o="urn:schemas-microsoft-com:office:office" xmlns:v="urn:schemas-microsoft-com:vml" xmlns:pvml="urn:schemas-microsoft-com:office:powerpoint" xmlns:com="http://schemas.openxmlformats.org/drawingml/2006/compatibility" xmlns:p14="http://schemas.microsoft.com/office/powerpoint/2010/main" xmlns:p15="http://schemas.microsoft.com/office/powerpoint/2012/main" xmlns:ahyp="http://schemas.microsoft.com/office/drawing/2018/hyperlinkcolor" showMasterPhAnim="0" showMasterSp="0">
+<p:notes xmlns:a="http://schemas.openxmlformats.org/drawingml/2006/main" xmlns:r="http://schemas.openxmlformats.org/officeDocument/2006/relationships" xmlns:p="http://schemas.openxmlformats.org/presentationml/2006/main" showMasterSp="0" showMasterPhAnim="0">
   <p:cSld>
     <p:spTree>
       <p:nvGrpSpPr>
-        <p:cNvPr id="57" name="Shape 57"/>
+        <p:cNvPr id="1" name="Shape 57"/>
         <p:cNvGrpSpPr/>
         <p:nvPr/>
       </p:nvGrpSpPr>
@@ -1530,9 +1585,11 @@
       <p:sp>
         <p:nvSpPr>
           <p:cNvPr id="58" name="Google Shape;58;g3fb085bff3c_0_134:notes"/>
-          <p:cNvSpPr/>
+          <p:cNvSpPr>
+            <a:spLocks noGrp="1" noRot="1" noChangeAspect="1"/>
+          </p:cNvSpPr>
           <p:nvPr>
-            <p:ph idx="2" type="sldImg"/>
+            <p:ph type="sldImg" idx="2"/>
           </p:nvPr>
         </p:nvSpPr>
         <p:spPr>
@@ -1541,9 +1598,13 @@
             <a:ext cx="6096000" cy="3429000"/>
           </a:xfrm>
           <a:custGeom>
-            <a:rect b="b" l="l" r="r" t="t"/>
+            <a:avLst/>
+            <a:gdLst/>
+            <a:ahLst/>
+            <a:cxnLst/>
+            <a:rect l="l" t="t" r="r" b="b"/>
             <a:pathLst>
-              <a:path extrusionOk="0" h="120000" w="120000">
+              <a:path w="120000" h="120000" extrusionOk="0">
                 <a:moveTo>
                   <a:pt x="0" y="0"/>
                 </a:moveTo>
@@ -1565,9 +1626,11 @@
       <p:sp>
         <p:nvSpPr>
           <p:cNvPr id="59" name="Google Shape;59;g3fb085bff3c_0_134:notes"/>
-          <p:cNvSpPr txBox="1"/>
+          <p:cNvSpPr txBox="1">
+            <a:spLocks noGrp="1"/>
+          </p:cNvSpPr>
           <p:nvPr>
-            <p:ph idx="1" type="body"/>
+            <p:ph type="body" idx="1"/>
           </p:nvPr>
         </p:nvSpPr>
         <p:spPr>
@@ -1580,23 +1643,20 @@
           </a:prstGeom>
         </p:spPr>
         <p:txBody>
-          <a:bodyPr anchorCtr="0" anchor="t" bIns="91425" lIns="91425" spcFirstLastPara="1" rIns="91425" wrap="square" tIns="91425">
+          <a:bodyPr spcFirstLastPara="1" wrap="square" lIns="91425" tIns="91425" rIns="91425" bIns="91425" anchor="t" anchorCtr="0">
             <a:noAutofit/>
           </a:bodyPr>
           <a:lstStyle/>
           <a:p>
-            <a:pPr indent="0" lvl="0" marL="0" rtl="0" algn="l">
-              <a:spcBef>
-                <a:spcPts val="0"/>
-              </a:spcBef>
-              <a:spcAft>
-                <a:spcPts val="0"/>
-              </a:spcAft>
-              <a:buNone/>
-            </a:pPr>
-            <a:r>
-              <a:t/>
-            </a:r>
+            <a:pPr marL="0" lvl="0" indent="0" algn="l" rtl="0">
+              <a:spcBef>
+                <a:spcPts val="0"/>
+              </a:spcBef>
+              <a:spcAft>
+                <a:spcPts val="0"/>
+              </a:spcAft>
+              <a:buNone/>
+            </a:pPr>
             <a:endParaRPr/>
           </a:p>
         </p:txBody>
@@ -1610,11 +1670,11 @@
 </file>
 
 <file path=ppt/notesSlides/notesSlide3.xml><?xml version="1.0" encoding="utf-8"?>
-<p:notes xmlns:a="http://schemas.openxmlformats.org/drawingml/2006/main" xmlns:r="http://schemas.openxmlformats.org/officeDocument/2006/relationships" xmlns:mc="http://schemas.openxmlformats.org/markup-compatibility/2006" xmlns:mv="urn:schemas-microsoft-com:mac:vml" xmlns:p="http://schemas.openxmlformats.org/presentationml/2006/main" xmlns:c="http://schemas.openxmlformats.org/drawingml/2006/chart" xmlns:dgm="http://schemas.openxmlformats.org/drawingml/2006/diagram" xmlns:o="urn:schemas-microsoft-com:office:office" xmlns:v="urn:schemas-microsoft-com:vml" xmlns:pvml="urn:schemas-microsoft-com:office:powerpoint" xmlns:com="http://schemas.openxmlformats.org/drawingml/2006/compatibility" xmlns:p14="http://schemas.microsoft.com/office/powerpoint/2010/main" xmlns:p15="http://schemas.microsoft.com/office/powerpoint/2012/main" xmlns:ahyp="http://schemas.microsoft.com/office/drawing/2018/hyperlinkcolor" showMasterPhAnim="0" showMasterSp="0">
+<p:notes xmlns:a="http://schemas.openxmlformats.org/drawingml/2006/main" xmlns:r="http://schemas.openxmlformats.org/officeDocument/2006/relationships" xmlns:p="http://schemas.openxmlformats.org/presentationml/2006/main" showMasterSp="0" showMasterPhAnim="0">
   <p:cSld>
     <p:spTree>
       <p:nvGrpSpPr>
-        <p:cNvPr id="65" name="Shape 65"/>
+        <p:cNvPr id="1" name="Shape 65"/>
         <p:cNvGrpSpPr/>
         <p:nvPr/>
       </p:nvGrpSpPr>
@@ -1629,9 +1689,11 @@
       <p:sp>
         <p:nvSpPr>
           <p:cNvPr id="66" name="Google Shape;66;g3fb085bff3c_0_4:notes"/>
-          <p:cNvSpPr/>
+          <p:cNvSpPr>
+            <a:spLocks noGrp="1" noRot="1" noChangeAspect="1"/>
+          </p:cNvSpPr>
           <p:nvPr>
-            <p:ph idx="2" type="sldImg"/>
+            <p:ph type="sldImg" idx="2"/>
           </p:nvPr>
         </p:nvSpPr>
         <p:spPr>
@@ -1640,9 +1702,13 @@
             <a:ext cx="6096000" cy="3429000"/>
           </a:xfrm>
           <a:custGeom>
-            <a:rect b="b" l="l" r="r" t="t"/>
+            <a:avLst/>
+            <a:gdLst/>
+            <a:ahLst/>
+            <a:cxnLst/>
+            <a:rect l="l" t="t" r="r" b="b"/>
             <a:pathLst>
-              <a:path extrusionOk="0" h="120000" w="120000">
+              <a:path w="120000" h="120000" extrusionOk="0">
                 <a:moveTo>
                   <a:pt x="0" y="0"/>
                 </a:moveTo>
@@ -1664,9 +1730,11 @@
       <p:sp>
         <p:nvSpPr>
           <p:cNvPr id="67" name="Google Shape;67;g3fb085bff3c_0_4:notes"/>
-          <p:cNvSpPr txBox="1"/>
+          <p:cNvSpPr txBox="1">
+            <a:spLocks noGrp="1"/>
+          </p:cNvSpPr>
           <p:nvPr>
-            <p:ph idx="1" type="body"/>
+            <p:ph type="body" idx="1"/>
           </p:nvPr>
         </p:nvSpPr>
         <p:spPr>
@@ -1679,23 +1747,20 @@
           </a:prstGeom>
         </p:spPr>
         <p:txBody>
-          <a:bodyPr anchorCtr="0" anchor="t" bIns="91425" lIns="91425" spcFirstLastPara="1" rIns="91425" wrap="square" tIns="91425">
+          <a:bodyPr spcFirstLastPara="1" wrap="square" lIns="91425" tIns="91425" rIns="91425" bIns="91425" anchor="t" anchorCtr="0">
             <a:noAutofit/>
           </a:bodyPr>
           <a:lstStyle/>
           <a:p>
-            <a:pPr indent="0" lvl="0" marL="0" rtl="0" algn="l">
-              <a:spcBef>
-                <a:spcPts val="0"/>
-              </a:spcBef>
-              <a:spcAft>
-                <a:spcPts val="0"/>
-              </a:spcAft>
-              <a:buNone/>
-            </a:pPr>
-            <a:r>
-              <a:t/>
-            </a:r>
+            <a:pPr marL="0" lvl="0" indent="0" algn="l" rtl="0">
+              <a:spcBef>
+                <a:spcPts val="0"/>
+              </a:spcBef>
+              <a:spcAft>
+                <a:spcPts val="0"/>
+              </a:spcAft>
+              <a:buNone/>
+            </a:pPr>
             <a:endParaRPr/>
           </a:p>
         </p:txBody>
@@ -1709,11 +1774,11 @@
 </file>
 
 <file path=ppt/notesSlides/notesSlide4.xml><?xml version="1.0" encoding="utf-8"?>
-<p:notes xmlns:a="http://schemas.openxmlformats.org/drawingml/2006/main" xmlns:r="http://schemas.openxmlformats.org/officeDocument/2006/relationships" xmlns:mc="http://schemas.openxmlformats.org/markup-compatibility/2006" xmlns:mv="urn:schemas-microsoft-com:mac:vml" xmlns:p="http://schemas.openxmlformats.org/presentationml/2006/main" xmlns:c="http://schemas.openxmlformats.org/drawingml/2006/chart" xmlns:dgm="http://schemas.openxmlformats.org/drawingml/2006/diagram" xmlns:o="urn:schemas-microsoft-com:office:office" xmlns:v="urn:schemas-microsoft-com:vml" xmlns:pvml="urn:schemas-microsoft-com:office:powerpoint" xmlns:com="http://schemas.openxmlformats.org/drawingml/2006/compatibility" xmlns:p14="http://schemas.microsoft.com/office/powerpoint/2010/main" xmlns:p15="http://schemas.microsoft.com/office/powerpoint/2012/main" xmlns:ahyp="http://schemas.microsoft.com/office/drawing/2018/hyperlinkcolor" showMasterPhAnim="0" showMasterSp="0">
+<p:notes xmlns:a="http://schemas.openxmlformats.org/drawingml/2006/main" xmlns:r="http://schemas.openxmlformats.org/officeDocument/2006/relationships" xmlns:p="http://schemas.openxmlformats.org/presentationml/2006/main" showMasterSp="0" showMasterPhAnim="0">
   <p:cSld>
     <p:spTree>
       <p:nvGrpSpPr>
-        <p:cNvPr id="72" name="Shape 72"/>
+        <p:cNvPr id="1" name="Shape 72"/>
         <p:cNvGrpSpPr/>
         <p:nvPr/>
       </p:nvGrpSpPr>
@@ -1728,9 +1793,11 @@
       <p:sp>
         <p:nvSpPr>
           <p:cNvPr id="73" name="Google Shape;73;g3fb085bff3c_0_11:notes"/>
-          <p:cNvSpPr/>
+          <p:cNvSpPr>
+            <a:spLocks noGrp="1" noRot="1" noChangeAspect="1"/>
+          </p:cNvSpPr>
           <p:nvPr>
-            <p:ph idx="2" type="sldImg"/>
+            <p:ph type="sldImg" idx="2"/>
           </p:nvPr>
         </p:nvSpPr>
         <p:spPr>
@@ -1739,9 +1806,13 @@
             <a:ext cx="6096000" cy="3429000"/>
           </a:xfrm>
           <a:custGeom>
-            <a:rect b="b" l="l" r="r" t="t"/>
+            <a:avLst/>
+            <a:gdLst/>
+            <a:ahLst/>
+            <a:cxnLst/>
+            <a:rect l="l" t="t" r="r" b="b"/>
             <a:pathLst>
-              <a:path extrusionOk="0" h="120000" w="120000">
+              <a:path w="120000" h="120000" extrusionOk="0">
                 <a:moveTo>
                   <a:pt x="0" y="0"/>
                 </a:moveTo>
@@ -1763,9 +1834,11 @@
       <p:sp>
         <p:nvSpPr>
           <p:cNvPr id="74" name="Google Shape;74;g3fb085bff3c_0_11:notes"/>
-          <p:cNvSpPr txBox="1"/>
+          <p:cNvSpPr txBox="1">
+            <a:spLocks noGrp="1"/>
+          </p:cNvSpPr>
           <p:nvPr>
-            <p:ph idx="1" type="body"/>
+            <p:ph type="body" idx="1"/>
           </p:nvPr>
         </p:nvSpPr>
         <p:spPr>
@@ -1778,23 +1851,20 @@
           </a:prstGeom>
         </p:spPr>
         <p:txBody>
-          <a:bodyPr anchorCtr="0" anchor="t" bIns="91425" lIns="91425" spcFirstLastPara="1" rIns="91425" wrap="square" tIns="91425">
+          <a:bodyPr spcFirstLastPara="1" wrap="square" lIns="91425" tIns="91425" rIns="91425" bIns="91425" anchor="t" anchorCtr="0">
             <a:noAutofit/>
           </a:bodyPr>
           <a:lstStyle/>
           <a:p>
-            <a:pPr indent="0" lvl="0" marL="0" rtl="0" algn="l">
-              <a:spcBef>
-                <a:spcPts val="0"/>
-              </a:spcBef>
-              <a:spcAft>
-                <a:spcPts val="0"/>
-              </a:spcAft>
-              <a:buNone/>
-            </a:pPr>
-            <a:r>
-              <a:t/>
-            </a:r>
+            <a:pPr marL="0" lvl="0" indent="0" algn="l" rtl="0">
+              <a:spcBef>
+                <a:spcPts val="0"/>
+              </a:spcBef>
+              <a:spcAft>
+                <a:spcPts val="0"/>
+              </a:spcAft>
+              <a:buNone/>
+            </a:pPr>
             <a:endParaRPr/>
           </a:p>
         </p:txBody>
@@ -1808,11 +1878,11 @@
 </file>
 
 <file path=ppt/notesSlides/notesSlide5.xml><?xml version="1.0" encoding="utf-8"?>
-<p:notes xmlns:a="http://schemas.openxmlformats.org/drawingml/2006/main" xmlns:r="http://schemas.openxmlformats.org/officeDocument/2006/relationships" xmlns:mc="http://schemas.openxmlformats.org/markup-compatibility/2006" xmlns:mv="urn:schemas-microsoft-com:mac:vml" xmlns:p="http://schemas.openxmlformats.org/presentationml/2006/main" xmlns:c="http://schemas.openxmlformats.org/drawingml/2006/chart" xmlns:dgm="http://schemas.openxmlformats.org/drawingml/2006/diagram" xmlns:o="urn:schemas-microsoft-com:office:office" xmlns:v="urn:schemas-microsoft-com:vml" xmlns:pvml="urn:schemas-microsoft-com:office:powerpoint" xmlns:com="http://schemas.openxmlformats.org/drawingml/2006/compatibility" xmlns:p14="http://schemas.microsoft.com/office/powerpoint/2010/main" xmlns:p15="http://schemas.microsoft.com/office/powerpoint/2012/main" xmlns:ahyp="http://schemas.microsoft.com/office/drawing/2018/hyperlinkcolor" showMasterPhAnim="0" showMasterSp="0">
+<p:notes xmlns:a="http://schemas.openxmlformats.org/drawingml/2006/main" xmlns:r="http://schemas.openxmlformats.org/officeDocument/2006/relationships" xmlns:p="http://schemas.openxmlformats.org/presentationml/2006/main" showMasterSp="0" showMasterPhAnim="0">
   <p:cSld>
     <p:spTree>
       <p:nvGrpSpPr>
-        <p:cNvPr id="80" name="Shape 80"/>
+        <p:cNvPr id="1" name="Shape 80"/>
         <p:cNvGrpSpPr/>
         <p:nvPr/>
       </p:nvGrpSpPr>
@@ -1827,9 +1897,11 @@
       <p:sp>
         <p:nvSpPr>
           <p:cNvPr id="81" name="Google Shape;81;g3fb085bff3c_0_16:notes"/>
-          <p:cNvSpPr/>
+          <p:cNvSpPr>
+            <a:spLocks noGrp="1" noRot="1" noChangeAspect="1"/>
+          </p:cNvSpPr>
           <p:nvPr>
-            <p:ph idx="2" type="sldImg"/>
+            <p:ph type="sldImg" idx="2"/>
           </p:nvPr>
         </p:nvSpPr>
         <p:spPr>
@@ -1838,9 +1910,13 @@
             <a:ext cx="6096000" cy="3429000"/>
           </a:xfrm>
           <a:custGeom>
-            <a:rect b="b" l="l" r="r" t="t"/>
+            <a:avLst/>
+            <a:gdLst/>
+            <a:ahLst/>
+            <a:cxnLst/>
+            <a:rect l="l" t="t" r="r" b="b"/>
             <a:pathLst>
-              <a:path extrusionOk="0" h="120000" w="120000">
+              <a:path w="120000" h="120000" extrusionOk="0">
                 <a:moveTo>
                   <a:pt x="0" y="0"/>
                 </a:moveTo>
@@ -1862,9 +1938,11 @@
       <p:sp>
         <p:nvSpPr>
           <p:cNvPr id="82" name="Google Shape;82;g3fb085bff3c_0_16:notes"/>
-          <p:cNvSpPr txBox="1"/>
+          <p:cNvSpPr txBox="1">
+            <a:spLocks noGrp="1"/>
+          </p:cNvSpPr>
           <p:nvPr>
-            <p:ph idx="1" type="body"/>
+            <p:ph type="body" idx="1"/>
           </p:nvPr>
         </p:nvSpPr>
         <p:spPr>
@@ -1877,23 +1955,20 @@
           </a:prstGeom>
         </p:spPr>
         <p:txBody>
-          <a:bodyPr anchorCtr="0" anchor="t" bIns="91425" lIns="91425" spcFirstLastPara="1" rIns="91425" wrap="square" tIns="91425">
+          <a:bodyPr spcFirstLastPara="1" wrap="square" lIns="91425" tIns="91425" rIns="91425" bIns="91425" anchor="t" anchorCtr="0">
             <a:noAutofit/>
           </a:bodyPr>
           <a:lstStyle/>
           <a:p>
-            <a:pPr indent="0" lvl="0" marL="0" rtl="0" algn="l">
-              <a:spcBef>
-                <a:spcPts val="0"/>
-              </a:spcBef>
-              <a:spcAft>
-                <a:spcPts val="0"/>
-              </a:spcAft>
-              <a:buNone/>
-            </a:pPr>
-            <a:r>
-              <a:t/>
-            </a:r>
+            <a:pPr marL="0" lvl="0" indent="0" algn="l" rtl="0">
+              <a:spcBef>
+                <a:spcPts val="0"/>
+              </a:spcBef>
+              <a:spcAft>
+                <a:spcPts val="0"/>
+              </a:spcAft>
+              <a:buNone/>
+            </a:pPr>
             <a:endParaRPr/>
           </a:p>
         </p:txBody>
@@ -1907,11 +1982,11 @@
 </file>
 
 <file path=ppt/notesSlides/notesSlide6.xml><?xml version="1.0" encoding="utf-8"?>
-<p:notes xmlns:a="http://schemas.openxmlformats.org/drawingml/2006/main" xmlns:r="http://schemas.openxmlformats.org/officeDocument/2006/relationships" xmlns:mc="http://schemas.openxmlformats.org/markup-compatibility/2006" xmlns:mv="urn:schemas-microsoft-com:mac:vml" xmlns:p="http://schemas.openxmlformats.org/presentationml/2006/main" xmlns:c="http://schemas.openxmlformats.org/drawingml/2006/chart" xmlns:dgm="http://schemas.openxmlformats.org/drawingml/2006/diagram" xmlns:o="urn:schemas-microsoft-com:office:office" xmlns:v="urn:schemas-microsoft-com:vml" xmlns:pvml="urn:schemas-microsoft-com:office:powerpoint" xmlns:com="http://schemas.openxmlformats.org/drawingml/2006/compatibility" xmlns:p14="http://schemas.microsoft.com/office/powerpoint/2010/main" xmlns:p15="http://schemas.microsoft.com/office/powerpoint/2012/main" xmlns:ahyp="http://schemas.microsoft.com/office/drawing/2018/hyperlinkcolor" showMasterPhAnim="0" showMasterSp="0">
+<p:notes xmlns:a="http://schemas.openxmlformats.org/drawingml/2006/main" xmlns:r="http://schemas.openxmlformats.org/officeDocument/2006/relationships" xmlns:p="http://schemas.openxmlformats.org/presentationml/2006/main" showMasterSp="0" showMasterPhAnim="0">
   <p:cSld>
     <p:spTree>
       <p:nvGrpSpPr>
-        <p:cNvPr id="88" name="Shape 88"/>
+        <p:cNvPr id="1" name="Shape 88"/>
         <p:cNvGrpSpPr/>
         <p:nvPr/>
       </p:nvGrpSpPr>
@@ -1926,9 +2001,11 @@
       <p:sp>
         <p:nvSpPr>
           <p:cNvPr id="89" name="Google Shape;89;g3fb085bff3c_0_21:notes"/>
-          <p:cNvSpPr/>
+          <p:cNvSpPr>
+            <a:spLocks noGrp="1" noRot="1" noChangeAspect="1"/>
+          </p:cNvSpPr>
           <p:nvPr>
-            <p:ph idx="2" type="sldImg"/>
+            <p:ph type="sldImg" idx="2"/>
           </p:nvPr>
         </p:nvSpPr>
         <p:spPr>
@@ -1937,9 +2014,13 @@
             <a:ext cx="6096000" cy="3429000"/>
           </a:xfrm>
           <a:custGeom>
-            <a:rect b="b" l="l" r="r" t="t"/>
+            <a:avLst/>
+            <a:gdLst/>
+            <a:ahLst/>
+            <a:cxnLst/>
+            <a:rect l="l" t="t" r="r" b="b"/>
             <a:pathLst>
-              <a:path extrusionOk="0" h="120000" w="120000">
+              <a:path w="120000" h="120000" extrusionOk="0">
                 <a:moveTo>
                   <a:pt x="0" y="0"/>
                 </a:moveTo>
@@ -1961,9 +2042,11 @@
       <p:sp>
         <p:nvSpPr>
           <p:cNvPr id="90" name="Google Shape;90;g3fb085bff3c_0_21:notes"/>
-          <p:cNvSpPr txBox="1"/>
+          <p:cNvSpPr txBox="1">
+            <a:spLocks noGrp="1"/>
+          </p:cNvSpPr>
           <p:nvPr>
-            <p:ph idx="1" type="body"/>
+            <p:ph type="body" idx="1"/>
           </p:nvPr>
         </p:nvSpPr>
         <p:spPr>
@@ -1976,23 +2059,20 @@
           </a:prstGeom>
         </p:spPr>
         <p:txBody>
-          <a:bodyPr anchorCtr="0" anchor="t" bIns="91425" lIns="91425" spcFirstLastPara="1" rIns="91425" wrap="square" tIns="91425">
+          <a:bodyPr spcFirstLastPara="1" wrap="square" lIns="91425" tIns="91425" rIns="91425" bIns="91425" anchor="t" anchorCtr="0">
             <a:noAutofit/>
           </a:bodyPr>
           <a:lstStyle/>
           <a:p>
-            <a:pPr indent="0" lvl="0" marL="0" rtl="0" algn="l">
-              <a:spcBef>
-                <a:spcPts val="0"/>
-              </a:spcBef>
-              <a:spcAft>
-                <a:spcPts val="0"/>
-              </a:spcAft>
-              <a:buNone/>
-            </a:pPr>
-            <a:r>
-              <a:t/>
-            </a:r>
+            <a:pPr marL="0" lvl="0" indent="0" algn="l" rtl="0">
+              <a:spcBef>
+                <a:spcPts val="0"/>
+              </a:spcBef>
+              <a:spcAft>
+                <a:spcPts val="0"/>
+              </a:spcAft>
+              <a:buNone/>
+            </a:pPr>
             <a:endParaRPr/>
           </a:p>
         </p:txBody>
@@ -2006,11 +2086,11 @@
 </file>
 
 <file path=ppt/notesSlides/notesSlide7.xml><?xml version="1.0" encoding="utf-8"?>
-<p:notes xmlns:a="http://schemas.openxmlformats.org/drawingml/2006/main" xmlns:r="http://schemas.openxmlformats.org/officeDocument/2006/relationships" xmlns:mc="http://schemas.openxmlformats.org/markup-compatibility/2006" xmlns:mv="urn:schemas-microsoft-com:mac:vml" xmlns:p="http://schemas.openxmlformats.org/presentationml/2006/main" xmlns:c="http://schemas.openxmlformats.org/drawingml/2006/chart" xmlns:dgm="http://schemas.openxmlformats.org/drawingml/2006/diagram" xmlns:o="urn:schemas-microsoft-com:office:office" xmlns:v="urn:schemas-microsoft-com:vml" xmlns:pvml="urn:schemas-microsoft-com:office:powerpoint" xmlns:com="http://schemas.openxmlformats.org/drawingml/2006/compatibility" xmlns:p14="http://schemas.microsoft.com/office/powerpoint/2010/main" xmlns:p15="http://schemas.microsoft.com/office/powerpoint/2012/main" xmlns:ahyp="http://schemas.microsoft.com/office/drawing/2018/hyperlinkcolor" showMasterPhAnim="0" showMasterSp="0">
+<p:notes xmlns:a="http://schemas.openxmlformats.org/drawingml/2006/main" xmlns:r="http://schemas.openxmlformats.org/officeDocument/2006/relationships" xmlns:p="http://schemas.openxmlformats.org/presentationml/2006/main" showMasterSp="0" showMasterPhAnim="0">
   <p:cSld>
     <p:spTree>
       <p:nvGrpSpPr>
-        <p:cNvPr id="96" name="Shape 96"/>
+        <p:cNvPr id="1" name="Shape 96"/>
         <p:cNvGrpSpPr/>
         <p:nvPr/>
       </p:nvGrpSpPr>
@@ -2025,9 +2105,11 @@
       <p:sp>
         <p:nvSpPr>
           <p:cNvPr id="97" name="Google Shape;97;g3fb085bff3c_0_26:notes"/>
-          <p:cNvSpPr/>
+          <p:cNvSpPr>
+            <a:spLocks noGrp="1" noRot="1" noChangeAspect="1"/>
+          </p:cNvSpPr>
           <p:nvPr>
-            <p:ph idx="2" type="sldImg"/>
+            <p:ph type="sldImg" idx="2"/>
           </p:nvPr>
         </p:nvSpPr>
         <p:spPr>
@@ -2036,9 +2118,13 @@
             <a:ext cx="6096000" cy="3429000"/>
           </a:xfrm>
           <a:custGeom>
-            <a:rect b="b" l="l" r="r" t="t"/>
+            <a:avLst/>
+            <a:gdLst/>
+            <a:ahLst/>
+            <a:cxnLst/>
+            <a:rect l="l" t="t" r="r" b="b"/>
             <a:pathLst>
-              <a:path extrusionOk="0" h="120000" w="120000">
+              <a:path w="120000" h="120000" extrusionOk="0">
                 <a:moveTo>
                   <a:pt x="0" y="0"/>
                 </a:moveTo>
@@ -2060,9 +2146,11 @@
       <p:sp>
         <p:nvSpPr>
           <p:cNvPr id="98" name="Google Shape;98;g3fb085bff3c_0_26:notes"/>
-          <p:cNvSpPr txBox="1"/>
+          <p:cNvSpPr txBox="1">
+            <a:spLocks noGrp="1"/>
+          </p:cNvSpPr>
           <p:nvPr>
-            <p:ph idx="1" type="body"/>
+            <p:ph type="body" idx="1"/>
           </p:nvPr>
         </p:nvSpPr>
         <p:spPr>
@@ -2075,23 +2163,20 @@
           </a:prstGeom>
         </p:spPr>
         <p:txBody>
-          <a:bodyPr anchorCtr="0" anchor="t" bIns="91425" lIns="91425" spcFirstLastPara="1" rIns="91425" wrap="square" tIns="91425">
+          <a:bodyPr spcFirstLastPara="1" wrap="square" lIns="91425" tIns="91425" rIns="91425" bIns="91425" anchor="t" anchorCtr="0">
             <a:noAutofit/>
           </a:bodyPr>
           <a:lstStyle/>
           <a:p>
-            <a:pPr indent="0" lvl="0" marL="0" rtl="0" algn="l">
-              <a:spcBef>
-                <a:spcPts val="0"/>
-              </a:spcBef>
-              <a:spcAft>
-                <a:spcPts val="0"/>
-              </a:spcAft>
-              <a:buNone/>
-            </a:pPr>
-            <a:r>
-              <a:t/>
-            </a:r>
+            <a:pPr marL="0" lvl="0" indent="0" algn="l" rtl="0">
+              <a:spcBef>
+                <a:spcPts val="0"/>
+              </a:spcBef>
+              <a:spcAft>
+                <a:spcPts val="0"/>
+              </a:spcAft>
+              <a:buNone/>
+            </a:pPr>
             <a:endParaRPr/>
           </a:p>
         </p:txBody>
@@ -2105,11 +2190,11 @@
 </file>
 
 <file path=ppt/notesSlides/notesSlide8.xml><?xml version="1.0" encoding="utf-8"?>
-<p:notes xmlns:a="http://schemas.openxmlformats.org/drawingml/2006/main" xmlns:r="http://schemas.openxmlformats.org/officeDocument/2006/relationships" xmlns:mc="http://schemas.openxmlformats.org/markup-compatibility/2006" xmlns:mv="urn:schemas-microsoft-com:mac:vml" xmlns:p="http://schemas.openxmlformats.org/presentationml/2006/main" xmlns:c="http://schemas.openxmlformats.org/drawingml/2006/chart" xmlns:dgm="http://schemas.openxmlformats.org/drawingml/2006/diagram" xmlns:o="urn:schemas-microsoft-com:office:office" xmlns:v="urn:schemas-microsoft-com:vml" xmlns:pvml="urn:schemas-microsoft-com:office:powerpoint" xmlns:com="http://schemas.openxmlformats.org/drawingml/2006/compatibility" xmlns:p14="http://schemas.microsoft.com/office/powerpoint/2010/main" xmlns:p15="http://schemas.microsoft.com/office/powerpoint/2012/main" xmlns:ahyp="http://schemas.microsoft.com/office/drawing/2018/hyperlinkcolor" showMasterPhAnim="0" showMasterSp="0">
+<p:notes xmlns:a="http://schemas.openxmlformats.org/drawingml/2006/main" xmlns:r="http://schemas.openxmlformats.org/officeDocument/2006/relationships" xmlns:p="http://schemas.openxmlformats.org/presentationml/2006/main" showMasterSp="0" showMasterPhAnim="0">
   <p:cSld>
     <p:spTree>
       <p:nvGrpSpPr>
-        <p:cNvPr id="104" name="Shape 104"/>
+        <p:cNvPr id="1" name="Shape 104"/>
         <p:cNvGrpSpPr/>
         <p:nvPr/>
       </p:nvGrpSpPr>
@@ -2124,9 +2209,11 @@
       <p:sp>
         <p:nvSpPr>
           <p:cNvPr id="105" name="Google Shape;105;g3fb085bff3c_0_31:notes"/>
-          <p:cNvSpPr/>
+          <p:cNvSpPr>
+            <a:spLocks noGrp="1" noRot="1" noChangeAspect="1"/>
+          </p:cNvSpPr>
           <p:nvPr>
-            <p:ph idx="2" type="sldImg"/>
+            <p:ph type="sldImg" idx="2"/>
           </p:nvPr>
         </p:nvSpPr>
         <p:spPr>
@@ -2135,9 +2222,13 @@
             <a:ext cx="6096000" cy="3429000"/>
           </a:xfrm>
           <a:custGeom>
-            <a:rect b="b" l="l" r="r" t="t"/>
+            <a:avLst/>
+            <a:gdLst/>
+            <a:ahLst/>
+            <a:cxnLst/>
+            <a:rect l="l" t="t" r="r" b="b"/>
             <a:pathLst>
-              <a:path extrusionOk="0" h="120000" w="120000">
+              <a:path w="120000" h="120000" extrusionOk="0">
                 <a:moveTo>
                   <a:pt x="0" y="0"/>
                 </a:moveTo>
@@ -2159,9 +2250,11 @@
       <p:sp>
         <p:nvSpPr>
           <p:cNvPr id="106" name="Google Shape;106;g3fb085bff3c_0_31:notes"/>
-          <p:cNvSpPr txBox="1"/>
+          <p:cNvSpPr txBox="1">
+            <a:spLocks noGrp="1"/>
+          </p:cNvSpPr>
           <p:nvPr>
-            <p:ph idx="1" type="body"/>
+            <p:ph type="body" idx="1"/>
           </p:nvPr>
         </p:nvSpPr>
         <p:spPr>
@@ -2174,23 +2267,20 @@
           </a:prstGeom>
         </p:spPr>
         <p:txBody>
-          <a:bodyPr anchorCtr="0" anchor="t" bIns="91425" lIns="91425" spcFirstLastPara="1" rIns="91425" wrap="square" tIns="91425">
+          <a:bodyPr spcFirstLastPara="1" wrap="square" lIns="91425" tIns="91425" rIns="91425" bIns="91425" anchor="t" anchorCtr="0">
             <a:noAutofit/>
           </a:bodyPr>
           <a:lstStyle/>
           <a:p>
-            <a:pPr indent="0" lvl="0" marL="0" rtl="0" algn="l">
-              <a:spcBef>
-                <a:spcPts val="0"/>
-              </a:spcBef>
-              <a:spcAft>
-                <a:spcPts val="0"/>
-              </a:spcAft>
-              <a:buNone/>
-            </a:pPr>
-            <a:r>
-              <a:t/>
-            </a:r>
+            <a:pPr marL="0" lvl="0" indent="0" algn="l" rtl="0">
+              <a:spcBef>
+                <a:spcPts val="0"/>
+              </a:spcBef>
+              <a:spcAft>
+                <a:spcPts val="0"/>
+              </a:spcAft>
+              <a:buNone/>
+            </a:pPr>
             <a:endParaRPr/>
           </a:p>
         </p:txBody>
@@ -2204,11 +2294,11 @@
 </file>
 
 <file path=ppt/notesSlides/notesSlide9.xml><?xml version="1.0" encoding="utf-8"?>
-<p:notes xmlns:a="http://schemas.openxmlformats.org/drawingml/2006/main" xmlns:r="http://schemas.openxmlformats.org/officeDocument/2006/relationships" xmlns:mc="http://schemas.openxmlformats.org/markup-compatibility/2006" xmlns:mv="urn:schemas-microsoft-com:mac:vml" xmlns:p="http://schemas.openxmlformats.org/presentationml/2006/main" xmlns:c="http://schemas.openxmlformats.org/drawingml/2006/chart" xmlns:dgm="http://schemas.openxmlformats.org/drawingml/2006/diagram" xmlns:o="urn:schemas-microsoft-com:office:office" xmlns:v="urn:schemas-microsoft-com:vml" xmlns:pvml="urn:schemas-microsoft-com:office:powerpoint" xmlns:com="http://schemas.openxmlformats.org/drawingml/2006/compatibility" xmlns:p14="http://schemas.microsoft.com/office/powerpoint/2010/main" xmlns:p15="http://schemas.microsoft.com/office/powerpoint/2012/main" xmlns:ahyp="http://schemas.microsoft.com/office/drawing/2018/hyperlinkcolor" showMasterPhAnim="0" showMasterSp="0">
+<p:notes xmlns:a="http://schemas.openxmlformats.org/drawingml/2006/main" xmlns:r="http://schemas.openxmlformats.org/officeDocument/2006/relationships" xmlns:p="http://schemas.openxmlformats.org/presentationml/2006/main" showMasterSp="0" showMasterPhAnim="0">
   <p:cSld>
     <p:spTree>
       <p:nvGrpSpPr>
-        <p:cNvPr id="112" name="Shape 112"/>
+        <p:cNvPr id="1" name="Shape 112"/>
         <p:cNvGrpSpPr/>
         <p:nvPr/>
       </p:nvGrpSpPr>
@@ -2223,9 +2313,11 @@
       <p:sp>
         <p:nvSpPr>
           <p:cNvPr id="113" name="Google Shape;113;g3fb085bff3c_0_36:notes"/>
-          <p:cNvSpPr/>
+          <p:cNvSpPr>
+            <a:spLocks noGrp="1" noRot="1" noChangeAspect="1"/>
+          </p:cNvSpPr>
           <p:nvPr>
-            <p:ph idx="2" type="sldImg"/>
+            <p:ph type="sldImg" idx="2"/>
           </p:nvPr>
         </p:nvSpPr>
         <p:spPr>
@@ -2234,9 +2326,13 @@
             <a:ext cx="6096000" cy="3429000"/>
           </a:xfrm>
           <a:custGeom>
-            <a:rect b="b" l="l" r="r" t="t"/>
+            <a:avLst/>
+            <a:gdLst/>
+            <a:ahLst/>
+            <a:cxnLst/>
+            <a:rect l="l" t="t" r="r" b="b"/>
             <a:pathLst>
-              <a:path extrusionOk="0" h="120000" w="120000">
+              <a:path w="120000" h="120000" extrusionOk="0">
                 <a:moveTo>
                   <a:pt x="0" y="0"/>
                 </a:moveTo>
@@ -2258,9 +2354,11 @@
       <p:sp>
         <p:nvSpPr>
           <p:cNvPr id="114" name="Google Shape;114;g3fb085bff3c_0_36:notes"/>
-          <p:cNvSpPr txBox="1"/>
+          <p:cNvSpPr txBox="1">
+            <a:spLocks noGrp="1"/>
+          </p:cNvSpPr>
           <p:nvPr>
-            <p:ph idx="1" type="body"/>
+            <p:ph type="body" idx="1"/>
           </p:nvPr>
         </p:nvSpPr>
         <p:spPr>
@@ -2273,23 +2371,20 @@
           </a:prstGeom>
         </p:spPr>
         <p:txBody>
-          <a:bodyPr anchorCtr="0" anchor="t" bIns="91425" lIns="91425" spcFirstLastPara="1" rIns="91425" wrap="square" tIns="91425">
+          <a:bodyPr spcFirstLastPara="1" wrap="square" lIns="91425" tIns="91425" rIns="91425" bIns="91425" anchor="t" anchorCtr="0">
             <a:noAutofit/>
           </a:bodyPr>
           <a:lstStyle/>
           <a:p>
-            <a:pPr indent="0" lvl="0" marL="0" rtl="0" algn="l">
-              <a:spcBef>
-                <a:spcPts val="0"/>
-              </a:spcBef>
-              <a:spcAft>
-                <a:spcPts val="0"/>
-              </a:spcAft>
-              <a:buNone/>
-            </a:pPr>
-            <a:r>
-              <a:t/>
-            </a:r>
+            <a:pPr marL="0" lvl="0" indent="0" algn="l" rtl="0">
+              <a:spcBef>
+                <a:spcPts val="0"/>
+              </a:spcBef>
+              <a:spcAft>
+                <a:spcPts val="0"/>
+              </a:spcAft>
+              <a:buNone/>
+            </a:pPr>
             <a:endParaRPr/>
           </a:p>
         </p:txBody>
@@ -2303,11 +2398,11 @@
 </file>
 
 <file path=ppt/slideLayouts/slideLayout1.xml><?xml version="1.0" encoding="utf-8"?>
-<p:sldLayout xmlns:a="http://schemas.openxmlformats.org/drawingml/2006/main" xmlns:r="http://schemas.openxmlformats.org/officeDocument/2006/relationships" xmlns:mc="http://schemas.openxmlformats.org/markup-compatibility/2006" xmlns:mv="urn:schemas-microsoft-com:mac:vml" xmlns:p="http://schemas.openxmlformats.org/presentationml/2006/main" xmlns:c="http://schemas.openxmlformats.org/drawingml/2006/chart" xmlns:dgm="http://schemas.openxmlformats.org/drawingml/2006/diagram" xmlns:o="urn:schemas-microsoft-com:office:office" xmlns:v="urn:schemas-microsoft-com:vml" xmlns:pvml="urn:schemas-microsoft-com:office:powerpoint" xmlns:com="http://schemas.openxmlformats.org/drawingml/2006/compatibility" xmlns:p14="http://schemas.microsoft.com/office/powerpoint/2010/main" xmlns:p15="http://schemas.microsoft.com/office/powerpoint/2012/main" xmlns:ahyp="http://schemas.microsoft.com/office/drawing/2018/hyperlinkcolor" matchingName="Title slide" type="title">
+<p:sldLayout xmlns:a="http://schemas.openxmlformats.org/drawingml/2006/main" xmlns:r="http://schemas.openxmlformats.org/officeDocument/2006/relationships" xmlns:p="http://schemas.openxmlformats.org/presentationml/2006/main" matchingName="Title slide" type="title">
   <p:cSld name="TITLE">
     <p:spTree>
       <p:nvGrpSpPr>
-        <p:cNvPr id="9" name="Shape 9"/>
+        <p:cNvPr id="1" name="Shape 9"/>
         <p:cNvGrpSpPr/>
         <p:nvPr/>
       </p:nvGrpSpPr>
@@ -2322,7 +2417,9 @@
       <p:sp>
         <p:nvSpPr>
           <p:cNvPr id="10" name="Google Shape;10;p2"/>
-          <p:cNvSpPr txBox="1"/>
+          <p:cNvSpPr txBox="1">
+            <a:spLocks noGrp="1"/>
+          </p:cNvSpPr>
           <p:nvPr>
             <p:ph type="ctrTitle"/>
           </p:nvPr>
@@ -2337,7 +2434,7 @@
           </a:prstGeom>
         </p:spPr>
         <p:txBody>
-          <a:bodyPr anchorCtr="0" anchor="b" bIns="91425" lIns="91425" spcFirstLastPara="1" rIns="91425" wrap="square" tIns="91425">
+          <a:bodyPr spcFirstLastPara="1" wrap="square" lIns="91425" tIns="91425" rIns="91425" bIns="91425" anchor="b" anchorCtr="0">
             <a:normAutofit/>
           </a:bodyPr>
           <a:lstStyle>
@@ -2441,15 +2538,19 @@
               <a:defRPr sz="5200"/>
             </a:lvl9pPr>
           </a:lstStyle>
-          <a:p/>
+          <a:p>
+            <a:endParaRPr/>
+          </a:p>
         </p:txBody>
       </p:sp>
       <p:sp>
         <p:nvSpPr>
           <p:cNvPr id="11" name="Google Shape;11;p2"/>
-          <p:cNvSpPr txBox="1"/>
+          <p:cNvSpPr txBox="1">
+            <a:spLocks noGrp="1"/>
+          </p:cNvSpPr>
           <p:nvPr>
-            <p:ph idx="1" type="subTitle"/>
+            <p:ph type="subTitle" idx="1"/>
           </p:nvPr>
         </p:nvSpPr>
         <p:spPr>
@@ -2462,7 +2563,7 @@
           </a:prstGeom>
         </p:spPr>
         <p:txBody>
-          <a:bodyPr anchorCtr="0" anchor="t" bIns="91425" lIns="91425" spcFirstLastPara="1" rIns="91425" wrap="square" tIns="91425">
+          <a:bodyPr spcFirstLastPara="1" wrap="square" lIns="91425" tIns="91425" rIns="91425" bIns="91425" anchor="t" anchorCtr="0">
             <a:normAutofit/>
           </a:bodyPr>
           <a:lstStyle>
@@ -2593,15 +2694,19 @@
               <a:defRPr sz="2800"/>
             </a:lvl9pPr>
           </a:lstStyle>
-          <a:p/>
+          <a:p>
+            <a:endParaRPr/>
+          </a:p>
         </p:txBody>
       </p:sp>
       <p:sp>
         <p:nvSpPr>
           <p:cNvPr id="12" name="Google Shape;12;p2"/>
-          <p:cNvSpPr txBox="1"/>
+          <p:cNvSpPr txBox="1">
+            <a:spLocks noGrp="1"/>
+          </p:cNvSpPr>
           <p:nvPr>
-            <p:ph idx="12" type="sldNum"/>
+            <p:ph type="sldNum" idx="12"/>
           </p:nvPr>
         </p:nvSpPr>
         <p:spPr>
@@ -2614,7 +2719,7 @@
           </a:prstGeom>
         </p:spPr>
         <p:txBody>
-          <a:bodyPr anchorCtr="0" anchor="ctr" bIns="91425" lIns="91425" spcFirstLastPara="1" rIns="91425" wrap="square" tIns="91425">
+          <a:bodyPr spcFirstLastPara="1" wrap="square" lIns="91425" tIns="91425" rIns="91425" bIns="91425" anchor="ctr" anchorCtr="0">
             <a:normAutofit/>
           </a:bodyPr>
           <a:lstStyle>
@@ -2656,7 +2761,7 @@
             </a:lvl9pPr>
           </a:lstStyle>
           <a:p>
-            <a:pPr indent="0" lvl="0" marL="0" rtl="0" algn="r">
+            <a:pPr marL="0" lvl="0" indent="0" algn="r" rtl="0">
               <a:spcBef>
                 <a:spcPts val="0"/>
               </a:spcBef>
@@ -2682,11 +2787,11 @@
 </file>
 
 <file path=ppt/slideLayouts/slideLayout10.xml><?xml version="1.0" encoding="utf-8"?>
-<p:sldLayout xmlns:a="http://schemas.openxmlformats.org/drawingml/2006/main" xmlns:r="http://schemas.openxmlformats.org/officeDocument/2006/relationships" xmlns:mc="http://schemas.openxmlformats.org/markup-compatibility/2006" xmlns:mv="urn:schemas-microsoft-com:mac:vml" xmlns:p="http://schemas.openxmlformats.org/presentationml/2006/main" xmlns:c="http://schemas.openxmlformats.org/drawingml/2006/chart" xmlns:dgm="http://schemas.openxmlformats.org/drawingml/2006/diagram" xmlns:o="urn:schemas-microsoft-com:office:office" xmlns:v="urn:schemas-microsoft-com:vml" xmlns:pvml="urn:schemas-microsoft-com:office:powerpoint" xmlns:com="http://schemas.openxmlformats.org/drawingml/2006/compatibility" xmlns:p14="http://schemas.microsoft.com/office/powerpoint/2010/main" xmlns:p15="http://schemas.microsoft.com/office/powerpoint/2012/main" xmlns:ahyp="http://schemas.microsoft.com/office/drawing/2018/hyperlinkcolor" matchingName="Big number">
+<p:sldLayout xmlns:a="http://schemas.openxmlformats.org/drawingml/2006/main" xmlns:r="http://schemas.openxmlformats.org/officeDocument/2006/relationships" xmlns:p="http://schemas.openxmlformats.org/presentationml/2006/main" matchingName="Big number">
   <p:cSld name="BIG_NUMBER">
     <p:spTree>
       <p:nvGrpSpPr>
-        <p:cNvPr id="44" name="Shape 44"/>
+        <p:cNvPr id="1" name="Shape 44"/>
         <p:cNvGrpSpPr/>
         <p:nvPr/>
       </p:nvGrpSpPr>
@@ -2701,9 +2806,11 @@
       <p:sp>
         <p:nvSpPr>
           <p:cNvPr id="45" name="Google Shape;45;p11"/>
-          <p:cNvSpPr txBox="1"/>
+          <p:cNvSpPr txBox="1">
+            <a:spLocks noGrp="1"/>
+          </p:cNvSpPr>
           <p:nvPr>
-            <p:ph hasCustomPrompt="1" type="title"/>
+            <p:ph type="title" hasCustomPrompt="1"/>
           </p:nvPr>
         </p:nvSpPr>
         <p:spPr>
@@ -2716,7 +2823,7 @@
           </a:prstGeom>
         </p:spPr>
         <p:txBody>
-          <a:bodyPr anchorCtr="0" anchor="b" bIns="91425" lIns="91425" spcFirstLastPara="1" rIns="91425" wrap="square" tIns="91425">
+          <a:bodyPr spcFirstLastPara="1" wrap="square" lIns="91425" tIns="91425" rIns="91425" bIns="91425" anchor="b" anchorCtr="0">
             <a:normAutofit/>
           </a:bodyPr>
           <a:lstStyle>
@@ -2830,9 +2937,11 @@
       <p:sp>
         <p:nvSpPr>
           <p:cNvPr id="46" name="Google Shape;46;p11"/>
-          <p:cNvSpPr txBox="1"/>
+          <p:cNvSpPr txBox="1">
+            <a:spLocks noGrp="1"/>
+          </p:cNvSpPr>
           <p:nvPr>
-            <p:ph idx="1" type="body"/>
+            <p:ph type="body" idx="1"/>
           </p:nvPr>
         </p:nvSpPr>
         <p:spPr>
@@ -2845,11 +2954,11 @@
           </a:prstGeom>
         </p:spPr>
         <p:txBody>
-          <a:bodyPr anchorCtr="0" anchor="t" bIns="91425" lIns="91425" spcFirstLastPara="1" rIns="91425" wrap="square" tIns="91425">
+          <a:bodyPr spcFirstLastPara="1" wrap="square" lIns="91425" tIns="91425" rIns="91425" bIns="91425" anchor="t" anchorCtr="0">
             <a:normAutofit/>
           </a:bodyPr>
           <a:lstStyle>
-            <a:lvl1pPr indent="-342900" lvl="0" marL="457200" algn="ctr">
+            <a:lvl1pPr marL="457200" lvl="0" indent="-342900" algn="ctr">
               <a:spcBef>
                 <a:spcPts val="0"/>
               </a:spcBef>
@@ -2860,7 +2969,7 @@
               <a:buChar char="●"/>
               <a:defRPr/>
             </a:lvl1pPr>
-            <a:lvl2pPr indent="-317500" lvl="1" marL="914400" algn="ctr">
+            <a:lvl2pPr marL="914400" lvl="1" indent="-317500" algn="ctr">
               <a:spcBef>
                 <a:spcPts val="0"/>
               </a:spcBef>
@@ -2871,7 +2980,7 @@
               <a:buChar char="○"/>
               <a:defRPr/>
             </a:lvl2pPr>
-            <a:lvl3pPr indent="-317500" lvl="2" marL="1371600" algn="ctr">
+            <a:lvl3pPr marL="1371600" lvl="2" indent="-317500" algn="ctr">
               <a:spcBef>
                 <a:spcPts val="0"/>
               </a:spcBef>
@@ -2882,7 +2991,7 @@
               <a:buChar char="■"/>
               <a:defRPr/>
             </a:lvl3pPr>
-            <a:lvl4pPr indent="-317500" lvl="3" marL="1828800" algn="ctr">
+            <a:lvl4pPr marL="1828800" lvl="3" indent="-317500" algn="ctr">
               <a:spcBef>
                 <a:spcPts val="0"/>
               </a:spcBef>
@@ -2893,7 +3002,7 @@
               <a:buChar char="●"/>
               <a:defRPr/>
             </a:lvl4pPr>
-            <a:lvl5pPr indent="-317500" lvl="4" marL="2286000" algn="ctr">
+            <a:lvl5pPr marL="2286000" lvl="4" indent="-317500" algn="ctr">
               <a:spcBef>
                 <a:spcPts val="0"/>
               </a:spcBef>
@@ -2904,7 +3013,7 @@
               <a:buChar char="○"/>
               <a:defRPr/>
             </a:lvl5pPr>
-            <a:lvl6pPr indent="-317500" lvl="5" marL="2743200" algn="ctr">
+            <a:lvl6pPr marL="2743200" lvl="5" indent="-317500" algn="ctr">
               <a:spcBef>
                 <a:spcPts val="0"/>
               </a:spcBef>
@@ -2915,7 +3024,7 @@
               <a:buChar char="■"/>
               <a:defRPr/>
             </a:lvl6pPr>
-            <a:lvl7pPr indent="-317500" lvl="6" marL="3200400" algn="ctr">
+            <a:lvl7pPr marL="3200400" lvl="6" indent="-317500" algn="ctr">
               <a:spcBef>
                 <a:spcPts val="0"/>
               </a:spcBef>
@@ -2926,7 +3035,7 @@
               <a:buChar char="●"/>
               <a:defRPr/>
             </a:lvl7pPr>
-            <a:lvl8pPr indent="-317500" lvl="7" marL="3657600" algn="ctr">
+            <a:lvl8pPr marL="3657600" lvl="7" indent="-317500" algn="ctr">
               <a:spcBef>
                 <a:spcPts val="0"/>
               </a:spcBef>
@@ -2937,7 +3046,7 @@
               <a:buChar char="○"/>
               <a:defRPr/>
             </a:lvl8pPr>
-            <a:lvl9pPr indent="-317500" lvl="8" marL="4114800" algn="ctr">
+            <a:lvl9pPr marL="4114800" lvl="8" indent="-317500" algn="ctr">
               <a:spcBef>
                 <a:spcPts val="0"/>
               </a:spcBef>
@@ -2949,15 +3058,19 @@
               <a:defRPr/>
             </a:lvl9pPr>
           </a:lstStyle>
-          <a:p/>
+          <a:p>
+            <a:endParaRPr/>
+          </a:p>
         </p:txBody>
       </p:sp>
       <p:sp>
         <p:nvSpPr>
           <p:cNvPr id="47" name="Google Shape;47;p11"/>
-          <p:cNvSpPr txBox="1"/>
+          <p:cNvSpPr txBox="1">
+            <a:spLocks noGrp="1"/>
+          </p:cNvSpPr>
           <p:nvPr>
-            <p:ph idx="12" type="sldNum"/>
+            <p:ph type="sldNum" idx="12"/>
           </p:nvPr>
         </p:nvSpPr>
         <p:spPr>
@@ -2970,7 +3083,7 @@
           </a:prstGeom>
         </p:spPr>
         <p:txBody>
-          <a:bodyPr anchorCtr="0" anchor="ctr" bIns="91425" lIns="91425" spcFirstLastPara="1" rIns="91425" wrap="square" tIns="91425">
+          <a:bodyPr spcFirstLastPara="1" wrap="square" lIns="91425" tIns="91425" rIns="91425" bIns="91425" anchor="ctr" anchorCtr="0">
             <a:normAutofit/>
           </a:bodyPr>
           <a:lstStyle>
@@ -3012,7 +3125,7 @@
             </a:lvl9pPr>
           </a:lstStyle>
           <a:p>
-            <a:pPr indent="0" lvl="0" marL="0" rtl="0" algn="r">
+            <a:pPr marL="0" lvl="0" indent="0" algn="r" rtl="0">
               <a:spcBef>
                 <a:spcPts val="0"/>
               </a:spcBef>
@@ -3038,11 +3151,11 @@
 </file>
 
 <file path=ppt/slideLayouts/slideLayout11.xml><?xml version="1.0" encoding="utf-8"?>
-<p:sldLayout xmlns:a="http://schemas.openxmlformats.org/drawingml/2006/main" xmlns:r="http://schemas.openxmlformats.org/officeDocument/2006/relationships" xmlns:mc="http://schemas.openxmlformats.org/markup-compatibility/2006" xmlns:mv="urn:schemas-microsoft-com:mac:vml" xmlns:p="http://schemas.openxmlformats.org/presentationml/2006/main" xmlns:c="http://schemas.openxmlformats.org/drawingml/2006/chart" xmlns:dgm="http://schemas.openxmlformats.org/drawingml/2006/diagram" xmlns:o="urn:schemas-microsoft-com:office:office" xmlns:v="urn:schemas-microsoft-com:vml" xmlns:pvml="urn:schemas-microsoft-com:office:powerpoint" xmlns:com="http://schemas.openxmlformats.org/drawingml/2006/compatibility" xmlns:p14="http://schemas.microsoft.com/office/powerpoint/2010/main" xmlns:p15="http://schemas.microsoft.com/office/powerpoint/2012/main" xmlns:ahyp="http://schemas.microsoft.com/office/drawing/2018/hyperlinkcolor" matchingName="Blank" type="blank">
+<p:sldLayout xmlns:a="http://schemas.openxmlformats.org/drawingml/2006/main" xmlns:r="http://schemas.openxmlformats.org/officeDocument/2006/relationships" xmlns:p="http://schemas.openxmlformats.org/presentationml/2006/main" matchingName="Blank" type="blank">
   <p:cSld name="BLANK">
     <p:spTree>
       <p:nvGrpSpPr>
-        <p:cNvPr id="48" name="Shape 48"/>
+        <p:cNvPr id="1" name="Shape 48"/>
         <p:cNvGrpSpPr/>
         <p:nvPr/>
       </p:nvGrpSpPr>
@@ -3057,9 +3170,11 @@
       <p:sp>
         <p:nvSpPr>
           <p:cNvPr id="49" name="Google Shape;49;p12"/>
-          <p:cNvSpPr txBox="1"/>
+          <p:cNvSpPr txBox="1">
+            <a:spLocks noGrp="1"/>
+          </p:cNvSpPr>
           <p:nvPr>
-            <p:ph idx="12" type="sldNum"/>
+            <p:ph type="sldNum" idx="12"/>
           </p:nvPr>
         </p:nvSpPr>
         <p:spPr>
@@ -3072,7 +3187,7 @@
           </a:prstGeom>
         </p:spPr>
         <p:txBody>
-          <a:bodyPr anchorCtr="0" anchor="ctr" bIns="91425" lIns="91425" spcFirstLastPara="1" rIns="91425" wrap="square" tIns="91425">
+          <a:bodyPr spcFirstLastPara="1" wrap="square" lIns="91425" tIns="91425" rIns="91425" bIns="91425" anchor="ctr" anchorCtr="0">
             <a:normAutofit/>
           </a:bodyPr>
           <a:lstStyle>
@@ -3114,7 +3229,7 @@
             </a:lvl9pPr>
           </a:lstStyle>
           <a:p>
-            <a:pPr indent="0" lvl="0" marL="0" rtl="0" algn="r">
+            <a:pPr marL="0" lvl="0" indent="0" algn="r" rtl="0">
               <a:spcBef>
                 <a:spcPts val="0"/>
               </a:spcBef>
@@ -3140,11 +3255,11 @@
 </file>
 
 <file path=ppt/slideLayouts/slideLayout2.xml><?xml version="1.0" encoding="utf-8"?>
-<p:sldLayout xmlns:a="http://schemas.openxmlformats.org/drawingml/2006/main" xmlns:r="http://schemas.openxmlformats.org/officeDocument/2006/relationships" xmlns:mc="http://schemas.openxmlformats.org/markup-compatibility/2006" xmlns:mv="urn:schemas-microsoft-com:mac:vml" xmlns:p="http://schemas.openxmlformats.org/presentationml/2006/main" xmlns:c="http://schemas.openxmlformats.org/drawingml/2006/chart" xmlns:dgm="http://schemas.openxmlformats.org/drawingml/2006/diagram" xmlns:o="urn:schemas-microsoft-com:office:office" xmlns:v="urn:schemas-microsoft-com:vml" xmlns:pvml="urn:schemas-microsoft-com:office:powerpoint" xmlns:com="http://schemas.openxmlformats.org/drawingml/2006/compatibility" xmlns:p14="http://schemas.microsoft.com/office/powerpoint/2010/main" xmlns:p15="http://schemas.microsoft.com/office/powerpoint/2012/main" xmlns:ahyp="http://schemas.microsoft.com/office/drawing/2018/hyperlinkcolor" matchingName="Section header" type="secHead">
+<p:sldLayout xmlns:a="http://schemas.openxmlformats.org/drawingml/2006/main" xmlns:r="http://schemas.openxmlformats.org/officeDocument/2006/relationships" xmlns:p="http://schemas.openxmlformats.org/presentationml/2006/main" matchingName="Section header" type="secHead">
   <p:cSld name="SECTION_HEADER">
     <p:spTree>
       <p:nvGrpSpPr>
-        <p:cNvPr id="13" name="Shape 13"/>
+        <p:cNvPr id="1" name="Shape 13"/>
         <p:cNvGrpSpPr/>
         <p:nvPr/>
       </p:nvGrpSpPr>
@@ -3159,7 +3274,9 @@
       <p:sp>
         <p:nvSpPr>
           <p:cNvPr id="14" name="Google Shape;14;p3"/>
-          <p:cNvSpPr txBox="1"/>
+          <p:cNvSpPr txBox="1">
+            <a:spLocks noGrp="1"/>
+          </p:cNvSpPr>
           <p:nvPr>
             <p:ph type="title"/>
           </p:nvPr>
@@ -3174,7 +3291,7 @@
           </a:prstGeom>
         </p:spPr>
         <p:txBody>
-          <a:bodyPr anchorCtr="0" anchor="ctr" bIns="91425" lIns="91425" spcFirstLastPara="1" rIns="91425" wrap="square" tIns="91425">
+          <a:bodyPr spcFirstLastPara="1" wrap="square" lIns="91425" tIns="91425" rIns="91425" bIns="91425" anchor="ctr" anchorCtr="0">
             <a:normAutofit/>
           </a:bodyPr>
           <a:lstStyle>
@@ -3278,15 +3395,19 @@
               <a:defRPr sz="3600"/>
             </a:lvl9pPr>
           </a:lstStyle>
-          <a:p/>
+          <a:p>
+            <a:endParaRPr/>
+          </a:p>
         </p:txBody>
       </p:sp>
       <p:sp>
         <p:nvSpPr>
           <p:cNvPr id="15" name="Google Shape;15;p3"/>
-          <p:cNvSpPr txBox="1"/>
+          <p:cNvSpPr txBox="1">
+            <a:spLocks noGrp="1"/>
+          </p:cNvSpPr>
           <p:nvPr>
-            <p:ph idx="12" type="sldNum"/>
+            <p:ph type="sldNum" idx="12"/>
           </p:nvPr>
         </p:nvSpPr>
         <p:spPr>
@@ -3299,7 +3420,7 @@
           </a:prstGeom>
         </p:spPr>
         <p:txBody>
-          <a:bodyPr anchorCtr="0" anchor="ctr" bIns="91425" lIns="91425" spcFirstLastPara="1" rIns="91425" wrap="square" tIns="91425">
+          <a:bodyPr spcFirstLastPara="1" wrap="square" lIns="91425" tIns="91425" rIns="91425" bIns="91425" anchor="ctr" anchorCtr="0">
             <a:normAutofit/>
           </a:bodyPr>
           <a:lstStyle>
@@ -3341,7 +3462,7 @@
             </a:lvl9pPr>
           </a:lstStyle>
           <a:p>
-            <a:pPr indent="0" lvl="0" marL="0" rtl="0" algn="r">
+            <a:pPr marL="0" lvl="0" indent="0" algn="r" rtl="0">
               <a:spcBef>
                 <a:spcPts val="0"/>
               </a:spcBef>
@@ -3367,11 +3488,11 @@
 </file>
 
 <file path=ppt/slideLayouts/slideLayout3.xml><?xml version="1.0" encoding="utf-8"?>
-<p:sldLayout xmlns:a="http://schemas.openxmlformats.org/drawingml/2006/main" xmlns:r="http://schemas.openxmlformats.org/officeDocument/2006/relationships" xmlns:mc="http://schemas.openxmlformats.org/markup-compatibility/2006" xmlns:mv="urn:schemas-microsoft-com:mac:vml" xmlns:p="http://schemas.openxmlformats.org/presentationml/2006/main" xmlns:c="http://schemas.openxmlformats.org/drawingml/2006/chart" xmlns:dgm="http://schemas.openxmlformats.org/drawingml/2006/diagram" xmlns:o="urn:schemas-microsoft-com:office:office" xmlns:v="urn:schemas-microsoft-com:vml" xmlns:pvml="urn:schemas-microsoft-com:office:powerpoint" xmlns:com="http://schemas.openxmlformats.org/drawingml/2006/compatibility" xmlns:p14="http://schemas.microsoft.com/office/powerpoint/2010/main" xmlns:p15="http://schemas.microsoft.com/office/powerpoint/2012/main" xmlns:ahyp="http://schemas.microsoft.com/office/drawing/2018/hyperlinkcolor" matchingName="Title and body" type="tx">
+<p:sldLayout xmlns:a="http://schemas.openxmlformats.org/drawingml/2006/main" xmlns:r="http://schemas.openxmlformats.org/officeDocument/2006/relationships" xmlns:p="http://schemas.openxmlformats.org/presentationml/2006/main" matchingName="Title and body" type="tx">
   <p:cSld name="TITLE_AND_BODY">
     <p:spTree>
       <p:nvGrpSpPr>
-        <p:cNvPr id="16" name="Shape 16"/>
+        <p:cNvPr id="1" name="Shape 16"/>
         <p:cNvGrpSpPr/>
         <p:nvPr/>
       </p:nvGrpSpPr>
@@ -3386,7 +3507,9 @@
       <p:sp>
         <p:nvSpPr>
           <p:cNvPr id="17" name="Google Shape;17;p4"/>
-          <p:cNvSpPr txBox="1"/>
+          <p:cNvSpPr txBox="1">
+            <a:spLocks noGrp="1"/>
+          </p:cNvSpPr>
           <p:nvPr>
             <p:ph type="title"/>
           </p:nvPr>
@@ -3401,7 +3524,7 @@
           </a:prstGeom>
         </p:spPr>
         <p:txBody>
-          <a:bodyPr anchorCtr="0" anchor="t" bIns="91425" lIns="91425" spcFirstLastPara="1" rIns="91425" wrap="square" tIns="91425">
+          <a:bodyPr spcFirstLastPara="1" wrap="square" lIns="91425" tIns="91425" rIns="91425" bIns="91425" anchor="t" anchorCtr="0">
             <a:normAutofit/>
           </a:bodyPr>
           <a:lstStyle>
@@ -3505,15 +3628,19 @@
               <a:defRPr/>
             </a:lvl9pPr>
           </a:lstStyle>
-          <a:p/>
+          <a:p>
+            <a:endParaRPr/>
+          </a:p>
         </p:txBody>
       </p:sp>
       <p:sp>
         <p:nvSpPr>
           <p:cNvPr id="18" name="Google Shape;18;p4"/>
-          <p:cNvSpPr txBox="1"/>
+          <p:cNvSpPr txBox="1">
+            <a:spLocks noGrp="1"/>
+          </p:cNvSpPr>
           <p:nvPr>
-            <p:ph idx="1" type="body"/>
+            <p:ph type="body" idx="1"/>
           </p:nvPr>
         </p:nvSpPr>
         <p:spPr>
@@ -3526,11 +3653,11 @@
           </a:prstGeom>
         </p:spPr>
         <p:txBody>
-          <a:bodyPr anchorCtr="0" anchor="t" bIns="91425" lIns="91425" spcFirstLastPara="1" rIns="91425" wrap="square" tIns="91425">
+          <a:bodyPr spcFirstLastPara="1" wrap="square" lIns="91425" tIns="91425" rIns="91425" bIns="91425" anchor="t" anchorCtr="0">
             <a:normAutofit/>
           </a:bodyPr>
           <a:lstStyle>
-            <a:lvl1pPr indent="-342900" lvl="0" marL="457200">
+            <a:lvl1pPr marL="457200" lvl="0" indent="-342900">
               <a:spcBef>
                 <a:spcPts val="0"/>
               </a:spcBef>
@@ -3541,7 +3668,7 @@
               <a:buChar char="●"/>
               <a:defRPr/>
             </a:lvl1pPr>
-            <a:lvl2pPr indent="-317500" lvl="1" marL="914400">
+            <a:lvl2pPr marL="914400" lvl="1" indent="-317500">
               <a:spcBef>
                 <a:spcPts val="0"/>
               </a:spcBef>
@@ -3552,7 +3679,7 @@
               <a:buChar char="○"/>
               <a:defRPr/>
             </a:lvl2pPr>
-            <a:lvl3pPr indent="-317500" lvl="2" marL="1371600">
+            <a:lvl3pPr marL="1371600" lvl="2" indent="-317500">
               <a:spcBef>
                 <a:spcPts val="0"/>
               </a:spcBef>
@@ -3563,7 +3690,7 @@
               <a:buChar char="■"/>
               <a:defRPr/>
             </a:lvl3pPr>
-            <a:lvl4pPr indent="-317500" lvl="3" marL="1828800">
+            <a:lvl4pPr marL="1828800" lvl="3" indent="-317500">
               <a:spcBef>
                 <a:spcPts val="0"/>
               </a:spcBef>
@@ -3574,7 +3701,7 @@
               <a:buChar char="●"/>
               <a:defRPr/>
             </a:lvl4pPr>
-            <a:lvl5pPr indent="-317500" lvl="4" marL="2286000">
+            <a:lvl5pPr marL="2286000" lvl="4" indent="-317500">
               <a:spcBef>
                 <a:spcPts val="0"/>
               </a:spcBef>
@@ -3585,7 +3712,7 @@
               <a:buChar char="○"/>
               <a:defRPr/>
             </a:lvl5pPr>
-            <a:lvl6pPr indent="-317500" lvl="5" marL="2743200">
+            <a:lvl6pPr marL="2743200" lvl="5" indent="-317500">
               <a:spcBef>
                 <a:spcPts val="0"/>
               </a:spcBef>
@@ -3596,7 +3723,7 @@
               <a:buChar char="■"/>
               <a:defRPr/>
             </a:lvl6pPr>
-            <a:lvl7pPr indent="-317500" lvl="6" marL="3200400">
+            <a:lvl7pPr marL="3200400" lvl="6" indent="-317500">
               <a:spcBef>
                 <a:spcPts val="0"/>
               </a:spcBef>
@@ -3607,7 +3734,7 @@
               <a:buChar char="●"/>
               <a:defRPr/>
             </a:lvl7pPr>
-            <a:lvl8pPr indent="-317500" lvl="7" marL="3657600">
+            <a:lvl8pPr marL="3657600" lvl="7" indent="-317500">
               <a:spcBef>
                 <a:spcPts val="0"/>
               </a:spcBef>
@@ -3618,7 +3745,7 @@
               <a:buChar char="○"/>
               <a:defRPr/>
             </a:lvl8pPr>
-            <a:lvl9pPr indent="-317500" lvl="8" marL="4114800">
+            <a:lvl9pPr marL="4114800" lvl="8" indent="-317500">
               <a:spcBef>
                 <a:spcPts val="0"/>
               </a:spcBef>
@@ -3630,15 +3757,19 @@
               <a:defRPr/>
             </a:lvl9pPr>
           </a:lstStyle>
-          <a:p/>
+          <a:p>
+            <a:endParaRPr/>
+          </a:p>
         </p:txBody>
       </p:sp>
       <p:sp>
         <p:nvSpPr>
           <p:cNvPr id="19" name="Google Shape;19;p4"/>
-          <p:cNvSpPr txBox="1"/>
+          <p:cNvSpPr txBox="1">
+            <a:spLocks noGrp="1"/>
+          </p:cNvSpPr>
           <p:nvPr>
-            <p:ph idx="12" type="sldNum"/>
+            <p:ph type="sldNum" idx="12"/>
           </p:nvPr>
         </p:nvSpPr>
         <p:spPr>
@@ -3651,7 +3782,7 @@
           </a:prstGeom>
         </p:spPr>
         <p:txBody>
-          <a:bodyPr anchorCtr="0" anchor="ctr" bIns="91425" lIns="91425" spcFirstLastPara="1" rIns="91425" wrap="square" tIns="91425">
+          <a:bodyPr spcFirstLastPara="1" wrap="square" lIns="91425" tIns="91425" rIns="91425" bIns="91425" anchor="ctr" anchorCtr="0">
             <a:normAutofit/>
           </a:bodyPr>
           <a:lstStyle>
@@ -3693,7 +3824,7 @@
             </a:lvl9pPr>
           </a:lstStyle>
           <a:p>
-            <a:pPr indent="0" lvl="0" marL="0" rtl="0" algn="r">
+            <a:pPr marL="0" lvl="0" indent="0" algn="r" rtl="0">
               <a:spcBef>
                 <a:spcPts val="0"/>
               </a:spcBef>
@@ -3719,11 +3850,11 @@
 </file>
 
 <file path=ppt/slideLayouts/slideLayout4.xml><?xml version="1.0" encoding="utf-8"?>
-<p:sldLayout xmlns:a="http://schemas.openxmlformats.org/drawingml/2006/main" xmlns:r="http://schemas.openxmlformats.org/officeDocument/2006/relationships" xmlns:mc="http://schemas.openxmlformats.org/markup-compatibility/2006" xmlns:mv="urn:schemas-microsoft-com:mac:vml" xmlns:p="http://schemas.openxmlformats.org/presentationml/2006/main" xmlns:c="http://schemas.openxmlformats.org/drawingml/2006/chart" xmlns:dgm="http://schemas.openxmlformats.org/drawingml/2006/diagram" xmlns:o="urn:schemas-microsoft-com:office:office" xmlns:v="urn:schemas-microsoft-com:vml" xmlns:pvml="urn:schemas-microsoft-com:office:powerpoint" xmlns:com="http://schemas.openxmlformats.org/drawingml/2006/compatibility" xmlns:p14="http://schemas.microsoft.com/office/powerpoint/2010/main" xmlns:p15="http://schemas.microsoft.com/office/powerpoint/2012/main" xmlns:ahyp="http://schemas.microsoft.com/office/drawing/2018/hyperlinkcolor" matchingName="Title and two columns" type="twoColTx">
+<p:sldLayout xmlns:a="http://schemas.openxmlformats.org/drawingml/2006/main" xmlns:r="http://schemas.openxmlformats.org/officeDocument/2006/relationships" xmlns:p="http://schemas.openxmlformats.org/presentationml/2006/main" matchingName="Title and two columns" type="twoColTx">
   <p:cSld name="TITLE_AND_TWO_COLUMNS">
     <p:spTree>
       <p:nvGrpSpPr>
-        <p:cNvPr id="20" name="Shape 20"/>
+        <p:cNvPr id="1" name="Shape 20"/>
         <p:cNvGrpSpPr/>
         <p:nvPr/>
       </p:nvGrpSpPr>
@@ -3738,7 +3869,9 @@
       <p:sp>
         <p:nvSpPr>
           <p:cNvPr id="21" name="Google Shape;21;p5"/>
-          <p:cNvSpPr txBox="1"/>
+          <p:cNvSpPr txBox="1">
+            <a:spLocks noGrp="1"/>
+          </p:cNvSpPr>
           <p:nvPr>
             <p:ph type="title"/>
           </p:nvPr>
@@ -3753,7 +3886,7 @@
           </a:prstGeom>
         </p:spPr>
         <p:txBody>
-          <a:bodyPr anchorCtr="0" anchor="t" bIns="91425" lIns="91425" spcFirstLastPara="1" rIns="91425" wrap="square" tIns="91425">
+          <a:bodyPr spcFirstLastPara="1" wrap="square" lIns="91425" tIns="91425" rIns="91425" bIns="91425" anchor="t" anchorCtr="0">
             <a:normAutofit/>
           </a:bodyPr>
           <a:lstStyle>
@@ -3857,15 +3990,19 @@
               <a:defRPr/>
             </a:lvl9pPr>
           </a:lstStyle>
-          <a:p/>
+          <a:p>
+            <a:endParaRPr/>
+          </a:p>
         </p:txBody>
       </p:sp>
       <p:sp>
         <p:nvSpPr>
           <p:cNvPr id="22" name="Google Shape;22;p5"/>
-          <p:cNvSpPr txBox="1"/>
+          <p:cNvSpPr txBox="1">
+            <a:spLocks noGrp="1"/>
+          </p:cNvSpPr>
           <p:nvPr>
-            <p:ph idx="1" type="body"/>
+            <p:ph type="body" idx="1"/>
           </p:nvPr>
         </p:nvSpPr>
         <p:spPr>
@@ -3878,11 +4015,11 @@
           </a:prstGeom>
         </p:spPr>
         <p:txBody>
-          <a:bodyPr anchorCtr="0" anchor="t" bIns="91425" lIns="91425" spcFirstLastPara="1" rIns="91425" wrap="square" tIns="91425">
+          <a:bodyPr spcFirstLastPara="1" wrap="square" lIns="91425" tIns="91425" rIns="91425" bIns="91425" anchor="t" anchorCtr="0">
             <a:normAutofit/>
           </a:bodyPr>
           <a:lstStyle>
-            <a:lvl1pPr indent="-317500" lvl="0" marL="457200">
+            <a:lvl1pPr marL="457200" lvl="0" indent="-317500">
               <a:spcBef>
                 <a:spcPts val="0"/>
               </a:spcBef>
@@ -3893,7 +4030,7 @@
               <a:buChar char="●"/>
               <a:defRPr sz="1400"/>
             </a:lvl1pPr>
-            <a:lvl2pPr indent="-304800" lvl="1" marL="914400">
+            <a:lvl2pPr marL="914400" lvl="1" indent="-304800">
               <a:spcBef>
                 <a:spcPts val="0"/>
               </a:spcBef>
@@ -3904,7 +4041,7 @@
               <a:buChar char="○"/>
               <a:defRPr sz="1200"/>
             </a:lvl2pPr>
-            <a:lvl3pPr indent="-304800" lvl="2" marL="1371600">
+            <a:lvl3pPr marL="1371600" lvl="2" indent="-304800">
               <a:spcBef>
                 <a:spcPts val="0"/>
               </a:spcBef>
@@ -3915,7 +4052,7 @@
               <a:buChar char="■"/>
               <a:defRPr sz="1200"/>
             </a:lvl3pPr>
-            <a:lvl4pPr indent="-304800" lvl="3" marL="1828800">
+            <a:lvl4pPr marL="1828800" lvl="3" indent="-304800">
               <a:spcBef>
                 <a:spcPts val="0"/>
               </a:spcBef>
@@ -3926,7 +4063,7 @@
               <a:buChar char="●"/>
               <a:defRPr sz="1200"/>
             </a:lvl4pPr>
-            <a:lvl5pPr indent="-304800" lvl="4" marL="2286000">
+            <a:lvl5pPr marL="2286000" lvl="4" indent="-304800">
               <a:spcBef>
                 <a:spcPts val="0"/>
               </a:spcBef>
@@ -3937,7 +4074,7 @@
               <a:buChar char="○"/>
               <a:defRPr sz="1200"/>
             </a:lvl5pPr>
-            <a:lvl6pPr indent="-304800" lvl="5" marL="2743200">
+            <a:lvl6pPr marL="2743200" lvl="5" indent="-304800">
               <a:spcBef>
                 <a:spcPts val="0"/>
               </a:spcBef>
@@ -3948,7 +4085,7 @@
               <a:buChar char="■"/>
               <a:defRPr sz="1200"/>
             </a:lvl6pPr>
-            <a:lvl7pPr indent="-304800" lvl="6" marL="3200400">
+            <a:lvl7pPr marL="3200400" lvl="6" indent="-304800">
               <a:spcBef>
                 <a:spcPts val="0"/>
               </a:spcBef>
@@ -3959,7 +4096,7 @@
               <a:buChar char="●"/>
               <a:defRPr sz="1200"/>
             </a:lvl7pPr>
-            <a:lvl8pPr indent="-304800" lvl="7" marL="3657600">
+            <a:lvl8pPr marL="3657600" lvl="7" indent="-304800">
               <a:spcBef>
                 <a:spcPts val="0"/>
               </a:spcBef>
@@ -3970,7 +4107,7 @@
               <a:buChar char="○"/>
               <a:defRPr sz="1200"/>
             </a:lvl8pPr>
-            <a:lvl9pPr indent="-304800" lvl="8" marL="4114800">
+            <a:lvl9pPr marL="4114800" lvl="8" indent="-304800">
               <a:spcBef>
                 <a:spcPts val="0"/>
               </a:spcBef>
@@ -3982,15 +4119,19 @@
               <a:defRPr sz="1200"/>
             </a:lvl9pPr>
           </a:lstStyle>
-          <a:p/>
+          <a:p>
+            <a:endParaRPr/>
+          </a:p>
         </p:txBody>
       </p:sp>
       <p:sp>
         <p:nvSpPr>
           <p:cNvPr id="23" name="Google Shape;23;p5"/>
-          <p:cNvSpPr txBox="1"/>
+          <p:cNvSpPr txBox="1">
+            <a:spLocks noGrp="1"/>
+          </p:cNvSpPr>
           <p:nvPr>
-            <p:ph idx="2" type="body"/>
+            <p:ph type="body" idx="2"/>
           </p:nvPr>
         </p:nvSpPr>
         <p:spPr>
@@ -4003,11 +4144,11 @@
           </a:prstGeom>
         </p:spPr>
         <p:txBody>
-          <a:bodyPr anchorCtr="0" anchor="t" bIns="91425" lIns="91425" spcFirstLastPara="1" rIns="91425" wrap="square" tIns="91425">
+          <a:bodyPr spcFirstLastPara="1" wrap="square" lIns="91425" tIns="91425" rIns="91425" bIns="91425" anchor="t" anchorCtr="0">
             <a:normAutofit/>
           </a:bodyPr>
           <a:lstStyle>
-            <a:lvl1pPr indent="-317500" lvl="0" marL="457200">
+            <a:lvl1pPr marL="457200" lvl="0" indent="-317500">
               <a:spcBef>
                 <a:spcPts val="0"/>
               </a:spcBef>
@@ -4018,7 +4159,7 @@
               <a:buChar char="●"/>
               <a:defRPr sz="1400"/>
             </a:lvl1pPr>
-            <a:lvl2pPr indent="-304800" lvl="1" marL="914400">
+            <a:lvl2pPr marL="914400" lvl="1" indent="-304800">
               <a:spcBef>
                 <a:spcPts val="0"/>
               </a:spcBef>
@@ -4029,7 +4170,7 @@
               <a:buChar char="○"/>
               <a:defRPr sz="1200"/>
             </a:lvl2pPr>
-            <a:lvl3pPr indent="-304800" lvl="2" marL="1371600">
+            <a:lvl3pPr marL="1371600" lvl="2" indent="-304800">
               <a:spcBef>
                 <a:spcPts val="0"/>
               </a:spcBef>
@@ -4040,7 +4181,7 @@
               <a:buChar char="■"/>
               <a:defRPr sz="1200"/>
             </a:lvl3pPr>
-            <a:lvl4pPr indent="-304800" lvl="3" marL="1828800">
+            <a:lvl4pPr marL="1828800" lvl="3" indent="-304800">
               <a:spcBef>
                 <a:spcPts val="0"/>
               </a:spcBef>
@@ -4051,7 +4192,7 @@
               <a:buChar char="●"/>
               <a:defRPr sz="1200"/>
             </a:lvl4pPr>
-            <a:lvl5pPr indent="-304800" lvl="4" marL="2286000">
+            <a:lvl5pPr marL="2286000" lvl="4" indent="-304800">
               <a:spcBef>
                 <a:spcPts val="0"/>
               </a:spcBef>
@@ -4062,7 +4203,7 @@
               <a:buChar char="○"/>
               <a:defRPr sz="1200"/>
             </a:lvl5pPr>
-            <a:lvl6pPr indent="-304800" lvl="5" marL="2743200">
+            <a:lvl6pPr marL="2743200" lvl="5" indent="-304800">
               <a:spcBef>
                 <a:spcPts val="0"/>
               </a:spcBef>
@@ -4073,7 +4214,7 @@
               <a:buChar char="■"/>
               <a:defRPr sz="1200"/>
             </a:lvl6pPr>
-            <a:lvl7pPr indent="-304800" lvl="6" marL="3200400">
+            <a:lvl7pPr marL="3200400" lvl="6" indent="-304800">
               <a:spcBef>
                 <a:spcPts val="0"/>
               </a:spcBef>
@@ -4084,7 +4225,7 @@
               <a:buChar char="●"/>
               <a:defRPr sz="1200"/>
             </a:lvl7pPr>
-            <a:lvl8pPr indent="-304800" lvl="7" marL="3657600">
+            <a:lvl8pPr marL="3657600" lvl="7" indent="-304800">
               <a:spcBef>
                 <a:spcPts val="0"/>
               </a:spcBef>
@@ -4095,7 +4236,7 @@
               <a:buChar char="○"/>
               <a:defRPr sz="1200"/>
             </a:lvl8pPr>
-            <a:lvl9pPr indent="-304800" lvl="8" marL="4114800">
+            <a:lvl9pPr marL="4114800" lvl="8" indent="-304800">
               <a:spcBef>
                 <a:spcPts val="0"/>
               </a:spcBef>
@@ -4107,15 +4248,19 @@
               <a:defRPr sz="1200"/>
             </a:lvl9pPr>
           </a:lstStyle>
-          <a:p/>
+          <a:p>
+            <a:endParaRPr/>
+          </a:p>
         </p:txBody>
       </p:sp>
       <p:sp>
         <p:nvSpPr>
           <p:cNvPr id="24" name="Google Shape;24;p5"/>
-          <p:cNvSpPr txBox="1"/>
+          <p:cNvSpPr txBox="1">
+            <a:spLocks noGrp="1"/>
+          </p:cNvSpPr>
           <p:nvPr>
-            <p:ph idx="12" type="sldNum"/>
+            <p:ph type="sldNum" idx="12"/>
           </p:nvPr>
         </p:nvSpPr>
         <p:spPr>
@@ -4128,7 +4273,7 @@
           </a:prstGeom>
         </p:spPr>
         <p:txBody>
-          <a:bodyPr anchorCtr="0" anchor="ctr" bIns="91425" lIns="91425" spcFirstLastPara="1" rIns="91425" wrap="square" tIns="91425">
+          <a:bodyPr spcFirstLastPara="1" wrap="square" lIns="91425" tIns="91425" rIns="91425" bIns="91425" anchor="ctr" anchorCtr="0">
             <a:normAutofit/>
           </a:bodyPr>
           <a:lstStyle>
@@ -4170,7 +4315,7 @@
             </a:lvl9pPr>
           </a:lstStyle>
           <a:p>
-            <a:pPr indent="0" lvl="0" marL="0" rtl="0" algn="r">
+            <a:pPr marL="0" lvl="0" indent="0" algn="r" rtl="0">
               <a:spcBef>
                 <a:spcPts val="0"/>
               </a:spcBef>
@@ -4196,11 +4341,11 @@
 </file>
 
 <file path=ppt/slideLayouts/slideLayout5.xml><?xml version="1.0" encoding="utf-8"?>
-<p:sldLayout xmlns:a="http://schemas.openxmlformats.org/drawingml/2006/main" xmlns:r="http://schemas.openxmlformats.org/officeDocument/2006/relationships" xmlns:mc="http://schemas.openxmlformats.org/markup-compatibility/2006" xmlns:mv="urn:schemas-microsoft-com:mac:vml" xmlns:p="http://schemas.openxmlformats.org/presentationml/2006/main" xmlns:c="http://schemas.openxmlformats.org/drawingml/2006/chart" xmlns:dgm="http://schemas.openxmlformats.org/drawingml/2006/diagram" xmlns:o="urn:schemas-microsoft-com:office:office" xmlns:v="urn:schemas-microsoft-com:vml" xmlns:pvml="urn:schemas-microsoft-com:office:powerpoint" xmlns:com="http://schemas.openxmlformats.org/drawingml/2006/compatibility" xmlns:p14="http://schemas.microsoft.com/office/powerpoint/2010/main" xmlns:p15="http://schemas.microsoft.com/office/powerpoint/2012/main" xmlns:ahyp="http://schemas.microsoft.com/office/drawing/2018/hyperlinkcolor" matchingName="Title only" type="titleOnly">
+<p:sldLayout xmlns:a="http://schemas.openxmlformats.org/drawingml/2006/main" xmlns:r="http://schemas.openxmlformats.org/officeDocument/2006/relationships" xmlns:p="http://schemas.openxmlformats.org/presentationml/2006/main" matchingName="Title only" type="titleOnly">
   <p:cSld name="TITLE_ONLY">
     <p:spTree>
       <p:nvGrpSpPr>
-        <p:cNvPr id="25" name="Shape 25"/>
+        <p:cNvPr id="1" name="Shape 25"/>
         <p:cNvGrpSpPr/>
         <p:nvPr/>
       </p:nvGrpSpPr>
@@ -4215,7 +4360,9 @@
       <p:sp>
         <p:nvSpPr>
           <p:cNvPr id="26" name="Google Shape;26;p6"/>
-          <p:cNvSpPr txBox="1"/>
+          <p:cNvSpPr txBox="1">
+            <a:spLocks noGrp="1"/>
+          </p:cNvSpPr>
           <p:nvPr>
             <p:ph type="title"/>
           </p:nvPr>
@@ -4230,7 +4377,7 @@
           </a:prstGeom>
         </p:spPr>
         <p:txBody>
-          <a:bodyPr anchorCtr="0" anchor="t" bIns="91425" lIns="91425" spcFirstLastPara="1" rIns="91425" wrap="square" tIns="91425">
+          <a:bodyPr spcFirstLastPara="1" wrap="square" lIns="91425" tIns="91425" rIns="91425" bIns="91425" anchor="t" anchorCtr="0">
             <a:normAutofit/>
           </a:bodyPr>
           <a:lstStyle>
@@ -4334,15 +4481,19 @@
               <a:defRPr/>
             </a:lvl9pPr>
           </a:lstStyle>
-          <a:p/>
+          <a:p>
+            <a:endParaRPr/>
+          </a:p>
         </p:txBody>
       </p:sp>
       <p:sp>
         <p:nvSpPr>
           <p:cNvPr id="27" name="Google Shape;27;p6"/>
-          <p:cNvSpPr txBox="1"/>
+          <p:cNvSpPr txBox="1">
+            <a:spLocks noGrp="1"/>
+          </p:cNvSpPr>
           <p:nvPr>
-            <p:ph idx="12" type="sldNum"/>
+            <p:ph type="sldNum" idx="12"/>
           </p:nvPr>
         </p:nvSpPr>
         <p:spPr>
@@ -4355,7 +4506,7 @@
           </a:prstGeom>
         </p:spPr>
         <p:txBody>
-          <a:bodyPr anchorCtr="0" anchor="ctr" bIns="91425" lIns="91425" spcFirstLastPara="1" rIns="91425" wrap="square" tIns="91425">
+          <a:bodyPr spcFirstLastPara="1" wrap="square" lIns="91425" tIns="91425" rIns="91425" bIns="91425" anchor="ctr" anchorCtr="0">
             <a:normAutofit/>
           </a:bodyPr>
           <a:lstStyle>
@@ -4397,7 +4548,7 @@
             </a:lvl9pPr>
           </a:lstStyle>
           <a:p>
-            <a:pPr indent="0" lvl="0" marL="0" rtl="0" algn="r">
+            <a:pPr marL="0" lvl="0" indent="0" algn="r" rtl="0">
               <a:spcBef>
                 <a:spcPts val="0"/>
               </a:spcBef>
@@ -4423,11 +4574,11 @@
 </file>
 
 <file path=ppt/slideLayouts/slideLayout6.xml><?xml version="1.0" encoding="utf-8"?>
-<p:sldLayout xmlns:a="http://schemas.openxmlformats.org/drawingml/2006/main" xmlns:r="http://schemas.openxmlformats.org/officeDocument/2006/relationships" xmlns:mc="http://schemas.openxmlformats.org/markup-compatibility/2006" xmlns:mv="urn:schemas-microsoft-com:mac:vml" xmlns:p="http://schemas.openxmlformats.org/presentationml/2006/main" xmlns:c="http://schemas.openxmlformats.org/drawingml/2006/chart" xmlns:dgm="http://schemas.openxmlformats.org/drawingml/2006/diagram" xmlns:o="urn:schemas-microsoft-com:office:office" xmlns:v="urn:schemas-microsoft-com:vml" xmlns:pvml="urn:schemas-microsoft-com:office:powerpoint" xmlns:com="http://schemas.openxmlformats.org/drawingml/2006/compatibility" xmlns:p14="http://schemas.microsoft.com/office/powerpoint/2010/main" xmlns:p15="http://schemas.microsoft.com/office/powerpoint/2012/main" xmlns:ahyp="http://schemas.microsoft.com/office/drawing/2018/hyperlinkcolor" matchingName="One column text">
+<p:sldLayout xmlns:a="http://schemas.openxmlformats.org/drawingml/2006/main" xmlns:r="http://schemas.openxmlformats.org/officeDocument/2006/relationships" xmlns:p="http://schemas.openxmlformats.org/presentationml/2006/main" matchingName="One column text">
   <p:cSld name="ONE_COLUMN_TEXT">
     <p:spTree>
       <p:nvGrpSpPr>
-        <p:cNvPr id="28" name="Shape 28"/>
+        <p:cNvPr id="1" name="Shape 28"/>
         <p:cNvGrpSpPr/>
         <p:nvPr/>
       </p:nvGrpSpPr>
@@ -4442,7 +4593,9 @@
       <p:sp>
         <p:nvSpPr>
           <p:cNvPr id="29" name="Google Shape;29;p7"/>
-          <p:cNvSpPr txBox="1"/>
+          <p:cNvSpPr txBox="1">
+            <a:spLocks noGrp="1"/>
+          </p:cNvSpPr>
           <p:nvPr>
             <p:ph type="title"/>
           </p:nvPr>
@@ -4457,7 +4610,7 @@
           </a:prstGeom>
         </p:spPr>
         <p:txBody>
-          <a:bodyPr anchorCtr="0" anchor="b" bIns="91425" lIns="91425" spcFirstLastPara="1" rIns="91425" wrap="square" tIns="91425">
+          <a:bodyPr spcFirstLastPara="1" wrap="square" lIns="91425" tIns="91425" rIns="91425" bIns="91425" anchor="b" anchorCtr="0">
             <a:normAutofit/>
           </a:bodyPr>
           <a:lstStyle>
@@ -4561,15 +4714,19 @@
               <a:defRPr sz="2400"/>
             </a:lvl9pPr>
           </a:lstStyle>
-          <a:p/>
+          <a:p>
+            <a:endParaRPr/>
+          </a:p>
         </p:txBody>
       </p:sp>
       <p:sp>
         <p:nvSpPr>
           <p:cNvPr id="30" name="Google Shape;30;p7"/>
-          <p:cNvSpPr txBox="1"/>
+          <p:cNvSpPr txBox="1">
+            <a:spLocks noGrp="1"/>
+          </p:cNvSpPr>
           <p:nvPr>
-            <p:ph idx="1" type="body"/>
+            <p:ph type="body" idx="1"/>
           </p:nvPr>
         </p:nvSpPr>
         <p:spPr>
@@ -4582,11 +4739,11 @@
           </a:prstGeom>
         </p:spPr>
         <p:txBody>
-          <a:bodyPr anchorCtr="0" anchor="t" bIns="91425" lIns="91425" spcFirstLastPara="1" rIns="91425" wrap="square" tIns="91425">
+          <a:bodyPr spcFirstLastPara="1" wrap="square" lIns="91425" tIns="91425" rIns="91425" bIns="91425" anchor="t" anchorCtr="0">
             <a:normAutofit/>
           </a:bodyPr>
           <a:lstStyle>
-            <a:lvl1pPr indent="-304800" lvl="0" marL="457200">
+            <a:lvl1pPr marL="457200" lvl="0" indent="-304800">
               <a:spcBef>
                 <a:spcPts val="0"/>
               </a:spcBef>
@@ -4597,7 +4754,7 @@
               <a:buChar char="●"/>
               <a:defRPr sz="1200"/>
             </a:lvl1pPr>
-            <a:lvl2pPr indent="-304800" lvl="1" marL="914400">
+            <a:lvl2pPr marL="914400" lvl="1" indent="-304800">
               <a:spcBef>
                 <a:spcPts val="0"/>
               </a:spcBef>
@@ -4608,7 +4765,7 @@
               <a:buChar char="○"/>
               <a:defRPr sz="1200"/>
             </a:lvl2pPr>
-            <a:lvl3pPr indent="-304800" lvl="2" marL="1371600">
+            <a:lvl3pPr marL="1371600" lvl="2" indent="-304800">
               <a:spcBef>
                 <a:spcPts val="0"/>
               </a:spcBef>
@@ -4619,7 +4776,7 @@
               <a:buChar char="■"/>
               <a:defRPr sz="1200"/>
             </a:lvl3pPr>
-            <a:lvl4pPr indent="-304800" lvl="3" marL="1828800">
+            <a:lvl4pPr marL="1828800" lvl="3" indent="-304800">
               <a:spcBef>
                 <a:spcPts val="0"/>
               </a:spcBef>
@@ -4630,7 +4787,7 @@
               <a:buChar char="●"/>
               <a:defRPr sz="1200"/>
             </a:lvl4pPr>
-            <a:lvl5pPr indent="-304800" lvl="4" marL="2286000">
+            <a:lvl5pPr marL="2286000" lvl="4" indent="-304800">
               <a:spcBef>
                 <a:spcPts val="0"/>
               </a:spcBef>
@@ -4641,7 +4798,7 @@
               <a:buChar char="○"/>
               <a:defRPr sz="1200"/>
             </a:lvl5pPr>
-            <a:lvl6pPr indent="-304800" lvl="5" marL="2743200">
+            <a:lvl6pPr marL="2743200" lvl="5" indent="-304800">
               <a:spcBef>
                 <a:spcPts val="0"/>
               </a:spcBef>
@@ -4652,7 +4809,7 @@
               <a:buChar char="■"/>
               <a:defRPr sz="1200"/>
             </a:lvl6pPr>
-            <a:lvl7pPr indent="-304800" lvl="6" marL="3200400">
+            <a:lvl7pPr marL="3200400" lvl="6" indent="-304800">
               <a:spcBef>
                 <a:spcPts val="0"/>
               </a:spcBef>
@@ -4663,7 +4820,7 @@
               <a:buChar char="●"/>
               <a:defRPr sz="1200"/>
             </a:lvl7pPr>
-            <a:lvl8pPr indent="-304800" lvl="7" marL="3657600">
+            <a:lvl8pPr marL="3657600" lvl="7" indent="-304800">
               <a:spcBef>
                 <a:spcPts val="0"/>
               </a:spcBef>
@@ -4674,7 +4831,7 @@
               <a:buChar char="○"/>
               <a:defRPr sz="1200"/>
             </a:lvl8pPr>
-            <a:lvl9pPr indent="-304800" lvl="8" marL="4114800">
+            <a:lvl9pPr marL="4114800" lvl="8" indent="-304800">
               <a:spcBef>
                 <a:spcPts val="0"/>
               </a:spcBef>
@@ -4686,15 +4843,19 @@
               <a:defRPr sz="1200"/>
             </a:lvl9pPr>
           </a:lstStyle>
-          <a:p/>
+          <a:p>
+            <a:endParaRPr/>
+          </a:p>
         </p:txBody>
       </p:sp>
       <p:sp>
         <p:nvSpPr>
           <p:cNvPr id="31" name="Google Shape;31;p7"/>
-          <p:cNvSpPr txBox="1"/>
+          <p:cNvSpPr txBox="1">
+            <a:spLocks noGrp="1"/>
+          </p:cNvSpPr>
           <p:nvPr>
-            <p:ph idx="12" type="sldNum"/>
+            <p:ph type="sldNum" idx="12"/>
           </p:nvPr>
         </p:nvSpPr>
         <p:spPr>
@@ -4707,7 +4868,7 @@
           </a:prstGeom>
         </p:spPr>
         <p:txBody>
-          <a:bodyPr anchorCtr="0" anchor="ctr" bIns="91425" lIns="91425" spcFirstLastPara="1" rIns="91425" wrap="square" tIns="91425">
+          <a:bodyPr spcFirstLastPara="1" wrap="square" lIns="91425" tIns="91425" rIns="91425" bIns="91425" anchor="ctr" anchorCtr="0">
             <a:normAutofit/>
           </a:bodyPr>
           <a:lstStyle>
@@ -4749,7 +4910,7 @@
             </a:lvl9pPr>
           </a:lstStyle>
           <a:p>
-            <a:pPr indent="0" lvl="0" marL="0" rtl="0" algn="r">
+            <a:pPr marL="0" lvl="0" indent="0" algn="r" rtl="0">
               <a:spcBef>
                 <a:spcPts val="0"/>
               </a:spcBef>
@@ -4775,11 +4936,11 @@
 </file>
 
 <file path=ppt/slideLayouts/slideLayout7.xml><?xml version="1.0" encoding="utf-8"?>
-<p:sldLayout xmlns:a="http://schemas.openxmlformats.org/drawingml/2006/main" xmlns:r="http://schemas.openxmlformats.org/officeDocument/2006/relationships" xmlns:mc="http://schemas.openxmlformats.org/markup-compatibility/2006" xmlns:mv="urn:schemas-microsoft-com:mac:vml" xmlns:p="http://schemas.openxmlformats.org/presentationml/2006/main" xmlns:c="http://schemas.openxmlformats.org/drawingml/2006/chart" xmlns:dgm="http://schemas.openxmlformats.org/drawingml/2006/diagram" xmlns:o="urn:schemas-microsoft-com:office:office" xmlns:v="urn:schemas-microsoft-com:vml" xmlns:pvml="urn:schemas-microsoft-com:office:powerpoint" xmlns:com="http://schemas.openxmlformats.org/drawingml/2006/compatibility" xmlns:p14="http://schemas.microsoft.com/office/powerpoint/2010/main" xmlns:p15="http://schemas.microsoft.com/office/powerpoint/2012/main" xmlns:ahyp="http://schemas.microsoft.com/office/drawing/2018/hyperlinkcolor" matchingName="Main point">
+<p:sldLayout xmlns:a="http://schemas.openxmlformats.org/drawingml/2006/main" xmlns:r="http://schemas.openxmlformats.org/officeDocument/2006/relationships" xmlns:p="http://schemas.openxmlformats.org/presentationml/2006/main" matchingName="Main point">
   <p:cSld name="MAIN_POINT">
     <p:spTree>
       <p:nvGrpSpPr>
-        <p:cNvPr id="32" name="Shape 32"/>
+        <p:cNvPr id="1" name="Shape 32"/>
         <p:cNvGrpSpPr/>
         <p:nvPr/>
       </p:nvGrpSpPr>
@@ -4794,7 +4955,9 @@
       <p:sp>
         <p:nvSpPr>
           <p:cNvPr id="33" name="Google Shape;33;p8"/>
-          <p:cNvSpPr txBox="1"/>
+          <p:cNvSpPr txBox="1">
+            <a:spLocks noGrp="1"/>
+          </p:cNvSpPr>
           <p:nvPr>
             <p:ph type="title"/>
           </p:nvPr>
@@ -4809,7 +4972,7 @@
           </a:prstGeom>
         </p:spPr>
         <p:txBody>
-          <a:bodyPr anchorCtr="0" anchor="ctr" bIns="91425" lIns="91425" spcFirstLastPara="1" rIns="91425" wrap="square" tIns="91425">
+          <a:bodyPr spcFirstLastPara="1" wrap="square" lIns="91425" tIns="91425" rIns="91425" bIns="91425" anchor="ctr" anchorCtr="0">
             <a:normAutofit/>
           </a:bodyPr>
           <a:lstStyle>
@@ -4913,15 +5076,19 @@
               <a:defRPr sz="4800"/>
             </a:lvl9pPr>
           </a:lstStyle>
-          <a:p/>
+          <a:p>
+            <a:endParaRPr/>
+          </a:p>
         </p:txBody>
       </p:sp>
       <p:sp>
         <p:nvSpPr>
           <p:cNvPr id="34" name="Google Shape;34;p8"/>
-          <p:cNvSpPr txBox="1"/>
+          <p:cNvSpPr txBox="1">
+            <a:spLocks noGrp="1"/>
+          </p:cNvSpPr>
           <p:nvPr>
-            <p:ph idx="12" type="sldNum"/>
+            <p:ph type="sldNum" idx="12"/>
           </p:nvPr>
         </p:nvSpPr>
         <p:spPr>
@@ -4934,7 +5101,7 @@
           </a:prstGeom>
         </p:spPr>
         <p:txBody>
-          <a:bodyPr anchorCtr="0" anchor="ctr" bIns="91425" lIns="91425" spcFirstLastPara="1" rIns="91425" wrap="square" tIns="91425">
+          <a:bodyPr spcFirstLastPara="1" wrap="square" lIns="91425" tIns="91425" rIns="91425" bIns="91425" anchor="ctr" anchorCtr="0">
             <a:normAutofit/>
           </a:bodyPr>
           <a:lstStyle>
@@ -4976,7 +5143,7 @@
             </a:lvl9pPr>
           </a:lstStyle>
           <a:p>
-            <a:pPr indent="0" lvl="0" marL="0" rtl="0" algn="r">
+            <a:pPr marL="0" lvl="0" indent="0" algn="r" rtl="0">
               <a:spcBef>
                 <a:spcPts val="0"/>
               </a:spcBef>
@@ -5002,11 +5169,11 @@
 </file>
 
 <file path=ppt/slideLayouts/slideLayout8.xml><?xml version="1.0" encoding="utf-8"?>
-<p:sldLayout xmlns:a="http://schemas.openxmlformats.org/drawingml/2006/main" xmlns:r="http://schemas.openxmlformats.org/officeDocument/2006/relationships" xmlns:mc="http://schemas.openxmlformats.org/markup-compatibility/2006" xmlns:mv="urn:schemas-microsoft-com:mac:vml" xmlns:p="http://schemas.openxmlformats.org/presentationml/2006/main" xmlns:c="http://schemas.openxmlformats.org/drawingml/2006/chart" xmlns:dgm="http://schemas.openxmlformats.org/drawingml/2006/diagram" xmlns:o="urn:schemas-microsoft-com:office:office" xmlns:v="urn:schemas-microsoft-com:vml" xmlns:pvml="urn:schemas-microsoft-com:office:powerpoint" xmlns:com="http://schemas.openxmlformats.org/drawingml/2006/compatibility" xmlns:p14="http://schemas.microsoft.com/office/powerpoint/2010/main" xmlns:p15="http://schemas.microsoft.com/office/powerpoint/2012/main" xmlns:ahyp="http://schemas.microsoft.com/office/drawing/2018/hyperlinkcolor" matchingName="Section title and description">
+<p:sldLayout xmlns:a="http://schemas.openxmlformats.org/drawingml/2006/main" xmlns:r="http://schemas.openxmlformats.org/officeDocument/2006/relationships" xmlns:p="http://schemas.openxmlformats.org/presentationml/2006/main" matchingName="Section title and description">
   <p:cSld name="SECTION_TITLE_AND_DESCRIPTION">
     <p:spTree>
       <p:nvGrpSpPr>
-        <p:cNvPr id="35" name="Shape 35"/>
+        <p:cNvPr id="1" name="Shape 35"/>
         <p:cNvGrpSpPr/>
         <p:nvPr/>
       </p:nvGrpSpPr>
@@ -5040,23 +5207,20 @@
           </a:ln>
         </p:spPr>
         <p:txBody>
-          <a:bodyPr anchorCtr="0" anchor="ctr" bIns="91425" lIns="91425" spcFirstLastPara="1" rIns="91425" wrap="square" tIns="91425">
+          <a:bodyPr spcFirstLastPara="1" wrap="square" lIns="91425" tIns="91425" rIns="91425" bIns="91425" anchor="ctr" anchorCtr="0">
             <a:noAutofit/>
           </a:bodyPr>
           <a:lstStyle/>
           <a:p>
-            <a:pPr indent="0" lvl="0" marL="0" rtl="0" algn="l">
-              <a:spcBef>
-                <a:spcPts val="0"/>
-              </a:spcBef>
-              <a:spcAft>
-                <a:spcPts val="0"/>
-              </a:spcAft>
-              <a:buNone/>
-            </a:pPr>
-            <a:r>
-              <a:t/>
-            </a:r>
+            <a:pPr marL="0" lvl="0" indent="0" algn="l" rtl="0">
+              <a:spcBef>
+                <a:spcPts val="0"/>
+              </a:spcBef>
+              <a:spcAft>
+                <a:spcPts val="0"/>
+              </a:spcAft>
+              <a:buNone/>
+            </a:pPr>
             <a:endParaRPr/>
           </a:p>
         </p:txBody>
@@ -5064,7 +5228,9 @@
       <p:sp>
         <p:nvSpPr>
           <p:cNvPr id="37" name="Google Shape;37;p9"/>
-          <p:cNvSpPr txBox="1"/>
+          <p:cNvSpPr txBox="1">
+            <a:spLocks noGrp="1"/>
+          </p:cNvSpPr>
           <p:nvPr>
             <p:ph type="title"/>
           </p:nvPr>
@@ -5079,7 +5245,7 @@
           </a:prstGeom>
         </p:spPr>
         <p:txBody>
-          <a:bodyPr anchorCtr="0" anchor="b" bIns="91425" lIns="91425" spcFirstLastPara="1" rIns="91425" wrap="square" tIns="91425">
+          <a:bodyPr spcFirstLastPara="1" wrap="square" lIns="91425" tIns="91425" rIns="91425" bIns="91425" anchor="b" anchorCtr="0">
             <a:normAutofit/>
           </a:bodyPr>
           <a:lstStyle>
@@ -5183,15 +5349,19 @@
               <a:defRPr sz="4200"/>
             </a:lvl9pPr>
           </a:lstStyle>
-          <a:p/>
+          <a:p>
+            <a:endParaRPr/>
+          </a:p>
         </p:txBody>
       </p:sp>
       <p:sp>
         <p:nvSpPr>
           <p:cNvPr id="38" name="Google Shape;38;p9"/>
-          <p:cNvSpPr txBox="1"/>
+          <p:cNvSpPr txBox="1">
+            <a:spLocks noGrp="1"/>
+          </p:cNvSpPr>
           <p:nvPr>
-            <p:ph idx="1" type="subTitle"/>
+            <p:ph type="subTitle" idx="1"/>
           </p:nvPr>
         </p:nvSpPr>
         <p:spPr>
@@ -5204,7 +5374,7 @@
           </a:prstGeom>
         </p:spPr>
         <p:txBody>
-          <a:bodyPr anchorCtr="0" anchor="t" bIns="91425" lIns="91425" spcFirstLastPara="1" rIns="91425" wrap="square" tIns="91425">
+          <a:bodyPr spcFirstLastPara="1" wrap="square" lIns="91425" tIns="91425" rIns="91425" bIns="91425" anchor="t" anchorCtr="0">
             <a:normAutofit/>
           </a:bodyPr>
           <a:lstStyle>
@@ -5335,15 +5505,19 @@
               <a:defRPr sz="2100"/>
             </a:lvl9pPr>
           </a:lstStyle>
-          <a:p/>
+          <a:p>
+            <a:endParaRPr/>
+          </a:p>
         </p:txBody>
       </p:sp>
       <p:sp>
         <p:nvSpPr>
           <p:cNvPr id="39" name="Google Shape;39;p9"/>
-          <p:cNvSpPr txBox="1"/>
+          <p:cNvSpPr txBox="1">
+            <a:spLocks noGrp="1"/>
+          </p:cNvSpPr>
           <p:nvPr>
-            <p:ph idx="2" type="body"/>
+            <p:ph type="body" idx="2"/>
           </p:nvPr>
         </p:nvSpPr>
         <p:spPr>
@@ -5356,11 +5530,11 @@
           </a:prstGeom>
         </p:spPr>
         <p:txBody>
-          <a:bodyPr anchorCtr="0" anchor="ctr" bIns="91425" lIns="91425" spcFirstLastPara="1" rIns="91425" wrap="square" tIns="91425">
+          <a:bodyPr spcFirstLastPara="1" wrap="square" lIns="91425" tIns="91425" rIns="91425" bIns="91425" anchor="ctr" anchorCtr="0">
             <a:normAutofit/>
           </a:bodyPr>
           <a:lstStyle>
-            <a:lvl1pPr indent="-342900" lvl="0" marL="457200">
+            <a:lvl1pPr marL="457200" lvl="0" indent="-342900">
               <a:spcBef>
                 <a:spcPts val="0"/>
               </a:spcBef>
@@ -5371,7 +5545,7 @@
               <a:buChar char="●"/>
               <a:defRPr/>
             </a:lvl1pPr>
-            <a:lvl2pPr indent="-317500" lvl="1" marL="914400">
+            <a:lvl2pPr marL="914400" lvl="1" indent="-317500">
               <a:spcBef>
                 <a:spcPts val="0"/>
               </a:spcBef>
@@ -5382,7 +5556,7 @@
               <a:buChar char="○"/>
               <a:defRPr/>
             </a:lvl2pPr>
-            <a:lvl3pPr indent="-317500" lvl="2" marL="1371600">
+            <a:lvl3pPr marL="1371600" lvl="2" indent="-317500">
               <a:spcBef>
                 <a:spcPts val="0"/>
               </a:spcBef>
@@ -5393,7 +5567,7 @@
               <a:buChar char="■"/>
               <a:defRPr/>
             </a:lvl3pPr>
-            <a:lvl4pPr indent="-317500" lvl="3" marL="1828800">
+            <a:lvl4pPr marL="1828800" lvl="3" indent="-317500">
               <a:spcBef>
                 <a:spcPts val="0"/>
               </a:spcBef>
@@ -5404,7 +5578,7 @@
               <a:buChar char="●"/>
               <a:defRPr/>
             </a:lvl4pPr>
-            <a:lvl5pPr indent="-317500" lvl="4" marL="2286000">
+            <a:lvl5pPr marL="2286000" lvl="4" indent="-317500">
               <a:spcBef>
                 <a:spcPts val="0"/>
               </a:spcBef>
@@ -5415,7 +5589,7 @@
               <a:buChar char="○"/>
               <a:defRPr/>
             </a:lvl5pPr>
-            <a:lvl6pPr indent="-317500" lvl="5" marL="2743200">
+            <a:lvl6pPr marL="2743200" lvl="5" indent="-317500">
               <a:spcBef>
                 <a:spcPts val="0"/>
               </a:spcBef>
@@ -5426,7 +5600,7 @@
               <a:buChar char="■"/>
               <a:defRPr/>
             </a:lvl6pPr>
-            <a:lvl7pPr indent="-317500" lvl="6" marL="3200400">
+            <a:lvl7pPr marL="3200400" lvl="6" indent="-317500">
               <a:spcBef>
                 <a:spcPts val="0"/>
               </a:spcBef>
@@ -5437,7 +5611,7 @@
               <a:buChar char="●"/>
               <a:defRPr/>
             </a:lvl7pPr>
-            <a:lvl8pPr indent="-317500" lvl="7" marL="3657600">
+            <a:lvl8pPr marL="3657600" lvl="7" indent="-317500">
               <a:spcBef>
                 <a:spcPts val="0"/>
               </a:spcBef>
@@ -5448,7 +5622,7 @@
               <a:buChar char="○"/>
               <a:defRPr/>
             </a:lvl8pPr>
-            <a:lvl9pPr indent="-317500" lvl="8" marL="4114800">
+            <a:lvl9pPr marL="4114800" lvl="8" indent="-317500">
               <a:spcBef>
                 <a:spcPts val="0"/>
               </a:spcBef>
@@ -5460,15 +5634,19 @@
               <a:defRPr/>
             </a:lvl9pPr>
           </a:lstStyle>
-          <a:p/>
+          <a:p>
+            <a:endParaRPr/>
+          </a:p>
         </p:txBody>
       </p:sp>
       <p:sp>
         <p:nvSpPr>
           <p:cNvPr id="40" name="Google Shape;40;p9"/>
-          <p:cNvSpPr txBox="1"/>
+          <p:cNvSpPr txBox="1">
+            <a:spLocks noGrp="1"/>
+          </p:cNvSpPr>
           <p:nvPr>
-            <p:ph idx="12" type="sldNum"/>
+            <p:ph type="sldNum" idx="12"/>
           </p:nvPr>
         </p:nvSpPr>
         <p:spPr>
@@ -5481,7 +5659,7 @@
           </a:prstGeom>
         </p:spPr>
         <p:txBody>
-          <a:bodyPr anchorCtr="0" anchor="ctr" bIns="91425" lIns="91425" spcFirstLastPara="1" rIns="91425" wrap="square" tIns="91425">
+          <a:bodyPr spcFirstLastPara="1" wrap="square" lIns="91425" tIns="91425" rIns="91425" bIns="91425" anchor="ctr" anchorCtr="0">
             <a:normAutofit/>
           </a:bodyPr>
           <a:lstStyle>
@@ -5523,7 +5701,7 @@
             </a:lvl9pPr>
           </a:lstStyle>
           <a:p>
-            <a:pPr indent="0" lvl="0" marL="0" rtl="0" algn="r">
+            <a:pPr marL="0" lvl="0" indent="0" algn="r" rtl="0">
               <a:spcBef>
                 <a:spcPts val="0"/>
               </a:spcBef>
@@ -5549,11 +5727,11 @@
 </file>
 
 <file path=ppt/slideLayouts/slideLayout9.xml><?xml version="1.0" encoding="utf-8"?>
-<p:sldLayout xmlns:a="http://schemas.openxmlformats.org/drawingml/2006/main" xmlns:r="http://schemas.openxmlformats.org/officeDocument/2006/relationships" xmlns:mc="http://schemas.openxmlformats.org/markup-compatibility/2006" xmlns:mv="urn:schemas-microsoft-com:mac:vml" xmlns:p="http://schemas.openxmlformats.org/presentationml/2006/main" xmlns:c="http://schemas.openxmlformats.org/drawingml/2006/chart" xmlns:dgm="http://schemas.openxmlformats.org/drawingml/2006/diagram" xmlns:o="urn:schemas-microsoft-com:office:office" xmlns:v="urn:schemas-microsoft-com:vml" xmlns:pvml="urn:schemas-microsoft-com:office:powerpoint" xmlns:com="http://schemas.openxmlformats.org/drawingml/2006/compatibility" xmlns:p14="http://schemas.microsoft.com/office/powerpoint/2010/main" xmlns:p15="http://schemas.microsoft.com/office/powerpoint/2012/main" xmlns:ahyp="http://schemas.microsoft.com/office/drawing/2018/hyperlinkcolor" matchingName="Caption">
+<p:sldLayout xmlns:a="http://schemas.openxmlformats.org/drawingml/2006/main" xmlns:r="http://schemas.openxmlformats.org/officeDocument/2006/relationships" xmlns:p="http://schemas.openxmlformats.org/presentationml/2006/main" matchingName="Caption">
   <p:cSld name="CAPTION_ONLY">
     <p:spTree>
       <p:nvGrpSpPr>
-        <p:cNvPr id="41" name="Shape 41"/>
+        <p:cNvPr id="1" name="Shape 41"/>
         <p:cNvGrpSpPr/>
         <p:nvPr/>
       </p:nvGrpSpPr>
@@ -5568,9 +5746,11 @@
       <p:sp>
         <p:nvSpPr>
           <p:cNvPr id="42" name="Google Shape;42;p10"/>
-          <p:cNvSpPr txBox="1"/>
+          <p:cNvSpPr txBox="1">
+            <a:spLocks noGrp="1"/>
+          </p:cNvSpPr>
           <p:nvPr>
-            <p:ph idx="1" type="body"/>
+            <p:ph type="body" idx="1"/>
           </p:nvPr>
         </p:nvSpPr>
         <p:spPr>
@@ -5583,11 +5763,11 @@
           </a:prstGeom>
         </p:spPr>
         <p:txBody>
-          <a:bodyPr anchorCtr="0" anchor="ctr" bIns="91425" lIns="91425" spcFirstLastPara="1" rIns="91425" wrap="square" tIns="91425">
+          <a:bodyPr spcFirstLastPara="1" wrap="square" lIns="91425" tIns="91425" rIns="91425" bIns="91425" anchor="ctr" anchorCtr="0">
             <a:normAutofit/>
           </a:bodyPr>
           <a:lstStyle>
-            <a:lvl1pPr indent="-228600" lvl="0" marL="457200">
+            <a:lvl1pPr marL="457200" lvl="0" indent="-228600">
               <a:lnSpc>
                 <a:spcPct val="100000"/>
               </a:lnSpc>
@@ -5602,15 +5782,19 @@
               <a:defRPr/>
             </a:lvl1pPr>
           </a:lstStyle>
-          <a:p/>
+          <a:p>
+            <a:endParaRPr/>
+          </a:p>
         </p:txBody>
       </p:sp>
       <p:sp>
         <p:nvSpPr>
           <p:cNvPr id="43" name="Google Shape;43;p10"/>
-          <p:cNvSpPr txBox="1"/>
+          <p:cNvSpPr txBox="1">
+            <a:spLocks noGrp="1"/>
+          </p:cNvSpPr>
           <p:nvPr>
-            <p:ph idx="12" type="sldNum"/>
+            <p:ph type="sldNum" idx="12"/>
           </p:nvPr>
         </p:nvSpPr>
         <p:spPr>
@@ -5623,7 +5807,7 @@
           </a:prstGeom>
         </p:spPr>
         <p:txBody>
-          <a:bodyPr anchorCtr="0" anchor="ctr" bIns="91425" lIns="91425" spcFirstLastPara="1" rIns="91425" wrap="square" tIns="91425">
+          <a:bodyPr spcFirstLastPara="1" wrap="square" lIns="91425" tIns="91425" rIns="91425" bIns="91425" anchor="ctr" anchorCtr="0">
             <a:normAutofit/>
           </a:bodyPr>
           <a:lstStyle>
@@ -5665,7 +5849,7 @@
             </a:lvl9pPr>
           </a:lstStyle>
           <a:p>
-            <a:pPr indent="0" lvl="0" marL="0" rtl="0" algn="r">
+            <a:pPr marL="0" lvl="0" indent="0" algn="r" rtl="0">
               <a:spcBef>
                 <a:spcPts val="0"/>
               </a:spcBef>
@@ -5691,18 +5875,19 @@
 </file>
 
 <file path=ppt/slideMasters/slideMaster1.xml><?xml version="1.0" encoding="utf-8"?>
-<p:sldMaster xmlns:a="http://schemas.openxmlformats.org/drawingml/2006/main" xmlns:r="http://schemas.openxmlformats.org/officeDocument/2006/relationships" xmlns:mc="http://schemas.openxmlformats.org/markup-compatibility/2006" xmlns:mv="urn:schemas-microsoft-com:mac:vml" xmlns:p="http://schemas.openxmlformats.org/presentationml/2006/main" xmlns:c="http://schemas.openxmlformats.org/drawingml/2006/chart" xmlns:dgm="http://schemas.openxmlformats.org/drawingml/2006/diagram" xmlns:o="urn:schemas-microsoft-com:office:office" xmlns:v="urn:schemas-microsoft-com:vml" xmlns:pvml="urn:schemas-microsoft-com:office:powerpoint" xmlns:com="http://schemas.openxmlformats.org/drawingml/2006/compatibility" xmlns:p14="http://schemas.microsoft.com/office/powerpoint/2010/main" xmlns:p15="http://schemas.microsoft.com/office/powerpoint/2012/main" xmlns:ahyp="http://schemas.microsoft.com/office/drawing/2018/hyperlinkcolor">
+<p:sldMaster xmlns:a="http://schemas.openxmlformats.org/drawingml/2006/main" xmlns:r="http://schemas.openxmlformats.org/officeDocument/2006/relationships" xmlns:p="http://schemas.openxmlformats.org/presentationml/2006/main">
   <p:cSld name="simple-light-2">
     <p:bg>
       <p:bgPr>
         <a:solidFill>
           <a:schemeClr val="lt1"/>
         </a:solidFill>
+        <a:effectLst/>
       </p:bgPr>
     </p:bg>
     <p:spTree>
       <p:nvGrpSpPr>
-        <p:cNvPr id="5" name="Shape 5"/>
+        <p:cNvPr id="1" name="Shape 5"/>
         <p:cNvGrpSpPr/>
         <p:nvPr/>
       </p:nvGrpSpPr>
@@ -5717,7 +5902,9 @@
       <p:sp>
         <p:nvSpPr>
           <p:cNvPr id="6" name="Google Shape;6;p1"/>
-          <p:cNvSpPr txBox="1"/>
+          <p:cNvSpPr txBox="1">
+            <a:spLocks noGrp="1"/>
+          </p:cNvSpPr>
           <p:nvPr>
             <p:ph type="title"/>
           </p:nvPr>
@@ -5736,7 +5923,7 @@
           </a:ln>
         </p:spPr>
         <p:txBody>
-          <a:bodyPr anchorCtr="0" anchor="t" bIns="91425" lIns="91425" spcFirstLastPara="1" rIns="91425" wrap="square" tIns="91425">
+          <a:bodyPr spcFirstLastPara="1" wrap="square" lIns="91425" tIns="91425" rIns="91425" bIns="91425" anchor="t" anchorCtr="0">
             <a:normAutofit/>
           </a:bodyPr>
           <a:lstStyle>
@@ -5903,15 +6090,19 @@
               </a:defRPr>
             </a:lvl9pPr>
           </a:lstStyle>
-          <a:p/>
+          <a:p>
+            <a:endParaRPr/>
+          </a:p>
         </p:txBody>
       </p:sp>
       <p:sp>
         <p:nvSpPr>
           <p:cNvPr id="7" name="Google Shape;7;p1"/>
-          <p:cNvSpPr txBox="1"/>
+          <p:cNvSpPr txBox="1">
+            <a:spLocks noGrp="1"/>
+          </p:cNvSpPr>
           <p:nvPr>
-            <p:ph idx="1" type="body"/>
+            <p:ph type="body" idx="1"/>
           </p:nvPr>
         </p:nvSpPr>
         <p:spPr>
@@ -5928,11 +6119,11 @@
           </a:ln>
         </p:spPr>
         <p:txBody>
-          <a:bodyPr anchorCtr="0" anchor="t" bIns="91425" lIns="91425" spcFirstLastPara="1" rIns="91425" wrap="square" tIns="91425">
+          <a:bodyPr spcFirstLastPara="1" wrap="square" lIns="91425" tIns="91425" rIns="91425" bIns="91425" anchor="t" anchorCtr="0">
             <a:normAutofit/>
           </a:bodyPr>
           <a:lstStyle>
-            <a:lvl1pPr indent="-342900" lvl="0" marL="457200">
+            <a:lvl1pPr marL="457200" lvl="0" indent="-342900">
               <a:lnSpc>
                 <a:spcPct val="115000"/>
               </a:lnSpc>
@@ -5953,7 +6144,7 @@
                 </a:solidFill>
               </a:defRPr>
             </a:lvl1pPr>
-            <a:lvl2pPr indent="-317500" lvl="1" marL="914400">
+            <a:lvl2pPr marL="914400" lvl="1" indent="-317500">
               <a:lnSpc>
                 <a:spcPct val="115000"/>
               </a:lnSpc>
@@ -5974,7 +6165,7 @@
                 </a:solidFill>
               </a:defRPr>
             </a:lvl2pPr>
-            <a:lvl3pPr indent="-317500" lvl="2" marL="1371600">
+            <a:lvl3pPr marL="1371600" lvl="2" indent="-317500">
               <a:lnSpc>
                 <a:spcPct val="115000"/>
               </a:lnSpc>
@@ -5995,7 +6186,7 @@
                 </a:solidFill>
               </a:defRPr>
             </a:lvl3pPr>
-            <a:lvl4pPr indent="-317500" lvl="3" marL="1828800">
+            <a:lvl4pPr marL="1828800" lvl="3" indent="-317500">
               <a:lnSpc>
                 <a:spcPct val="115000"/>
               </a:lnSpc>
@@ -6016,7 +6207,7 @@
                 </a:solidFill>
               </a:defRPr>
             </a:lvl4pPr>
-            <a:lvl5pPr indent="-317500" lvl="4" marL="2286000">
+            <a:lvl5pPr marL="2286000" lvl="4" indent="-317500">
               <a:lnSpc>
                 <a:spcPct val="115000"/>
               </a:lnSpc>
@@ -6037,7 +6228,7 @@
                 </a:solidFill>
               </a:defRPr>
             </a:lvl5pPr>
-            <a:lvl6pPr indent="-317500" lvl="5" marL="2743200">
+            <a:lvl6pPr marL="2743200" lvl="5" indent="-317500">
               <a:lnSpc>
                 <a:spcPct val="115000"/>
               </a:lnSpc>
@@ -6058,7 +6249,7 @@
                 </a:solidFill>
               </a:defRPr>
             </a:lvl6pPr>
-            <a:lvl7pPr indent="-317500" lvl="6" marL="3200400">
+            <a:lvl7pPr marL="3200400" lvl="6" indent="-317500">
               <a:lnSpc>
                 <a:spcPct val="115000"/>
               </a:lnSpc>
@@ -6079,7 +6270,7 @@
                 </a:solidFill>
               </a:defRPr>
             </a:lvl7pPr>
-            <a:lvl8pPr indent="-317500" lvl="7" marL="3657600">
+            <a:lvl8pPr marL="3657600" lvl="7" indent="-317500">
               <a:lnSpc>
                 <a:spcPct val="115000"/>
               </a:lnSpc>
@@ -6100,7 +6291,7 @@
                 </a:solidFill>
               </a:defRPr>
             </a:lvl8pPr>
-            <a:lvl9pPr indent="-317500" lvl="8" marL="4114800">
+            <a:lvl9pPr marL="4114800" lvl="8" indent="-317500">
               <a:lnSpc>
                 <a:spcPct val="115000"/>
               </a:lnSpc>
@@ -6122,15 +6313,19 @@
               </a:defRPr>
             </a:lvl9pPr>
           </a:lstStyle>
-          <a:p/>
+          <a:p>
+            <a:endParaRPr/>
+          </a:p>
         </p:txBody>
       </p:sp>
       <p:sp>
         <p:nvSpPr>
           <p:cNvPr id="8" name="Google Shape;8;p1"/>
-          <p:cNvSpPr txBox="1"/>
+          <p:cNvSpPr txBox="1">
+            <a:spLocks noGrp="1"/>
+          </p:cNvSpPr>
           <p:nvPr>
-            <p:ph idx="12" type="sldNum"/>
+            <p:ph type="sldNum" idx="12"/>
           </p:nvPr>
         </p:nvSpPr>
         <p:spPr>
@@ -6147,7 +6342,7 @@
           </a:ln>
         </p:spPr>
         <p:txBody>
-          <a:bodyPr anchorCtr="0" anchor="ctr" bIns="91425" lIns="91425" spcFirstLastPara="1" rIns="91425" wrap="square" tIns="91425">
+          <a:bodyPr spcFirstLastPara="1" wrap="square" lIns="91425" tIns="91425" rIns="91425" bIns="91425" anchor="ctr" anchorCtr="0">
             <a:normAutofit/>
           </a:bodyPr>
           <a:lstStyle>
@@ -6225,7 +6420,7 @@
             </a:lvl9pPr>
           </a:lstStyle>
           <a:p>
-            <a:pPr indent="0" lvl="0" marL="0" rtl="0" algn="r">
+            <a:pPr marL="0" lvl="0" indent="0" algn="r" rtl="0">
               <a:spcBef>
                 <a:spcPts val="0"/>
               </a:spcBef>
@@ -6244,7 +6439,7 @@
       </p:sp>
     </p:spTree>
   </p:cSld>
-  <p:clrMap accent1="accent1" accent2="accent2" accent3="accent3" accent4="accent4" accent5="accent5" accent6="accent6" bg1="lt1" bg2="dk2" tx1="dk1" tx2="lt2" folHlink="folHlink" hlink="hlink"/>
+  <p:clrMap bg1="lt1" tx1="dk1" bg2="dk2" tx2="lt2" accent1="accent1" accent2="accent2" accent3="accent3" accent4="accent4" accent5="accent5" accent6="accent6" hlink="hlink" folHlink="folHlink"/>
   <p:sldLayoutIdLst>
     <p:sldLayoutId id="2147483648" r:id="rId1"/>
     <p:sldLayoutId id="2147483649" r:id="rId2"/>
@@ -6258,10 +6453,10 @@
     <p:sldLayoutId id="2147483657" r:id="rId10"/>
     <p:sldLayoutId id="2147483658" r:id="rId11"/>
   </p:sldLayoutIdLst>
-  <p:hf dt="0" ftr="0" hdr="0" sldNum="0"/>
+  <p:hf sldNum="0" hdr="0" ftr="0" dt="0"/>
   <p:txStyles>
     <p:titleStyle>
-      <a:defPPr lvl="0" marR="0" rtl="0" algn="l">
+      <a:defPPr marR="0" lvl="0" algn="l" rtl="0">
         <a:lnSpc>
           <a:spcPct val="100000"/>
         </a:lnSpc>
@@ -6272,7 +6467,7 @@
           <a:spcPts val="0"/>
         </a:spcAft>
       </a:defPPr>
-      <a:lvl1pPr lvl="0" marR="0" rtl="0" algn="l">
+      <a:lvl1pPr marR="0" lvl="0" algn="l" rtl="0">
         <a:lnSpc>
           <a:spcPct val="100000"/>
         </a:lnSpc>
@@ -6286,7 +6481,7 @@
           <a:srgbClr val="000000"/>
         </a:buClr>
         <a:buFont typeface="Arial"/>
-        <a:defRPr b="0" i="0" spc="0" sz="1400" u="none" cap="none" strike="noStrike">
+        <a:defRPr sz="1400" b="0" i="0" u="none" strike="noStrike" cap="none" spc="0">
           <a:solidFill>
             <a:srgbClr val="000000"/>
           </a:solidFill>
@@ -6296,7 +6491,7 @@
           <a:sym typeface="Arial"/>
         </a:defRPr>
       </a:lvl1pPr>
-      <a:lvl2pPr lvl="1" marR="0" rtl="0" algn="l">
+      <a:lvl2pPr marR="0" lvl="1" algn="l" rtl="0">
         <a:lnSpc>
           <a:spcPct val="100000"/>
         </a:lnSpc>
@@ -6310,7 +6505,7 @@
           <a:srgbClr val="000000"/>
         </a:buClr>
         <a:buFont typeface="Arial"/>
-        <a:defRPr b="0" i="0" spc="0" sz="1400" u="none" cap="none" strike="noStrike">
+        <a:defRPr sz="1400" b="0" i="0" u="none" strike="noStrike" cap="none" spc="0">
           <a:solidFill>
             <a:srgbClr val="000000"/>
           </a:solidFill>
@@ -6320,7 +6515,7 @@
           <a:sym typeface="Arial"/>
         </a:defRPr>
       </a:lvl2pPr>
-      <a:lvl3pPr lvl="2" marR="0" rtl="0" algn="l">
+      <a:lvl3pPr marR="0" lvl="2" algn="l" rtl="0">
         <a:lnSpc>
           <a:spcPct val="100000"/>
         </a:lnSpc>
@@ -6334,7 +6529,7 @@
           <a:srgbClr val="000000"/>
         </a:buClr>
         <a:buFont typeface="Arial"/>
-        <a:defRPr b="0" i="0" spc="0" sz="1400" u="none" cap="none" strike="noStrike">
+        <a:defRPr sz="1400" b="0" i="0" u="none" strike="noStrike" cap="none" spc="0">
           <a:solidFill>
             <a:srgbClr val="000000"/>
           </a:solidFill>
@@ -6344,7 +6539,7 @@
           <a:sym typeface="Arial"/>
         </a:defRPr>
       </a:lvl3pPr>
-      <a:lvl4pPr lvl="3" marR="0" rtl="0" algn="l">
+      <a:lvl4pPr marR="0" lvl="3" algn="l" rtl="0">
         <a:lnSpc>
           <a:spcPct val="100000"/>
         </a:lnSpc>
@@ -6358,7 +6553,7 @@
           <a:srgbClr val="000000"/>
         </a:buClr>
         <a:buFont typeface="Arial"/>
-        <a:defRPr b="0" i="0" spc="0" sz="1400" u="none" cap="none" strike="noStrike">
+        <a:defRPr sz="1400" b="0" i="0" u="none" strike="noStrike" cap="none" spc="0">
           <a:solidFill>
             <a:srgbClr val="000000"/>
           </a:solidFill>
@@ -6368,7 +6563,7 @@
           <a:sym typeface="Arial"/>
         </a:defRPr>
       </a:lvl4pPr>
-      <a:lvl5pPr lvl="4" marR="0" rtl="0" algn="l">
+      <a:lvl5pPr marR="0" lvl="4" algn="l" rtl="0">
         <a:lnSpc>
           <a:spcPct val="100000"/>
         </a:lnSpc>
@@ -6382,7 +6577,7 @@
           <a:srgbClr val="000000"/>
         </a:buClr>
         <a:buFont typeface="Arial"/>
-        <a:defRPr b="0" i="0" spc="0" sz="1400" u="none" cap="none" strike="noStrike">
+        <a:defRPr sz="1400" b="0" i="0" u="none" strike="noStrike" cap="none" spc="0">
           <a:solidFill>
             <a:srgbClr val="000000"/>
           </a:solidFill>
@@ -6392,7 +6587,7 @@
           <a:sym typeface="Arial"/>
         </a:defRPr>
       </a:lvl5pPr>
-      <a:lvl6pPr lvl="5" marR="0" rtl="0" algn="l">
+      <a:lvl6pPr marR="0" lvl="5" algn="l" rtl="0">
         <a:lnSpc>
           <a:spcPct val="100000"/>
         </a:lnSpc>
@@ -6406,7 +6601,7 @@
           <a:srgbClr val="000000"/>
         </a:buClr>
         <a:buFont typeface="Arial"/>
-        <a:defRPr b="0" i="0" spc="0" sz="1400" u="none" cap="none" strike="noStrike">
+        <a:defRPr sz="1400" b="0" i="0" u="none" strike="noStrike" cap="none" spc="0">
           <a:solidFill>
             <a:srgbClr val="000000"/>
           </a:solidFill>
@@ -6416,7 +6611,7 @@
           <a:sym typeface="Arial"/>
         </a:defRPr>
       </a:lvl6pPr>
-      <a:lvl7pPr lvl="6" marR="0" rtl="0" algn="l">
+      <a:lvl7pPr marR="0" lvl="6" algn="l" rtl="0">
         <a:lnSpc>
           <a:spcPct val="100000"/>
         </a:lnSpc>
@@ -6430,7 +6625,7 @@
           <a:srgbClr val="000000"/>
         </a:buClr>
         <a:buFont typeface="Arial"/>
-        <a:defRPr b="0" i="0" spc="0" sz="1400" u="none" cap="none" strike="noStrike">
+        <a:defRPr sz="1400" b="0" i="0" u="none" strike="noStrike" cap="none" spc="0">
           <a:solidFill>
             <a:srgbClr val="000000"/>
           </a:solidFill>
@@ -6440,7 +6635,7 @@
           <a:sym typeface="Arial"/>
         </a:defRPr>
       </a:lvl7pPr>
-      <a:lvl8pPr lvl="7" marR="0" rtl="0" algn="l">
+      <a:lvl8pPr marR="0" lvl="7" algn="l" rtl="0">
         <a:lnSpc>
           <a:spcPct val="100000"/>
         </a:lnSpc>
@@ -6454,7 +6649,7 @@
           <a:srgbClr val="000000"/>
         </a:buClr>
         <a:buFont typeface="Arial"/>
-        <a:defRPr b="0" i="0" spc="0" sz="1400" u="none" cap="none" strike="noStrike">
+        <a:defRPr sz="1400" b="0" i="0" u="none" strike="noStrike" cap="none" spc="0">
           <a:solidFill>
             <a:srgbClr val="000000"/>
           </a:solidFill>
@@ -6464,7 +6659,7 @@
           <a:sym typeface="Arial"/>
         </a:defRPr>
       </a:lvl8pPr>
-      <a:lvl9pPr lvl="8" marR="0" rtl="0" algn="l">
+      <a:lvl9pPr marR="0" lvl="8" algn="l" rtl="0">
         <a:lnSpc>
           <a:spcPct val="100000"/>
         </a:lnSpc>
@@ -6478,7 +6673,7 @@
           <a:srgbClr val="000000"/>
         </a:buClr>
         <a:buFont typeface="Arial"/>
-        <a:defRPr b="0" i="0" spc="0" sz="1400" u="none" cap="none" strike="noStrike">
+        <a:defRPr sz="1400" b="0" i="0" u="none" strike="noStrike" cap="none" spc="0">
           <a:solidFill>
             <a:srgbClr val="000000"/>
           </a:solidFill>
@@ -6490,7 +6685,7 @@
       </a:lvl9pPr>
     </p:titleStyle>
     <p:bodyStyle>
-      <a:defPPr lvl="0" marR="0" rtl="0" algn="l">
+      <a:defPPr marR="0" lvl="0" algn="l" rtl="0">
         <a:lnSpc>
           <a:spcPct val="100000"/>
         </a:lnSpc>
@@ -6501,7 +6696,7 @@
           <a:spcPts val="0"/>
         </a:spcAft>
       </a:defPPr>
-      <a:lvl1pPr lvl="0" marR="0" rtl="0" algn="l">
+      <a:lvl1pPr marR="0" lvl="0" algn="l" rtl="0">
         <a:lnSpc>
           <a:spcPct val="100000"/>
         </a:lnSpc>
@@ -6515,7 +6710,7 @@
           <a:srgbClr val="000000"/>
         </a:buClr>
         <a:buFont typeface="Arial"/>
-        <a:defRPr b="0" i="0" spc="0" sz="1400" u="none" cap="none" strike="noStrike">
+        <a:defRPr sz="1400" b="0" i="0" u="none" strike="noStrike" cap="none" spc="0">
           <a:solidFill>
             <a:srgbClr val="000000"/>
           </a:solidFill>
@@ -6525,7 +6720,7 @@
           <a:sym typeface="Arial"/>
         </a:defRPr>
       </a:lvl1pPr>
-      <a:lvl2pPr lvl="1" marR="0" rtl="0" algn="l">
+      <a:lvl2pPr marR="0" lvl="1" algn="l" rtl="0">
         <a:lnSpc>
           <a:spcPct val="100000"/>
         </a:lnSpc>
@@ -6539,7 +6734,7 @@
           <a:srgbClr val="000000"/>
         </a:buClr>
         <a:buFont typeface="Arial"/>
-        <a:defRPr b="0" i="0" spc="0" sz="1400" u="none" cap="none" strike="noStrike">
+        <a:defRPr sz="1400" b="0" i="0" u="none" strike="noStrike" cap="none" spc="0">
           <a:solidFill>
             <a:srgbClr val="000000"/>
           </a:solidFill>
@@ -6549,7 +6744,7 @@
           <a:sym typeface="Arial"/>
         </a:defRPr>
       </a:lvl2pPr>
-      <a:lvl3pPr lvl="2" marR="0" rtl="0" algn="l">
+      <a:lvl3pPr marR="0" lvl="2" algn="l" rtl="0">
         <a:lnSpc>
           <a:spcPct val="100000"/>
         </a:lnSpc>
@@ -6563,7 +6758,7 @@
           <a:srgbClr val="000000"/>
         </a:buClr>
         <a:buFont typeface="Arial"/>
-        <a:defRPr b="0" i="0" spc="0" sz="1400" u="none" cap="none" strike="noStrike">
+        <a:defRPr sz="1400" b="0" i="0" u="none" strike="noStrike" cap="none" spc="0">
           <a:solidFill>
             <a:srgbClr val="000000"/>
           </a:solidFill>
@@ -6573,7 +6768,7 @@
           <a:sym typeface="Arial"/>
         </a:defRPr>
       </a:lvl3pPr>
-      <a:lvl4pPr lvl="3" marR="0" rtl="0" algn="l">
+      <a:lvl4pPr marR="0" lvl="3" algn="l" rtl="0">
         <a:lnSpc>
           <a:spcPct val="100000"/>
         </a:lnSpc>
@@ -6587,7 +6782,7 @@
           <a:srgbClr val="000000"/>
         </a:buClr>
         <a:buFont typeface="Arial"/>
-        <a:defRPr b="0" i="0" spc="0" sz="1400" u="none" cap="none" strike="noStrike">
+        <a:defRPr sz="1400" b="0" i="0" u="none" strike="noStrike" cap="none" spc="0">
           <a:solidFill>
             <a:srgbClr val="000000"/>
           </a:solidFill>
@@ -6597,7 +6792,7 @@
           <a:sym typeface="Arial"/>
         </a:defRPr>
       </a:lvl4pPr>
-      <a:lvl5pPr lvl="4" marR="0" rtl="0" algn="l">
+      <a:lvl5pPr marR="0" lvl="4" algn="l" rtl="0">
         <a:lnSpc>
           <a:spcPct val="100000"/>
         </a:lnSpc>
@@ -6611,7 +6806,7 @@
           <a:srgbClr val="000000"/>
         </a:buClr>
         <a:buFont typeface="Arial"/>
-        <a:defRPr b="0" i="0" spc="0" sz="1400" u="none" cap="none" strike="noStrike">
+        <a:defRPr sz="1400" b="0" i="0" u="none" strike="noStrike" cap="none" spc="0">
           <a:solidFill>
             <a:srgbClr val="000000"/>
           </a:solidFill>
@@ -6621,7 +6816,7 @@
           <a:sym typeface="Arial"/>
         </a:defRPr>
       </a:lvl5pPr>
-      <a:lvl6pPr lvl="5" marR="0" rtl="0" algn="l">
+      <a:lvl6pPr marR="0" lvl="5" algn="l" rtl="0">
         <a:lnSpc>
           <a:spcPct val="100000"/>
         </a:lnSpc>
@@ -6635,7 +6830,7 @@
           <a:srgbClr val="000000"/>
         </a:buClr>
         <a:buFont typeface="Arial"/>
-        <a:defRPr b="0" i="0" spc="0" sz="1400" u="none" cap="none" strike="noStrike">
+        <a:defRPr sz="1400" b="0" i="0" u="none" strike="noStrike" cap="none" spc="0">
           <a:solidFill>
             <a:srgbClr val="000000"/>
           </a:solidFill>
@@ -6645,7 +6840,7 @@
           <a:sym typeface="Arial"/>
         </a:defRPr>
       </a:lvl6pPr>
-      <a:lvl7pPr lvl="6" marR="0" rtl="0" algn="l">
+      <a:lvl7pPr marR="0" lvl="6" algn="l" rtl="0">
         <a:lnSpc>
           <a:spcPct val="100000"/>
         </a:lnSpc>
@@ -6659,7 +6854,7 @@
           <a:srgbClr val="000000"/>
         </a:buClr>
         <a:buFont typeface="Arial"/>
-        <a:defRPr b="0" i="0" spc="0" sz="1400" u="none" cap="none" strike="noStrike">
+        <a:defRPr sz="1400" b="0" i="0" u="none" strike="noStrike" cap="none" spc="0">
           <a:solidFill>
             <a:srgbClr val="000000"/>
           </a:solidFill>
@@ -6669,7 +6864,7 @@
           <a:sym typeface="Arial"/>
         </a:defRPr>
       </a:lvl7pPr>
-      <a:lvl8pPr lvl="7" marR="0" rtl="0" algn="l">
+      <a:lvl8pPr marR="0" lvl="7" algn="l" rtl="0">
         <a:lnSpc>
           <a:spcPct val="100000"/>
         </a:lnSpc>
@@ -6683,7 +6878,7 @@
           <a:srgbClr val="000000"/>
         </a:buClr>
         <a:buFont typeface="Arial"/>
-        <a:defRPr b="0" i="0" spc="0" sz="1400" u="none" cap="none" strike="noStrike">
+        <a:defRPr sz="1400" b="0" i="0" u="none" strike="noStrike" cap="none" spc="0">
           <a:solidFill>
             <a:srgbClr val="000000"/>
           </a:solidFill>
@@ -6693,7 +6888,7 @@
           <a:sym typeface="Arial"/>
         </a:defRPr>
       </a:lvl8pPr>
-      <a:lvl9pPr lvl="8" marR="0" rtl="0" algn="l">
+      <a:lvl9pPr marR="0" lvl="8" algn="l" rtl="0">
         <a:lnSpc>
           <a:spcPct val="100000"/>
         </a:lnSpc>
@@ -6707,7 +6902,7 @@
           <a:srgbClr val="000000"/>
         </a:buClr>
         <a:buFont typeface="Arial"/>
-        <a:defRPr b="0" i="0" spc="0" sz="1400" u="none" cap="none" strike="noStrike">
+        <a:defRPr sz="1400" b="0" i="0" u="none" strike="noStrike" cap="none" spc="0">
           <a:solidFill>
             <a:srgbClr val="000000"/>
           </a:solidFill>
@@ -6719,7 +6914,7 @@
       </a:lvl9pPr>
     </p:bodyStyle>
     <p:otherStyle>
-      <a:defPPr lvl="0" marR="0" rtl="0" algn="l">
+      <a:defPPr marR="0" lvl="0" algn="l" rtl="0">
         <a:lnSpc>
           <a:spcPct val="100000"/>
         </a:lnSpc>
@@ -6730,7 +6925,7 @@
           <a:spcPts val="0"/>
         </a:spcAft>
       </a:defPPr>
-      <a:lvl1pPr lvl="0" marR="0" rtl="0" algn="l">
+      <a:lvl1pPr marR="0" lvl="0" algn="l" rtl="0">
         <a:lnSpc>
           <a:spcPct val="100000"/>
         </a:lnSpc>
@@ -6744,7 +6939,7 @@
           <a:srgbClr val="000000"/>
         </a:buClr>
         <a:buFont typeface="Arial"/>
-        <a:defRPr b="0" i="0" spc="0" sz="1400" u="none" cap="none" strike="noStrike">
+        <a:defRPr sz="1400" b="0" i="0" u="none" strike="noStrike" cap="none" spc="0">
           <a:solidFill>
             <a:srgbClr val="000000"/>
           </a:solidFill>
@@ -6754,7 +6949,7 @@
           <a:sym typeface="Arial"/>
         </a:defRPr>
       </a:lvl1pPr>
-      <a:lvl2pPr lvl="1" marR="0" rtl="0" algn="l">
+      <a:lvl2pPr marR="0" lvl="1" algn="l" rtl="0">
         <a:lnSpc>
           <a:spcPct val="100000"/>
         </a:lnSpc>
@@ -6768,7 +6963,7 @@
           <a:srgbClr val="000000"/>
         </a:buClr>
         <a:buFont typeface="Arial"/>
-        <a:defRPr b="0" i="0" spc="0" sz="1400" u="none" cap="none" strike="noStrike">
+        <a:defRPr sz="1400" b="0" i="0" u="none" strike="noStrike" cap="none" spc="0">
           <a:solidFill>
             <a:srgbClr val="000000"/>
           </a:solidFill>
@@ -6778,7 +6973,7 @@
           <a:sym typeface="Arial"/>
         </a:defRPr>
       </a:lvl2pPr>
-      <a:lvl3pPr lvl="2" marR="0" rtl="0" algn="l">
+      <a:lvl3pPr marR="0" lvl="2" algn="l" rtl="0">
         <a:lnSpc>
           <a:spcPct val="100000"/>
         </a:lnSpc>
@@ -6792,7 +6987,7 @@
           <a:srgbClr val="000000"/>
         </a:buClr>
         <a:buFont typeface="Arial"/>
-        <a:defRPr b="0" i="0" spc="0" sz="1400" u="none" cap="none" strike="noStrike">
+        <a:defRPr sz="1400" b="0" i="0" u="none" strike="noStrike" cap="none" spc="0">
           <a:solidFill>
             <a:srgbClr val="000000"/>
           </a:solidFill>
@@ -6802,7 +6997,7 @@
           <a:sym typeface="Arial"/>
         </a:defRPr>
       </a:lvl3pPr>
-      <a:lvl4pPr lvl="3" marR="0" rtl="0" algn="l">
+      <a:lvl4pPr marR="0" lvl="3" algn="l" rtl="0">
         <a:lnSpc>
           <a:spcPct val="100000"/>
         </a:lnSpc>
@@ -6816,7 +7011,7 @@
           <a:srgbClr val="000000"/>
         </a:buClr>
         <a:buFont typeface="Arial"/>
-        <a:defRPr b="0" i="0" spc="0" sz="1400" u="none" cap="none" strike="noStrike">
+        <a:defRPr sz="1400" b="0" i="0" u="none" strike="noStrike" cap="none" spc="0">
           <a:solidFill>
             <a:srgbClr val="000000"/>
           </a:solidFill>
@@ -6826,7 +7021,7 @@
           <a:sym typeface="Arial"/>
         </a:defRPr>
       </a:lvl4pPr>
-      <a:lvl5pPr lvl="4" marR="0" rtl="0" algn="l">
+      <a:lvl5pPr marR="0" lvl="4" algn="l" rtl="0">
         <a:lnSpc>
           <a:spcPct val="100000"/>
         </a:lnSpc>
@@ -6840,7 +7035,7 @@
           <a:srgbClr val="000000"/>
         </a:buClr>
         <a:buFont typeface="Arial"/>
-        <a:defRPr b="0" i="0" spc="0" sz="1400" u="none" cap="none" strike="noStrike">
+        <a:defRPr sz="1400" b="0" i="0" u="none" strike="noStrike" cap="none" spc="0">
           <a:solidFill>
             <a:srgbClr val="000000"/>
           </a:solidFill>
@@ -6850,7 +7045,7 @@
           <a:sym typeface="Arial"/>
         </a:defRPr>
       </a:lvl5pPr>
-      <a:lvl6pPr lvl="5" marR="0" rtl="0" algn="l">
+      <a:lvl6pPr marR="0" lvl="5" algn="l" rtl="0">
         <a:lnSpc>
           <a:spcPct val="100000"/>
         </a:lnSpc>
@@ -6864,7 +7059,7 @@
           <a:srgbClr val="000000"/>
         </a:buClr>
         <a:buFont typeface="Arial"/>
-        <a:defRPr b="0" i="0" spc="0" sz="1400" u="none" cap="none" strike="noStrike">
+        <a:defRPr sz="1400" b="0" i="0" u="none" strike="noStrike" cap="none" spc="0">
           <a:solidFill>
             <a:srgbClr val="000000"/>
           </a:solidFill>
@@ -6874,7 +7069,7 @@
           <a:sym typeface="Arial"/>
         </a:defRPr>
       </a:lvl6pPr>
-      <a:lvl7pPr lvl="6" marR="0" rtl="0" algn="l">
+      <a:lvl7pPr marR="0" lvl="6" algn="l" rtl="0">
         <a:lnSpc>
           <a:spcPct val="100000"/>
         </a:lnSpc>
@@ -6888,7 +7083,7 @@
           <a:srgbClr val="000000"/>
         </a:buClr>
         <a:buFont typeface="Arial"/>
-        <a:defRPr b="0" i="0" spc="0" sz="1400" u="none" cap="none" strike="noStrike">
+        <a:defRPr sz="1400" b="0" i="0" u="none" strike="noStrike" cap="none" spc="0">
           <a:solidFill>
             <a:srgbClr val="000000"/>
           </a:solidFill>
@@ -6898,7 +7093,7 @@
           <a:sym typeface="Arial"/>
         </a:defRPr>
       </a:lvl7pPr>
-      <a:lvl8pPr lvl="7" marR="0" rtl="0" algn="l">
+      <a:lvl8pPr marR="0" lvl="7" algn="l" rtl="0">
         <a:lnSpc>
           <a:spcPct val="100000"/>
         </a:lnSpc>
@@ -6912,7 +7107,7 @@
           <a:srgbClr val="000000"/>
         </a:buClr>
         <a:buFont typeface="Arial"/>
-        <a:defRPr b="0" i="0" spc="0" sz="1400" u="none" cap="none" strike="noStrike">
+        <a:defRPr sz="1400" b="0" i="0" u="none" strike="noStrike" cap="none" spc="0">
           <a:solidFill>
             <a:srgbClr val="000000"/>
           </a:solidFill>
@@ -6922,7 +7117,7 @@
           <a:sym typeface="Arial"/>
         </a:defRPr>
       </a:lvl8pPr>
-      <a:lvl9pPr lvl="8" marR="0" rtl="0" algn="l">
+      <a:lvl9pPr marR="0" lvl="8" algn="l" rtl="0">
         <a:lnSpc>
           <a:spcPct val="100000"/>
         </a:lnSpc>
@@ -6936,7 +7131,7 @@
           <a:srgbClr val="000000"/>
         </a:buClr>
         <a:buFont typeface="Arial"/>
-        <a:defRPr b="0" i="0" spc="0" sz="1400" u="none" cap="none" strike="noStrike">
+        <a:defRPr sz="1400" b="0" i="0" u="none" strike="noStrike" cap="none" spc="0">
           <a:solidFill>
             <a:srgbClr val="000000"/>
           </a:solidFill>
@@ -6952,11 +7147,11 @@
 </file>
 
 <file path=ppt/slides/slide1.xml><?xml version="1.0" encoding="utf-8"?>
-<p:sld xmlns:a="http://schemas.openxmlformats.org/drawingml/2006/main" xmlns:r="http://schemas.openxmlformats.org/officeDocument/2006/relationships" xmlns:mc="http://schemas.openxmlformats.org/markup-compatibility/2006" xmlns:mv="urn:schemas-microsoft-com:mac:vml" xmlns:p="http://schemas.openxmlformats.org/presentationml/2006/main" xmlns:c="http://schemas.openxmlformats.org/drawingml/2006/chart" xmlns:dgm="http://schemas.openxmlformats.org/drawingml/2006/diagram" xmlns:o="urn:schemas-microsoft-com:office:office" xmlns:v="urn:schemas-microsoft-com:vml" xmlns:pvml="urn:schemas-microsoft-com:office:powerpoint" xmlns:com="http://schemas.openxmlformats.org/drawingml/2006/compatibility" xmlns:p14="http://schemas.microsoft.com/office/powerpoint/2010/main" xmlns:p15="http://schemas.microsoft.com/office/powerpoint/2012/main" xmlns:ahyp="http://schemas.microsoft.com/office/drawing/2018/hyperlinkcolor">
+<p:sld xmlns:a="http://schemas.openxmlformats.org/drawingml/2006/main" xmlns:r="http://schemas.openxmlformats.org/officeDocument/2006/relationships" xmlns:p="http://schemas.openxmlformats.org/presentationml/2006/main">
   <p:cSld>
     <p:spTree>
       <p:nvGrpSpPr>
-        <p:cNvPr id="53" name="Shape 53"/>
+        <p:cNvPr id="1" name="Shape 53"/>
         <p:cNvGrpSpPr/>
         <p:nvPr/>
       </p:nvGrpSpPr>
@@ -6988,12 +7183,12 @@
           </a:ln>
         </p:spPr>
         <p:txBody>
-          <a:bodyPr anchorCtr="0" anchor="t" bIns="91425" lIns="91425" spcFirstLastPara="1" rIns="91425" wrap="square" tIns="91425">
+          <a:bodyPr spcFirstLastPara="1" wrap="square" lIns="91425" tIns="91425" rIns="91425" bIns="91425" anchor="t" anchorCtr="0">
             <a:noAutofit/>
           </a:bodyPr>
           <a:lstStyle/>
           <a:p>
-            <a:pPr indent="0" lvl="0" marL="0" rtl="0" algn="l">
+            <a:pPr marL="0" lvl="0" indent="0" algn="l" rtl="0">
               <a:lnSpc>
                 <a:spcPct val="115000"/>
               </a:lnSpc>
@@ -7109,7 +7304,7 @@
           <a:blip r:embed="rId4">
             <a:alphaModFix/>
           </a:blip>
-          <a:srcRect b="98001" l="0" r="0" t="0"/>
+          <a:srcRect b="98001"/>
           <a:stretch/>
         </p:blipFill>
         <p:spPr>
@@ -7135,11 +7330,11 @@
 </file>
 
 <file path=ppt/slides/slide10.xml><?xml version="1.0" encoding="utf-8"?>
-<p:sld xmlns:a="http://schemas.openxmlformats.org/drawingml/2006/main" xmlns:r="http://schemas.openxmlformats.org/officeDocument/2006/relationships" xmlns:mc="http://schemas.openxmlformats.org/markup-compatibility/2006" xmlns:mv="urn:schemas-microsoft-com:mac:vml" xmlns:p="http://schemas.openxmlformats.org/presentationml/2006/main" xmlns:c="http://schemas.openxmlformats.org/drawingml/2006/chart" xmlns:dgm="http://schemas.openxmlformats.org/drawingml/2006/diagram" xmlns:o="urn:schemas-microsoft-com:office:office" xmlns:v="urn:schemas-microsoft-com:vml" xmlns:pvml="urn:schemas-microsoft-com:office:powerpoint" xmlns:com="http://schemas.openxmlformats.org/drawingml/2006/compatibility" xmlns:p14="http://schemas.microsoft.com/office/powerpoint/2010/main" xmlns:p15="http://schemas.microsoft.com/office/powerpoint/2012/main" xmlns:ahyp="http://schemas.microsoft.com/office/drawing/2018/hyperlinkcolor">
+<p:sld xmlns:a="http://schemas.openxmlformats.org/drawingml/2006/main" xmlns:r="http://schemas.openxmlformats.org/officeDocument/2006/relationships" xmlns:p="http://schemas.openxmlformats.org/presentationml/2006/main">
   <p:cSld>
     <p:spTree>
       <p:nvGrpSpPr>
-        <p:cNvPr id="123" name="Shape 123"/>
+        <p:cNvPr id="1" name="Shape 123"/>
         <p:cNvGrpSpPr/>
         <p:nvPr/>
       </p:nvGrpSpPr>
@@ -7161,7 +7356,7 @@
           <a:blip r:embed="rId3">
             <a:alphaModFix/>
           </a:blip>
-          <a:srcRect b="98001" l="0" r="0" t="0"/>
+          <a:srcRect b="98001"/>
           <a:stretch/>
         </p:blipFill>
         <p:spPr>
@@ -7228,23 +7423,20 @@
           </a:ln>
         </p:spPr>
         <p:txBody>
-          <a:bodyPr anchorCtr="0" anchor="ctr" bIns="91425" lIns="91425" spcFirstLastPara="1" rIns="91425" wrap="square" tIns="91425">
+          <a:bodyPr spcFirstLastPara="1" wrap="square" lIns="91425" tIns="91425" rIns="91425" bIns="91425" anchor="ctr" anchorCtr="0">
             <a:noAutofit/>
           </a:bodyPr>
           <a:lstStyle/>
           <a:p>
-            <a:pPr indent="0" lvl="0" marL="0" rtl="0" algn="ctr">
-              <a:spcBef>
-                <a:spcPts val="0"/>
-              </a:spcBef>
-              <a:spcAft>
-                <a:spcPts val="0"/>
-              </a:spcAft>
-              <a:buNone/>
-            </a:pPr>
-            <a:r>
-              <a:t/>
-            </a:r>
+            <a:pPr marL="0" lvl="0" indent="0" algn="ctr" rtl="0">
+              <a:spcBef>
+                <a:spcPts val="0"/>
+              </a:spcBef>
+              <a:spcAft>
+                <a:spcPts val="0"/>
+              </a:spcAft>
+              <a:buNone/>
+            </a:pPr>
             <a:endParaRPr/>
           </a:p>
         </p:txBody>
@@ -7269,12 +7461,12 @@
           </a:ln>
         </p:spPr>
         <p:txBody>
-          <a:bodyPr anchorCtr="0" anchor="t" bIns="91425" lIns="91425" spcFirstLastPara="1" rIns="91425" wrap="square" tIns="91425">
+          <a:bodyPr spcFirstLastPara="1" wrap="square" lIns="91425" tIns="91425" rIns="91425" bIns="91425" anchor="t" anchorCtr="0">
             <a:noAutofit/>
           </a:bodyPr>
           <a:lstStyle/>
           <a:p>
-            <a:pPr indent="0" lvl="0" marL="0" rtl="0" algn="l">
+            <a:pPr marL="0" lvl="0" indent="0" algn="l" rtl="0">
               <a:lnSpc>
                 <a:spcPct val="115000"/>
               </a:lnSpc>
@@ -7431,11 +7623,11 @@
 </file>
 
 <file path=ppt/slides/slide11.xml><?xml version="1.0" encoding="utf-8"?>
-<p:sld xmlns:a="http://schemas.openxmlformats.org/drawingml/2006/main" xmlns:r="http://schemas.openxmlformats.org/officeDocument/2006/relationships" xmlns:mc="http://schemas.openxmlformats.org/markup-compatibility/2006" xmlns:mv="urn:schemas-microsoft-com:mac:vml" xmlns:p="http://schemas.openxmlformats.org/presentationml/2006/main" xmlns:c="http://schemas.openxmlformats.org/drawingml/2006/chart" xmlns:dgm="http://schemas.openxmlformats.org/drawingml/2006/diagram" xmlns:o="urn:schemas-microsoft-com:office:office" xmlns:v="urn:schemas-microsoft-com:vml" xmlns:pvml="urn:schemas-microsoft-com:office:powerpoint" xmlns:com="http://schemas.openxmlformats.org/drawingml/2006/compatibility" xmlns:p14="http://schemas.microsoft.com/office/powerpoint/2010/main" xmlns:p15="http://schemas.microsoft.com/office/powerpoint/2012/main" xmlns:ahyp="http://schemas.microsoft.com/office/drawing/2018/hyperlinkcolor">
+<p:sld xmlns:a="http://schemas.openxmlformats.org/drawingml/2006/main" xmlns:r="http://schemas.openxmlformats.org/officeDocument/2006/relationships" xmlns:p="http://schemas.openxmlformats.org/presentationml/2006/main">
   <p:cSld>
     <p:spTree>
       <p:nvGrpSpPr>
-        <p:cNvPr id="131" name="Shape 131"/>
+        <p:cNvPr id="1" name="Shape 131"/>
         <p:cNvGrpSpPr/>
         <p:nvPr/>
       </p:nvGrpSpPr>
@@ -7457,7 +7649,7 @@
           <a:blip r:embed="rId3">
             <a:alphaModFix/>
           </a:blip>
-          <a:srcRect b="98001" l="0" r="0" t="0"/>
+          <a:srcRect b="98001"/>
           <a:stretch/>
         </p:blipFill>
         <p:spPr>
@@ -7524,23 +7716,20 @@
           </a:ln>
         </p:spPr>
         <p:txBody>
-          <a:bodyPr anchorCtr="0" anchor="ctr" bIns="91425" lIns="91425" spcFirstLastPara="1" rIns="91425" wrap="square" tIns="91425">
+          <a:bodyPr spcFirstLastPara="1" wrap="square" lIns="91425" tIns="91425" rIns="91425" bIns="91425" anchor="ctr" anchorCtr="0">
             <a:noAutofit/>
           </a:bodyPr>
           <a:lstStyle/>
           <a:p>
-            <a:pPr indent="0" lvl="0" marL="0" rtl="0" algn="ctr">
-              <a:spcBef>
-                <a:spcPts val="0"/>
-              </a:spcBef>
-              <a:spcAft>
-                <a:spcPts val="0"/>
-              </a:spcAft>
-              <a:buNone/>
-            </a:pPr>
-            <a:r>
-              <a:t/>
-            </a:r>
+            <a:pPr marL="0" lvl="0" indent="0" algn="ctr" rtl="0">
+              <a:spcBef>
+                <a:spcPts val="0"/>
+              </a:spcBef>
+              <a:spcAft>
+                <a:spcPts val="0"/>
+              </a:spcAft>
+              <a:buNone/>
+            </a:pPr>
             <a:endParaRPr/>
           </a:p>
         </p:txBody>
@@ -7565,12 +7754,12 @@
           </a:ln>
         </p:spPr>
         <p:txBody>
-          <a:bodyPr anchorCtr="0" anchor="t" bIns="91425" lIns="91425" spcFirstLastPara="1" rIns="91425" wrap="square" tIns="91425">
+          <a:bodyPr spcFirstLastPara="1" wrap="square" lIns="91425" tIns="91425" rIns="91425" bIns="91425" anchor="t" anchorCtr="0">
             <a:noAutofit/>
           </a:bodyPr>
           <a:lstStyle/>
           <a:p>
-            <a:pPr indent="0" lvl="0" marL="0" rtl="0" algn="l">
+            <a:pPr marL="0" lvl="0" indent="0" algn="l" rtl="0">
               <a:lnSpc>
                 <a:spcPct val="115000"/>
               </a:lnSpc>
@@ -7657,11 +7846,11 @@
 </file>
 
 <file path=ppt/slides/slide12.xml><?xml version="1.0" encoding="utf-8"?>
-<p:sld xmlns:a="http://schemas.openxmlformats.org/drawingml/2006/main" xmlns:r="http://schemas.openxmlformats.org/officeDocument/2006/relationships" xmlns:mc="http://schemas.openxmlformats.org/markup-compatibility/2006" xmlns:mv="urn:schemas-microsoft-com:mac:vml" xmlns:p="http://schemas.openxmlformats.org/presentationml/2006/main" xmlns:c="http://schemas.openxmlformats.org/drawingml/2006/chart" xmlns:dgm="http://schemas.openxmlformats.org/drawingml/2006/diagram" xmlns:o="urn:schemas-microsoft-com:office:office" xmlns:v="urn:schemas-microsoft-com:vml" xmlns:pvml="urn:schemas-microsoft-com:office:powerpoint" xmlns:com="http://schemas.openxmlformats.org/drawingml/2006/compatibility" xmlns:p14="http://schemas.microsoft.com/office/powerpoint/2010/main" xmlns:p15="http://schemas.microsoft.com/office/powerpoint/2012/main" xmlns:ahyp="http://schemas.microsoft.com/office/drawing/2018/hyperlinkcolor">
+<p:sld xmlns:a="http://schemas.openxmlformats.org/drawingml/2006/main" xmlns:r="http://schemas.openxmlformats.org/officeDocument/2006/relationships" xmlns:p="http://schemas.openxmlformats.org/presentationml/2006/main">
   <p:cSld>
     <p:spTree>
       <p:nvGrpSpPr>
-        <p:cNvPr id="139" name="Shape 139"/>
+        <p:cNvPr id="1" name="Shape 139"/>
         <p:cNvGrpSpPr/>
         <p:nvPr/>
       </p:nvGrpSpPr>
@@ -7683,7 +7872,7 @@
           <a:blip r:embed="rId3">
             <a:alphaModFix/>
           </a:blip>
-          <a:srcRect b="98001" l="0" r="0" t="0"/>
+          <a:srcRect b="98001"/>
           <a:stretch/>
         </p:blipFill>
         <p:spPr>
@@ -7750,23 +7939,20 @@
           </a:ln>
         </p:spPr>
         <p:txBody>
-          <a:bodyPr anchorCtr="0" anchor="ctr" bIns="91425" lIns="91425" spcFirstLastPara="1" rIns="91425" wrap="square" tIns="91425">
+          <a:bodyPr spcFirstLastPara="1" wrap="square" lIns="91425" tIns="91425" rIns="91425" bIns="91425" anchor="ctr" anchorCtr="0">
             <a:noAutofit/>
           </a:bodyPr>
           <a:lstStyle/>
           <a:p>
-            <a:pPr indent="0" lvl="0" marL="0" rtl="0" algn="ctr">
-              <a:spcBef>
-                <a:spcPts val="0"/>
-              </a:spcBef>
-              <a:spcAft>
-                <a:spcPts val="0"/>
-              </a:spcAft>
-              <a:buNone/>
-            </a:pPr>
-            <a:r>
-              <a:t/>
-            </a:r>
+            <a:pPr marL="0" lvl="0" indent="0" algn="ctr" rtl="0">
+              <a:spcBef>
+                <a:spcPts val="0"/>
+              </a:spcBef>
+              <a:spcAft>
+                <a:spcPts val="0"/>
+              </a:spcAft>
+              <a:buNone/>
+            </a:pPr>
             <a:endParaRPr/>
           </a:p>
         </p:txBody>
@@ -7791,12 +7977,12 @@
           </a:ln>
         </p:spPr>
         <p:txBody>
-          <a:bodyPr anchorCtr="0" anchor="t" bIns="91425" lIns="91425" spcFirstLastPara="1" rIns="91425" wrap="square" tIns="91425">
+          <a:bodyPr spcFirstLastPara="1" wrap="square" lIns="91425" tIns="91425" rIns="91425" bIns="91425" anchor="t" anchorCtr="0">
             <a:noAutofit/>
           </a:bodyPr>
           <a:lstStyle/>
           <a:p>
-            <a:pPr indent="0" lvl="0" marL="0" rtl="0" algn="l">
+            <a:pPr marL="0" lvl="0" indent="0" algn="l" rtl="0">
               <a:lnSpc>
                 <a:spcPct val="115000"/>
               </a:lnSpc>
@@ -8010,11 +8196,11 @@
 </file>
 
 <file path=ppt/slides/slide13.xml><?xml version="1.0" encoding="utf-8"?>
-<p:sld xmlns:a="http://schemas.openxmlformats.org/drawingml/2006/main" xmlns:r="http://schemas.openxmlformats.org/officeDocument/2006/relationships" xmlns:mc="http://schemas.openxmlformats.org/markup-compatibility/2006" xmlns:mv="urn:schemas-microsoft-com:mac:vml" xmlns:p="http://schemas.openxmlformats.org/presentationml/2006/main" xmlns:c="http://schemas.openxmlformats.org/drawingml/2006/chart" xmlns:dgm="http://schemas.openxmlformats.org/drawingml/2006/diagram" xmlns:o="urn:schemas-microsoft-com:office:office" xmlns:v="urn:schemas-microsoft-com:vml" xmlns:pvml="urn:schemas-microsoft-com:office:powerpoint" xmlns:com="http://schemas.openxmlformats.org/drawingml/2006/compatibility" xmlns:p14="http://schemas.microsoft.com/office/powerpoint/2010/main" xmlns:p15="http://schemas.microsoft.com/office/powerpoint/2012/main" xmlns:ahyp="http://schemas.microsoft.com/office/drawing/2018/hyperlinkcolor">
+<p:sld xmlns:a="http://schemas.openxmlformats.org/drawingml/2006/main" xmlns:r="http://schemas.openxmlformats.org/officeDocument/2006/relationships" xmlns:p="http://schemas.openxmlformats.org/presentationml/2006/main">
   <p:cSld>
     <p:spTree>
       <p:nvGrpSpPr>
-        <p:cNvPr id="147" name="Shape 147"/>
+        <p:cNvPr id="1" name="Shape 147"/>
         <p:cNvGrpSpPr/>
         <p:nvPr/>
       </p:nvGrpSpPr>
@@ -8036,7 +8222,7 @@
           <a:blip r:embed="rId3">
             <a:alphaModFix/>
           </a:blip>
-          <a:srcRect b="98001" l="0" r="0" t="0"/>
+          <a:srcRect b="98001"/>
           <a:stretch/>
         </p:blipFill>
         <p:spPr>
@@ -8103,23 +8289,20 @@
           </a:ln>
         </p:spPr>
         <p:txBody>
-          <a:bodyPr anchorCtr="0" anchor="ctr" bIns="91425" lIns="91425" spcFirstLastPara="1" rIns="91425" wrap="square" tIns="91425">
+          <a:bodyPr spcFirstLastPara="1" wrap="square" lIns="91425" tIns="91425" rIns="91425" bIns="91425" anchor="ctr" anchorCtr="0">
             <a:noAutofit/>
           </a:bodyPr>
           <a:lstStyle/>
           <a:p>
-            <a:pPr indent="0" lvl="0" marL="0" rtl="0" algn="ctr">
-              <a:spcBef>
-                <a:spcPts val="0"/>
-              </a:spcBef>
-              <a:spcAft>
-                <a:spcPts val="0"/>
-              </a:spcAft>
-              <a:buNone/>
-            </a:pPr>
-            <a:r>
-              <a:t/>
-            </a:r>
+            <a:pPr marL="0" lvl="0" indent="0" algn="ctr" rtl="0">
+              <a:spcBef>
+                <a:spcPts val="0"/>
+              </a:spcBef>
+              <a:spcAft>
+                <a:spcPts val="0"/>
+              </a:spcAft>
+              <a:buNone/>
+            </a:pPr>
             <a:endParaRPr/>
           </a:p>
         </p:txBody>
@@ -8144,12 +8327,12 @@
           </a:ln>
         </p:spPr>
         <p:txBody>
-          <a:bodyPr anchorCtr="0" anchor="t" bIns="91425" lIns="91425" spcFirstLastPara="1" rIns="91425" wrap="square" tIns="91425">
+          <a:bodyPr spcFirstLastPara="1" wrap="square" lIns="91425" tIns="91425" rIns="91425" bIns="91425" anchor="t" anchorCtr="0">
             <a:noAutofit/>
           </a:bodyPr>
           <a:lstStyle/>
           <a:p>
-            <a:pPr indent="0" lvl="0" marL="0" rtl="0" algn="l">
+            <a:pPr marL="0" lvl="0" indent="0" algn="l" rtl="0">
               <a:lnSpc>
                 <a:spcPct val="115000"/>
               </a:lnSpc>
@@ -8188,7 +8371,7 @@
         <p:spPr>
           <a:xfrm>
             <a:off x="265176" y="1280160"/>
-            <a:ext cx="8595360" cy="3566160"/>
+            <a:ext cx="8595360" cy="3948325"/>
           </a:xfrm>
           <a:prstGeom prst="rect">
             <a:avLst/>
@@ -8206,11 +8389,30 @@
                 <a:spcPct val="120000"/>
               </a:lnSpc>
               <a:spcAft>
-                <a:spcPts val="1000"/>
+                <a:spcPts val="700"/>
               </a:spcAft>
             </a:pPr>
             <a:r>
-              <a:rPr sz="1400">
+              <a:rPr lang="en-US" sz="1300">
+                <a:solidFill>
+                  <a:srgbClr val="212121"/>
+                </a:solidFill>
+                <a:latin typeface="Google Sans Flex"/>
+              </a:rPr>
+              <a:t>•  Next step — upgrade to managed Google Cloud services once billing is available: Gemini moved behind a Cloud Run/Cloud Functions proxy (closes the current public-key exposure and removes the 20-req/day free-tier ceiling), Firestore replacing the static dealer/price/history JSON so the district dashboard becomes genuinely live instead of a deploy-time snapshot, Vertex AI Search replacing the hand-rolled TF-IDF retrieval, and Cloud Translation/Text-to-Speech replacing the template-based Kannada advisory. Every substitute today sits behind one isolated call site per module, so each swap is incremental, not a rewrite.</a:t>
+            </a:r>
+          </a:p>
+          <a:p>
+            <a:pPr>
+              <a:lnSpc>
+                <a:spcPct val="120000"/>
+              </a:lnSpc>
+              <a:spcAft>
+                <a:spcPts val="700"/>
+              </a:spcAft>
+            </a:pPr>
+            <a:r>
+              <a:rPr lang="en-US" sz="1300">
                 <a:solidFill>
                   <a:srgbClr val="212121"/>
                 </a:solidFill>
@@ -8225,17 +8427,17 @@
                 <a:spcPct val="120000"/>
               </a:lnSpc>
               <a:spcAft>
-                <a:spcPts val="1000"/>
+                <a:spcPts val="700"/>
               </a:spcAft>
             </a:pPr>
             <a:r>
-              <a:rPr sz="1400">
+              <a:rPr lang="en-US" sz="1300">
                 <a:solidFill>
                   <a:srgbClr val="212121"/>
                 </a:solidFill>
                 <a:latin typeface="Google Sans Flex"/>
               </a:rPr>
-              <a:t>•  Expansion path: adding a new crop or region means indexing a new disease guide into Vertex AI Search, not rewriting the diagnosis logic — the architecture is crop-agnostic by design even though this build is scoped to tomato in Karnataka for the demo.</a:t>
+              <a:t>•  Expansion path: adding a new crop or region means indexing a new disease guide into the retrieval layer, not rewriting the diagnosis logic — the architecture is crop-agnostic by design even though this build is scoped to tomato in Karnataka for the demo.</a:t>
             </a:r>
           </a:p>
           <a:p>
@@ -8244,11 +8446,11 @@
                 <a:spcPct val="120000"/>
               </a:lnSpc>
               <a:spcAft>
-                <a:spcPts val="1000"/>
+                <a:spcPts val="700"/>
               </a:spcAft>
             </a:pPr>
             <a:r>
-              <a:rPr sz="1400">
+              <a:rPr lang="en-US" sz="1300">
                 <a:solidFill>
                   <a:srgbClr val="212121"/>
                 </a:solidFill>
@@ -8268,11 +8470,11 @@
 </file>
 
 <file path=ppt/slides/slide14.xml><?xml version="1.0" encoding="utf-8"?>
-<p:sld xmlns:a="http://schemas.openxmlformats.org/drawingml/2006/main" xmlns:r="http://schemas.openxmlformats.org/officeDocument/2006/relationships" xmlns:mc="http://schemas.openxmlformats.org/markup-compatibility/2006" xmlns:mv="urn:schemas-microsoft-com:mac:vml" xmlns:p="http://schemas.openxmlformats.org/presentationml/2006/main" xmlns:c="http://schemas.openxmlformats.org/drawingml/2006/chart" xmlns:dgm="http://schemas.openxmlformats.org/drawingml/2006/diagram" xmlns:o="urn:schemas-microsoft-com:office:office" xmlns:v="urn:schemas-microsoft-com:vml" xmlns:pvml="urn:schemas-microsoft-com:office:powerpoint" xmlns:com="http://schemas.openxmlformats.org/drawingml/2006/compatibility" xmlns:p14="http://schemas.microsoft.com/office/powerpoint/2010/main" xmlns:p15="http://schemas.microsoft.com/office/powerpoint/2012/main" xmlns:ahyp="http://schemas.microsoft.com/office/drawing/2018/hyperlinkcolor">
+<p:sld xmlns:a="http://schemas.openxmlformats.org/drawingml/2006/main" xmlns:r="http://schemas.openxmlformats.org/officeDocument/2006/relationships" xmlns:p="http://schemas.openxmlformats.org/presentationml/2006/main">
   <p:cSld>
     <p:spTree>
       <p:nvGrpSpPr>
-        <p:cNvPr id="155" name="Shape 155"/>
+        <p:cNvPr id="1" name="Shape 155"/>
         <p:cNvGrpSpPr/>
         <p:nvPr/>
       </p:nvGrpSpPr>
@@ -8294,7 +8496,7 @@
           <a:blip r:embed="rId3">
             <a:alphaModFix/>
           </a:blip>
-          <a:srcRect b="98001" l="0" r="0" t="0"/>
+          <a:srcRect b="98001"/>
           <a:stretch/>
         </p:blipFill>
         <p:spPr>
@@ -8361,23 +8563,20 @@
           </a:ln>
         </p:spPr>
         <p:txBody>
-          <a:bodyPr anchorCtr="0" anchor="ctr" bIns="91425" lIns="91425" spcFirstLastPara="1" rIns="91425" wrap="square" tIns="91425">
+          <a:bodyPr spcFirstLastPara="1" wrap="square" lIns="91425" tIns="91425" rIns="91425" bIns="91425" anchor="ctr" anchorCtr="0">
             <a:noAutofit/>
           </a:bodyPr>
           <a:lstStyle/>
           <a:p>
-            <a:pPr indent="0" lvl="0" marL="0" rtl="0" algn="ctr">
-              <a:spcBef>
-                <a:spcPts val="0"/>
-              </a:spcBef>
-              <a:spcAft>
-                <a:spcPts val="0"/>
-              </a:spcAft>
-              <a:buNone/>
-            </a:pPr>
-            <a:r>
-              <a:t/>
-            </a:r>
+            <a:pPr marL="0" lvl="0" indent="0" algn="ctr" rtl="0">
+              <a:spcBef>
+                <a:spcPts val="0"/>
+              </a:spcBef>
+              <a:spcAft>
+                <a:spcPts val="0"/>
+              </a:spcAft>
+              <a:buNone/>
+            </a:pPr>
             <a:endParaRPr/>
           </a:p>
         </p:txBody>
@@ -8402,12 +8601,12 @@
           </a:ln>
         </p:spPr>
         <p:txBody>
-          <a:bodyPr anchorCtr="0" anchor="t" bIns="91425" lIns="91425" spcFirstLastPara="1" rIns="91425" wrap="square" tIns="91425">
+          <a:bodyPr spcFirstLastPara="1" wrap="square" lIns="91425" tIns="91425" rIns="91425" bIns="91425" anchor="t" anchorCtr="0">
             <a:noAutofit/>
           </a:bodyPr>
           <a:lstStyle/>
           <a:p>
-            <a:pPr indent="0" lvl="0" marL="0" rtl="0" algn="l">
+            <a:pPr marL="0" lvl="0" indent="0" algn="l" rtl="0">
               <a:lnSpc>
                 <a:spcPct val="115000"/>
               </a:lnSpc>
@@ -8494,11 +8693,11 @@
 </file>
 
 <file path=ppt/slides/slide15.xml><?xml version="1.0" encoding="utf-8"?>
-<p:sld xmlns:a="http://schemas.openxmlformats.org/drawingml/2006/main" xmlns:r="http://schemas.openxmlformats.org/officeDocument/2006/relationships" xmlns:mc="http://schemas.openxmlformats.org/markup-compatibility/2006" xmlns:mv="urn:schemas-microsoft-com:mac:vml" xmlns:p="http://schemas.openxmlformats.org/presentationml/2006/main" xmlns:c="http://schemas.openxmlformats.org/drawingml/2006/chart" xmlns:dgm="http://schemas.openxmlformats.org/drawingml/2006/diagram" xmlns:o="urn:schemas-microsoft-com:office:office" xmlns:v="urn:schemas-microsoft-com:vml" xmlns:pvml="urn:schemas-microsoft-com:office:powerpoint" xmlns:com="http://schemas.openxmlformats.org/drawingml/2006/compatibility" xmlns:p14="http://schemas.microsoft.com/office/powerpoint/2010/main" xmlns:p15="http://schemas.microsoft.com/office/powerpoint/2012/main" xmlns:ahyp="http://schemas.microsoft.com/office/drawing/2018/hyperlinkcolor">
+<p:sld xmlns:a="http://schemas.openxmlformats.org/drawingml/2006/main" xmlns:r="http://schemas.openxmlformats.org/officeDocument/2006/relationships" xmlns:p="http://schemas.openxmlformats.org/presentationml/2006/main">
   <p:cSld>
     <p:spTree>
       <p:nvGrpSpPr>
-        <p:cNvPr id="163" name="Shape 163"/>
+        <p:cNvPr id="1" name="Shape 163"/>
         <p:cNvGrpSpPr/>
         <p:nvPr/>
       </p:nvGrpSpPr>
@@ -8520,7 +8719,7 @@
           <a:blip r:embed="rId3">
             <a:alphaModFix/>
           </a:blip>
-          <a:srcRect b="98001" l="0" r="0" t="0"/>
+          <a:srcRect b="98001"/>
           <a:stretch/>
         </p:blipFill>
         <p:spPr>
@@ -8587,23 +8786,20 @@
           </a:ln>
         </p:spPr>
         <p:txBody>
-          <a:bodyPr anchorCtr="0" anchor="ctr" bIns="91425" lIns="91425" spcFirstLastPara="1" rIns="91425" wrap="square" tIns="91425">
+          <a:bodyPr spcFirstLastPara="1" wrap="square" lIns="91425" tIns="91425" rIns="91425" bIns="91425" anchor="ctr" anchorCtr="0">
             <a:noAutofit/>
           </a:bodyPr>
           <a:lstStyle/>
           <a:p>
-            <a:pPr indent="0" lvl="0" marL="0" rtl="0" algn="ctr">
-              <a:spcBef>
-                <a:spcPts val="0"/>
-              </a:spcBef>
-              <a:spcAft>
-                <a:spcPts val="0"/>
-              </a:spcAft>
-              <a:buNone/>
-            </a:pPr>
-            <a:r>
-              <a:t/>
-            </a:r>
+            <a:pPr marL="0" lvl="0" indent="0" algn="ctr" rtl="0">
+              <a:spcBef>
+                <a:spcPts val="0"/>
+              </a:spcBef>
+              <a:spcAft>
+                <a:spcPts val="0"/>
+              </a:spcAft>
+              <a:buNone/>
+            </a:pPr>
             <a:endParaRPr/>
           </a:p>
         </p:txBody>
@@ -8617,11 +8813,11 @@
 </file>
 
 <file path=ppt/slides/slide16.xml><?xml version="1.0" encoding="utf-8"?>
-<p:sld xmlns:a="http://schemas.openxmlformats.org/drawingml/2006/main" xmlns:r="http://schemas.openxmlformats.org/officeDocument/2006/relationships" xmlns:mc="http://schemas.openxmlformats.org/markup-compatibility/2006" xmlns:mv="urn:schemas-microsoft-com:mac:vml" xmlns:p="http://schemas.openxmlformats.org/presentationml/2006/main" xmlns:c="http://schemas.openxmlformats.org/drawingml/2006/chart" xmlns:dgm="http://schemas.openxmlformats.org/drawingml/2006/diagram" xmlns:o="urn:schemas-microsoft-com:office:office" xmlns:v="urn:schemas-microsoft-com:vml" xmlns:pvml="urn:schemas-microsoft-com:office:powerpoint" xmlns:com="http://schemas.openxmlformats.org/drawingml/2006/compatibility" xmlns:p14="http://schemas.microsoft.com/office/powerpoint/2010/main" xmlns:p15="http://schemas.microsoft.com/office/powerpoint/2012/main" xmlns:ahyp="http://schemas.microsoft.com/office/drawing/2018/hyperlinkcolor">
+<p:sld xmlns:a="http://schemas.openxmlformats.org/drawingml/2006/main" xmlns:r="http://schemas.openxmlformats.org/officeDocument/2006/relationships" xmlns:p="http://schemas.openxmlformats.org/presentationml/2006/main">
   <p:cSld>
     <p:spTree>
       <p:nvGrpSpPr>
-        <p:cNvPr id="170" name="Shape 170"/>
+        <p:cNvPr id="1" name="Shape 170"/>
         <p:cNvGrpSpPr/>
         <p:nvPr/>
       </p:nvGrpSpPr>
@@ -8643,7 +8839,7 @@
           <a:blip r:embed="rId3">
             <a:alphaModFix/>
           </a:blip>
-          <a:srcRect b="98001" l="0" r="0" t="0"/>
+          <a:srcRect b="98001"/>
           <a:stretch/>
         </p:blipFill>
         <p:spPr>
@@ -8697,11 +8893,11 @@
 </file>
 
 <file path=ppt/slides/slide2.xml><?xml version="1.0" encoding="utf-8"?>
-<p:sld xmlns:a="http://schemas.openxmlformats.org/drawingml/2006/main" xmlns:r="http://schemas.openxmlformats.org/officeDocument/2006/relationships" xmlns:mc="http://schemas.openxmlformats.org/markup-compatibility/2006" xmlns:mv="urn:schemas-microsoft-com:mac:vml" xmlns:p="http://schemas.openxmlformats.org/presentationml/2006/main" xmlns:c="http://schemas.openxmlformats.org/drawingml/2006/chart" xmlns:dgm="http://schemas.openxmlformats.org/drawingml/2006/diagram" xmlns:o="urn:schemas-microsoft-com:office:office" xmlns:v="urn:schemas-microsoft-com:vml" xmlns:pvml="urn:schemas-microsoft-com:office:powerpoint" xmlns:com="http://schemas.openxmlformats.org/drawingml/2006/compatibility" xmlns:p14="http://schemas.microsoft.com/office/powerpoint/2010/main" xmlns:p15="http://schemas.microsoft.com/office/powerpoint/2012/main" xmlns:ahyp="http://schemas.microsoft.com/office/drawing/2018/hyperlinkcolor">
+<p:sld xmlns:a="http://schemas.openxmlformats.org/drawingml/2006/main" xmlns:r="http://schemas.openxmlformats.org/officeDocument/2006/relationships" xmlns:p="http://schemas.openxmlformats.org/presentationml/2006/main">
   <p:cSld>
     <p:spTree>
       <p:nvGrpSpPr>
-        <p:cNvPr id="60" name="Shape 60"/>
+        <p:cNvPr id="1" name="Shape 60"/>
         <p:cNvGrpSpPr/>
         <p:nvPr/>
       </p:nvGrpSpPr>
@@ -8723,7 +8919,7 @@
           <a:blip r:embed="rId3">
             <a:alphaModFix/>
           </a:blip>
-          <a:srcRect b="98001" l="0" r="0" t="0"/>
+          <a:srcRect b="98001"/>
           <a:stretch/>
         </p:blipFill>
         <p:spPr>
@@ -8762,23 +8958,20 @@
           </a:ln>
         </p:spPr>
         <p:txBody>
-          <a:bodyPr anchorCtr="0" anchor="ctr" bIns="91425" lIns="91425" spcFirstLastPara="1" rIns="91425" wrap="square" tIns="91425">
+          <a:bodyPr spcFirstLastPara="1" wrap="square" lIns="91425" tIns="91425" rIns="91425" bIns="91425" anchor="ctr" anchorCtr="0">
             <a:noAutofit/>
           </a:bodyPr>
           <a:lstStyle/>
           <a:p>
-            <a:pPr indent="0" lvl="0" marL="0" rtl="0" algn="ctr">
-              <a:spcBef>
-                <a:spcPts val="0"/>
-              </a:spcBef>
-              <a:spcAft>
-                <a:spcPts val="0"/>
-              </a:spcAft>
-              <a:buNone/>
-            </a:pPr>
-            <a:r>
-              <a:t/>
-            </a:r>
+            <a:pPr marL="0" lvl="0" indent="0" algn="ctr" rtl="0">
+              <a:spcBef>
+                <a:spcPts val="0"/>
+              </a:spcBef>
+              <a:spcAft>
+                <a:spcPts val="0"/>
+              </a:spcAft>
+              <a:buNone/>
+            </a:pPr>
             <a:endParaRPr/>
           </a:p>
         </p:txBody>
@@ -8803,12 +8996,12 @@
           </a:ln>
         </p:spPr>
         <p:txBody>
-          <a:bodyPr anchorCtr="0" anchor="t" bIns="91425" lIns="91425" spcFirstLastPara="1" rIns="91425" wrap="square" tIns="91425">
+          <a:bodyPr spcFirstLastPara="1" wrap="square" lIns="91425" tIns="91425" rIns="91425" bIns="91425" anchor="t" anchorCtr="0">
             <a:noAutofit/>
           </a:bodyPr>
           <a:lstStyle/>
           <a:p>
-            <a:pPr indent="0" lvl="0" marL="0" rtl="0" algn="l">
+            <a:pPr marL="0" lvl="0" indent="0" algn="l" rtl="0">
               <a:spcBef>
                 <a:spcPts val="0"/>
               </a:spcBef>
@@ -8886,18 +9079,15 @@
             </a:endParaRPr>
           </a:p>
           <a:p>
-            <a:pPr indent="0" lvl="0" marL="0" rtl="0" algn="l">
-              <a:spcBef>
-                <a:spcPts val="0"/>
-              </a:spcBef>
-              <a:spcAft>
-                <a:spcPts val="0"/>
-              </a:spcAft>
-              <a:buNone/>
-            </a:pPr>
-            <a:r>
-              <a:t/>
-            </a:r>
+            <a:pPr marL="0" lvl="0" indent="0" algn="l" rtl="0">
+              <a:spcBef>
+                <a:spcPts val="0"/>
+              </a:spcBef>
+              <a:spcAft>
+                <a:spcPts val="0"/>
+              </a:spcAft>
+              <a:buNone/>
+            </a:pPr>
             <a:endParaRPr sz="1100">
               <a:solidFill>
                 <a:schemeClr val="lt1"/>
@@ -8937,7 +9127,7 @@
             <a:noFill/>
           </a:ln>
           <a:effectLst>
-            <a:outerShdw blurRad="971550" rotWithShape="0" algn="bl" dir="5400000" dist="19050">
+            <a:outerShdw blurRad="971550" dist="19050" dir="5400000" algn="bl" rotWithShape="0">
               <a:schemeClr val="lt1">
                 <a:alpha val="50000"/>
               </a:schemeClr>
@@ -8954,11 +9144,11 @@
 </file>
 
 <file path=ppt/slides/slide3.xml><?xml version="1.0" encoding="utf-8"?>
-<p:sld xmlns:a="http://schemas.openxmlformats.org/drawingml/2006/main" xmlns:r="http://schemas.openxmlformats.org/officeDocument/2006/relationships" xmlns:mc="http://schemas.openxmlformats.org/markup-compatibility/2006" xmlns:mv="urn:schemas-microsoft-com:mac:vml" xmlns:p="http://schemas.openxmlformats.org/presentationml/2006/main" xmlns:c="http://schemas.openxmlformats.org/drawingml/2006/chart" xmlns:dgm="http://schemas.openxmlformats.org/drawingml/2006/diagram" xmlns:o="urn:schemas-microsoft-com:office:office" xmlns:v="urn:schemas-microsoft-com:vml" xmlns:pvml="urn:schemas-microsoft-com:office:powerpoint" xmlns:com="http://schemas.openxmlformats.org/drawingml/2006/compatibility" xmlns:p14="http://schemas.microsoft.com/office/powerpoint/2010/main" xmlns:p15="http://schemas.microsoft.com/office/powerpoint/2012/main" xmlns:ahyp="http://schemas.microsoft.com/office/drawing/2018/hyperlinkcolor">
+<p:sld xmlns:a="http://schemas.openxmlformats.org/drawingml/2006/main" xmlns:r="http://schemas.openxmlformats.org/officeDocument/2006/relationships" xmlns:p="http://schemas.openxmlformats.org/presentationml/2006/main">
   <p:cSld>
     <p:spTree>
       <p:nvGrpSpPr>
-        <p:cNvPr id="68" name="Shape 68"/>
+        <p:cNvPr id="1" name="Shape 68"/>
         <p:cNvGrpSpPr/>
         <p:nvPr/>
       </p:nvGrpSpPr>
@@ -9020,23 +9210,20 @@
           </a:ln>
         </p:spPr>
         <p:txBody>
-          <a:bodyPr anchorCtr="0" anchor="ctr" bIns="91425" lIns="91425" spcFirstLastPara="1" rIns="91425" wrap="square" tIns="91425">
+          <a:bodyPr spcFirstLastPara="1" wrap="square" lIns="91425" tIns="91425" rIns="91425" bIns="91425" anchor="ctr" anchorCtr="0">
             <a:noAutofit/>
           </a:bodyPr>
           <a:lstStyle/>
           <a:p>
-            <a:pPr indent="0" lvl="0" marL="0" rtl="0" algn="ctr">
-              <a:spcBef>
-                <a:spcPts val="0"/>
-              </a:spcBef>
-              <a:spcAft>
-                <a:spcPts val="0"/>
-              </a:spcAft>
-              <a:buNone/>
-            </a:pPr>
-            <a:r>
-              <a:t/>
-            </a:r>
+            <a:pPr marL="0" lvl="0" indent="0" algn="ctr" rtl="0">
+              <a:spcBef>
+                <a:spcPts val="0"/>
+              </a:spcBef>
+              <a:spcAft>
+                <a:spcPts val="0"/>
+              </a:spcAft>
+              <a:buNone/>
+            </a:pPr>
             <a:endParaRPr/>
           </a:p>
         </p:txBody>
@@ -9061,12 +9248,12 @@
           </a:ln>
         </p:spPr>
         <p:txBody>
-          <a:bodyPr anchorCtr="0" anchor="t" bIns="91425" lIns="91425" spcFirstLastPara="1" rIns="91425" wrap="square" tIns="91425">
+          <a:bodyPr spcFirstLastPara="1" wrap="square" lIns="91425" tIns="91425" rIns="91425" bIns="91425" anchor="t" anchorCtr="0">
             <a:noAutofit/>
           </a:bodyPr>
           <a:lstStyle/>
           <a:p>
-            <a:pPr indent="0" lvl="0" marL="0" rtl="0" algn="l">
+            <a:pPr marL="0" lvl="0" indent="0" algn="l" rtl="0">
               <a:lnSpc>
                 <a:spcPct val="115000"/>
               </a:lnSpc>
@@ -9204,11 +9391,11 @@
 </file>
 
 <file path=ppt/slides/slide4.xml><?xml version="1.0" encoding="utf-8"?>
-<p:sld xmlns:a="http://schemas.openxmlformats.org/drawingml/2006/main" xmlns:r="http://schemas.openxmlformats.org/officeDocument/2006/relationships" xmlns:mc="http://schemas.openxmlformats.org/markup-compatibility/2006" xmlns:mv="urn:schemas-microsoft-com:mac:vml" xmlns:p="http://schemas.openxmlformats.org/presentationml/2006/main" xmlns:c="http://schemas.openxmlformats.org/drawingml/2006/chart" xmlns:dgm="http://schemas.openxmlformats.org/drawingml/2006/diagram" xmlns:o="urn:schemas-microsoft-com:office:office" xmlns:v="urn:schemas-microsoft-com:vml" xmlns:pvml="urn:schemas-microsoft-com:office:powerpoint" xmlns:com="http://schemas.openxmlformats.org/drawingml/2006/compatibility" xmlns:p14="http://schemas.microsoft.com/office/powerpoint/2010/main" xmlns:p15="http://schemas.microsoft.com/office/powerpoint/2012/main" xmlns:ahyp="http://schemas.microsoft.com/office/drawing/2018/hyperlinkcolor">
+<p:sld xmlns:a="http://schemas.openxmlformats.org/drawingml/2006/main" xmlns:r="http://schemas.openxmlformats.org/officeDocument/2006/relationships" xmlns:p="http://schemas.openxmlformats.org/presentationml/2006/main">
   <p:cSld>
     <p:spTree>
       <p:nvGrpSpPr>
-        <p:cNvPr id="75" name="Shape 75"/>
+        <p:cNvPr id="1" name="Shape 75"/>
         <p:cNvGrpSpPr/>
         <p:nvPr/>
       </p:nvGrpSpPr>
@@ -9230,7 +9417,7 @@
           <a:blip r:embed="rId3">
             <a:alphaModFix/>
           </a:blip>
-          <a:srcRect b="98001" l="0" r="0" t="0"/>
+          <a:srcRect b="98001"/>
           <a:stretch/>
         </p:blipFill>
         <p:spPr>
@@ -9297,23 +9484,20 @@
           </a:ln>
         </p:spPr>
         <p:txBody>
-          <a:bodyPr anchorCtr="0" anchor="ctr" bIns="91425" lIns="91425" spcFirstLastPara="1" rIns="91425" wrap="square" tIns="91425">
+          <a:bodyPr spcFirstLastPara="1" wrap="square" lIns="91425" tIns="91425" rIns="91425" bIns="91425" anchor="ctr" anchorCtr="0">
             <a:noAutofit/>
           </a:bodyPr>
           <a:lstStyle/>
           <a:p>
-            <a:pPr indent="0" lvl="0" marL="0" rtl="0" algn="ctr">
-              <a:spcBef>
-                <a:spcPts val="0"/>
-              </a:spcBef>
-              <a:spcAft>
-                <a:spcPts val="0"/>
-              </a:spcAft>
-              <a:buNone/>
-            </a:pPr>
-            <a:r>
-              <a:t/>
-            </a:r>
+            <a:pPr marL="0" lvl="0" indent="0" algn="ctr" rtl="0">
+              <a:spcBef>
+                <a:spcPts val="0"/>
+              </a:spcBef>
+              <a:spcAft>
+                <a:spcPts val="0"/>
+              </a:spcAft>
+              <a:buNone/>
+            </a:pPr>
             <a:endParaRPr/>
           </a:p>
         </p:txBody>
@@ -9338,12 +9522,12 @@
           </a:ln>
         </p:spPr>
         <p:txBody>
-          <a:bodyPr anchorCtr="0" anchor="t" bIns="91425" lIns="91425" spcFirstLastPara="1" rIns="91425" wrap="square" tIns="91425">
+          <a:bodyPr spcFirstLastPara="1" wrap="square" lIns="91425" tIns="91425" rIns="91425" bIns="91425" anchor="t" anchorCtr="0">
             <a:noAutofit/>
           </a:bodyPr>
           <a:lstStyle/>
           <a:p>
-            <a:pPr indent="0" lvl="0" marL="0" rtl="0" algn="l">
+            <a:pPr marL="0" lvl="0" indent="0" algn="l" rtl="0">
               <a:lnSpc>
                 <a:spcPct val="115000"/>
               </a:lnSpc>
@@ -9462,11 +9646,11 @@
 </file>
 
 <file path=ppt/slides/slide5.xml><?xml version="1.0" encoding="utf-8"?>
-<p:sld xmlns:a="http://schemas.openxmlformats.org/drawingml/2006/main" xmlns:r="http://schemas.openxmlformats.org/officeDocument/2006/relationships" xmlns:mc="http://schemas.openxmlformats.org/markup-compatibility/2006" xmlns:mv="urn:schemas-microsoft-com:mac:vml" xmlns:p="http://schemas.openxmlformats.org/presentationml/2006/main" xmlns:c="http://schemas.openxmlformats.org/drawingml/2006/chart" xmlns:dgm="http://schemas.openxmlformats.org/drawingml/2006/diagram" xmlns:o="urn:schemas-microsoft-com:office:office" xmlns:v="urn:schemas-microsoft-com:vml" xmlns:pvml="urn:schemas-microsoft-com:office:powerpoint" xmlns:com="http://schemas.openxmlformats.org/drawingml/2006/compatibility" xmlns:p14="http://schemas.microsoft.com/office/powerpoint/2010/main" xmlns:p15="http://schemas.microsoft.com/office/powerpoint/2012/main" xmlns:ahyp="http://schemas.microsoft.com/office/drawing/2018/hyperlinkcolor">
+<p:sld xmlns:a="http://schemas.openxmlformats.org/drawingml/2006/main" xmlns:r="http://schemas.openxmlformats.org/officeDocument/2006/relationships" xmlns:p="http://schemas.openxmlformats.org/presentationml/2006/main">
   <p:cSld>
     <p:spTree>
       <p:nvGrpSpPr>
-        <p:cNvPr id="83" name="Shape 83"/>
+        <p:cNvPr id="1" name="Shape 83"/>
         <p:cNvGrpSpPr/>
         <p:nvPr/>
       </p:nvGrpSpPr>
@@ -9488,7 +9672,7 @@
           <a:blip r:embed="rId3">
             <a:alphaModFix/>
           </a:blip>
-          <a:srcRect b="98001" l="0" r="0" t="0"/>
+          <a:srcRect b="98001"/>
           <a:stretch/>
         </p:blipFill>
         <p:spPr>
@@ -9555,23 +9739,20 @@
           </a:ln>
         </p:spPr>
         <p:txBody>
-          <a:bodyPr anchorCtr="0" anchor="ctr" bIns="91425" lIns="91425" spcFirstLastPara="1" rIns="91425" wrap="square" tIns="91425">
+          <a:bodyPr spcFirstLastPara="1" wrap="square" lIns="91425" tIns="91425" rIns="91425" bIns="91425" anchor="ctr" anchorCtr="0">
             <a:noAutofit/>
           </a:bodyPr>
           <a:lstStyle/>
           <a:p>
-            <a:pPr indent="0" lvl="0" marL="0" rtl="0" algn="ctr">
-              <a:spcBef>
-                <a:spcPts val="0"/>
-              </a:spcBef>
-              <a:spcAft>
-                <a:spcPts val="0"/>
-              </a:spcAft>
-              <a:buNone/>
-            </a:pPr>
-            <a:r>
-              <a:t/>
-            </a:r>
+            <a:pPr marL="0" lvl="0" indent="0" algn="ctr" rtl="0">
+              <a:spcBef>
+                <a:spcPts val="0"/>
+              </a:spcBef>
+              <a:spcAft>
+                <a:spcPts val="0"/>
+              </a:spcAft>
+              <a:buNone/>
+            </a:pPr>
             <a:endParaRPr/>
           </a:p>
         </p:txBody>
@@ -9596,12 +9777,12 @@
           </a:ln>
         </p:spPr>
         <p:txBody>
-          <a:bodyPr anchorCtr="0" anchor="t" bIns="91425" lIns="91425" spcFirstLastPara="1" rIns="91425" wrap="square" tIns="91425">
+          <a:bodyPr spcFirstLastPara="1" wrap="square" lIns="91425" tIns="91425" rIns="91425" bIns="91425" anchor="t" anchorCtr="0">
             <a:noAutofit/>
           </a:bodyPr>
           <a:lstStyle/>
           <a:p>
-            <a:pPr indent="0" lvl="0" marL="0" rtl="0" algn="l">
+            <a:pPr marL="0" lvl="0" indent="0" algn="l" rtl="0">
               <a:lnSpc>
                 <a:spcPct val="115000"/>
               </a:lnSpc>
@@ -9853,11 +10034,11 @@
 </file>
 
 <file path=ppt/slides/slide6.xml><?xml version="1.0" encoding="utf-8"?>
-<p:sld xmlns:a="http://schemas.openxmlformats.org/drawingml/2006/main" xmlns:r="http://schemas.openxmlformats.org/officeDocument/2006/relationships" xmlns:mc="http://schemas.openxmlformats.org/markup-compatibility/2006" xmlns:mv="urn:schemas-microsoft-com:mac:vml" xmlns:p="http://schemas.openxmlformats.org/presentationml/2006/main" xmlns:c="http://schemas.openxmlformats.org/drawingml/2006/chart" xmlns:dgm="http://schemas.openxmlformats.org/drawingml/2006/diagram" xmlns:o="urn:schemas-microsoft-com:office:office" xmlns:v="urn:schemas-microsoft-com:vml" xmlns:pvml="urn:schemas-microsoft-com:office:powerpoint" xmlns:com="http://schemas.openxmlformats.org/drawingml/2006/compatibility" xmlns:p14="http://schemas.microsoft.com/office/powerpoint/2010/main" xmlns:p15="http://schemas.microsoft.com/office/powerpoint/2012/main" xmlns:ahyp="http://schemas.microsoft.com/office/drawing/2018/hyperlinkcolor">
+<p:sld xmlns:a="http://schemas.openxmlformats.org/drawingml/2006/main" xmlns:r="http://schemas.openxmlformats.org/officeDocument/2006/relationships" xmlns:p="http://schemas.openxmlformats.org/presentationml/2006/main">
   <p:cSld>
     <p:spTree>
       <p:nvGrpSpPr>
-        <p:cNvPr id="91" name="Shape 91"/>
+        <p:cNvPr id="1" name="Shape 91"/>
         <p:cNvGrpSpPr/>
         <p:nvPr/>
       </p:nvGrpSpPr>
@@ -9879,7 +10060,7 @@
           <a:blip r:embed="rId3">
             <a:alphaModFix/>
           </a:blip>
-          <a:srcRect b="98001" l="0" r="0" t="0"/>
+          <a:srcRect b="98001"/>
           <a:stretch/>
         </p:blipFill>
         <p:spPr>
@@ -9946,23 +10127,20 @@
           </a:ln>
         </p:spPr>
         <p:txBody>
-          <a:bodyPr anchorCtr="0" anchor="ctr" bIns="91425" lIns="91425" spcFirstLastPara="1" rIns="91425" wrap="square" tIns="91425">
+          <a:bodyPr spcFirstLastPara="1" wrap="square" lIns="91425" tIns="91425" rIns="91425" bIns="91425" anchor="ctr" anchorCtr="0">
             <a:noAutofit/>
           </a:bodyPr>
           <a:lstStyle/>
           <a:p>
-            <a:pPr indent="0" lvl="0" marL="0" rtl="0" algn="ctr">
-              <a:spcBef>
-                <a:spcPts val="0"/>
-              </a:spcBef>
-              <a:spcAft>
-                <a:spcPts val="0"/>
-              </a:spcAft>
-              <a:buNone/>
-            </a:pPr>
-            <a:r>
-              <a:t/>
-            </a:r>
+            <a:pPr marL="0" lvl="0" indent="0" algn="ctr" rtl="0">
+              <a:spcBef>
+                <a:spcPts val="0"/>
+              </a:spcBef>
+              <a:spcAft>
+                <a:spcPts val="0"/>
+              </a:spcAft>
+              <a:buNone/>
+            </a:pPr>
             <a:endParaRPr/>
           </a:p>
         </p:txBody>
@@ -9987,12 +10165,12 @@
           </a:ln>
         </p:spPr>
         <p:txBody>
-          <a:bodyPr anchorCtr="0" anchor="t" bIns="91425" lIns="91425" spcFirstLastPara="1" rIns="91425" wrap="square" tIns="91425">
+          <a:bodyPr spcFirstLastPara="1" wrap="square" lIns="91425" tIns="91425" rIns="91425" bIns="91425" anchor="t" anchorCtr="0">
             <a:noAutofit/>
           </a:bodyPr>
           <a:lstStyle/>
           <a:p>
-            <a:pPr indent="0" lvl="0" marL="0" rtl="0" algn="l">
+            <a:pPr marL="0" lvl="0" indent="0" algn="l" rtl="0">
               <a:lnSpc>
                 <a:spcPct val="115000"/>
               </a:lnSpc>
@@ -10206,11 +10384,11 @@
 </file>
 
 <file path=ppt/slides/slide7.xml><?xml version="1.0" encoding="utf-8"?>
-<p:sld xmlns:a="http://schemas.openxmlformats.org/drawingml/2006/main" xmlns:r="http://schemas.openxmlformats.org/officeDocument/2006/relationships" xmlns:mc="http://schemas.openxmlformats.org/markup-compatibility/2006" xmlns:mv="urn:schemas-microsoft-com:mac:vml" xmlns:p="http://schemas.openxmlformats.org/presentationml/2006/main" xmlns:c="http://schemas.openxmlformats.org/drawingml/2006/chart" xmlns:dgm="http://schemas.openxmlformats.org/drawingml/2006/diagram" xmlns:o="urn:schemas-microsoft-com:office:office" xmlns:v="urn:schemas-microsoft-com:vml" xmlns:pvml="urn:schemas-microsoft-com:office:powerpoint" xmlns:com="http://schemas.openxmlformats.org/drawingml/2006/compatibility" xmlns:p14="http://schemas.microsoft.com/office/powerpoint/2010/main" xmlns:p15="http://schemas.microsoft.com/office/powerpoint/2012/main" xmlns:ahyp="http://schemas.microsoft.com/office/drawing/2018/hyperlinkcolor">
+<p:sld xmlns:a="http://schemas.openxmlformats.org/drawingml/2006/main" xmlns:r="http://schemas.openxmlformats.org/officeDocument/2006/relationships" xmlns:p="http://schemas.openxmlformats.org/presentationml/2006/main">
   <p:cSld>
     <p:spTree>
       <p:nvGrpSpPr>
-        <p:cNvPr id="99" name="Shape 99"/>
+        <p:cNvPr id="1" name="Shape 99"/>
         <p:cNvGrpSpPr/>
         <p:nvPr/>
       </p:nvGrpSpPr>
@@ -10232,7 +10410,7 @@
           <a:blip r:embed="rId3">
             <a:alphaModFix/>
           </a:blip>
-          <a:srcRect b="98001" l="0" r="0" t="0"/>
+          <a:srcRect b="98001"/>
           <a:stretch/>
         </p:blipFill>
         <p:spPr>
@@ -10299,23 +10477,20 @@
           </a:ln>
         </p:spPr>
         <p:txBody>
-          <a:bodyPr anchorCtr="0" anchor="ctr" bIns="91425" lIns="91425" spcFirstLastPara="1" rIns="91425" wrap="square" tIns="91425">
+          <a:bodyPr spcFirstLastPara="1" wrap="square" lIns="91425" tIns="91425" rIns="91425" bIns="91425" anchor="ctr" anchorCtr="0">
             <a:noAutofit/>
           </a:bodyPr>
           <a:lstStyle/>
           <a:p>
-            <a:pPr indent="0" lvl="0" marL="0" rtl="0" algn="ctr">
-              <a:spcBef>
-                <a:spcPts val="0"/>
-              </a:spcBef>
-              <a:spcAft>
-                <a:spcPts val="0"/>
-              </a:spcAft>
-              <a:buNone/>
-            </a:pPr>
-            <a:r>
-              <a:t/>
-            </a:r>
+            <a:pPr marL="0" lvl="0" indent="0" algn="ctr" rtl="0">
+              <a:spcBef>
+                <a:spcPts val="0"/>
+              </a:spcBef>
+              <a:spcAft>
+                <a:spcPts val="0"/>
+              </a:spcAft>
+              <a:buNone/>
+            </a:pPr>
             <a:endParaRPr/>
           </a:p>
         </p:txBody>
@@ -10340,12 +10515,12 @@
           </a:ln>
         </p:spPr>
         <p:txBody>
-          <a:bodyPr anchorCtr="0" anchor="t" bIns="91425" lIns="91425" spcFirstLastPara="1" rIns="91425" wrap="square" tIns="91425">
+          <a:bodyPr spcFirstLastPara="1" wrap="square" lIns="91425" tIns="91425" rIns="91425" bIns="91425" anchor="t" anchorCtr="0">
             <a:noAutofit/>
           </a:bodyPr>
           <a:lstStyle/>
           <a:p>
-            <a:pPr indent="0" lvl="0" marL="0" rtl="0" algn="l">
+            <a:pPr marL="0" lvl="0" indent="0" algn="l" rtl="0">
               <a:lnSpc>
                 <a:spcPct val="115000"/>
               </a:lnSpc>
@@ -10432,11 +10607,11 @@
 </file>
 
 <file path=ppt/slides/slide8.xml><?xml version="1.0" encoding="utf-8"?>
-<p:sld xmlns:a="http://schemas.openxmlformats.org/drawingml/2006/main" xmlns:r="http://schemas.openxmlformats.org/officeDocument/2006/relationships" xmlns:mc="http://schemas.openxmlformats.org/markup-compatibility/2006" xmlns:mv="urn:schemas-microsoft-com:mac:vml" xmlns:p="http://schemas.openxmlformats.org/presentationml/2006/main" xmlns:c="http://schemas.openxmlformats.org/drawingml/2006/chart" xmlns:dgm="http://schemas.openxmlformats.org/drawingml/2006/diagram" xmlns:o="urn:schemas-microsoft-com:office:office" xmlns:v="urn:schemas-microsoft-com:vml" xmlns:pvml="urn:schemas-microsoft-com:office:powerpoint" xmlns:com="http://schemas.openxmlformats.org/drawingml/2006/compatibility" xmlns:p14="http://schemas.microsoft.com/office/powerpoint/2010/main" xmlns:p15="http://schemas.microsoft.com/office/powerpoint/2012/main" xmlns:ahyp="http://schemas.microsoft.com/office/drawing/2018/hyperlinkcolor">
+<p:sld xmlns:a="http://schemas.openxmlformats.org/drawingml/2006/main" xmlns:r="http://schemas.openxmlformats.org/officeDocument/2006/relationships" xmlns:p="http://schemas.openxmlformats.org/presentationml/2006/main">
   <p:cSld>
     <p:spTree>
       <p:nvGrpSpPr>
-        <p:cNvPr id="107" name="Shape 107"/>
+        <p:cNvPr id="1" name="Shape 107"/>
         <p:cNvGrpSpPr/>
         <p:nvPr/>
       </p:nvGrpSpPr>
@@ -10458,7 +10633,7 @@
           <a:blip r:embed="rId3">
             <a:alphaModFix/>
           </a:blip>
-          <a:srcRect b="98001" l="0" r="0" t="0"/>
+          <a:srcRect b="98001"/>
           <a:stretch/>
         </p:blipFill>
         <p:spPr>
@@ -10525,23 +10700,20 @@
           </a:ln>
         </p:spPr>
         <p:txBody>
-          <a:bodyPr anchorCtr="0" anchor="ctr" bIns="91425" lIns="91425" spcFirstLastPara="1" rIns="91425" wrap="square" tIns="91425">
+          <a:bodyPr spcFirstLastPara="1" wrap="square" lIns="91425" tIns="91425" rIns="91425" bIns="91425" anchor="ctr" anchorCtr="0">
             <a:noAutofit/>
           </a:bodyPr>
           <a:lstStyle/>
           <a:p>
-            <a:pPr indent="0" lvl="0" marL="0" rtl="0" algn="ctr">
-              <a:spcBef>
-                <a:spcPts val="0"/>
-              </a:spcBef>
-              <a:spcAft>
-                <a:spcPts val="0"/>
-              </a:spcAft>
-              <a:buNone/>
-            </a:pPr>
-            <a:r>
-              <a:t/>
-            </a:r>
+            <a:pPr marL="0" lvl="0" indent="0" algn="ctr" rtl="0">
+              <a:spcBef>
+                <a:spcPts val="0"/>
+              </a:spcBef>
+              <a:spcAft>
+                <a:spcPts val="0"/>
+              </a:spcAft>
+              <a:buNone/>
+            </a:pPr>
             <a:endParaRPr/>
           </a:p>
         </p:txBody>
@@ -10566,12 +10738,12 @@
           </a:ln>
         </p:spPr>
         <p:txBody>
-          <a:bodyPr anchorCtr="0" anchor="t" bIns="91425" lIns="91425" spcFirstLastPara="1" rIns="91425" wrap="square" tIns="91425">
+          <a:bodyPr spcFirstLastPara="1" wrap="square" lIns="91425" tIns="91425" rIns="91425" bIns="91425" anchor="t" anchorCtr="0">
             <a:noAutofit/>
           </a:bodyPr>
           <a:lstStyle/>
           <a:p>
-            <a:pPr indent="0" lvl="0" marL="0" rtl="0" algn="l">
+            <a:pPr marL="0" lvl="0" indent="0" algn="l" rtl="0">
               <a:lnSpc>
                 <a:spcPct val="115000"/>
               </a:lnSpc>
@@ -10747,11 +10919,11 @@
 </file>
 
 <file path=ppt/slides/slide9.xml><?xml version="1.0" encoding="utf-8"?>
-<p:sld xmlns:a="http://schemas.openxmlformats.org/drawingml/2006/main" xmlns:r="http://schemas.openxmlformats.org/officeDocument/2006/relationships" xmlns:mc="http://schemas.openxmlformats.org/markup-compatibility/2006" xmlns:mv="urn:schemas-microsoft-com:mac:vml" xmlns:p="http://schemas.openxmlformats.org/presentationml/2006/main" xmlns:c="http://schemas.openxmlformats.org/drawingml/2006/chart" xmlns:dgm="http://schemas.openxmlformats.org/drawingml/2006/diagram" xmlns:o="urn:schemas-microsoft-com:office:office" xmlns:v="urn:schemas-microsoft-com:vml" xmlns:pvml="urn:schemas-microsoft-com:office:powerpoint" xmlns:com="http://schemas.openxmlformats.org/drawingml/2006/compatibility" xmlns:p14="http://schemas.microsoft.com/office/powerpoint/2010/main" xmlns:p15="http://schemas.microsoft.com/office/powerpoint/2012/main" xmlns:ahyp="http://schemas.microsoft.com/office/drawing/2018/hyperlinkcolor">
+<p:sld xmlns:a="http://schemas.openxmlformats.org/drawingml/2006/main" xmlns:r="http://schemas.openxmlformats.org/officeDocument/2006/relationships" xmlns:p="http://schemas.openxmlformats.org/presentationml/2006/main">
   <p:cSld>
     <p:spTree>
       <p:nvGrpSpPr>
-        <p:cNvPr id="115" name="Shape 115"/>
+        <p:cNvPr id="1" name="Shape 115"/>
         <p:cNvGrpSpPr/>
         <p:nvPr/>
       </p:nvGrpSpPr>
@@ -10773,7 +10945,7 @@
           <a:blip r:embed="rId3">
             <a:alphaModFix/>
           </a:blip>
-          <a:srcRect b="98001" l="0" r="0" t="0"/>
+          <a:srcRect b="98001"/>
           <a:stretch/>
         </p:blipFill>
         <p:spPr>
@@ -10840,23 +11012,20 @@
           </a:ln>
         </p:spPr>
         <p:txBody>
-          <a:bodyPr anchorCtr="0" anchor="ctr" bIns="91425" lIns="91425" spcFirstLastPara="1" rIns="91425" wrap="square" tIns="91425">
+          <a:bodyPr spcFirstLastPara="1" wrap="square" lIns="91425" tIns="91425" rIns="91425" bIns="91425" anchor="ctr" anchorCtr="0">
             <a:noAutofit/>
           </a:bodyPr>
           <a:lstStyle/>
           <a:p>
-            <a:pPr indent="0" lvl="0" marL="0" rtl="0" algn="ctr">
-              <a:spcBef>
-                <a:spcPts val="0"/>
-              </a:spcBef>
-              <a:spcAft>
-                <a:spcPts val="0"/>
-              </a:spcAft>
-              <a:buNone/>
-            </a:pPr>
-            <a:r>
-              <a:t/>
-            </a:r>
+            <a:pPr marL="0" lvl="0" indent="0" algn="ctr" rtl="0">
+              <a:spcBef>
+                <a:spcPts val="0"/>
+              </a:spcBef>
+              <a:spcAft>
+                <a:spcPts val="0"/>
+              </a:spcAft>
+              <a:buNone/>
+            </a:pPr>
             <a:endParaRPr/>
           </a:p>
         </p:txBody>
@@ -10881,12 +11050,12 @@
           </a:ln>
         </p:spPr>
         <p:txBody>
-          <a:bodyPr anchorCtr="0" anchor="t" bIns="91425" lIns="91425" spcFirstLastPara="1" rIns="91425" wrap="square" tIns="91425">
+          <a:bodyPr spcFirstLastPara="1" wrap="square" lIns="91425" tIns="91425" rIns="91425" bIns="91425" anchor="t" anchorCtr="0">
             <a:noAutofit/>
           </a:bodyPr>
           <a:lstStyle/>
           <a:p>
-            <a:pPr indent="0" lvl="0" marL="0" rtl="0" algn="l">
+            <a:pPr marL="0" lvl="0" indent="0" algn="l" rtl="0">
               <a:lnSpc>
                 <a:spcPct val="115000"/>
               </a:lnSpc>
@@ -11100,7 +11269,7 @@
 </file>
 
 <file path=ppt/theme/theme1.xml><?xml version="1.0" encoding="utf-8"?>
-<a:theme xmlns:a="http://schemas.openxmlformats.org/drawingml/2006/main" xmlns:r="http://schemas.openxmlformats.org/officeDocument/2006/relationships" name="Simple Light">
+<a:theme xmlns:a="http://schemas.openxmlformats.org/drawingml/2006/main" name="Simple Light">
   <a:themeElements>
     <a:clrScheme name="Simple Light">
       <a:dk1>
@@ -11375,11 +11544,13 @@
       </a:bgFillStyleLst>
     </a:fmtScheme>
   </a:themeElements>
+  <a:objectDefaults/>
+  <a:extraClrSchemeLst/>
 </a:theme>
 </file>
 
 <file path=ppt/theme/theme2.xml><?xml version="1.0" encoding="utf-8"?>
-<a:theme xmlns:a="http://schemas.openxmlformats.org/drawingml/2006/main" xmlns:r="http://schemas.openxmlformats.org/officeDocument/2006/relationships">
+<a:theme xmlns:a="http://schemas.openxmlformats.org/drawingml/2006/main">
   <a:themeElements>
     <a:clrScheme name="Default">
       <a:dk1>
@@ -11654,5 +11825,7 @@
       </a:bgFillStyleLst>
     </a:fmtScheme>
   </a:themeElements>
+  <a:objectDefaults/>
+  <a:extraClrSchemeLst/>
 </a:theme>
 </file>
--- a/docs/Kisan_Mitra_Submission.pptx
+++ b/docs/Kisan_Mitra_Submission.pptx
@@ -9,18 +9,18 @@
   </p:notesMasterIdLst>
   <p:sldIdLst>
     <p:sldId id="256" r:id="rId2"/>
-    <p:sldId id="257" r:id="rId3"/>
-    <p:sldId id="258" r:id="rId4"/>
-    <p:sldId id="259" r:id="rId5"/>
-    <p:sldId id="260" r:id="rId6"/>
-    <p:sldId id="261" r:id="rId7"/>
-    <p:sldId id="262" r:id="rId8"/>
-    <p:sldId id="263" r:id="rId9"/>
-    <p:sldId id="264" r:id="rId10"/>
-    <p:sldId id="265" r:id="rId11"/>
-    <p:sldId id="266" r:id="rId12"/>
-    <p:sldId id="267" r:id="rId13"/>
-    <p:sldId id="268" r:id="rId14"/>
+    <p:sldId id="258" r:id="rId3"/>
+    <p:sldId id="259" r:id="rId4"/>
+    <p:sldId id="260" r:id="rId5"/>
+    <p:sldId id="261" r:id="rId6"/>
+    <p:sldId id="262" r:id="rId7"/>
+    <p:sldId id="263" r:id="rId8"/>
+    <p:sldId id="264" r:id="rId9"/>
+    <p:sldId id="265" r:id="rId10"/>
+    <p:sldId id="266" r:id="rId11"/>
+    <p:sldId id="267" r:id="rId12"/>
+    <p:sldId id="268" r:id="rId13"/>
+    <p:sldId id="272" r:id="rId14"/>
     <p:sldId id="269" r:id="rId15"/>
     <p:sldId id="270" r:id="rId16"/>
     <p:sldId id="271" r:id="rId17"/>
@@ -842,7 +842,7 @@
   <p:cSld>
     <p:spTree>
       <p:nvGrpSpPr>
-        <p:cNvPr id="1" name="Shape 120"/>
+        <p:cNvPr id="1" name="Shape 128"/>
         <p:cNvGrpSpPr/>
         <p:nvPr/>
       </p:nvGrpSpPr>
@@ -856,7 +856,7 @@
       </p:grpSpPr>
       <p:sp>
         <p:nvSpPr>
-          <p:cNvPr id="121" name="Google Shape;121;g3fb085bff3c_0_41:notes"/>
+          <p:cNvPr id="129" name="Google Shape;129;g3fb085bff3c_0_46:notes"/>
           <p:cNvSpPr>
             <a:spLocks noGrp="1" noRot="1" noChangeAspect="1"/>
           </p:cNvSpPr>
@@ -897,7 +897,7 @@
       </p:sp>
       <p:sp>
         <p:nvSpPr>
-          <p:cNvPr id="122" name="Google Shape;122;g3fb085bff3c_0_41:notes"/>
+          <p:cNvPr id="130" name="Google Shape;130;g3fb085bff3c_0_46:notes"/>
           <p:cNvSpPr txBox="1">
             <a:spLocks noGrp="1"/>
           </p:cNvSpPr>
@@ -942,110 +942,6 @@
 </file>
 
 <file path=ppt/notesSlides/notesSlide11.xml><?xml version="1.0" encoding="utf-8"?>
-<p:notes xmlns:a="http://schemas.openxmlformats.org/drawingml/2006/main" xmlns:r="http://schemas.openxmlformats.org/officeDocument/2006/relationships" xmlns:p="http://schemas.openxmlformats.org/presentationml/2006/main" showMasterSp="0" showMasterPhAnim="0">
-  <p:cSld>
-    <p:spTree>
-      <p:nvGrpSpPr>
-        <p:cNvPr id="1" name="Shape 128"/>
-        <p:cNvGrpSpPr/>
-        <p:nvPr/>
-      </p:nvGrpSpPr>
-      <p:grpSpPr>
-        <a:xfrm>
-          <a:off x="0" y="0"/>
-          <a:ext cx="0" cy="0"/>
-          <a:chOff x="0" y="0"/>
-          <a:chExt cx="0" cy="0"/>
-        </a:xfrm>
-      </p:grpSpPr>
-      <p:sp>
-        <p:nvSpPr>
-          <p:cNvPr id="129" name="Google Shape;129;g3fb085bff3c_0_46:notes"/>
-          <p:cNvSpPr>
-            <a:spLocks noGrp="1" noRot="1" noChangeAspect="1"/>
-          </p:cNvSpPr>
-          <p:nvPr>
-            <p:ph type="sldImg" idx="2"/>
-          </p:nvPr>
-        </p:nvSpPr>
-        <p:spPr>
-          <a:xfrm>
-            <a:off x="381300" y="685800"/>
-            <a:ext cx="6096000" cy="3429000"/>
-          </a:xfrm>
-          <a:custGeom>
-            <a:avLst/>
-            <a:gdLst/>
-            <a:ahLst/>
-            <a:cxnLst/>
-            <a:rect l="l" t="t" r="r" b="b"/>
-            <a:pathLst>
-              <a:path w="120000" h="120000" extrusionOk="0">
-                <a:moveTo>
-                  <a:pt x="0" y="0"/>
-                </a:moveTo>
-                <a:lnTo>
-                  <a:pt x="120000" y="0"/>
-                </a:lnTo>
-                <a:lnTo>
-                  <a:pt x="120000" y="120000"/>
-                </a:lnTo>
-                <a:lnTo>
-                  <a:pt x="0" y="120000"/>
-                </a:lnTo>
-                <a:close/>
-              </a:path>
-            </a:pathLst>
-          </a:custGeom>
-        </p:spPr>
-      </p:sp>
-      <p:sp>
-        <p:nvSpPr>
-          <p:cNvPr id="130" name="Google Shape;130;g3fb085bff3c_0_46:notes"/>
-          <p:cNvSpPr txBox="1">
-            <a:spLocks noGrp="1"/>
-          </p:cNvSpPr>
-          <p:nvPr>
-            <p:ph type="body" idx="1"/>
-          </p:nvPr>
-        </p:nvSpPr>
-        <p:spPr>
-          <a:xfrm>
-            <a:off x="685800" y="4343400"/>
-            <a:ext cx="5486400" cy="4114800"/>
-          </a:xfrm>
-          <a:prstGeom prst="rect">
-            <a:avLst/>
-          </a:prstGeom>
-        </p:spPr>
-        <p:txBody>
-          <a:bodyPr spcFirstLastPara="1" wrap="square" lIns="91425" tIns="91425" rIns="91425" bIns="91425" anchor="t" anchorCtr="0">
-            <a:noAutofit/>
-          </a:bodyPr>
-          <a:lstStyle/>
-          <a:p>
-            <a:pPr marL="0" lvl="0" indent="0" algn="l" rtl="0">
-              <a:spcBef>
-                <a:spcPts val="0"/>
-              </a:spcBef>
-              <a:spcAft>
-                <a:spcPts val="0"/>
-              </a:spcAft>
-              <a:buNone/>
-            </a:pPr>
-            <a:endParaRPr/>
-          </a:p>
-        </p:txBody>
-      </p:sp>
-    </p:spTree>
-  </p:cSld>
-  <p:clrMapOvr>
-    <a:masterClrMapping/>
-  </p:clrMapOvr>
-</p:notes>
-</file>
-
-<file path=ppt/notesSlides/notesSlide12.xml><?xml version="1.0" encoding="utf-8"?>
 <p:notes xmlns:a="http://schemas.openxmlformats.org/drawingml/2006/main" xmlns:r="http://schemas.openxmlformats.org/officeDocument/2006/relationships" xmlns:p="http://schemas.openxmlformats.org/presentationml/2006/main" showMasterSp="0" showMasterPhAnim="0">
   <p:cSld>
     <p:spTree>
@@ -1106,6 +1002,110 @@
       <p:sp>
         <p:nvSpPr>
           <p:cNvPr id="138" name="Google Shape;138;g3fb085bff3c_0_51:notes"/>
+          <p:cNvSpPr txBox="1">
+            <a:spLocks noGrp="1"/>
+          </p:cNvSpPr>
+          <p:nvPr>
+            <p:ph type="body" idx="1"/>
+          </p:nvPr>
+        </p:nvSpPr>
+        <p:spPr>
+          <a:xfrm>
+            <a:off x="685800" y="4343400"/>
+            <a:ext cx="5486400" cy="4114800"/>
+          </a:xfrm>
+          <a:prstGeom prst="rect">
+            <a:avLst/>
+          </a:prstGeom>
+        </p:spPr>
+        <p:txBody>
+          <a:bodyPr spcFirstLastPara="1" wrap="square" lIns="91425" tIns="91425" rIns="91425" bIns="91425" anchor="t" anchorCtr="0">
+            <a:noAutofit/>
+          </a:bodyPr>
+          <a:lstStyle/>
+          <a:p>
+            <a:pPr marL="0" lvl="0" indent="0" algn="l" rtl="0">
+              <a:spcBef>
+                <a:spcPts val="0"/>
+              </a:spcBef>
+              <a:spcAft>
+                <a:spcPts val="0"/>
+              </a:spcAft>
+              <a:buNone/>
+            </a:pPr>
+            <a:endParaRPr/>
+          </a:p>
+        </p:txBody>
+      </p:sp>
+    </p:spTree>
+  </p:cSld>
+  <p:clrMapOvr>
+    <a:masterClrMapping/>
+  </p:clrMapOvr>
+</p:notes>
+</file>
+
+<file path=ppt/notesSlides/notesSlide12.xml><?xml version="1.0" encoding="utf-8"?>
+<p:notes xmlns:a="http://schemas.openxmlformats.org/drawingml/2006/main" xmlns:r="http://schemas.openxmlformats.org/officeDocument/2006/relationships" xmlns:p="http://schemas.openxmlformats.org/presentationml/2006/main" showMasterSp="0" showMasterPhAnim="0">
+  <p:cSld>
+    <p:spTree>
+      <p:nvGrpSpPr>
+        <p:cNvPr id="1" name="Shape 144"/>
+        <p:cNvGrpSpPr/>
+        <p:nvPr/>
+      </p:nvGrpSpPr>
+      <p:grpSpPr>
+        <a:xfrm>
+          <a:off x="0" y="0"/>
+          <a:ext cx="0" cy="0"/>
+          <a:chOff x="0" y="0"/>
+          <a:chExt cx="0" cy="0"/>
+        </a:xfrm>
+      </p:grpSpPr>
+      <p:sp>
+        <p:nvSpPr>
+          <p:cNvPr id="145" name="Google Shape;145;g3fb085bff3c_0_56:notes"/>
+          <p:cNvSpPr>
+            <a:spLocks noGrp="1" noRot="1" noChangeAspect="1"/>
+          </p:cNvSpPr>
+          <p:nvPr>
+            <p:ph type="sldImg" idx="2"/>
+          </p:nvPr>
+        </p:nvSpPr>
+        <p:spPr>
+          <a:xfrm>
+            <a:off x="381000" y="685800"/>
+            <a:ext cx="6096000" cy="3429000"/>
+          </a:xfrm>
+          <a:custGeom>
+            <a:avLst/>
+            <a:gdLst/>
+            <a:ahLst/>
+            <a:cxnLst/>
+            <a:rect l="l" t="t" r="r" b="b"/>
+            <a:pathLst>
+              <a:path w="120000" h="120000" extrusionOk="0">
+                <a:moveTo>
+                  <a:pt x="0" y="0"/>
+                </a:moveTo>
+                <a:lnTo>
+                  <a:pt x="120000" y="0"/>
+                </a:lnTo>
+                <a:lnTo>
+                  <a:pt x="120000" y="120000"/>
+                </a:lnTo>
+                <a:lnTo>
+                  <a:pt x="0" y="120000"/>
+                </a:lnTo>
+                <a:close/>
+              </a:path>
+            </a:pathLst>
+          </a:custGeom>
+        </p:spPr>
+      </p:sp>
+      <p:sp>
+        <p:nvSpPr>
+          <p:cNvPr id="146" name="Google Shape;146;g3fb085bff3c_0_56:notes"/>
           <p:cNvSpPr txBox="1">
             <a:spLocks noGrp="1"/>
           </p:cNvSpPr>
@@ -1570,7 +1570,7 @@
   <p:cSld>
     <p:spTree>
       <p:nvGrpSpPr>
-        <p:cNvPr id="1" name="Shape 57"/>
+        <p:cNvPr id="1" name="Shape 65"/>
         <p:cNvGrpSpPr/>
         <p:nvPr/>
       </p:nvGrpSpPr>
@@ -1584,7 +1584,7 @@
       </p:grpSpPr>
       <p:sp>
         <p:nvSpPr>
-          <p:cNvPr id="58" name="Google Shape;58;g3fb085bff3c_0_134:notes"/>
+          <p:cNvPr id="66" name="Google Shape;66;g3fb085bff3c_0_4:notes"/>
           <p:cNvSpPr>
             <a:spLocks noGrp="1" noRot="1" noChangeAspect="1"/>
           </p:cNvSpPr>
@@ -1625,7 +1625,7 @@
       </p:sp>
       <p:sp>
         <p:nvSpPr>
-          <p:cNvPr id="59" name="Google Shape;59;g3fb085bff3c_0_134:notes"/>
+          <p:cNvPr id="67" name="Google Shape;67;g3fb085bff3c_0_4:notes"/>
           <p:cNvSpPr txBox="1">
             <a:spLocks noGrp="1"/>
           </p:cNvSpPr>
@@ -1670,110 +1670,6 @@
 </file>
 
 <file path=ppt/notesSlides/notesSlide3.xml><?xml version="1.0" encoding="utf-8"?>
-<p:notes xmlns:a="http://schemas.openxmlformats.org/drawingml/2006/main" xmlns:r="http://schemas.openxmlformats.org/officeDocument/2006/relationships" xmlns:p="http://schemas.openxmlformats.org/presentationml/2006/main" showMasterSp="0" showMasterPhAnim="0">
-  <p:cSld>
-    <p:spTree>
-      <p:nvGrpSpPr>
-        <p:cNvPr id="1" name="Shape 65"/>
-        <p:cNvGrpSpPr/>
-        <p:nvPr/>
-      </p:nvGrpSpPr>
-      <p:grpSpPr>
-        <a:xfrm>
-          <a:off x="0" y="0"/>
-          <a:ext cx="0" cy="0"/>
-          <a:chOff x="0" y="0"/>
-          <a:chExt cx="0" cy="0"/>
-        </a:xfrm>
-      </p:grpSpPr>
-      <p:sp>
-        <p:nvSpPr>
-          <p:cNvPr id="66" name="Google Shape;66;g3fb085bff3c_0_4:notes"/>
-          <p:cNvSpPr>
-            <a:spLocks noGrp="1" noRot="1" noChangeAspect="1"/>
-          </p:cNvSpPr>
-          <p:nvPr>
-            <p:ph type="sldImg" idx="2"/>
-          </p:nvPr>
-        </p:nvSpPr>
-        <p:spPr>
-          <a:xfrm>
-            <a:off x="381300" y="685800"/>
-            <a:ext cx="6096000" cy="3429000"/>
-          </a:xfrm>
-          <a:custGeom>
-            <a:avLst/>
-            <a:gdLst/>
-            <a:ahLst/>
-            <a:cxnLst/>
-            <a:rect l="l" t="t" r="r" b="b"/>
-            <a:pathLst>
-              <a:path w="120000" h="120000" extrusionOk="0">
-                <a:moveTo>
-                  <a:pt x="0" y="0"/>
-                </a:moveTo>
-                <a:lnTo>
-                  <a:pt x="120000" y="0"/>
-                </a:lnTo>
-                <a:lnTo>
-                  <a:pt x="120000" y="120000"/>
-                </a:lnTo>
-                <a:lnTo>
-                  <a:pt x="0" y="120000"/>
-                </a:lnTo>
-                <a:close/>
-              </a:path>
-            </a:pathLst>
-          </a:custGeom>
-        </p:spPr>
-      </p:sp>
-      <p:sp>
-        <p:nvSpPr>
-          <p:cNvPr id="67" name="Google Shape;67;g3fb085bff3c_0_4:notes"/>
-          <p:cNvSpPr txBox="1">
-            <a:spLocks noGrp="1"/>
-          </p:cNvSpPr>
-          <p:nvPr>
-            <p:ph type="body" idx="1"/>
-          </p:nvPr>
-        </p:nvSpPr>
-        <p:spPr>
-          <a:xfrm>
-            <a:off x="685800" y="4343400"/>
-            <a:ext cx="5486400" cy="4114800"/>
-          </a:xfrm>
-          <a:prstGeom prst="rect">
-            <a:avLst/>
-          </a:prstGeom>
-        </p:spPr>
-        <p:txBody>
-          <a:bodyPr spcFirstLastPara="1" wrap="square" lIns="91425" tIns="91425" rIns="91425" bIns="91425" anchor="t" anchorCtr="0">
-            <a:noAutofit/>
-          </a:bodyPr>
-          <a:lstStyle/>
-          <a:p>
-            <a:pPr marL="0" lvl="0" indent="0" algn="l" rtl="0">
-              <a:spcBef>
-                <a:spcPts val="0"/>
-              </a:spcBef>
-              <a:spcAft>
-                <a:spcPts val="0"/>
-              </a:spcAft>
-              <a:buNone/>
-            </a:pPr>
-            <a:endParaRPr/>
-          </a:p>
-        </p:txBody>
-      </p:sp>
-    </p:spTree>
-  </p:cSld>
-  <p:clrMapOvr>
-    <a:masterClrMapping/>
-  </p:clrMapOvr>
-</p:notes>
-</file>
-
-<file path=ppt/notesSlides/notesSlide4.xml><?xml version="1.0" encoding="utf-8"?>
 <p:notes xmlns:a="http://schemas.openxmlformats.org/drawingml/2006/main" xmlns:r="http://schemas.openxmlformats.org/officeDocument/2006/relationships" xmlns:p="http://schemas.openxmlformats.org/presentationml/2006/main" showMasterSp="0" showMasterPhAnim="0">
   <p:cSld>
     <p:spTree>
@@ -1877,7 +1773,7 @@
 </p:notes>
 </file>
 
-<file path=ppt/notesSlides/notesSlide5.xml><?xml version="1.0" encoding="utf-8"?>
+<file path=ppt/notesSlides/notesSlide4.xml><?xml version="1.0" encoding="utf-8"?>
 <p:notes xmlns:a="http://schemas.openxmlformats.org/drawingml/2006/main" xmlns:r="http://schemas.openxmlformats.org/officeDocument/2006/relationships" xmlns:p="http://schemas.openxmlformats.org/presentationml/2006/main" showMasterSp="0" showMasterPhAnim="0">
   <p:cSld>
     <p:spTree>
@@ -1981,7 +1877,7 @@
 </p:notes>
 </file>
 
-<file path=ppt/notesSlides/notesSlide6.xml><?xml version="1.0" encoding="utf-8"?>
+<file path=ppt/notesSlides/notesSlide5.xml><?xml version="1.0" encoding="utf-8"?>
 <p:notes xmlns:a="http://schemas.openxmlformats.org/drawingml/2006/main" xmlns:r="http://schemas.openxmlformats.org/officeDocument/2006/relationships" xmlns:p="http://schemas.openxmlformats.org/presentationml/2006/main" showMasterSp="0" showMasterPhAnim="0">
   <p:cSld>
     <p:spTree>
@@ -2010,7 +1906,7 @@
         </p:nvSpPr>
         <p:spPr>
           <a:xfrm>
-            <a:off x="381300" y="685800"/>
+            <a:off x="381000" y="685800"/>
             <a:ext cx="6096000" cy="3429000"/>
           </a:xfrm>
           <a:custGeom>
@@ -2085,7 +1981,7 @@
 </p:notes>
 </file>
 
-<file path=ppt/notesSlides/notesSlide7.xml><?xml version="1.0" encoding="utf-8"?>
+<file path=ppt/notesSlides/notesSlide6.xml><?xml version="1.0" encoding="utf-8"?>
 <p:notes xmlns:a="http://schemas.openxmlformats.org/drawingml/2006/main" xmlns:r="http://schemas.openxmlformats.org/officeDocument/2006/relationships" xmlns:p="http://schemas.openxmlformats.org/presentationml/2006/main" showMasterSp="0" showMasterPhAnim="0">
   <p:cSld>
     <p:spTree>
@@ -2189,7 +2085,7 @@
 </p:notes>
 </file>
 
-<file path=ppt/notesSlides/notesSlide8.xml><?xml version="1.0" encoding="utf-8"?>
+<file path=ppt/notesSlides/notesSlide7.xml><?xml version="1.0" encoding="utf-8"?>
 <p:notes xmlns:a="http://schemas.openxmlformats.org/drawingml/2006/main" xmlns:r="http://schemas.openxmlformats.org/officeDocument/2006/relationships" xmlns:p="http://schemas.openxmlformats.org/presentationml/2006/main" showMasterSp="0" showMasterPhAnim="0">
   <p:cSld>
     <p:spTree>
@@ -2218,7 +2114,7 @@
         </p:nvSpPr>
         <p:spPr>
           <a:xfrm>
-            <a:off x="381300" y="685800"/>
+            <a:off x="381000" y="685800"/>
             <a:ext cx="6096000" cy="3429000"/>
           </a:xfrm>
           <a:custGeom>
@@ -2293,7 +2189,7 @@
 </p:notes>
 </file>
 
-<file path=ppt/notesSlides/notesSlide9.xml><?xml version="1.0" encoding="utf-8"?>
+<file path=ppt/notesSlides/notesSlide8.xml><?xml version="1.0" encoding="utf-8"?>
 <p:notes xmlns:a="http://schemas.openxmlformats.org/drawingml/2006/main" xmlns:r="http://schemas.openxmlformats.org/officeDocument/2006/relationships" xmlns:p="http://schemas.openxmlformats.org/presentationml/2006/main" showMasterSp="0" showMasterPhAnim="0">
   <p:cSld>
     <p:spTree>
@@ -2354,6 +2250,110 @@
       <p:sp>
         <p:nvSpPr>
           <p:cNvPr id="114" name="Google Shape;114;g3fb085bff3c_0_36:notes"/>
+          <p:cNvSpPr txBox="1">
+            <a:spLocks noGrp="1"/>
+          </p:cNvSpPr>
+          <p:nvPr>
+            <p:ph type="body" idx="1"/>
+          </p:nvPr>
+        </p:nvSpPr>
+        <p:spPr>
+          <a:xfrm>
+            <a:off x="685800" y="4343400"/>
+            <a:ext cx="5486400" cy="4114800"/>
+          </a:xfrm>
+          <a:prstGeom prst="rect">
+            <a:avLst/>
+          </a:prstGeom>
+        </p:spPr>
+        <p:txBody>
+          <a:bodyPr spcFirstLastPara="1" wrap="square" lIns="91425" tIns="91425" rIns="91425" bIns="91425" anchor="t" anchorCtr="0">
+            <a:noAutofit/>
+          </a:bodyPr>
+          <a:lstStyle/>
+          <a:p>
+            <a:pPr marL="0" lvl="0" indent="0" algn="l" rtl="0">
+              <a:spcBef>
+                <a:spcPts val="0"/>
+              </a:spcBef>
+              <a:spcAft>
+                <a:spcPts val="0"/>
+              </a:spcAft>
+              <a:buNone/>
+            </a:pPr>
+            <a:endParaRPr/>
+          </a:p>
+        </p:txBody>
+      </p:sp>
+    </p:spTree>
+  </p:cSld>
+  <p:clrMapOvr>
+    <a:masterClrMapping/>
+  </p:clrMapOvr>
+</p:notes>
+</file>
+
+<file path=ppt/notesSlides/notesSlide9.xml><?xml version="1.0" encoding="utf-8"?>
+<p:notes xmlns:a="http://schemas.openxmlformats.org/drawingml/2006/main" xmlns:r="http://schemas.openxmlformats.org/officeDocument/2006/relationships" xmlns:p="http://schemas.openxmlformats.org/presentationml/2006/main" showMasterSp="0" showMasterPhAnim="0">
+  <p:cSld>
+    <p:spTree>
+      <p:nvGrpSpPr>
+        <p:cNvPr id="1" name="Shape 120"/>
+        <p:cNvGrpSpPr/>
+        <p:nvPr/>
+      </p:nvGrpSpPr>
+      <p:grpSpPr>
+        <a:xfrm>
+          <a:off x="0" y="0"/>
+          <a:ext cx="0" cy="0"/>
+          <a:chOff x="0" y="0"/>
+          <a:chExt cx="0" cy="0"/>
+        </a:xfrm>
+      </p:grpSpPr>
+      <p:sp>
+        <p:nvSpPr>
+          <p:cNvPr id="121" name="Google Shape;121;g3fb085bff3c_0_41:notes"/>
+          <p:cNvSpPr>
+            <a:spLocks noGrp="1" noRot="1" noChangeAspect="1"/>
+          </p:cNvSpPr>
+          <p:nvPr>
+            <p:ph type="sldImg" idx="2"/>
+          </p:nvPr>
+        </p:nvSpPr>
+        <p:spPr>
+          <a:xfrm>
+            <a:off x="381300" y="685800"/>
+            <a:ext cx="6096000" cy="3429000"/>
+          </a:xfrm>
+          <a:custGeom>
+            <a:avLst/>
+            <a:gdLst/>
+            <a:ahLst/>
+            <a:cxnLst/>
+            <a:rect l="l" t="t" r="r" b="b"/>
+            <a:pathLst>
+              <a:path w="120000" h="120000" extrusionOk="0">
+                <a:moveTo>
+                  <a:pt x="0" y="0"/>
+                </a:moveTo>
+                <a:lnTo>
+                  <a:pt x="120000" y="0"/>
+                </a:lnTo>
+                <a:lnTo>
+                  <a:pt x="120000" y="120000"/>
+                </a:lnTo>
+                <a:lnTo>
+                  <a:pt x="0" y="120000"/>
+                </a:lnTo>
+                <a:close/>
+              </a:path>
+            </a:pathLst>
+          </a:custGeom>
+        </p:spPr>
+      </p:sp>
+      <p:sp>
+        <p:nvSpPr>
+          <p:cNvPr id="122" name="Google Shape;122;g3fb085bff3c_0_41:notes"/>
           <p:cNvSpPr txBox="1">
             <a:spLocks noGrp="1"/>
           </p:cNvSpPr>
@@ -7334,299 +7334,6 @@
   <p:cSld>
     <p:spTree>
       <p:nvGrpSpPr>
-        <p:cNvPr id="1" name="Shape 123"/>
-        <p:cNvGrpSpPr/>
-        <p:nvPr/>
-      </p:nvGrpSpPr>
-      <p:grpSpPr>
-        <a:xfrm>
-          <a:off x="0" y="0"/>
-          <a:ext cx="0" cy="0"/>
-          <a:chOff x="0" y="0"/>
-          <a:chExt cx="0" cy="0"/>
-        </a:xfrm>
-      </p:grpSpPr>
-      <p:pic>
-        <p:nvPicPr>
-          <p:cNvPr id="124" name="Google Shape;124;p22" title="Frame 144.png"/>
-          <p:cNvPicPr preferRelativeResize="0"/>
-          <p:nvPr/>
-        </p:nvPicPr>
-        <p:blipFill rotWithShape="1">
-          <a:blip r:embed="rId3">
-            <a:alphaModFix/>
-          </a:blip>
-          <a:srcRect b="98001"/>
-          <a:stretch/>
-        </p:blipFill>
-        <p:spPr>
-          <a:xfrm>
-            <a:off x="0" y="5093562"/>
-            <a:ext cx="9144000" cy="54275"/>
-          </a:xfrm>
-          <a:prstGeom prst="rect">
-            <a:avLst/>
-          </a:prstGeom>
-          <a:noFill/>
-          <a:ln>
-            <a:noFill/>
-          </a:ln>
-        </p:spPr>
-      </p:pic>
-      <p:pic>
-        <p:nvPicPr>
-          <p:cNvPr id="125" name="Google Shape;125;p22" title="Group 427319979.png"/>
-          <p:cNvPicPr preferRelativeResize="0"/>
-          <p:nvPr/>
-        </p:nvPicPr>
-        <p:blipFill>
-          <a:blip r:embed="rId4">
-            <a:alphaModFix/>
-          </a:blip>
-          <a:stretch>
-            <a:fillRect/>
-          </a:stretch>
-        </p:blipFill>
-        <p:spPr>
-          <a:xfrm>
-            <a:off x="0" y="1"/>
-            <a:ext cx="9144000" cy="507359"/>
-          </a:xfrm>
-          <a:prstGeom prst="rect">
-            <a:avLst/>
-          </a:prstGeom>
-          <a:noFill/>
-          <a:ln>
-            <a:noFill/>
-          </a:ln>
-        </p:spPr>
-      </p:pic>
-      <p:sp>
-        <p:nvSpPr>
-          <p:cNvPr id="126" name="Google Shape;126;p22"/>
-          <p:cNvSpPr/>
-          <p:nvPr/>
-        </p:nvSpPr>
-        <p:spPr>
-          <a:xfrm>
-            <a:off x="-29250" y="5071875"/>
-            <a:ext cx="9173400" cy="97800"/>
-          </a:xfrm>
-          <a:prstGeom prst="rect">
-            <a:avLst/>
-          </a:prstGeom>
-          <a:solidFill>
-            <a:schemeClr val="dk1"/>
-          </a:solidFill>
-          <a:ln>
-            <a:noFill/>
-          </a:ln>
-        </p:spPr>
-        <p:txBody>
-          <a:bodyPr spcFirstLastPara="1" wrap="square" lIns="91425" tIns="91425" rIns="91425" bIns="91425" anchor="ctr" anchorCtr="0">
-            <a:noAutofit/>
-          </a:bodyPr>
-          <a:lstStyle/>
-          <a:p>
-            <a:pPr marL="0" lvl="0" indent="0" algn="ctr" rtl="0">
-              <a:spcBef>
-                <a:spcPts val="0"/>
-              </a:spcBef>
-              <a:spcAft>
-                <a:spcPts val="0"/>
-              </a:spcAft>
-              <a:buNone/>
-            </a:pPr>
-            <a:endParaRPr/>
-          </a:p>
-        </p:txBody>
-      </p:sp>
-      <p:sp>
-        <p:nvSpPr>
-          <p:cNvPr id="127" name="Google Shape;127;p22"/>
-          <p:cNvSpPr txBox="1"/>
-          <p:nvPr/>
-        </p:nvSpPr>
-        <p:spPr>
-          <a:xfrm>
-            <a:off x="265350" y="663825"/>
-            <a:ext cx="8943000" cy="561900"/>
-          </a:xfrm>
-          <a:prstGeom prst="rect">
-            <a:avLst/>
-          </a:prstGeom>
-          <a:noFill/>
-          <a:ln>
-            <a:noFill/>
-          </a:ln>
-        </p:spPr>
-        <p:txBody>
-          <a:bodyPr spcFirstLastPara="1" wrap="square" lIns="91425" tIns="91425" rIns="91425" bIns="91425" anchor="t" anchorCtr="0">
-            <a:noAutofit/>
-          </a:bodyPr>
-          <a:lstStyle/>
-          <a:p>
-            <a:pPr marL="0" lvl="0" indent="0" algn="l" rtl="0">
-              <a:lnSpc>
-                <a:spcPct val="115000"/>
-              </a:lnSpc>
-              <a:spcBef>
-                <a:spcPts val="0"/>
-              </a:spcBef>
-              <a:spcAft>
-                <a:spcPts val="0"/>
-              </a:spcAft>
-              <a:buNone/>
-            </a:pPr>
-            <a:r>
-              <a:rPr sz="1600">
-                <a:solidFill>
-                  <a:srgbClr val="212121"/>
-                </a:solidFill>
-                <a:latin typeface="Google Sans Flex Medium"/>
-              </a:rPr>
-              <a:t>Estimated implementation cost</a:t>
-            </a:r>
-            <a:endParaRPr sz="1600">
-              <a:latin typeface="Google Sans Flex Medium"/>
-              <a:ea typeface="Google Sans Flex Medium"/>
-              <a:cs typeface="Google Sans Flex Medium"/>
-              <a:sym typeface="Google Sans Flex Medium"/>
-            </a:endParaRPr>
-          </a:p>
-        </p:txBody>
-      </p:sp>
-      <p:sp>
-        <p:nvSpPr>
-          <p:cNvPr id="128" name="TextBox 127"/>
-          <p:cNvSpPr txBox="1"/>
-          <p:nvPr/>
-        </p:nvSpPr>
-        <p:spPr>
-          <a:xfrm>
-            <a:off x="265176" y="1280160"/>
-            <a:ext cx="8595360" cy="3566160"/>
-          </a:xfrm>
-          <a:prstGeom prst="rect">
-            <a:avLst/>
-          </a:prstGeom>
-          <a:noFill/>
-        </p:spPr>
-        <p:txBody>
-          <a:bodyPr wrap="square">
-            <a:spAutoFit/>
-          </a:bodyPr>
-          <a:lstStyle/>
-          <a:p>
-            <a:pPr>
-              <a:lnSpc>
-                <a:spcPct val="120000"/>
-              </a:lnSpc>
-              <a:spcAft>
-                <a:spcPts val="600"/>
-              </a:spcAft>
-            </a:pPr>
-            <a:r>
-              <a:rPr sz="1400">
-                <a:solidFill>
-                  <a:srgbClr val="212121"/>
-                </a:solidFill>
-                <a:latin typeface="Google Sans Flex"/>
-              </a:rPr>
-              <a:t>•  Current deployed cost: $0 — no billing account, no credit card, anywhere in the stack</a:t>
-            </a:r>
-          </a:p>
-          <a:p>
-            <a:pPr>
-              <a:lnSpc>
-                <a:spcPct val="120000"/>
-              </a:lnSpc>
-              <a:spcAft>
-                <a:spcPts val="600"/>
-              </a:spcAft>
-            </a:pPr>
-            <a:r>
-              <a:rPr sz="1400">
-                <a:solidFill>
-                  <a:srgbClr val="212121"/>
-                </a:solidFill>
-                <a:latin typeface="Google Sans Flex"/>
-              </a:rPr>
-              <a:t>•  Firebase Hosting: free Spark plan, no usage cap reached at this scale</a:t>
-            </a:r>
-          </a:p>
-          <a:p>
-            <a:pPr>
-              <a:lnSpc>
-                <a:spcPct val="120000"/>
-              </a:lnSpc>
-              <a:spcAft>
-                <a:spcPts val="600"/>
-              </a:spcAft>
-            </a:pPr>
-            <a:r>
-              <a:rPr sz="1400">
-                <a:solidFill>
-                  <a:srgbClr val="212121"/>
-                </a:solidFill>
-                <a:latin typeface="Google Sans Flex"/>
-              </a:rPr>
-              <a:t>•  Gemini API: free tier via Google AI Studio — 20 requests/day per project for gemini-3.8-flash; each diagnosis now uses 2 calls (diagnosis + orchestration), so roughly 10 full diagnoses/day before the app gracefully falls back to deterministic logic for the rest of the day</a:t>
-            </a:r>
-          </a:p>
-          <a:p>
-            <a:pPr>
-              <a:lnSpc>
-                <a:spcPct val="120000"/>
-              </a:lnSpc>
-              <a:spcAft>
-                <a:spcPts val="600"/>
-              </a:spcAft>
-            </a:pPr>
-            <a:r>
-              <a:rPr sz="1400">
-                <a:solidFill>
-                  <a:srgbClr val="212121"/>
-                </a:solidFill>
-                <a:latin typeface="Google Sans Flex"/>
-              </a:rPr>
-              <a:t>•  Open-Meteo, Web Speech API: free, no quota observed in testing</a:t>
-            </a:r>
-          </a:p>
-          <a:p>
-            <a:pPr>
-              <a:lnSpc>
-                <a:spcPct val="120000"/>
-              </a:lnSpc>
-              <a:spcAft>
-                <a:spcPts val="600"/>
-              </a:spcAft>
-            </a:pPr>
-            <a:r>
-              <a:rPr sz="1400">
-                <a:solidFill>
-                  <a:srgbClr val="212121"/>
-                </a:solidFill>
-                <a:latin typeface="Google Sans Flex"/>
-              </a:rPr>
-              <a:t>•  Scaling beyond the free tier: upgrading to a paid Gemini tier is the only cost that would be needed to raise the daily diagnosis cap — no other paid service is required even at higher usage, since there is no backend, database, or search service to scale</a:t>
-            </a:r>
-          </a:p>
-        </p:txBody>
-      </p:sp>
-    </p:spTree>
-  </p:cSld>
-  <p:clrMapOvr>
-    <a:masterClrMapping/>
-  </p:clrMapOvr>
-</p:sld>
-</file>
-
-<file path=ppt/slides/slide11.xml><?xml version="1.0" encoding="utf-8"?>
-<p:sld xmlns:a="http://schemas.openxmlformats.org/drawingml/2006/main" xmlns:r="http://schemas.openxmlformats.org/officeDocument/2006/relationships" xmlns:p="http://schemas.openxmlformats.org/presentationml/2006/main">
-  <p:cSld>
-    <p:spTree>
-      <p:nvGrpSpPr>
         <p:cNvPr id="1" name="Shape 131"/>
         <p:cNvGrpSpPr/>
         <p:nvPr/>
@@ -7845,7 +7552,7 @@
 </p:sld>
 </file>
 
-<file path=ppt/slides/slide12.xml><?xml version="1.0" encoding="utf-8"?>
+<file path=ppt/slides/slide11.xml><?xml version="1.0" encoding="utf-8"?>
 <p:sld xmlns:a="http://schemas.openxmlformats.org/drawingml/2006/main" xmlns:r="http://schemas.openxmlformats.org/officeDocument/2006/relationships" xmlns:p="http://schemas.openxmlformats.org/presentationml/2006/main">
   <p:cSld>
     <p:spTree>
@@ -8195,7 +7902,7 @@
 </p:sld>
 </file>
 
-<file path=ppt/slides/slide13.xml><?xml version="1.0" encoding="utf-8"?>
+<file path=ppt/slides/slide12.xml><?xml version="1.0" encoding="utf-8"?>
 <p:sld xmlns:a="http://schemas.openxmlformats.org/drawingml/2006/main" xmlns:r="http://schemas.openxmlformats.org/officeDocument/2006/relationships" xmlns:p="http://schemas.openxmlformats.org/presentationml/2006/main">
   <p:cSld>
     <p:spTree>
@@ -8462,6 +8169,285 @@
         </p:txBody>
       </p:sp>
     </p:spTree>
+  </p:cSld>
+  <p:clrMapOvr>
+    <a:masterClrMapping/>
+  </p:clrMapOvr>
+</p:sld>
+</file>
+
+<file path=ppt/slides/slide13.xml><?xml version="1.0" encoding="utf-8"?>
+<p:sld xmlns:a="http://schemas.openxmlformats.org/drawingml/2006/main" xmlns:r="http://schemas.openxmlformats.org/officeDocument/2006/relationships" xmlns:p="http://schemas.openxmlformats.org/presentationml/2006/main" show="0">
+  <p:cSld>
+    <p:spTree>
+      <p:nvGrpSpPr>
+        <p:cNvPr id="1" name="Shape 147"/>
+        <p:cNvGrpSpPr/>
+        <p:nvPr/>
+      </p:nvGrpSpPr>
+      <p:grpSpPr>
+        <a:xfrm>
+          <a:off x="0" y="0"/>
+          <a:ext cx="0" cy="0"/>
+          <a:chOff x="0" y="0"/>
+          <a:chExt cx="0" cy="0"/>
+        </a:xfrm>
+      </p:grpSpPr>
+      <p:pic>
+        <p:nvPicPr>
+          <p:cNvPr id="148" name="Google Shape;148;p25" title="Frame 144.png"/>
+          <p:cNvPicPr preferRelativeResize="0"/>
+          <p:nvPr/>
+        </p:nvPicPr>
+        <p:blipFill rotWithShape="1">
+          <a:blip r:embed="rId3">
+            <a:alphaModFix/>
+          </a:blip>
+          <a:srcRect b="98001"/>
+          <a:stretch/>
+        </p:blipFill>
+        <p:spPr>
+          <a:xfrm>
+            <a:off x="0" y="5093562"/>
+            <a:ext cx="9144000" cy="54275"/>
+          </a:xfrm>
+          <a:prstGeom prst="rect">
+            <a:avLst/>
+          </a:prstGeom>
+          <a:noFill/>
+          <a:ln>
+            <a:noFill/>
+          </a:ln>
+        </p:spPr>
+      </p:pic>
+      <p:pic>
+        <p:nvPicPr>
+          <p:cNvPr id="149" name="Google Shape;149;p25" title="Group 427319979.png"/>
+          <p:cNvPicPr preferRelativeResize="0"/>
+          <p:nvPr/>
+        </p:nvPicPr>
+        <p:blipFill>
+          <a:blip r:embed="rId4">
+            <a:alphaModFix/>
+          </a:blip>
+          <a:stretch>
+            <a:fillRect/>
+          </a:stretch>
+        </p:blipFill>
+        <p:spPr>
+          <a:xfrm>
+            <a:off x="0" y="1"/>
+            <a:ext cx="9144000" cy="507359"/>
+          </a:xfrm>
+          <a:prstGeom prst="rect">
+            <a:avLst/>
+          </a:prstGeom>
+          <a:noFill/>
+          <a:ln>
+            <a:noFill/>
+          </a:ln>
+        </p:spPr>
+      </p:pic>
+      <p:sp>
+        <p:nvSpPr>
+          <p:cNvPr id="150" name="Google Shape;150;p25"/>
+          <p:cNvSpPr/>
+          <p:nvPr/>
+        </p:nvSpPr>
+        <p:spPr>
+          <a:xfrm>
+            <a:off x="-29250" y="5071875"/>
+            <a:ext cx="9173400" cy="97800"/>
+          </a:xfrm>
+          <a:prstGeom prst="rect">
+            <a:avLst/>
+          </a:prstGeom>
+          <a:solidFill>
+            <a:schemeClr val="dk1"/>
+          </a:solidFill>
+          <a:ln>
+            <a:noFill/>
+          </a:ln>
+        </p:spPr>
+        <p:txBody>
+          <a:bodyPr spcFirstLastPara="1" wrap="square" lIns="91425" tIns="91425" rIns="91425" bIns="91425" anchor="ctr" anchorCtr="0">
+            <a:noAutofit/>
+          </a:bodyPr>
+          <a:lstStyle/>
+          <a:p>
+            <a:pPr marL="0" lvl="0" indent="0" algn="ctr" rtl="0">
+              <a:spcBef>
+                <a:spcPts val="0"/>
+              </a:spcBef>
+              <a:spcAft>
+                <a:spcPts val="0"/>
+              </a:spcAft>
+              <a:buNone/>
+            </a:pPr>
+            <a:endParaRPr/>
+          </a:p>
+        </p:txBody>
+      </p:sp>
+      <p:sp>
+        <p:nvSpPr>
+          <p:cNvPr id="151" name="Google Shape;151;p25"/>
+          <p:cNvSpPr txBox="1"/>
+          <p:nvPr/>
+        </p:nvSpPr>
+        <p:spPr>
+          <a:xfrm>
+            <a:off x="265350" y="663825"/>
+            <a:ext cx="8943000" cy="561900"/>
+          </a:xfrm>
+          <a:prstGeom prst="rect">
+            <a:avLst/>
+          </a:prstGeom>
+          <a:noFill/>
+          <a:ln>
+            <a:noFill/>
+          </a:ln>
+        </p:spPr>
+        <p:txBody>
+          <a:bodyPr spcFirstLastPara="1" wrap="square" lIns="91425" tIns="91425" rIns="91425" bIns="91425" anchor="t" anchorCtr="0">
+            <a:noAutofit/>
+          </a:bodyPr>
+          <a:lstStyle/>
+          <a:p>
+            <a:pPr marL="0" lvl="0" indent="0" algn="l" rtl="0">
+              <a:lnSpc>
+                <a:spcPct val="115000"/>
+              </a:lnSpc>
+              <a:spcBef>
+                <a:spcPts val="0"/>
+              </a:spcBef>
+              <a:spcAft>
+                <a:spcPts val="0"/>
+              </a:spcAft>
+              <a:buNone/>
+            </a:pPr>
+            <a:r>
+              <a:rPr sz="1600">
+                <a:solidFill>
+                  <a:srgbClr val="212121"/>
+                </a:solidFill>
+                <a:latin typeface="Google Sans Flex Medium"/>
+              </a:rPr>
+              <a:t>Additional Details / Future Development</a:t>
+            </a:r>
+            <a:endParaRPr sz="1600">
+              <a:latin typeface="Google Sans Flex Medium"/>
+              <a:ea typeface="Google Sans Flex Medium"/>
+              <a:cs typeface="Google Sans Flex Medium"/>
+              <a:sym typeface="Google Sans Flex Medium"/>
+            </a:endParaRPr>
+          </a:p>
+        </p:txBody>
+      </p:sp>
+      <p:sp>
+        <p:nvSpPr>
+          <p:cNvPr id="152" name="TextBox 151"/>
+          <p:cNvSpPr txBox="1"/>
+          <p:nvPr/>
+        </p:nvSpPr>
+        <p:spPr>
+          <a:xfrm>
+            <a:off x="265176" y="1280160"/>
+            <a:ext cx="8595360" cy="3948325"/>
+          </a:xfrm>
+          <a:prstGeom prst="rect">
+            <a:avLst/>
+          </a:prstGeom>
+          <a:noFill/>
+        </p:spPr>
+        <p:txBody>
+          <a:bodyPr wrap="square">
+            <a:spAutoFit/>
+          </a:bodyPr>
+          <a:lstStyle/>
+          <a:p>
+            <a:pPr>
+              <a:lnSpc>
+                <a:spcPct val="120000"/>
+              </a:lnSpc>
+              <a:spcAft>
+                <a:spcPts val="700"/>
+              </a:spcAft>
+            </a:pPr>
+            <a:r>
+              <a:rPr lang="en-US" sz="1300">
+                <a:solidFill>
+                  <a:srgbClr val="212121"/>
+                </a:solidFill>
+                <a:latin typeface="Google Sans Flex"/>
+              </a:rPr>
+              <a:t>•  Next step — upgrade to managed Google Cloud services once billing is available: Gemini moved behind a Cloud Run/Cloud Functions proxy (closes the current public-key exposure and removes the 20-req/day free-tier ceiling), Firestore replacing the static dealer/price/history JSON so the district dashboard becomes genuinely live instead of a deploy-time snapshot, Vertex AI Search replacing the hand-rolled TF-IDF retrieval, and Cloud Translation/Text-to-Speech replacing the template-based Kannada advisory. Every substitute today sits behind one isolated call site per module, so each swap is incremental, not a rewrite.</a:t>
+            </a:r>
+          </a:p>
+          <a:p>
+            <a:pPr>
+              <a:lnSpc>
+                <a:spcPct val="120000"/>
+              </a:lnSpc>
+              <a:spcAft>
+                <a:spcPts val="700"/>
+              </a:spcAft>
+            </a:pPr>
+            <a:r>
+              <a:rPr lang="en-US" sz="1300">
+                <a:solidFill>
+                  <a:srgbClr val="212121"/>
+                </a:solidFill>
+                <a:latin typeface="Google Sans Flex"/>
+              </a:rPr>
+              <a:t>•  Offline-first fallback (planned): a distilled on-device TensorFlow Lite classifier for the 8–10 most common regional diseases, so core diagnosis keeps working when connectivity drops entirely. Training script already written, pending a real multi-hour training run on the full PlantVillage dataset.</a:t>
+            </a:r>
+          </a:p>
+          <a:p>
+            <a:pPr>
+              <a:lnSpc>
+                <a:spcPct val="120000"/>
+              </a:lnSpc>
+              <a:spcAft>
+                <a:spcPts val="700"/>
+              </a:spcAft>
+            </a:pPr>
+            <a:r>
+              <a:rPr lang="en-US" sz="1300">
+                <a:solidFill>
+                  <a:srgbClr val="212121"/>
+                </a:solidFill>
+                <a:latin typeface="Google Sans Flex"/>
+              </a:rPr>
+              <a:t>•  Expansion path: adding a new crop or region means indexing a new disease guide into the retrieval layer, not rewriting the diagnosis logic — the architecture is crop-agnostic by design even though this build is scoped to tomato in Karnataka for the demo.</a:t>
+            </a:r>
+          </a:p>
+          <a:p>
+            <a:pPr>
+              <a:lnSpc>
+                <a:spcPct val="120000"/>
+              </a:lnSpc>
+              <a:spcAft>
+                <a:spcPts val="700"/>
+              </a:spcAft>
+            </a:pPr>
+            <a:r>
+              <a:rPr lang="en-US" sz="1300">
+                <a:solidFill>
+                  <a:srgbClr val="212121"/>
+                </a:solidFill>
+                <a:latin typeface="Google Sans Flex"/>
+              </a:rPr>
+              <a:t>•  Resource &amp; environmental impact: targeted treatment instead of blanket spraying, weather-timed application to reduce chemical runoff, and earlier detection to reduce crop loss — moving this beyond social impact into genuine sustainability.</a:t>
+            </a:r>
+          </a:p>
+        </p:txBody>
+      </p:sp>
+    </p:spTree>
+    <p:extLst>
+      <p:ext uri="{BB962C8B-B14F-4D97-AF65-F5344CB8AC3E}">
+        <p14:creationId xmlns:p14="http://schemas.microsoft.com/office/powerpoint/2010/main" val="773534487"/>
+      </p:ext>
+    </p:extLst>
   </p:cSld>
   <p:clrMapOvr>
     <a:masterClrMapping/>
@@ -8897,257 +8883,6 @@
   <p:cSld>
     <p:spTree>
       <p:nvGrpSpPr>
-        <p:cNvPr id="1" name="Shape 60"/>
-        <p:cNvGrpSpPr/>
-        <p:nvPr/>
-      </p:nvGrpSpPr>
-      <p:grpSpPr>
-        <a:xfrm>
-          <a:off x="0" y="0"/>
-          <a:ext cx="0" cy="0"/>
-          <a:chOff x="0" y="0"/>
-          <a:chExt cx="0" cy="0"/>
-        </a:xfrm>
-      </p:grpSpPr>
-      <p:pic>
-        <p:nvPicPr>
-          <p:cNvPr id="61" name="Google Shape;61;p14" title="Frame 144.png"/>
-          <p:cNvPicPr preferRelativeResize="0"/>
-          <p:nvPr/>
-        </p:nvPicPr>
-        <p:blipFill rotWithShape="1">
-          <a:blip r:embed="rId3">
-            <a:alphaModFix/>
-          </a:blip>
-          <a:srcRect b="98001"/>
-          <a:stretch/>
-        </p:blipFill>
-        <p:spPr>
-          <a:xfrm>
-            <a:off x="0" y="5093562"/>
-            <a:ext cx="9144000" cy="54275"/>
-          </a:xfrm>
-          <a:prstGeom prst="rect">
-            <a:avLst/>
-          </a:prstGeom>
-          <a:noFill/>
-          <a:ln>
-            <a:noFill/>
-          </a:ln>
-        </p:spPr>
-      </p:pic>
-      <p:sp>
-        <p:nvSpPr>
-          <p:cNvPr id="62" name="Google Shape;62;p14"/>
-          <p:cNvSpPr/>
-          <p:nvPr/>
-        </p:nvSpPr>
-        <p:spPr>
-          <a:xfrm>
-            <a:off x="0" y="0"/>
-            <a:ext cx="9144000" cy="5143500"/>
-          </a:xfrm>
-          <a:prstGeom prst="rect">
-            <a:avLst/>
-          </a:prstGeom>
-          <a:solidFill>
-            <a:schemeClr val="dk1"/>
-          </a:solidFill>
-          <a:ln>
-            <a:noFill/>
-          </a:ln>
-        </p:spPr>
-        <p:txBody>
-          <a:bodyPr spcFirstLastPara="1" wrap="square" lIns="91425" tIns="91425" rIns="91425" bIns="91425" anchor="ctr" anchorCtr="0">
-            <a:noAutofit/>
-          </a:bodyPr>
-          <a:lstStyle/>
-          <a:p>
-            <a:pPr marL="0" lvl="0" indent="0" algn="ctr" rtl="0">
-              <a:spcBef>
-                <a:spcPts val="0"/>
-              </a:spcBef>
-              <a:spcAft>
-                <a:spcPts val="0"/>
-              </a:spcAft>
-              <a:buNone/>
-            </a:pPr>
-            <a:endParaRPr/>
-          </a:p>
-        </p:txBody>
-      </p:sp>
-      <p:sp>
-        <p:nvSpPr>
-          <p:cNvPr id="63" name="Google Shape;63;p14"/>
-          <p:cNvSpPr txBox="1"/>
-          <p:nvPr/>
-        </p:nvSpPr>
-        <p:spPr>
-          <a:xfrm>
-            <a:off x="5092475" y="1968750"/>
-            <a:ext cx="3311400" cy="1206000"/>
-          </a:xfrm>
-          <a:prstGeom prst="rect">
-            <a:avLst/>
-          </a:prstGeom>
-          <a:noFill/>
-          <a:ln>
-            <a:noFill/>
-          </a:ln>
-        </p:spPr>
-        <p:txBody>
-          <a:bodyPr spcFirstLastPara="1" wrap="square" lIns="91425" tIns="91425" rIns="91425" bIns="91425" anchor="t" anchorCtr="0">
-            <a:noAutofit/>
-          </a:bodyPr>
-          <a:lstStyle/>
-          <a:p>
-            <a:pPr marL="0" lvl="0" indent="0" algn="l" rtl="0">
-              <a:spcBef>
-                <a:spcPts val="0"/>
-              </a:spcBef>
-              <a:spcAft>
-                <a:spcPts val="0"/>
-              </a:spcAft>
-              <a:buNone/>
-            </a:pPr>
-            <a:r>
-              <a:rPr lang="en-GB" sz="1100">
-                <a:solidFill>
-                  <a:schemeClr val="lt1"/>
-                </a:solidFill>
-                <a:latin typeface="Google Sans Flex Medium"/>
-                <a:ea typeface="Google Sans Flex Medium"/>
-                <a:cs typeface="Google Sans Flex Medium"/>
-                <a:sym typeface="Google Sans Flex Medium"/>
-              </a:rPr>
-              <a:t>Note:</a:t>
-            </a:r>
-            <a:r>
-              <a:rPr lang="en-GB" sz="1100">
-                <a:solidFill>
-                  <a:schemeClr val="lt1"/>
-                </a:solidFill>
-                <a:latin typeface="Google Sans Flex"/>
-                <a:ea typeface="Google Sans Flex"/>
-                <a:cs typeface="Google Sans Flex"/>
-                <a:sym typeface="Google Sans Flex"/>
-              </a:rPr>
-              <a:t> Please download this template to make your edits and submit the final version.</a:t>
-            </a:r>
-            <a:br>
-              <a:rPr lang="en-GB" sz="1100">
-                <a:solidFill>
-                  <a:schemeClr val="lt1"/>
-                </a:solidFill>
-                <a:latin typeface="Google Sans Flex"/>
-                <a:ea typeface="Google Sans Flex"/>
-                <a:cs typeface="Google Sans Flex"/>
-                <a:sym typeface="Google Sans Flex"/>
-              </a:rPr>
-            </a:br>
-            <a:br>
-              <a:rPr lang="en-GB" sz="1100">
-                <a:solidFill>
-                  <a:schemeClr val="lt1"/>
-                </a:solidFill>
-                <a:latin typeface="Google Sans Flex"/>
-                <a:ea typeface="Google Sans Flex"/>
-                <a:cs typeface="Google Sans Flex"/>
-                <a:sym typeface="Google Sans Flex"/>
-              </a:rPr>
-            </a:br>
-            <a:r>
-              <a:rPr lang="en-GB" sz="1100">
-                <a:solidFill>
-                  <a:schemeClr val="lt1"/>
-                </a:solidFill>
-                <a:latin typeface="Google Sans Flex"/>
-                <a:ea typeface="Google Sans Flex"/>
-                <a:cs typeface="Google Sans Flex"/>
-                <a:sym typeface="Google Sans Flex"/>
-              </a:rPr>
-              <a:t>To download, go to File &gt; Download &gt; Microsoft PowerPoint (.PPTX). Kindly refrain from sending edit requests.</a:t>
-            </a:r>
-            <a:endParaRPr sz="1100">
-              <a:solidFill>
-                <a:schemeClr val="lt1"/>
-              </a:solidFill>
-              <a:latin typeface="Google Sans Flex"/>
-              <a:ea typeface="Google Sans Flex"/>
-              <a:cs typeface="Google Sans Flex"/>
-              <a:sym typeface="Google Sans Flex"/>
-            </a:endParaRPr>
-          </a:p>
-          <a:p>
-            <a:pPr marL="0" lvl="0" indent="0" algn="l" rtl="0">
-              <a:spcBef>
-                <a:spcPts val="0"/>
-              </a:spcBef>
-              <a:spcAft>
-                <a:spcPts val="0"/>
-              </a:spcAft>
-              <a:buNone/>
-            </a:pPr>
-            <a:endParaRPr sz="1100">
-              <a:solidFill>
-                <a:schemeClr val="lt1"/>
-              </a:solidFill>
-              <a:latin typeface="Google Sans Flex"/>
-              <a:ea typeface="Google Sans Flex"/>
-              <a:cs typeface="Google Sans Flex"/>
-              <a:sym typeface="Google Sans Flex"/>
-            </a:endParaRPr>
-          </a:p>
-        </p:txBody>
-      </p:sp>
-      <p:pic>
-        <p:nvPicPr>
-          <p:cNvPr id="64" name="Google Shape;64;p14"/>
-          <p:cNvPicPr preferRelativeResize="0"/>
-          <p:nvPr/>
-        </p:nvPicPr>
-        <p:blipFill>
-          <a:blip r:embed="rId4">
-            <a:alphaModFix/>
-          </a:blip>
-          <a:stretch>
-            <a:fillRect/>
-          </a:stretch>
-        </p:blipFill>
-        <p:spPr>
-          <a:xfrm>
-            <a:off x="924203" y="1194675"/>
-            <a:ext cx="3604250" cy="2621725"/>
-          </a:xfrm>
-          <a:prstGeom prst="rect">
-            <a:avLst/>
-          </a:prstGeom>
-          <a:noFill/>
-          <a:ln>
-            <a:noFill/>
-          </a:ln>
-          <a:effectLst>
-            <a:outerShdw blurRad="971550" dist="19050" dir="5400000" algn="bl" rotWithShape="0">
-              <a:schemeClr val="lt1">
-                <a:alpha val="50000"/>
-              </a:schemeClr>
-            </a:outerShdw>
-          </a:effectLst>
-        </p:spPr>
-      </p:pic>
-    </p:spTree>
-  </p:cSld>
-  <p:clrMapOvr>
-    <a:masterClrMapping/>
-  </p:clrMapOvr>
-</p:sld>
-</file>
-
-<file path=ppt/slides/slide3.xml><?xml version="1.0" encoding="utf-8"?>
-<p:sld xmlns:a="http://schemas.openxmlformats.org/drawingml/2006/main" xmlns:r="http://schemas.openxmlformats.org/officeDocument/2006/relationships" xmlns:p="http://schemas.openxmlformats.org/presentationml/2006/main">
-  <p:cSld>
-    <p:spTree>
-      <p:nvGrpSpPr>
         <p:cNvPr id="1" name="Shape 68"/>
         <p:cNvGrpSpPr/>
         <p:nvPr/>
@@ -9390,7 +9125,7 @@
 </p:sld>
 </file>
 
-<file path=ppt/slides/slide4.xml><?xml version="1.0" encoding="utf-8"?>
+<file path=ppt/slides/slide3.xml><?xml version="1.0" encoding="utf-8"?>
 <p:sld xmlns:a="http://schemas.openxmlformats.org/drawingml/2006/main" xmlns:r="http://schemas.openxmlformats.org/officeDocument/2006/relationships" xmlns:p="http://schemas.openxmlformats.org/presentationml/2006/main">
   <p:cSld>
     <p:spTree>
@@ -9645,7 +9380,7 @@
 </p:sld>
 </file>
 
-<file path=ppt/slides/slide5.xml><?xml version="1.0" encoding="utf-8"?>
+<file path=ppt/slides/slide4.xml><?xml version="1.0" encoding="utf-8"?>
 <p:sld xmlns:a="http://schemas.openxmlformats.org/drawingml/2006/main" xmlns:r="http://schemas.openxmlformats.org/officeDocument/2006/relationships" xmlns:p="http://schemas.openxmlformats.org/presentationml/2006/main">
   <p:cSld>
     <p:spTree>
@@ -10033,7 +9768,7 @@
 </p:sld>
 </file>
 
-<file path=ppt/slides/slide6.xml><?xml version="1.0" encoding="utf-8"?>
+<file path=ppt/slides/slide5.xml><?xml version="1.0" encoding="utf-8"?>
 <p:sld xmlns:a="http://schemas.openxmlformats.org/drawingml/2006/main" xmlns:r="http://schemas.openxmlformats.org/officeDocument/2006/relationships" xmlns:p="http://schemas.openxmlformats.org/presentationml/2006/main">
   <p:cSld>
     <p:spTree>
@@ -10202,14 +9937,166 @@
       </p:sp>
       <p:sp>
         <p:nvSpPr>
-          <p:cNvPr id="96" name="TextBox 95"/>
+          <p:cNvPr id="96" name="Rounded Rectangle 95"/>
+          <p:cNvSpPr>
+            <a:spLocks/>
+          </p:cNvSpPr>
+          <p:nvPr/>
+        </p:nvSpPr>
+        <p:spPr>
+          <a:xfrm>
+            <a:off x="201168" y="1298448"/>
+            <a:ext cx="4288536" cy="420624"/>
+          </a:xfrm>
+          <a:prstGeom prst="roundRect">
+            <a:avLst/>
+          </a:prstGeom>
+          <a:solidFill>
+            <a:srgbClr val="F1F1F1"/>
+          </a:solidFill>
+          <a:ln w="12700">
+            <a:solidFill>
+              <a:srgbClr val="B0B0B0"/>
+            </a:solidFill>
+          </a:ln>
+          <a:effectLst/>
+        </p:spPr>
+        <p:style>
+          <a:lnRef idx="1">
+            <a:schemeClr val="accent1"/>
+          </a:lnRef>
+          <a:fillRef idx="3">
+            <a:schemeClr val="accent1"/>
+          </a:fillRef>
+          <a:effectRef idx="2">
+            <a:schemeClr val="accent1"/>
+          </a:effectRef>
+          <a:fontRef idx="minor">
+            <a:schemeClr val="lt1"/>
+          </a:fontRef>
+        </p:style>
+        <p:txBody>
+          <a:bodyPr wrap="square" lIns="64008" tIns="18288" rIns="64008" bIns="18288" rtlCol="0" anchor="ctr"/>
+          <a:lstStyle/>
+          <a:p>
+            <a:pPr algn="ctr">
+              <a:lnSpc>
+                <a:spcPct val="100000"/>
+              </a:lnSpc>
+            </a:pPr>
+            <a:r>
+              <a:rPr lang="en-US" sz="1000" b="1">
+                <a:solidFill>
+                  <a:srgbClr val="212121"/>
+                </a:solidFill>
+                <a:latin typeface="Google Sans Flex SemiBold"/>
+              </a:rPr>
+              <a:t>FARMER INPUT</a:t>
+            </a:r>
+          </a:p>
+          <a:p>
+            <a:pPr algn="ctr">
+              <a:lnSpc>
+                <a:spcPct val="100000"/>
+              </a:lnSpc>
+            </a:pPr>
+            <a:r>
+              <a:rPr lang="en-US" sz="800" b="0">
+                <a:solidFill>
+                  <a:srgbClr val="595959"/>
+                </a:solidFill>
+                <a:latin typeface="Google Sans Flex"/>
+              </a:rPr>
+              <a:t>Symptom text or speech (Kannada/English) + optional photo, in-browser</a:t>
+            </a:r>
+          </a:p>
+        </p:txBody>
+      </p:sp>
+      <p:sp>
+        <p:nvSpPr>
+          <p:cNvPr id="97" name="Rounded Rectangle 96"/>
+          <p:cNvSpPr/>
+          <p:nvPr/>
+        </p:nvSpPr>
+        <p:spPr>
+          <a:xfrm>
+            <a:off x="4654295" y="1298448"/>
+            <a:ext cx="4288536" cy="420624"/>
+          </a:xfrm>
+          <a:prstGeom prst="roundRect">
+            <a:avLst/>
+          </a:prstGeom>
+          <a:solidFill>
+            <a:srgbClr val="F1F1F1"/>
+          </a:solidFill>
+          <a:ln w="12700">
+            <a:solidFill>
+              <a:srgbClr val="B0B0B0"/>
+            </a:solidFill>
+          </a:ln>
+          <a:effectLst/>
+        </p:spPr>
+        <p:style>
+          <a:lnRef idx="1">
+            <a:schemeClr val="accent1"/>
+          </a:lnRef>
+          <a:fillRef idx="3">
+            <a:schemeClr val="accent1"/>
+          </a:fillRef>
+          <a:effectRef idx="2">
+            <a:schemeClr val="accent1"/>
+          </a:effectRef>
+          <a:fontRef idx="minor">
+            <a:schemeClr val="lt1"/>
+          </a:fontRef>
+        </p:style>
+        <p:txBody>
+          <a:bodyPr wrap="square" lIns="64008" tIns="18288" rIns="64008" bIns="18288" rtlCol="0" anchor="ctr"/>
+          <a:lstStyle/>
+          <a:p>
+            <a:pPr algn="ctr">
+              <a:lnSpc>
+                <a:spcPct val="100000"/>
+              </a:lnSpc>
+            </a:pPr>
+            <a:r>
+              <a:rPr sz="1000" b="1">
+                <a:solidFill>
+                  <a:srgbClr val="212121"/>
+                </a:solidFill>
+                <a:latin typeface="Google Sans Flex SemiBold"/>
+              </a:rPr>
+              <a:t>CONTEXT CHECKS</a:t>
+            </a:r>
+          </a:p>
+          <a:p>
+            <a:pPr algn="ctr">
+              <a:lnSpc>
+                <a:spcPct val="100000"/>
+              </a:lnSpc>
+            </a:pPr>
+            <a:r>
+              <a:rPr sz="800" b="0">
+                <a:solidFill>
+                  <a:srgbClr val="595959"/>
+                </a:solidFill>
+                <a:latin typeface="Google Sans Flex"/>
+              </a:rPr>
+              <a:t>Weather (Open-Meteo), outbreak radius, plot-memory history</a:t>
+            </a:r>
+          </a:p>
+        </p:txBody>
+      </p:sp>
+      <p:sp>
+        <p:nvSpPr>
+          <p:cNvPr id="98" name="TextBox 97"/>
           <p:cNvSpPr txBox="1"/>
           <p:nvPr/>
         </p:nvSpPr>
         <p:spPr>
           <a:xfrm>
-            <a:off x="265176" y="1371600"/>
-            <a:ext cx="8595360" cy="3474720"/>
+            <a:off x="4434840" y="1719072"/>
+            <a:ext cx="274320" cy="146304"/>
           </a:xfrm>
           <a:prstGeom prst="rect">
             <a:avLst/>
@@ -10217,160 +10104,705 @@
           <a:noFill/>
         </p:spPr>
         <p:txBody>
-          <a:bodyPr wrap="square">
+          <a:bodyPr wrap="none" lIns="0" tIns="0" rIns="0" bIns="0">
             <a:spAutoFit/>
           </a:bodyPr>
           <a:lstStyle/>
           <a:p>
-            <a:pPr>
+            <a:pPr algn="ctr"/>
+            <a:r>
+              <a:rPr sz="1400" b="1">
+                <a:solidFill>
+                  <a:srgbClr val="B0B0B0"/>
+                </a:solidFill>
+              </a:rPr>
+              <a:t>↓</a:t>
+            </a:r>
+          </a:p>
+        </p:txBody>
+      </p:sp>
+      <p:sp>
+        <p:nvSpPr>
+          <p:cNvPr id="99" name="Rounded Rectangle 98"/>
+          <p:cNvSpPr/>
+          <p:nvPr/>
+        </p:nvSpPr>
+        <p:spPr>
+          <a:xfrm>
+            <a:off x="201168" y="1865376"/>
+            <a:ext cx="8741663" cy="420624"/>
+          </a:xfrm>
+          <a:prstGeom prst="roundRect">
+            <a:avLst/>
+          </a:prstGeom>
+          <a:solidFill>
+            <a:srgbClr val="E1F5FE"/>
+          </a:solidFill>
+          <a:ln w="12700">
+            <a:solidFill>
+              <a:srgbClr val="4FC3F7"/>
+            </a:solidFill>
+          </a:ln>
+          <a:effectLst/>
+        </p:spPr>
+        <p:style>
+          <a:lnRef idx="1">
+            <a:schemeClr val="accent1"/>
+          </a:lnRef>
+          <a:fillRef idx="3">
+            <a:schemeClr val="accent1"/>
+          </a:fillRef>
+          <a:effectRef idx="2">
+            <a:schemeClr val="accent1"/>
+          </a:effectRef>
+          <a:fontRef idx="minor">
+            <a:schemeClr val="lt1"/>
+          </a:fontRef>
+        </p:style>
+        <p:txBody>
+          <a:bodyPr wrap="square" lIns="64008" tIns="18288" rIns="64008" bIns="18288" rtlCol="0" anchor="ctr"/>
+          <a:lstStyle/>
+          <a:p>
+            <a:pPr algn="ctr">
               <a:lnSpc>
-                <a:spcPct val="120000"/>
+                <a:spcPct val="100000"/>
               </a:lnSpc>
-              <a:spcAft>
-                <a:spcPts val="600"/>
-              </a:spcAft>
             </a:pPr>
             <a:r>
-              <a:rPr sz="1250">
+              <a:rPr sz="1000" b="1">
                 <a:solidFill>
                   <a:srgbClr val="212121"/>
+                </a:solidFill>
+                <a:latin typeface="Google Sans Flex SemiBold"/>
+              </a:rPr>
+              <a:t>GEMINI CALL 1 — DIAGNOSIS</a:t>
+            </a:r>
+          </a:p>
+          <a:p>
+            <a:pPr algn="ctr">
+              <a:lnSpc>
+                <a:spcPct val="100000"/>
+              </a:lnSpc>
+            </a:pPr>
+            <a:r>
+              <a:rPr sz="800" b="0">
+                <a:solidFill>
+                  <a:srgbClr val="595959"/>
                 </a:solidFill>
                 <a:latin typeface="Google Sans Flex"/>
               </a:rPr>
-              <a:t>•  Farmer speaks/types symptom + optionally uploads a photo, entirely in the browser</a:t>
+              <a:t>Multimodal + RAG (TF-IDF over 18 bilingual disease docs) → structured diagnosis JSON</a:t>
             </a:r>
           </a:p>
-          <a:p>
-            <a:pPr>
+        </p:txBody>
+      </p:sp>
+      <p:sp>
+        <p:nvSpPr>
+          <p:cNvPr id="100" name="TextBox 99"/>
+          <p:cNvSpPr txBox="1"/>
+          <p:nvPr/>
+        </p:nvSpPr>
+        <p:spPr>
+          <a:xfrm>
+            <a:off x="4434840" y="2286000"/>
+            <a:ext cx="274320" cy="146304"/>
+          </a:xfrm>
+          <a:prstGeom prst="rect">
+            <a:avLst/>
+          </a:prstGeom>
+          <a:noFill/>
+        </p:spPr>
+        <p:txBody>
+          <a:bodyPr wrap="none" lIns="0" tIns="0" rIns="0" bIns="0">
+            <a:spAutoFit/>
+          </a:bodyPr>
+          <a:lstStyle/>
+          <a:p>
+            <a:pPr algn="ctr"/>
+            <a:r>
+              <a:rPr sz="1400" b="1">
+                <a:solidFill>
+                  <a:srgbClr val="B0B0B0"/>
+                </a:solidFill>
+              </a:rPr>
+              <a:t>↓</a:t>
+            </a:r>
+          </a:p>
+        </p:txBody>
+      </p:sp>
+      <p:sp>
+        <p:nvSpPr>
+          <p:cNvPr id="101" name="Rounded Rectangle 100"/>
+          <p:cNvSpPr/>
+          <p:nvPr/>
+        </p:nvSpPr>
+        <p:spPr>
+          <a:xfrm>
+            <a:off x="201168" y="2432304"/>
+            <a:ext cx="8741663" cy="420624"/>
+          </a:xfrm>
+          <a:prstGeom prst="roundRect">
+            <a:avLst/>
+          </a:prstGeom>
+          <a:solidFill>
+            <a:srgbClr val="B2EBF2"/>
+          </a:solidFill>
+          <a:ln w="12700">
+            <a:solidFill>
+              <a:srgbClr val="0097A7"/>
+            </a:solidFill>
+          </a:ln>
+          <a:effectLst/>
+        </p:spPr>
+        <p:style>
+          <a:lnRef idx="1">
+            <a:schemeClr val="accent1"/>
+          </a:lnRef>
+          <a:fillRef idx="3">
+            <a:schemeClr val="accent1"/>
+          </a:fillRef>
+          <a:effectRef idx="2">
+            <a:schemeClr val="accent1"/>
+          </a:effectRef>
+          <a:fontRef idx="minor">
+            <a:schemeClr val="lt1"/>
+          </a:fontRef>
+        </p:style>
+        <p:txBody>
+          <a:bodyPr wrap="square" lIns="64008" tIns="18288" rIns="64008" bIns="18288" rtlCol="0" anchor="ctr"/>
+          <a:lstStyle/>
+          <a:p>
+            <a:pPr algn="ctr">
               <a:lnSpc>
-                <a:spcPct val="120000"/>
+                <a:spcPct val="100000"/>
               </a:lnSpc>
-              <a:spcAft>
-                <a:spcPts val="600"/>
-              </a:spcAft>
             </a:pPr>
             <a:r>
-              <a:rPr sz="1250">
+              <a:rPr sz="1000" b="1">
                 <a:solidFill>
                   <a:srgbClr val="212121"/>
+                </a:solidFill>
+                <a:latin typeface="Google Sans Flex SemiBold"/>
+              </a:rPr>
+              <a:t>GEMINI CALL 2 — ORCHESTRATION (real function-calling)</a:t>
+            </a:r>
+          </a:p>
+          <a:p>
+            <a:pPr algn="ctr">
+              <a:lnSpc>
+                <a:spcPct val="100000"/>
+              </a:lnSpc>
+            </a:pPr>
+            <a:r>
+              <a:rPr sz="800" b="0">
+                <a:solidFill>
+                  <a:srgbClr val="595959"/>
                 </a:solidFill>
                 <a:latin typeface="Google Sans Flex"/>
               </a:rPr>
-              <a:t>•  → Gemini multimodal diagnosis call, grounded by RAG retrieval (TF-IDF, hand-rolled in JS) over bilingual English + Kannada disease guides shipped with the site</a:t>
+              <a:t>Decides WHICH tools to invoke from diagnosis + outbreak + near-harvest — not a hardcoded if/else</a:t>
             </a:r>
           </a:p>
-          <a:p>
-            <a:pPr>
+        </p:txBody>
+      </p:sp>
+      <p:sp>
+        <p:nvSpPr>
+          <p:cNvPr id="102" name="TextBox 101"/>
+          <p:cNvSpPr txBox="1"/>
+          <p:nvPr/>
+        </p:nvSpPr>
+        <p:spPr>
+          <a:xfrm>
+            <a:off x="4434840" y="2852928"/>
+            <a:ext cx="274320" cy="146304"/>
+          </a:xfrm>
+          <a:prstGeom prst="rect">
+            <a:avLst/>
+          </a:prstGeom>
+          <a:noFill/>
+        </p:spPr>
+        <p:txBody>
+          <a:bodyPr wrap="none" lIns="0" tIns="0" rIns="0" bIns="0">
+            <a:spAutoFit/>
+          </a:bodyPr>
+          <a:lstStyle/>
+          <a:p>
+            <a:pPr algn="ctr"/>
+            <a:r>
+              <a:rPr sz="1400" b="1">
+                <a:solidFill>
+                  <a:srgbClr val="0097A7"/>
+                </a:solidFill>
+              </a:rPr>
+              <a:t>↓</a:t>
+            </a:r>
+          </a:p>
+        </p:txBody>
+      </p:sp>
+      <p:sp>
+        <p:nvSpPr>
+          <p:cNvPr id="103" name="Rounded Rectangle 102"/>
+          <p:cNvSpPr/>
+          <p:nvPr/>
+        </p:nvSpPr>
+        <p:spPr>
+          <a:xfrm>
+            <a:off x="201168" y="2999232"/>
+            <a:ext cx="2103120" cy="475488"/>
+          </a:xfrm>
+          <a:prstGeom prst="roundRect">
+            <a:avLst/>
+          </a:prstGeom>
+          <a:solidFill>
+            <a:srgbClr val="E8F5E9"/>
+          </a:solidFill>
+          <a:ln w="12700">
+            <a:solidFill>
+              <a:srgbClr val="81C784"/>
+            </a:solidFill>
+          </a:ln>
+          <a:effectLst/>
+        </p:spPr>
+        <p:style>
+          <a:lnRef idx="1">
+            <a:schemeClr val="accent1"/>
+          </a:lnRef>
+          <a:fillRef idx="3">
+            <a:schemeClr val="accent1"/>
+          </a:fillRef>
+          <a:effectRef idx="2">
+            <a:schemeClr val="accent1"/>
+          </a:effectRef>
+          <a:fontRef idx="minor">
+            <a:schemeClr val="lt1"/>
+          </a:fontRef>
+        </p:style>
+        <p:txBody>
+          <a:bodyPr wrap="square" lIns="64008" tIns="18288" rIns="64008" bIns="18288" rtlCol="0" anchor="ctr"/>
+          <a:lstStyle/>
+          <a:p>
+            <a:pPr algn="ctr">
               <a:lnSpc>
-                <a:spcPct val="120000"/>
+                <a:spcPct val="100000"/>
               </a:lnSpc>
-              <a:spcAft>
-                <a:spcPts val="600"/>
-              </a:spcAft>
             </a:pPr>
             <a:r>
-              <a:rPr sz="1250">
+              <a:rPr sz="900" b="1">
                 <a:solidFill>
                   <a:srgbClr val="212121"/>
+                </a:solidFill>
+                <a:latin typeface="Google Sans Flex SemiBold"/>
+              </a:rPr>
+              <a:t>DEALER LOOKUP</a:t>
+            </a:r>
+          </a:p>
+          <a:p>
+            <a:pPr algn="ctr">
+              <a:lnSpc>
+                <a:spcPct val="100000"/>
+              </a:lnSpc>
+            </a:pPr>
+            <a:r>
+              <a:rPr sz="750" b="0">
+                <a:solidFill>
+                  <a:srgbClr val="595959"/>
                 </a:solidFill>
                 <a:latin typeface="Google Sans Flex"/>
               </a:rPr>
-              <a:t>•  → Weather tool call (Open-Meteo) checked before recommending a spray</a:t>
+              <a:t>Nearest in-stock dealer + price</a:t>
             </a:r>
           </a:p>
-          <a:p>
-            <a:pPr>
+        </p:txBody>
+      </p:sp>
+      <p:sp>
+        <p:nvSpPr>
+          <p:cNvPr id="104" name="Rounded Rectangle 103"/>
+          <p:cNvSpPr/>
+          <p:nvPr/>
+        </p:nvSpPr>
+        <p:spPr>
+          <a:xfrm>
+            <a:off x="2414016" y="2999232"/>
+            <a:ext cx="2103120" cy="475488"/>
+          </a:xfrm>
+          <a:prstGeom prst="roundRect">
+            <a:avLst/>
+          </a:prstGeom>
+          <a:solidFill>
+            <a:srgbClr val="E8F5E9"/>
+          </a:solidFill>
+          <a:ln w="12700">
+            <a:solidFill>
+              <a:srgbClr val="81C784"/>
+            </a:solidFill>
+          </a:ln>
+          <a:effectLst/>
+        </p:spPr>
+        <p:style>
+          <a:lnRef idx="1">
+            <a:schemeClr val="accent1"/>
+          </a:lnRef>
+          <a:fillRef idx="3">
+            <a:schemeClr val="accent1"/>
+          </a:fillRef>
+          <a:effectRef idx="2">
+            <a:schemeClr val="accent1"/>
+          </a:effectRef>
+          <a:fontRef idx="minor">
+            <a:schemeClr val="lt1"/>
+          </a:fontRef>
+        </p:style>
+        <p:txBody>
+          <a:bodyPr wrap="square" lIns="64008" tIns="18288" rIns="64008" bIns="18288" rtlCol="0" anchor="ctr"/>
+          <a:lstStyle/>
+          <a:p>
+            <a:pPr algn="ctr">
               <a:lnSpc>
-                <a:spcPct val="120000"/>
+                <a:spcPct val="100000"/>
               </a:lnSpc>
-              <a:spcAft>
-                <a:spcPts val="600"/>
-              </a:spcAft>
             </a:pPr>
             <a:r>
-              <a:rPr sz="1250">
+              <a:rPr sz="900" b="1">
                 <a:solidFill>
                   <a:srgbClr val="212121"/>
+                </a:solidFill>
+                <a:latin typeface="Google Sans Flex SemiBold"/>
+              </a:rPr>
+              <a:t>SELL-PRICE LOOKUP</a:t>
+            </a:r>
+          </a:p>
+          <a:p>
+            <a:pPr algn="ctr">
+              <a:lnSpc>
+                <a:spcPct val="100000"/>
+              </a:lnSpc>
+            </a:pPr>
+            <a:r>
+              <a:rPr sz="750" b="0">
+                <a:solidFill>
+                  <a:srgbClr val="595959"/>
                 </a:solidFill>
                 <a:latin typeface="Google Sans Flex"/>
               </a:rPr>
-              <a:t>•  → A second Gemini call, using real function-calling, decides WHICH of 4 tools to invoke (dealer lookup, sell-price lookup, insurance-claim check, group-buy check) based on the diagnosis, outbreak signal, and near-harvest flag — not a hardcoded if/else</a:t>
+              <a:t>Best nearby mandi price</a:t>
             </a:r>
           </a:p>
-          <a:p>
-            <a:pPr>
+        </p:txBody>
+      </p:sp>
+      <p:sp>
+        <p:nvSpPr>
+          <p:cNvPr id="105" name="Rounded Rectangle 104"/>
+          <p:cNvSpPr/>
+          <p:nvPr/>
+        </p:nvSpPr>
+        <p:spPr>
+          <a:xfrm>
+            <a:off x="4626864" y="2999232"/>
+            <a:ext cx="2103120" cy="475488"/>
+          </a:xfrm>
+          <a:prstGeom prst="roundRect">
+            <a:avLst/>
+          </a:prstGeom>
+          <a:solidFill>
+            <a:srgbClr val="E8F5E9"/>
+          </a:solidFill>
+          <a:ln w="12700">
+            <a:solidFill>
+              <a:srgbClr val="81C784"/>
+            </a:solidFill>
+          </a:ln>
+          <a:effectLst/>
+        </p:spPr>
+        <p:style>
+          <a:lnRef idx="1">
+            <a:schemeClr val="accent1"/>
+          </a:lnRef>
+          <a:fillRef idx="3">
+            <a:schemeClr val="accent1"/>
+          </a:fillRef>
+          <a:effectRef idx="2">
+            <a:schemeClr val="accent1"/>
+          </a:effectRef>
+          <a:fontRef idx="minor">
+            <a:schemeClr val="lt1"/>
+          </a:fontRef>
+        </p:style>
+        <p:txBody>
+          <a:bodyPr wrap="square" lIns="64008" tIns="18288" rIns="64008" bIns="18288" rtlCol="0" anchor="ctr"/>
+          <a:lstStyle/>
+          <a:p>
+            <a:pPr algn="ctr">
               <a:lnSpc>
-                <a:spcPct val="120000"/>
+                <a:spcPct val="100000"/>
               </a:lnSpc>
-              <a:spcAft>
-                <a:spcPts val="600"/>
-              </a:spcAft>
             </a:pPr>
             <a:r>
-              <a:rPr sz="1250">
+              <a:rPr sz="900" b="1">
                 <a:solidFill>
                   <a:srgbClr val="212121"/>
+                </a:solidFill>
+                <a:latin typeface="Google Sans Flex SemiBold"/>
+              </a:rPr>
+              <a:t>INSURANCE CHECK</a:t>
+            </a:r>
+          </a:p>
+          <a:p>
+            <a:pPr algn="ctr">
+              <a:lnSpc>
+                <a:spcPct val="100000"/>
+              </a:lnSpc>
+            </a:pPr>
+            <a:r>
+              <a:rPr sz="750" b="0">
+                <a:solidFill>
+                  <a:srgbClr val="595959"/>
                 </a:solidFill>
                 <a:latin typeface="Google Sans Flex"/>
               </a:rPr>
-              <a:t>•  → Chosen tools run against the known dealer/pricing data; results assembled</a:t>
+              <a:t>Fileable claim packet</a:t>
             </a:r>
           </a:p>
-          <a:p>
-            <a:pPr>
+        </p:txBody>
+      </p:sp>
+      <p:sp>
+        <p:nvSpPr>
+          <p:cNvPr id="106" name="Rounded Rectangle 105"/>
+          <p:cNvSpPr/>
+          <p:nvPr/>
+        </p:nvSpPr>
+        <p:spPr>
+          <a:xfrm>
+            <a:off x="6839712" y="2999232"/>
+            <a:ext cx="2103120" cy="475488"/>
+          </a:xfrm>
+          <a:prstGeom prst="roundRect">
+            <a:avLst/>
+          </a:prstGeom>
+          <a:solidFill>
+            <a:srgbClr val="E8F5E9"/>
+          </a:solidFill>
+          <a:ln w="12700">
+            <a:solidFill>
+              <a:srgbClr val="81C784"/>
+            </a:solidFill>
+          </a:ln>
+          <a:effectLst/>
+        </p:spPr>
+        <p:style>
+          <a:lnRef idx="1">
+            <a:schemeClr val="accent1"/>
+          </a:lnRef>
+          <a:fillRef idx="3">
+            <a:schemeClr val="accent1"/>
+          </a:fillRef>
+          <a:effectRef idx="2">
+            <a:schemeClr val="accent1"/>
+          </a:effectRef>
+          <a:fontRef idx="minor">
+            <a:schemeClr val="lt1"/>
+          </a:fontRef>
+        </p:style>
+        <p:txBody>
+          <a:bodyPr wrap="square" lIns="64008" tIns="18288" rIns="64008" bIns="18288" rtlCol="0" anchor="ctr"/>
+          <a:lstStyle/>
+          <a:p>
+            <a:pPr algn="ctr">
               <a:lnSpc>
-                <a:spcPct val="120000"/>
+                <a:spcPct val="100000"/>
               </a:lnSpc>
-              <a:spcAft>
-                <a:spcPts val="600"/>
-              </a:spcAft>
             </a:pPr>
             <a:r>
-              <a:rPr sz="1250">
+              <a:rPr sz="900" b="1">
                 <a:solidFill>
                   <a:srgbClr val="212121"/>
+                </a:solidFill>
+                <a:latin typeface="Google Sans Flex SemiBold"/>
+              </a:rPr>
+              <a:t>GROUP-BUY CHECK</a:t>
+            </a:r>
+          </a:p>
+          <a:p>
+            <a:pPr algn="ctr">
+              <a:lnSpc>
+                <a:spcPct val="100000"/>
+              </a:lnSpc>
+            </a:pPr>
+            <a:r>
+              <a:rPr sz="750" b="0">
+                <a:solidFill>
+                  <a:srgbClr val="595959"/>
                 </a:solidFill>
                 <a:latin typeface="Google Sans Flex"/>
               </a:rPr>
-              <a:t>•  → Advisory translated to Kannada, spoken via the browser's own Web Speech API if a kn-IN voice is available</a:t>
+              <a:t>Bulk-discount alert</a:t>
             </a:r>
           </a:p>
-          <a:p>
-            <a:pPr>
+        </p:txBody>
+      </p:sp>
+      <p:sp>
+        <p:nvSpPr>
+          <p:cNvPr id="107" name="TextBox 106"/>
+          <p:cNvSpPr txBox="1"/>
+          <p:nvPr/>
+        </p:nvSpPr>
+        <p:spPr>
+          <a:xfrm>
+            <a:off x="4434840" y="3474720"/>
+            <a:ext cx="274320" cy="146304"/>
+          </a:xfrm>
+          <a:prstGeom prst="rect">
+            <a:avLst/>
+          </a:prstGeom>
+          <a:noFill/>
+        </p:spPr>
+        <p:txBody>
+          <a:bodyPr wrap="none" lIns="0" tIns="0" rIns="0" bIns="0">
+            <a:spAutoFit/>
+          </a:bodyPr>
+          <a:lstStyle/>
+          <a:p>
+            <a:pPr algn="ctr"/>
+            <a:r>
+              <a:rPr sz="1400" b="1">
+                <a:solidFill>
+                  <a:srgbClr val="B0B0B0"/>
+                </a:solidFill>
+              </a:rPr>
+              <a:t>↓</a:t>
+            </a:r>
+          </a:p>
+        </p:txBody>
+      </p:sp>
+      <p:sp>
+        <p:nvSpPr>
+          <p:cNvPr id="108" name="Rounded Rectangle 107"/>
+          <p:cNvSpPr/>
+          <p:nvPr/>
+        </p:nvSpPr>
+        <p:spPr>
+          <a:xfrm>
+            <a:off x="201168" y="3621024"/>
+            <a:ext cx="8741663" cy="420624"/>
+          </a:xfrm>
+          <a:prstGeom prst="roundRect">
+            <a:avLst/>
+          </a:prstGeom>
+          <a:solidFill>
+            <a:srgbClr val="F1F1F1"/>
+          </a:solidFill>
+          <a:ln w="12700">
+            <a:solidFill>
+              <a:srgbClr val="B0B0B0"/>
+            </a:solidFill>
+          </a:ln>
+          <a:effectLst/>
+        </p:spPr>
+        <p:style>
+          <a:lnRef idx="1">
+            <a:schemeClr val="accent1"/>
+          </a:lnRef>
+          <a:fillRef idx="3">
+            <a:schemeClr val="accent1"/>
+          </a:fillRef>
+          <a:effectRef idx="2">
+            <a:schemeClr val="accent1"/>
+          </a:effectRef>
+          <a:fontRef idx="minor">
+            <a:schemeClr val="lt1"/>
+          </a:fontRef>
+        </p:style>
+        <p:txBody>
+          <a:bodyPr wrap="square" lIns="64008" tIns="18288" rIns="64008" bIns="18288" rtlCol="0" anchor="ctr"/>
+          <a:lstStyle/>
+          <a:p>
+            <a:pPr algn="ctr">
               <a:lnSpc>
-                <a:spcPct val="120000"/>
+                <a:spcPct val="100000"/>
               </a:lnSpc>
-              <a:spcAft>
-                <a:spcPts val="600"/>
-              </a:spcAft>
             </a:pPr>
             <a:r>
-              <a:rPr sz="1250">
+              <a:rPr sz="1000" b="1">
                 <a:solidFill>
                   <a:srgbClr val="212121"/>
+                </a:solidFill>
+                <a:latin typeface="Google Sans Flex SemiBold"/>
+              </a:rPr>
+              <a:t>RESPONSE ASSEMBLY</a:t>
+            </a:r>
+          </a:p>
+          <a:p>
+            <a:pPr algn="ctr">
+              <a:lnSpc>
+                <a:spcPct val="100000"/>
+              </a:lnSpc>
+            </a:pPr>
+            <a:r>
+              <a:rPr sz="800" b="0">
+                <a:solidFill>
+                  <a:srgbClr val="595959"/>
                 </a:solidFill>
                 <a:latin typeface="Google Sans Flex"/>
               </a:rPr>
-              <a:t>•  → Response rendered: diagnosis, dealer card, outbreak banner, insurance packet, group-buy card</a:t>
+              <a:t>Kannada advisory spoken via Web Speech API; diagnosis, dealer, outbreak, insurance, group-buy cards rendered</a:t>
             </a:r>
           </a:p>
-          <a:p>
-            <a:pPr>
+        </p:txBody>
+      </p:sp>
+      <p:sp>
+        <p:nvSpPr>
+          <p:cNvPr id="109" name="Rounded Rectangle 108"/>
+          <p:cNvSpPr/>
+          <p:nvPr/>
+        </p:nvSpPr>
+        <p:spPr>
+          <a:xfrm>
+            <a:off x="201168" y="4169664"/>
+            <a:ext cx="8741663" cy="420624"/>
+          </a:xfrm>
+          <a:prstGeom prst="roundRect">
+            <a:avLst/>
+          </a:prstGeom>
+          <a:solidFill>
+            <a:srgbClr val="E3F2FD"/>
+          </a:solidFill>
+          <a:ln w="12700">
+            <a:solidFill>
+              <a:srgbClr val="0097A7"/>
+            </a:solidFill>
+          </a:ln>
+          <a:effectLst/>
+        </p:spPr>
+        <p:style>
+          <a:lnRef idx="1">
+            <a:schemeClr val="accent1"/>
+          </a:lnRef>
+          <a:fillRef idx="3">
+            <a:schemeClr val="accent1"/>
+          </a:fillRef>
+          <a:effectRef idx="2">
+            <a:schemeClr val="accent1"/>
+          </a:effectRef>
+          <a:fontRef idx="minor">
+            <a:schemeClr val="lt1"/>
+          </a:fontRef>
+        </p:style>
+        <p:txBody>
+          <a:bodyPr wrap="square" lIns="64008" tIns="18288" rIns="64008" bIns="18288" rtlCol="0" anchor="ctr"/>
+          <a:lstStyle/>
+          <a:p>
+            <a:pPr algn="ctr">
               <a:lnSpc>
-                <a:spcPct val="120000"/>
+                <a:spcPct val="100000"/>
               </a:lnSpc>
-              <a:spcAft>
-                <a:spcPts val="600"/>
-              </a:spcAft>
             </a:pPr>
             <a:r>
-              <a:rPr sz="1250">
-                <a:solidFill>
-                  <a:srgbClr val="212121"/>
+              <a:rPr sz="850" b="0">
+                <a:solidFill>
+                  <a:srgbClr val="595959"/>
                 </a:solidFill>
                 <a:latin typeface="Google Sans Flex"/>
               </a:rPr>
-              <a:t>•  → Separately: district dashboard loads a pre-aggregated, anonymized village-level snapshot built at deploy time, never raw farmer data</a:t>
+              <a:t>Separately — district dashboard: a pre-aggregated, anonymized village-level snapshot loads independently, built at deploy time. Raw farmer data never reaches the browser.</a:t>
             </a:r>
           </a:p>
         </p:txBody>
@@ -10383,7 +10815,7 @@
 </p:sld>
 </file>
 
-<file path=ppt/slides/slide7.xml><?xml version="1.0" encoding="utf-8"?>
+<file path=ppt/slides/slide6.xml><?xml version="1.0" encoding="utf-8"?>
 <p:sld xmlns:a="http://schemas.openxmlformats.org/drawingml/2006/main" xmlns:r="http://schemas.openxmlformats.org/officeDocument/2006/relationships" xmlns:p="http://schemas.openxmlformats.org/presentationml/2006/main">
   <p:cSld>
     <p:spTree>
@@ -10606,7 +11038,7 @@
 </p:sld>
 </file>
 
-<file path=ppt/slides/slide8.xml><?xml version="1.0" encoding="utf-8"?>
+<file path=ppt/slides/slide7.xml><?xml version="1.0" encoding="utf-8"?>
 <p:sld xmlns:a="http://schemas.openxmlformats.org/drawingml/2006/main" xmlns:r="http://schemas.openxmlformats.org/officeDocument/2006/relationships" xmlns:p="http://schemas.openxmlformats.org/presentationml/2006/main">
   <p:cSld>
     <p:spTree>
@@ -10781,8 +11213,8 @@
         </p:nvSpPr>
         <p:spPr>
           <a:xfrm>
-            <a:off x="265176" y="1280160"/>
-            <a:ext cx="8595360" cy="3566160"/>
+            <a:off x="201168" y="1364462"/>
+            <a:ext cx="640080" cy="215444"/>
           </a:xfrm>
           <a:prstGeom prst="rect">
             <a:avLst/>
@@ -10790,122 +11222,1036 @@
           <a:noFill/>
         </p:spPr>
         <p:txBody>
-          <a:bodyPr wrap="square">
+          <a:bodyPr wrap="square" lIns="0" rIns="0" anchor="ctr">
             <a:spAutoFit/>
           </a:bodyPr>
           <a:lstStyle/>
           <a:p>
-            <a:pPr>
+            <a:pPr algn="l"/>
+            <a:r>
+              <a:rPr lang="en-IN" sz="800" b="1">
+                <a:solidFill>
+                  <a:srgbClr val="595959"/>
+                </a:solidFill>
+                <a:latin typeface="Google Sans Flex SemiBold"/>
+              </a:rPr>
+              <a:t>HOSTING</a:t>
+            </a:r>
+          </a:p>
+        </p:txBody>
+      </p:sp>
+      <p:sp>
+        <p:nvSpPr>
+          <p:cNvPr id="113" name="Rounded Rectangle 112"/>
+          <p:cNvSpPr/>
+          <p:nvPr/>
+        </p:nvSpPr>
+        <p:spPr>
+          <a:xfrm>
+            <a:off x="914400" y="1280160"/>
+            <a:ext cx="8028431" cy="384048"/>
+          </a:xfrm>
+          <a:prstGeom prst="roundRect">
+            <a:avLst/>
+          </a:prstGeom>
+          <a:solidFill>
+            <a:srgbClr val="FFF3E0"/>
+          </a:solidFill>
+          <a:ln w="12700">
+            <a:solidFill>
+              <a:srgbClr val="FFB74D"/>
+            </a:solidFill>
+          </a:ln>
+          <a:effectLst/>
+        </p:spPr>
+        <p:style>
+          <a:lnRef idx="1">
+            <a:schemeClr val="accent1"/>
+          </a:lnRef>
+          <a:fillRef idx="3">
+            <a:schemeClr val="accent1"/>
+          </a:fillRef>
+          <a:effectRef idx="2">
+            <a:schemeClr val="accent1"/>
+          </a:effectRef>
+          <a:fontRef idx="minor">
+            <a:schemeClr val="lt1"/>
+          </a:fontRef>
+        </p:style>
+        <p:txBody>
+          <a:bodyPr wrap="square" lIns="64008" tIns="18288" rIns="64008" bIns="18288" rtlCol="0" anchor="ctr"/>
+          <a:lstStyle/>
+          <a:p>
+            <a:pPr algn="ctr">
               <a:lnSpc>
-                <a:spcPct val="120000"/>
+                <a:spcPct val="100000"/>
               </a:lnSpc>
-              <a:spcAft>
-                <a:spcPts val="600"/>
-              </a:spcAft>
             </a:pPr>
             <a:r>
-              <a:rPr sz="1300">
+              <a:rPr sz="950" b="1">
                 <a:solidFill>
                   <a:srgbClr val="212121"/>
+                </a:solidFill>
+                <a:latin typeface="Google Sans Flex SemiBold"/>
+              </a:rPr>
+              <a:t>FIREBASE HOSTING — FREE SPARK PLAN</a:t>
+            </a:r>
+          </a:p>
+          <a:p>
+            <a:pPr algn="ctr">
+              <a:lnSpc>
+                <a:spcPct val="100000"/>
+              </a:lnSpc>
+            </a:pPr>
+            <a:r>
+              <a:rPr sz="800" b="0">
+                <a:solidFill>
+                  <a:srgbClr val="595959"/>
                 </a:solidFill>
                 <a:latin typeface="Google Sans Flex"/>
               </a:rPr>
-              <a:t>•  100% client-side static site — no backend server, no billing account, no credit card anywhere in the deployed stack — Firebase Hosting (free Spark plan) serves the app</a:t>
+              <a:t>Static site only. $0 billing, no credit card anywhere in the stack.</a:t>
             </a:r>
           </a:p>
-          <a:p>
-            <a:pPr>
+        </p:txBody>
+      </p:sp>
+      <p:sp>
+        <p:nvSpPr>
+          <p:cNvPr id="114" name="TextBox 113"/>
+          <p:cNvSpPr txBox="1"/>
+          <p:nvPr/>
+        </p:nvSpPr>
+        <p:spPr>
+          <a:xfrm>
+            <a:off x="4791455" y="1773936"/>
+            <a:ext cx="274320" cy="128016"/>
+          </a:xfrm>
+          <a:prstGeom prst="rect">
+            <a:avLst/>
+          </a:prstGeom>
+          <a:noFill/>
+        </p:spPr>
+        <p:txBody>
+          <a:bodyPr wrap="none" lIns="0" tIns="0" rIns="0" bIns="0">
+            <a:spAutoFit/>
+          </a:bodyPr>
+          <a:lstStyle/>
+          <a:p>
+            <a:pPr algn="ctr"/>
+            <a:r>
+              <a:rPr sz="1400" b="1">
+                <a:solidFill>
+                  <a:srgbClr val="B0B0B0"/>
+                </a:solidFill>
+              </a:rPr>
+              <a:t>↓</a:t>
+            </a:r>
+          </a:p>
+        </p:txBody>
+      </p:sp>
+      <p:sp>
+        <p:nvSpPr>
+          <p:cNvPr id="115" name="TextBox 114"/>
+          <p:cNvSpPr txBox="1"/>
+          <p:nvPr/>
+        </p:nvSpPr>
+        <p:spPr>
+          <a:xfrm>
+            <a:off x="201168" y="1901952"/>
+            <a:ext cx="640080" cy="457200"/>
+          </a:xfrm>
+          <a:prstGeom prst="rect">
+            <a:avLst/>
+          </a:prstGeom>
+          <a:noFill/>
+        </p:spPr>
+        <p:txBody>
+          <a:bodyPr wrap="square" lIns="0" rIns="0" anchor="ctr">
+            <a:spAutoFit/>
+          </a:bodyPr>
+          <a:lstStyle/>
+          <a:p>
+            <a:pPr algn="l"/>
+            <a:r>
+              <a:rPr sz="800" b="1">
+                <a:solidFill>
+                  <a:srgbClr val="595959"/>
+                </a:solidFill>
+                <a:latin typeface="Google Sans Flex SemiBold"/>
+              </a:rPr>
+              <a:t>BROWSER</a:t>
+            </a:r>
+          </a:p>
+        </p:txBody>
+      </p:sp>
+      <p:sp>
+        <p:nvSpPr>
+          <p:cNvPr id="116" name="Rounded Rectangle 115"/>
+          <p:cNvSpPr/>
+          <p:nvPr/>
+        </p:nvSpPr>
+        <p:spPr>
+          <a:xfrm>
+            <a:off x="914400" y="1901952"/>
+            <a:ext cx="2602991" cy="457200"/>
+          </a:xfrm>
+          <a:prstGeom prst="roundRect">
+            <a:avLst/>
+          </a:prstGeom>
+          <a:solidFill>
+            <a:srgbClr val="F1F1F1"/>
+          </a:solidFill>
+          <a:ln w="12700">
+            <a:solidFill>
+              <a:srgbClr val="B0B0B0"/>
+            </a:solidFill>
+          </a:ln>
+          <a:effectLst/>
+        </p:spPr>
+        <p:style>
+          <a:lnRef idx="1">
+            <a:schemeClr val="accent1"/>
+          </a:lnRef>
+          <a:fillRef idx="3">
+            <a:schemeClr val="accent1"/>
+          </a:fillRef>
+          <a:effectRef idx="2">
+            <a:schemeClr val="accent1"/>
+          </a:effectRef>
+          <a:fontRef idx="minor">
+            <a:schemeClr val="lt1"/>
+          </a:fontRef>
+        </p:style>
+        <p:txBody>
+          <a:bodyPr wrap="square" lIns="64008" tIns="18288" rIns="64008" bIns="18288" rtlCol="0" anchor="ctr"/>
+          <a:lstStyle/>
+          <a:p>
+            <a:pPr algn="ctr">
               <a:lnSpc>
-                <a:spcPct val="120000"/>
+                <a:spcPct val="100000"/>
               </a:lnSpc>
-              <a:spcAft>
-                <a:spcPts val="600"/>
-              </a:spcAft>
             </a:pPr>
             <a:r>
-              <a:rPr sz="1300">
+              <a:rPr sz="900" b="1">
                 <a:solidFill>
                   <a:srgbClr val="212121"/>
+                </a:solidFill>
+                <a:latin typeface="Google Sans Flex SemiBold"/>
+              </a:rPr>
+              <a:t>CAMERA / MIC INPUT</a:t>
+            </a:r>
+          </a:p>
+          <a:p>
+            <a:pPr algn="ctr">
+              <a:lnSpc>
+                <a:spcPct val="100000"/>
+              </a:lnSpc>
+            </a:pPr>
+            <a:r>
+              <a:rPr sz="750" b="0">
+                <a:solidFill>
+                  <a:srgbClr val="595959"/>
                 </a:solidFill>
                 <a:latin typeface="Google Sans Flex"/>
               </a:rPr>
-              <a:t>•  Diagnosis: a real Gemini multimodal API call direct from the browser, grounded by a hand-rolled TF-IDF + cosine-similarity RAG index over 18 disease documents (9 English + 9 Kannada), so a Kannada symptom description retrieves relevant passages natively</a:t>
+              <a:t>Photo + Kannada speech, Web Speech API</a:t>
             </a:r>
           </a:p>
-          <a:p>
-            <a:pPr>
+        </p:txBody>
+      </p:sp>
+      <p:sp>
+        <p:nvSpPr>
+          <p:cNvPr id="117" name="Rounded Rectangle 116"/>
+          <p:cNvSpPr/>
+          <p:nvPr/>
+        </p:nvSpPr>
+        <p:spPr>
+          <a:xfrm>
+            <a:off x="3627119" y="1901952"/>
+            <a:ext cx="2602991" cy="457200"/>
+          </a:xfrm>
+          <a:prstGeom prst="roundRect">
+            <a:avLst/>
+          </a:prstGeom>
+          <a:solidFill>
+            <a:srgbClr val="F1F1F1"/>
+          </a:solidFill>
+          <a:ln w="12700">
+            <a:solidFill>
+              <a:srgbClr val="B0B0B0"/>
+            </a:solidFill>
+          </a:ln>
+          <a:effectLst/>
+        </p:spPr>
+        <p:style>
+          <a:lnRef idx="1">
+            <a:schemeClr val="accent1"/>
+          </a:lnRef>
+          <a:fillRef idx="3">
+            <a:schemeClr val="accent1"/>
+          </a:fillRef>
+          <a:effectRef idx="2">
+            <a:schemeClr val="accent1"/>
+          </a:effectRef>
+          <a:fontRef idx="minor">
+            <a:schemeClr val="lt1"/>
+          </a:fontRef>
+        </p:style>
+        <p:txBody>
+          <a:bodyPr wrap="square" lIns="64008" tIns="18288" rIns="64008" bIns="18288" rtlCol="0" anchor="ctr"/>
+          <a:lstStyle/>
+          <a:p>
+            <a:pPr algn="ctr">
               <a:lnSpc>
-                <a:spcPct val="120000"/>
+                <a:spcPct val="100000"/>
               </a:lnSpc>
-              <a:spcAft>
-                <a:spcPts val="600"/>
-              </a:spcAft>
             </a:pPr>
             <a:r>
-              <a:rPr sz="1300">
+              <a:rPr sz="900" b="1">
                 <a:solidFill>
                   <a:srgbClr val="212121"/>
+                </a:solidFill>
+                <a:latin typeface="Google Sans Flex SemiBold"/>
+              </a:rPr>
+              <a:t>UI RENDER</a:t>
+            </a:r>
+          </a:p>
+          <a:p>
+            <a:pPr algn="ctr">
+              <a:lnSpc>
+                <a:spcPct val="100000"/>
+              </a:lnSpc>
+            </a:pPr>
+            <a:r>
+              <a:rPr sz="750" b="0">
+                <a:solidFill>
+                  <a:srgbClr val="595959"/>
                 </a:solidFill>
                 <a:latin typeface="Google Sans Flex"/>
               </a:rPr>
-              <a:t>•  Orchestration: a second Gemini call uses real function-calling (tools/functionDeclarations) to decide which of 4 downstream tools to invoke — the model drives the decision, not a hardcoded branch — falling back to equivalent deterministic rules only if the live call fails after retries</a:t>
+              <a:t>Diagnosis, dealer, outbreak, insurance, group-buy cards</a:t>
             </a:r>
           </a:p>
-          <a:p>
-            <a:pPr>
+        </p:txBody>
+      </p:sp>
+      <p:sp>
+        <p:nvSpPr>
+          <p:cNvPr id="118" name="Rounded Rectangle 117"/>
+          <p:cNvSpPr/>
+          <p:nvPr/>
+        </p:nvSpPr>
+        <p:spPr>
+          <a:xfrm>
+            <a:off x="6339839" y="1901952"/>
+            <a:ext cx="2602991" cy="457200"/>
+          </a:xfrm>
+          <a:prstGeom prst="roundRect">
+            <a:avLst/>
+          </a:prstGeom>
+          <a:solidFill>
+            <a:srgbClr val="F1F1F1"/>
+          </a:solidFill>
+          <a:ln w="12700">
+            <a:solidFill>
+              <a:srgbClr val="B0B0B0"/>
+            </a:solidFill>
+          </a:ln>
+          <a:effectLst/>
+        </p:spPr>
+        <p:style>
+          <a:lnRef idx="1">
+            <a:schemeClr val="accent1"/>
+          </a:lnRef>
+          <a:fillRef idx="3">
+            <a:schemeClr val="accent1"/>
+          </a:fillRef>
+          <a:effectRef idx="2">
+            <a:schemeClr val="accent1"/>
+          </a:effectRef>
+          <a:fontRef idx="minor">
+            <a:schemeClr val="lt1"/>
+          </a:fontRef>
+        </p:style>
+        <p:txBody>
+          <a:bodyPr wrap="square" lIns="64008" tIns="18288" rIns="64008" bIns="18288" rtlCol="0" anchor="ctr"/>
+          <a:lstStyle/>
+          <a:p>
+            <a:pPr algn="ctr">
               <a:lnSpc>
-                <a:spcPct val="120000"/>
+                <a:spcPct val="100000"/>
               </a:lnSpc>
-              <a:spcAft>
-                <a:spcPts val="600"/>
-              </a:spcAft>
             </a:pPr>
             <a:r>
-              <a:rPr sz="1300">
+              <a:rPr sz="900" b="1">
                 <a:solidFill>
                   <a:srgbClr val="212121"/>
+                </a:solidFill>
+                <a:latin typeface="Google Sans Flex SemiBold"/>
+              </a:rPr>
+              <a:t>VOICE OUTPUT</a:t>
+            </a:r>
+          </a:p>
+          <a:p>
+            <a:pPr algn="ctr">
+              <a:lnSpc>
+                <a:spcPct val="100000"/>
+              </a:lnSpc>
+            </a:pPr>
+            <a:r>
+              <a:rPr sz="750" b="0">
+                <a:solidFill>
+                  <a:srgbClr val="595959"/>
                 </a:solidFill>
                 <a:latin typeface="Google Sans Flex"/>
               </a:rPr>
-              <a:t>•  Weather: a direct, keyless call to the free Open-Meteo API (confirmed CORS-enabled)</a:t>
+              <a:t>SpeechSynthesis, kn-IN voice feature-detect</a:t>
             </a:r>
           </a:p>
-          <a:p>
-            <a:pPr>
+        </p:txBody>
+      </p:sp>
+      <p:sp>
+        <p:nvSpPr>
+          <p:cNvPr id="119" name="TextBox 118"/>
+          <p:cNvSpPr txBox="1"/>
+          <p:nvPr/>
+        </p:nvSpPr>
+        <p:spPr>
+          <a:xfrm>
+            <a:off x="4791455" y="2450592"/>
+            <a:ext cx="274320" cy="128016"/>
+          </a:xfrm>
+          <a:prstGeom prst="rect">
+            <a:avLst/>
+          </a:prstGeom>
+          <a:noFill/>
+        </p:spPr>
+        <p:txBody>
+          <a:bodyPr wrap="none" lIns="0" tIns="0" rIns="0" bIns="0">
+            <a:spAutoFit/>
+          </a:bodyPr>
+          <a:lstStyle/>
+          <a:p>
+            <a:pPr algn="ctr"/>
+            <a:r>
+              <a:rPr sz="1400" b="1">
+                <a:solidFill>
+                  <a:srgbClr val="B0B0B0"/>
+                </a:solidFill>
+              </a:rPr>
+              <a:t>↓</a:t>
+            </a:r>
+          </a:p>
+        </p:txBody>
+      </p:sp>
+      <p:sp>
+        <p:nvSpPr>
+          <p:cNvPr id="120" name="TextBox 119"/>
+          <p:cNvSpPr txBox="1"/>
+          <p:nvPr/>
+        </p:nvSpPr>
+        <p:spPr>
+          <a:xfrm>
+            <a:off x="201168" y="2578608"/>
+            <a:ext cx="640080" cy="512064"/>
+          </a:xfrm>
+          <a:prstGeom prst="rect">
+            <a:avLst/>
+          </a:prstGeom>
+          <a:noFill/>
+        </p:spPr>
+        <p:txBody>
+          <a:bodyPr wrap="square" lIns="0" rIns="0" anchor="ctr">
+            <a:spAutoFit/>
+          </a:bodyPr>
+          <a:lstStyle/>
+          <a:p>
+            <a:pPr algn="l"/>
+            <a:r>
+              <a:rPr sz="800" b="1">
+                <a:solidFill>
+                  <a:srgbClr val="595959"/>
+                </a:solidFill>
+                <a:latin typeface="Google Sans Flex SemiBold"/>
+              </a:rPr>
+              <a:t>GEMINI API</a:t>
+            </a:r>
+          </a:p>
+        </p:txBody>
+      </p:sp>
+      <p:sp>
+        <p:nvSpPr>
+          <p:cNvPr id="121" name="Rounded Rectangle 120"/>
+          <p:cNvSpPr/>
+          <p:nvPr/>
+        </p:nvSpPr>
+        <p:spPr>
+          <a:xfrm>
+            <a:off x="914400" y="2578608"/>
+            <a:ext cx="3959352" cy="512064"/>
+          </a:xfrm>
+          <a:prstGeom prst="roundRect">
+            <a:avLst/>
+          </a:prstGeom>
+          <a:solidFill>
+            <a:srgbClr val="B2EBF2"/>
+          </a:solidFill>
+          <a:ln w="12700">
+            <a:solidFill>
+              <a:srgbClr val="0097A7"/>
+            </a:solidFill>
+          </a:ln>
+          <a:effectLst/>
+        </p:spPr>
+        <p:style>
+          <a:lnRef idx="1">
+            <a:schemeClr val="accent1"/>
+          </a:lnRef>
+          <a:fillRef idx="3">
+            <a:schemeClr val="accent1"/>
+          </a:fillRef>
+          <a:effectRef idx="2">
+            <a:schemeClr val="accent1"/>
+          </a:effectRef>
+          <a:fontRef idx="minor">
+            <a:schemeClr val="lt1"/>
+          </a:fontRef>
+        </p:style>
+        <p:txBody>
+          <a:bodyPr wrap="square" lIns="64008" tIns="18288" rIns="64008" bIns="18288" rtlCol="0" anchor="ctr"/>
+          <a:lstStyle/>
+          <a:p>
+            <a:pPr algn="ctr">
               <a:lnSpc>
-                <a:spcPct val="120000"/>
+                <a:spcPct val="100000"/>
               </a:lnSpc>
-              <a:spcAft>
-                <a:spcPts val="600"/>
-              </a:spcAft>
             </a:pPr>
             <a:r>
-              <a:rPr sz="1300">
+              <a:rPr sz="950" b="1">
                 <a:solidFill>
                   <a:srgbClr val="212121"/>
+                </a:solidFill>
+                <a:latin typeface="Google Sans Flex SemiBold"/>
+              </a:rPr>
+              <a:t>CALL 1 — DIAGNOSIS</a:t>
+            </a:r>
+          </a:p>
+          <a:p>
+            <a:pPr algn="ctr">
+              <a:lnSpc>
+                <a:spcPct val="100000"/>
+              </a:lnSpc>
+            </a:pPr>
+            <a:r>
+              <a:rPr sz="800" b="0">
+                <a:solidFill>
+                  <a:srgbClr val="595959"/>
                 </a:solidFill>
                 <a:latin typeface="Google Sans Flex"/>
               </a:rPr>
-              <a:t>•  Dealer directory, mandi prices, and diagnosis history ship as static JSON/CSV with the site; the district dashboard loads a pre-aggregated snapshot built at deploy time from the private farmer dataset, so raw farmer/plot linkage never ships publicly</a:t>
+              <a:t>Multimodal + RAG-grounded structured JSON output</a:t>
             </a:r>
           </a:p>
-          <a:p>
-            <a:pPr>
+        </p:txBody>
+      </p:sp>
+      <p:sp>
+        <p:nvSpPr>
+          <p:cNvPr id="122" name="Rounded Rectangle 121"/>
+          <p:cNvSpPr/>
+          <p:nvPr/>
+        </p:nvSpPr>
+        <p:spPr>
+          <a:xfrm>
+            <a:off x="4983480" y="2578608"/>
+            <a:ext cx="3959352" cy="512064"/>
+          </a:xfrm>
+          <a:prstGeom prst="roundRect">
+            <a:avLst/>
+          </a:prstGeom>
+          <a:solidFill>
+            <a:srgbClr val="B2EBF2"/>
+          </a:solidFill>
+          <a:ln w="12700">
+            <a:solidFill>
+              <a:srgbClr val="0097A7"/>
+            </a:solidFill>
+          </a:ln>
+          <a:effectLst/>
+        </p:spPr>
+        <p:style>
+          <a:lnRef idx="1">
+            <a:schemeClr val="accent1"/>
+          </a:lnRef>
+          <a:fillRef idx="3">
+            <a:schemeClr val="accent1"/>
+          </a:fillRef>
+          <a:effectRef idx="2">
+            <a:schemeClr val="accent1"/>
+          </a:effectRef>
+          <a:fontRef idx="minor">
+            <a:schemeClr val="lt1"/>
+          </a:fontRef>
+        </p:style>
+        <p:txBody>
+          <a:bodyPr wrap="square" lIns="64008" tIns="18288" rIns="64008" bIns="18288" rtlCol="0" anchor="ctr"/>
+          <a:lstStyle/>
+          <a:p>
+            <a:pPr algn="ctr">
               <a:lnSpc>
-                <a:spcPct val="120000"/>
+                <a:spcPct val="100000"/>
               </a:lnSpc>
-              <a:spcAft>
-                <a:spcPts val="600"/>
-              </a:spcAft>
             </a:pPr>
             <a:r>
-              <a:rPr sz="1300">
+              <a:rPr sz="950" b="1">
                 <a:solidFill>
                   <a:srgbClr val="212121"/>
+                </a:solidFill>
+                <a:latin typeface="Google Sans Flex SemiBold"/>
+              </a:rPr>
+              <a:t>CALL 2 — ORCHESTRATION</a:t>
+            </a:r>
+          </a:p>
+          <a:p>
+            <a:pPr algn="ctr">
+              <a:lnSpc>
+                <a:spcPct val="100000"/>
+              </a:lnSpc>
+            </a:pPr>
+            <a:r>
+              <a:rPr sz="800" b="0">
+                <a:solidFill>
+                  <a:srgbClr val="595959"/>
                 </a:solidFill>
                 <a:latin typeface="Google Sans Flex"/>
               </a:rPr>
-              <a:t>•  Voice advisory: the browser's own Web Speech API (SpeechSynthesis), feature-detecting a kn-IN voice at runtime</a:t>
+              <a:t>Real function-calling picks which tools fire; retries, then deterministic fallback</a:t>
+            </a:r>
+          </a:p>
+        </p:txBody>
+      </p:sp>
+      <p:sp>
+        <p:nvSpPr>
+          <p:cNvPr id="123" name="TextBox 122"/>
+          <p:cNvSpPr txBox="1"/>
+          <p:nvPr/>
+        </p:nvSpPr>
+        <p:spPr>
+          <a:xfrm>
+            <a:off x="4791455" y="3182112"/>
+            <a:ext cx="274320" cy="128016"/>
+          </a:xfrm>
+          <a:prstGeom prst="rect">
+            <a:avLst/>
+          </a:prstGeom>
+          <a:noFill/>
+        </p:spPr>
+        <p:txBody>
+          <a:bodyPr wrap="none" lIns="0" tIns="0" rIns="0" bIns="0">
+            <a:spAutoFit/>
+          </a:bodyPr>
+          <a:lstStyle/>
+          <a:p>
+            <a:pPr algn="ctr"/>
+            <a:r>
+              <a:rPr sz="1400" b="1">
+                <a:solidFill>
+                  <a:srgbClr val="0097A7"/>
+                </a:solidFill>
+              </a:rPr>
+              <a:t>↓</a:t>
+            </a:r>
+          </a:p>
+        </p:txBody>
+      </p:sp>
+      <p:sp>
+        <p:nvSpPr>
+          <p:cNvPr id="124" name="TextBox 123"/>
+          <p:cNvSpPr txBox="1"/>
+          <p:nvPr/>
+        </p:nvSpPr>
+        <p:spPr>
+          <a:xfrm>
+            <a:off x="201168" y="3310128"/>
+            <a:ext cx="640080" cy="530352"/>
+          </a:xfrm>
+          <a:prstGeom prst="rect">
+            <a:avLst/>
+          </a:prstGeom>
+          <a:noFill/>
+        </p:spPr>
+        <p:txBody>
+          <a:bodyPr wrap="square" lIns="0" rIns="0" anchor="ctr">
+            <a:spAutoFit/>
+          </a:bodyPr>
+          <a:lstStyle/>
+          <a:p>
+            <a:pPr algn="l"/>
+            <a:r>
+              <a:rPr sz="800" b="1">
+                <a:solidFill>
+                  <a:srgbClr val="595959"/>
+                </a:solidFill>
+                <a:latin typeface="Google Sans Flex SemiBold"/>
+              </a:rPr>
+              <a:t>DATA &amp; APIs</a:t>
+            </a:r>
+          </a:p>
+        </p:txBody>
+      </p:sp>
+      <p:sp>
+        <p:nvSpPr>
+          <p:cNvPr id="125" name="Rounded Rectangle 124"/>
+          <p:cNvSpPr/>
+          <p:nvPr/>
+        </p:nvSpPr>
+        <p:spPr>
+          <a:xfrm>
+            <a:off x="914400" y="3310128"/>
+            <a:ext cx="1924812" cy="530352"/>
+          </a:xfrm>
+          <a:prstGeom prst="roundRect">
+            <a:avLst/>
+          </a:prstGeom>
+          <a:solidFill>
+            <a:srgbClr val="E8F5E9"/>
+          </a:solidFill>
+          <a:ln w="12700">
+            <a:solidFill>
+              <a:srgbClr val="81C784"/>
+            </a:solidFill>
+          </a:ln>
+          <a:effectLst/>
+        </p:spPr>
+        <p:style>
+          <a:lnRef idx="1">
+            <a:schemeClr val="accent1"/>
+          </a:lnRef>
+          <a:fillRef idx="3">
+            <a:schemeClr val="accent1"/>
+          </a:fillRef>
+          <a:effectRef idx="2">
+            <a:schemeClr val="accent1"/>
+          </a:effectRef>
+          <a:fontRef idx="minor">
+            <a:schemeClr val="lt1"/>
+          </a:fontRef>
+        </p:style>
+        <p:txBody>
+          <a:bodyPr wrap="square" lIns="64008" tIns="18288" rIns="64008" bIns="18288" rtlCol="0" anchor="ctr"/>
+          <a:lstStyle/>
+          <a:p>
+            <a:pPr algn="ctr">
+              <a:lnSpc>
+                <a:spcPct val="100000"/>
+              </a:lnSpc>
+            </a:pPr>
+            <a:r>
+              <a:rPr sz="900" b="1">
+                <a:solidFill>
+                  <a:srgbClr val="212121"/>
+                </a:solidFill>
+                <a:latin typeface="Google Sans Flex SemiBold"/>
+              </a:rPr>
+              <a:t>RAG INDEX (JS)</a:t>
+            </a:r>
+          </a:p>
+          <a:p>
+            <a:pPr algn="ctr">
+              <a:lnSpc>
+                <a:spcPct val="100000"/>
+              </a:lnSpc>
+            </a:pPr>
+            <a:r>
+              <a:rPr sz="750" b="0">
+                <a:solidFill>
+                  <a:srgbClr val="595959"/>
+                </a:solidFill>
+                <a:latin typeface="Google Sans Flex"/>
+              </a:rPr>
+              <a:t>TF-IDF + cosine, 18 bilingual disease docs</a:t>
+            </a:r>
+          </a:p>
+        </p:txBody>
+      </p:sp>
+      <p:sp>
+        <p:nvSpPr>
+          <p:cNvPr id="126" name="Rounded Rectangle 125"/>
+          <p:cNvSpPr/>
+          <p:nvPr/>
+        </p:nvSpPr>
+        <p:spPr>
+          <a:xfrm>
+            <a:off x="2948940" y="3310128"/>
+            <a:ext cx="1924812" cy="530352"/>
+          </a:xfrm>
+          <a:prstGeom prst="roundRect">
+            <a:avLst/>
+          </a:prstGeom>
+          <a:solidFill>
+            <a:srgbClr val="E8F5E9"/>
+          </a:solidFill>
+          <a:ln w="12700">
+            <a:solidFill>
+              <a:srgbClr val="81C784"/>
+            </a:solidFill>
+          </a:ln>
+          <a:effectLst/>
+        </p:spPr>
+        <p:style>
+          <a:lnRef idx="1">
+            <a:schemeClr val="accent1"/>
+          </a:lnRef>
+          <a:fillRef idx="3">
+            <a:schemeClr val="accent1"/>
+          </a:fillRef>
+          <a:effectRef idx="2">
+            <a:schemeClr val="accent1"/>
+          </a:effectRef>
+          <a:fontRef idx="minor">
+            <a:schemeClr val="lt1"/>
+          </a:fontRef>
+        </p:style>
+        <p:txBody>
+          <a:bodyPr wrap="square" lIns="64008" tIns="18288" rIns="64008" bIns="18288" rtlCol="0" anchor="ctr"/>
+          <a:lstStyle/>
+          <a:p>
+            <a:pPr algn="ctr">
+              <a:lnSpc>
+                <a:spcPct val="100000"/>
+              </a:lnSpc>
+            </a:pPr>
+            <a:r>
+              <a:rPr sz="900" b="1">
+                <a:solidFill>
+                  <a:srgbClr val="212121"/>
+                </a:solidFill>
+                <a:latin typeface="Google Sans Flex SemiBold"/>
+              </a:rPr>
+              <a:t>STATIC JSON/CSV</a:t>
+            </a:r>
+          </a:p>
+          <a:p>
+            <a:pPr algn="ctr">
+              <a:lnSpc>
+                <a:spcPct val="100000"/>
+              </a:lnSpc>
+            </a:pPr>
+            <a:r>
+              <a:rPr sz="750" b="0">
+                <a:solidFill>
+                  <a:srgbClr val="595959"/>
+                </a:solidFill>
+                <a:latin typeface="Google Sans Flex"/>
+              </a:rPr>
+              <a:t>Dealers, mandi prices, diagnosis history</a:t>
+            </a:r>
+          </a:p>
+        </p:txBody>
+      </p:sp>
+      <p:sp>
+        <p:nvSpPr>
+          <p:cNvPr id="127" name="Rounded Rectangle 126"/>
+          <p:cNvSpPr/>
+          <p:nvPr/>
+        </p:nvSpPr>
+        <p:spPr>
+          <a:xfrm>
+            <a:off x="4983480" y="3310128"/>
+            <a:ext cx="1924812" cy="530352"/>
+          </a:xfrm>
+          <a:prstGeom prst="roundRect">
+            <a:avLst/>
+          </a:prstGeom>
+          <a:solidFill>
+            <a:srgbClr val="E8F5E9"/>
+          </a:solidFill>
+          <a:ln w="12700">
+            <a:solidFill>
+              <a:srgbClr val="81C784"/>
+            </a:solidFill>
+          </a:ln>
+          <a:effectLst/>
+        </p:spPr>
+        <p:style>
+          <a:lnRef idx="1">
+            <a:schemeClr val="accent1"/>
+          </a:lnRef>
+          <a:fillRef idx="3">
+            <a:schemeClr val="accent1"/>
+          </a:fillRef>
+          <a:effectRef idx="2">
+            <a:schemeClr val="accent1"/>
+          </a:effectRef>
+          <a:fontRef idx="minor">
+            <a:schemeClr val="lt1"/>
+          </a:fontRef>
+        </p:style>
+        <p:txBody>
+          <a:bodyPr wrap="square" lIns="64008" tIns="18288" rIns="64008" bIns="18288" rtlCol="0" anchor="ctr"/>
+          <a:lstStyle/>
+          <a:p>
+            <a:pPr algn="ctr">
+              <a:lnSpc>
+                <a:spcPct val="100000"/>
+              </a:lnSpc>
+            </a:pPr>
+            <a:r>
+              <a:rPr sz="900" b="1">
+                <a:solidFill>
+                  <a:srgbClr val="212121"/>
+                </a:solidFill>
+                <a:latin typeface="Google Sans Flex SemiBold"/>
+              </a:rPr>
+              <a:t>DASHBOARD SNAPSHOT</a:t>
+            </a:r>
+          </a:p>
+          <a:p>
+            <a:pPr algn="ctr">
+              <a:lnSpc>
+                <a:spcPct val="100000"/>
+              </a:lnSpc>
+            </a:pPr>
+            <a:r>
+              <a:rPr sz="750" b="0">
+                <a:solidFill>
+                  <a:srgbClr val="595959"/>
+                </a:solidFill>
+                <a:latin typeface="Google Sans Flex"/>
+              </a:rPr>
+              <a:t>Pre-aggregated at deploy time — raw farmer data never ships</a:t>
+            </a:r>
+          </a:p>
+        </p:txBody>
+      </p:sp>
+      <p:sp>
+        <p:nvSpPr>
+          <p:cNvPr id="128" name="Rounded Rectangle 127"/>
+          <p:cNvSpPr/>
+          <p:nvPr/>
+        </p:nvSpPr>
+        <p:spPr>
+          <a:xfrm>
+            <a:off x="7018020" y="3310128"/>
+            <a:ext cx="1924812" cy="530352"/>
+          </a:xfrm>
+          <a:prstGeom prst="roundRect">
+            <a:avLst/>
+          </a:prstGeom>
+          <a:solidFill>
+            <a:srgbClr val="E8F5E9"/>
+          </a:solidFill>
+          <a:ln w="12700">
+            <a:solidFill>
+              <a:srgbClr val="81C784"/>
+            </a:solidFill>
+          </a:ln>
+          <a:effectLst/>
+        </p:spPr>
+        <p:style>
+          <a:lnRef idx="1">
+            <a:schemeClr val="accent1"/>
+          </a:lnRef>
+          <a:fillRef idx="3">
+            <a:schemeClr val="accent1"/>
+          </a:fillRef>
+          <a:effectRef idx="2">
+            <a:schemeClr val="accent1"/>
+          </a:effectRef>
+          <a:fontRef idx="minor">
+            <a:schemeClr val="lt1"/>
+          </a:fontRef>
+        </p:style>
+        <p:txBody>
+          <a:bodyPr wrap="square" lIns="64008" tIns="18288" rIns="64008" bIns="18288" rtlCol="0" anchor="ctr"/>
+          <a:lstStyle/>
+          <a:p>
+            <a:pPr algn="ctr">
+              <a:lnSpc>
+                <a:spcPct val="100000"/>
+              </a:lnSpc>
+            </a:pPr>
+            <a:r>
+              <a:rPr sz="900" b="1">
+                <a:solidFill>
+                  <a:srgbClr val="212121"/>
+                </a:solidFill>
+                <a:latin typeface="Google Sans Flex SemiBold"/>
+              </a:rPr>
+              <a:t>OPEN-METEO</a:t>
+            </a:r>
+          </a:p>
+          <a:p>
+            <a:pPr algn="ctr">
+              <a:lnSpc>
+                <a:spcPct val="100000"/>
+              </a:lnSpc>
+            </a:pPr>
+            <a:r>
+              <a:rPr sz="750" b="0">
+                <a:solidFill>
+                  <a:srgbClr val="595959"/>
+                </a:solidFill>
+                <a:latin typeface="Google Sans Flex"/>
+              </a:rPr>
+              <a:t>Keyless, CORS-enabled weather API</a:t>
+            </a:r>
+          </a:p>
+        </p:txBody>
+      </p:sp>
+      <p:sp>
+        <p:nvSpPr>
+          <p:cNvPr id="129" name="Rounded Rectangle 128"/>
+          <p:cNvSpPr/>
+          <p:nvPr/>
+        </p:nvSpPr>
+        <p:spPr>
+          <a:xfrm>
+            <a:off x="201168" y="3986784"/>
+            <a:ext cx="8741664" cy="384048"/>
+          </a:xfrm>
+          <a:prstGeom prst="roundRect">
+            <a:avLst/>
+          </a:prstGeom>
+          <a:solidFill>
+            <a:srgbClr val="E3F2FD"/>
+          </a:solidFill>
+          <a:ln w="12700">
+            <a:solidFill>
+              <a:srgbClr val="0097A7"/>
+            </a:solidFill>
+          </a:ln>
+          <a:effectLst/>
+        </p:spPr>
+        <p:style>
+          <a:lnRef idx="1">
+            <a:schemeClr val="accent1"/>
+          </a:lnRef>
+          <a:fillRef idx="3">
+            <a:schemeClr val="accent1"/>
+          </a:fillRef>
+          <a:effectRef idx="2">
+            <a:schemeClr val="accent1"/>
+          </a:effectRef>
+          <a:fontRef idx="minor">
+            <a:schemeClr val="lt1"/>
+          </a:fontRef>
+        </p:style>
+        <p:txBody>
+          <a:bodyPr wrap="square" lIns="64008" tIns="18288" rIns="64008" bIns="18288" rtlCol="0" anchor="ctr"/>
+          <a:lstStyle/>
+          <a:p>
+            <a:pPr algn="ctr">
+              <a:lnSpc>
+                <a:spcPct val="100000"/>
+              </a:lnSpc>
+            </a:pPr>
+            <a:r>
+              <a:rPr sz="850" b="0">
+                <a:solidFill>
+                  <a:srgbClr val="595959"/>
+                </a:solidFill>
+                <a:latin typeface="Google Sans Flex"/>
+              </a:rPr>
+              <a:t>No backend server anywhere in this stack — every call above runs directly from the farmer's browser to a public API or a static file.</a:t>
             </a:r>
           </a:p>
         </p:txBody>
@@ -10918,7 +12264,7 @@
 </p:sld>
 </file>
 
-<file path=ppt/slides/slide9.xml><?xml version="1.0" encoding="utf-8"?>
+<file path=ppt/slides/slide8.xml><?xml version="1.0" encoding="utf-8"?>
 <p:sld xmlns:a="http://schemas.openxmlformats.org/drawingml/2006/main" xmlns:r="http://schemas.openxmlformats.org/officeDocument/2006/relationships" xmlns:p="http://schemas.openxmlformats.org/presentationml/2006/main">
   <p:cSld>
     <p:spTree>
@@ -11256,6 +12602,299 @@
                 <a:latin typeface="Google Sans Flex"/>
               </a:rPr>
               <a:t>•  Python (data generation, build-time dashboard aggregation), Playwright (verification)</a:t>
+            </a:r>
+          </a:p>
+        </p:txBody>
+      </p:sp>
+    </p:spTree>
+  </p:cSld>
+  <p:clrMapOvr>
+    <a:masterClrMapping/>
+  </p:clrMapOvr>
+</p:sld>
+</file>
+
+<file path=ppt/slides/slide9.xml><?xml version="1.0" encoding="utf-8"?>
+<p:sld xmlns:a="http://schemas.openxmlformats.org/drawingml/2006/main" xmlns:r="http://schemas.openxmlformats.org/officeDocument/2006/relationships" xmlns:p="http://schemas.openxmlformats.org/presentationml/2006/main">
+  <p:cSld>
+    <p:spTree>
+      <p:nvGrpSpPr>
+        <p:cNvPr id="1" name="Shape 123"/>
+        <p:cNvGrpSpPr/>
+        <p:nvPr/>
+      </p:nvGrpSpPr>
+      <p:grpSpPr>
+        <a:xfrm>
+          <a:off x="0" y="0"/>
+          <a:ext cx="0" cy="0"/>
+          <a:chOff x="0" y="0"/>
+          <a:chExt cx="0" cy="0"/>
+        </a:xfrm>
+      </p:grpSpPr>
+      <p:pic>
+        <p:nvPicPr>
+          <p:cNvPr id="124" name="Google Shape;124;p22" title="Frame 144.png"/>
+          <p:cNvPicPr preferRelativeResize="0"/>
+          <p:nvPr/>
+        </p:nvPicPr>
+        <p:blipFill rotWithShape="1">
+          <a:blip r:embed="rId3">
+            <a:alphaModFix/>
+          </a:blip>
+          <a:srcRect b="98001"/>
+          <a:stretch/>
+        </p:blipFill>
+        <p:spPr>
+          <a:xfrm>
+            <a:off x="0" y="5093562"/>
+            <a:ext cx="9144000" cy="54275"/>
+          </a:xfrm>
+          <a:prstGeom prst="rect">
+            <a:avLst/>
+          </a:prstGeom>
+          <a:noFill/>
+          <a:ln>
+            <a:noFill/>
+          </a:ln>
+        </p:spPr>
+      </p:pic>
+      <p:pic>
+        <p:nvPicPr>
+          <p:cNvPr id="125" name="Google Shape;125;p22" title="Group 427319979.png"/>
+          <p:cNvPicPr preferRelativeResize="0"/>
+          <p:nvPr/>
+        </p:nvPicPr>
+        <p:blipFill>
+          <a:blip r:embed="rId4">
+            <a:alphaModFix/>
+          </a:blip>
+          <a:stretch>
+            <a:fillRect/>
+          </a:stretch>
+        </p:blipFill>
+        <p:spPr>
+          <a:xfrm>
+            <a:off x="0" y="1"/>
+            <a:ext cx="9144000" cy="507359"/>
+          </a:xfrm>
+          <a:prstGeom prst="rect">
+            <a:avLst/>
+          </a:prstGeom>
+          <a:noFill/>
+          <a:ln>
+            <a:noFill/>
+          </a:ln>
+        </p:spPr>
+      </p:pic>
+      <p:sp>
+        <p:nvSpPr>
+          <p:cNvPr id="126" name="Google Shape;126;p22"/>
+          <p:cNvSpPr/>
+          <p:nvPr/>
+        </p:nvSpPr>
+        <p:spPr>
+          <a:xfrm>
+            <a:off x="-29250" y="5071875"/>
+            <a:ext cx="9173400" cy="97800"/>
+          </a:xfrm>
+          <a:prstGeom prst="rect">
+            <a:avLst/>
+          </a:prstGeom>
+          <a:solidFill>
+            <a:schemeClr val="dk1"/>
+          </a:solidFill>
+          <a:ln>
+            <a:noFill/>
+          </a:ln>
+        </p:spPr>
+        <p:txBody>
+          <a:bodyPr spcFirstLastPara="1" wrap="square" lIns="91425" tIns="91425" rIns="91425" bIns="91425" anchor="ctr" anchorCtr="0">
+            <a:noAutofit/>
+          </a:bodyPr>
+          <a:lstStyle/>
+          <a:p>
+            <a:pPr marL="0" lvl="0" indent="0" algn="ctr" rtl="0">
+              <a:spcBef>
+                <a:spcPts val="0"/>
+              </a:spcBef>
+              <a:spcAft>
+                <a:spcPts val="0"/>
+              </a:spcAft>
+              <a:buNone/>
+            </a:pPr>
+            <a:endParaRPr/>
+          </a:p>
+        </p:txBody>
+      </p:sp>
+      <p:sp>
+        <p:nvSpPr>
+          <p:cNvPr id="127" name="Google Shape;127;p22"/>
+          <p:cNvSpPr txBox="1"/>
+          <p:nvPr/>
+        </p:nvSpPr>
+        <p:spPr>
+          <a:xfrm>
+            <a:off x="265350" y="663825"/>
+            <a:ext cx="8943000" cy="561900"/>
+          </a:xfrm>
+          <a:prstGeom prst="rect">
+            <a:avLst/>
+          </a:prstGeom>
+          <a:noFill/>
+          <a:ln>
+            <a:noFill/>
+          </a:ln>
+        </p:spPr>
+        <p:txBody>
+          <a:bodyPr spcFirstLastPara="1" wrap="square" lIns="91425" tIns="91425" rIns="91425" bIns="91425" anchor="t" anchorCtr="0">
+            <a:noAutofit/>
+          </a:bodyPr>
+          <a:lstStyle/>
+          <a:p>
+            <a:pPr marL="0" lvl="0" indent="0" algn="l" rtl="0">
+              <a:lnSpc>
+                <a:spcPct val="115000"/>
+              </a:lnSpc>
+              <a:spcBef>
+                <a:spcPts val="0"/>
+              </a:spcBef>
+              <a:spcAft>
+                <a:spcPts val="0"/>
+              </a:spcAft>
+              <a:buNone/>
+            </a:pPr>
+            <a:r>
+              <a:rPr sz="1600">
+                <a:solidFill>
+                  <a:srgbClr val="212121"/>
+                </a:solidFill>
+                <a:latin typeface="Google Sans Flex Medium"/>
+              </a:rPr>
+              <a:t>Estimated implementation cost</a:t>
+            </a:r>
+            <a:endParaRPr sz="1600">
+              <a:latin typeface="Google Sans Flex Medium"/>
+              <a:ea typeface="Google Sans Flex Medium"/>
+              <a:cs typeface="Google Sans Flex Medium"/>
+              <a:sym typeface="Google Sans Flex Medium"/>
+            </a:endParaRPr>
+          </a:p>
+        </p:txBody>
+      </p:sp>
+      <p:sp>
+        <p:nvSpPr>
+          <p:cNvPr id="128" name="TextBox 127"/>
+          <p:cNvSpPr txBox="1"/>
+          <p:nvPr/>
+        </p:nvSpPr>
+        <p:spPr>
+          <a:xfrm>
+            <a:off x="265176" y="1280160"/>
+            <a:ext cx="8595360" cy="3566160"/>
+          </a:xfrm>
+          <a:prstGeom prst="rect">
+            <a:avLst/>
+          </a:prstGeom>
+          <a:noFill/>
+        </p:spPr>
+        <p:txBody>
+          <a:bodyPr wrap="square">
+            <a:spAutoFit/>
+          </a:bodyPr>
+          <a:lstStyle/>
+          <a:p>
+            <a:pPr>
+              <a:lnSpc>
+                <a:spcPct val="120000"/>
+              </a:lnSpc>
+              <a:spcAft>
+                <a:spcPts val="600"/>
+              </a:spcAft>
+            </a:pPr>
+            <a:r>
+              <a:rPr sz="1400">
+                <a:solidFill>
+                  <a:srgbClr val="212121"/>
+                </a:solidFill>
+                <a:latin typeface="Google Sans Flex"/>
+              </a:rPr>
+              <a:t>•  Current deployed cost: $0 — no billing account, no credit card, anywhere in the stack</a:t>
+            </a:r>
+          </a:p>
+          <a:p>
+            <a:pPr>
+              <a:lnSpc>
+                <a:spcPct val="120000"/>
+              </a:lnSpc>
+              <a:spcAft>
+                <a:spcPts val="600"/>
+              </a:spcAft>
+            </a:pPr>
+            <a:r>
+              <a:rPr sz="1400">
+                <a:solidFill>
+                  <a:srgbClr val="212121"/>
+                </a:solidFill>
+                <a:latin typeface="Google Sans Flex"/>
+              </a:rPr>
+              <a:t>•  Firebase Hosting: free Spark plan, no usage cap reached at this scale</a:t>
+            </a:r>
+          </a:p>
+          <a:p>
+            <a:pPr>
+              <a:lnSpc>
+                <a:spcPct val="120000"/>
+              </a:lnSpc>
+              <a:spcAft>
+                <a:spcPts val="600"/>
+              </a:spcAft>
+            </a:pPr>
+            <a:r>
+              <a:rPr sz="1400">
+                <a:solidFill>
+                  <a:srgbClr val="212121"/>
+                </a:solidFill>
+                <a:latin typeface="Google Sans Flex"/>
+              </a:rPr>
+              <a:t>•  Gemini API: free tier via Google AI Studio — 20 requests/day per project for gemini-3.8-flash; each diagnosis now uses 2 calls (diagnosis + orchestration), so roughly 10 full diagnoses/day before the app gracefully falls back to deterministic logic for the rest of the day</a:t>
+            </a:r>
+          </a:p>
+          <a:p>
+            <a:pPr>
+              <a:lnSpc>
+                <a:spcPct val="120000"/>
+              </a:lnSpc>
+              <a:spcAft>
+                <a:spcPts val="600"/>
+              </a:spcAft>
+            </a:pPr>
+            <a:r>
+              <a:rPr sz="1400">
+                <a:solidFill>
+                  <a:srgbClr val="212121"/>
+                </a:solidFill>
+                <a:latin typeface="Google Sans Flex"/>
+              </a:rPr>
+              <a:t>•  Open-Meteo, Web Speech API: free, no quota observed in testing</a:t>
+            </a:r>
+          </a:p>
+          <a:p>
+            <a:pPr>
+              <a:lnSpc>
+                <a:spcPct val="120000"/>
+              </a:lnSpc>
+              <a:spcAft>
+                <a:spcPts val="600"/>
+              </a:spcAft>
+            </a:pPr>
+            <a:r>
+              <a:rPr sz="1400">
+                <a:solidFill>
+                  <a:srgbClr val="212121"/>
+                </a:solidFill>
+                <a:latin typeface="Google Sans Flex"/>
+              </a:rPr>
+              <a:t>•  Scaling beyond the free tier: upgrading to a paid Gemini tier is the only cost that would be needed to raise the daily diagnosis cap — no other paid service is required even at higher usage, since there is no backend, database, or search service to scale</a:t>
             </a:r>
           </a:p>
         </p:txBody>

--- a/docs/Kisan_Mitra_Submission.pptx
+++ b/docs/Kisan_Mitra_Submission.pptx
@@ -8377,7 +8377,7 @@
               </a:lnSpc>
             </a:pPr>
             <a:r>
-              <a:rPr sz="1400">
+              <a:rPr sz="1300">
                 <a:solidFill>
                   <a:srgbClr val="212121"/>
                 </a:solidFill>
@@ -8393,13 +8393,13 @@
               </a:lnSpc>
             </a:pPr>
             <a:r>
-              <a:rPr sz="1400">
+              <a:rPr sz="1300">
                 <a:solidFill>
                   <a:srgbClr val="212121"/>
                 </a:solidFill>
                 <a:latin typeface="Google Sans Flex"/>
               </a:rPr>
-              <a:t>Demo Video Link (3 Minutes): [add link before submission]</a:t>
+              <a:t>Demo Video Link (3 Minutes): https://github.com/Kavitacs08/kisan-mitra/raw/main/docs/video/Kisan_Mitra_Demo.mp4</a:t>
             </a:r>
           </a:p>
           <a:p>
@@ -8409,7 +8409,7 @@
               </a:lnSpc>
             </a:pPr>
             <a:r>
-              <a:rPr sz="1400">
+              <a:rPr sz="1300">
                 <a:solidFill>
                   <a:srgbClr val="212121"/>
                 </a:solidFill>

--- a/docs/Kisan_Mitra_Submission.pptx
+++ b/docs/Kisan_Mitra_Submission.pptx
@@ -8399,7 +8399,7 @@
                 </a:solidFill>
                 <a:latin typeface="Google Sans Flex"/>
               </a:rPr>
-              <a:t>Demo Video Link (3 Minutes): https://github.com/Kavitacs08/kisan-mitra/raw/main/docs/video/Kisan_Mitra_Demo.mp4</a:t>
+              <a:t>Demo Video Link (3 Minutes): https://drive.google.com/file/d/1xu7f6okDBQRVK4ykY2NfpF_JFG0lTMAB/view?usp=drive_link</a:t>
             </a:r>
           </a:p>
           <a:p>
